--- a/LabBook_10.pptx
+++ b/LabBook_10.pptx
@@ -5,10 +5,10 @@
     <p:sldMasterId id="2147483648" r:id="rId1"/>
   </p:sldMasterIdLst>
   <p:notesMasterIdLst>
-    <p:notesMasterId r:id="rId9"/>
+    <p:notesMasterId r:id="rId10"/>
   </p:notesMasterIdLst>
   <p:handoutMasterIdLst>
-    <p:handoutMasterId r:id="rId10"/>
+    <p:handoutMasterId r:id="rId11"/>
   </p:handoutMasterIdLst>
   <p:sldIdLst>
     <p:sldId id="256" r:id="rId2"/>
@@ -16,8 +16,9 @@
     <p:sldId id="290" r:id="rId4"/>
     <p:sldId id="292" r:id="rId5"/>
     <p:sldId id="297" r:id="rId6"/>
-    <p:sldId id="293" r:id="rId7"/>
-    <p:sldId id="288" r:id="rId8"/>
+    <p:sldId id="298" r:id="rId7"/>
+    <p:sldId id="293" r:id="rId8"/>
+    <p:sldId id="288" r:id="rId9"/>
   </p:sldIdLst>
   <p:sldSz cx="12192000" cy="6858000"/>
   <p:notesSz cx="12192000" cy="6858000"/>
@@ -392,7 +393,7 @@
           <a:p>
             <a:fld id="{8438F8DC-35B0-48E6-A86E-42F1F08DD00F}" type="datetimeFigureOut">
               <a:rPr lang="es-ES" smtClean="0"/>
-              <a:t>16/02/2026</a:t>
+              <a:t>02/03/2026</a:t>
             </a:fld>
             <a:endParaRPr lang="es-ES"/>
           </a:p>
@@ -569,7 +570,7 @@
           <a:p>
             <a:fld id="{FACBDC12-F39B-4B97-8F4D-6734F9D366FF}" type="datetimeFigureOut">
               <a:rPr lang="es-ES" smtClean="0"/>
-              <a:t>16/02/2026</a:t>
+              <a:t>02/03/2026</a:t>
             </a:fld>
             <a:endParaRPr lang="es-ES"/>
           </a:p>
@@ -1225,7 +1226,7 @@
           <a:p>
             <a:fld id="{676223B9-C868-4436-87D9-1A3152E1157A}" type="slidenum">
               <a:rPr lang="es-ES" smtClean="0"/>
-              <a:t>6</a:t>
+              <a:t>7</a:t>
             </a:fld>
             <a:endParaRPr lang="es-ES"/>
           </a:p>
@@ -6184,7 +6185,7 @@
         </p:blipFill>
         <p:spPr>
           <a:xfrm>
-            <a:off x="1292939" y="1658235"/>
+            <a:off x="1447800" y="1579745"/>
             <a:ext cx="4119562" cy="3042138"/>
           </a:xfrm>
           <a:prstGeom prst="rect">
@@ -8039,7 +8040,7 @@
             <p:spPr>
               <a:xfrm>
                 <a:off x="685800" y="408883"/>
-                <a:ext cx="10994410" cy="1071255"/>
+                <a:ext cx="10994410" cy="1428661"/>
               </a:xfrm>
               <a:prstGeom prst="rect">
                 <a:avLst/>
@@ -8077,264 +8078,263 @@
                   <a:rPr lang="en-US" b="0" dirty="0"/>
                 </a:br>
                 <a14:m>
-                  <m:oMathPara xmlns:m="http://schemas.openxmlformats.org/officeDocument/2006/math">
-                    <m:oMathParaPr>
-                      <m:jc m:val="centerGroup"/>
-                    </m:oMathParaPr>
-                    <m:oMath xmlns:m="http://schemas.openxmlformats.org/officeDocument/2006/math">
-                      <m:sSub>
-                        <m:sSubPr>
-                          <m:ctrlPr>
-                            <a:rPr lang="es-ES" b="0" i="1" smtClean="0">
-                              <a:latin typeface="Cambria Math" panose="02040503050406030204" pitchFamily="18" charset="0"/>
-                            </a:rPr>
-                          </m:ctrlPr>
-                        </m:sSubPr>
-                        <m:e>
-                          <m:r>
-                            <a:rPr lang="es-ES" b="0" i="1" smtClean="0">
-                              <a:latin typeface="Cambria Math" panose="02040503050406030204" pitchFamily="18" charset="0"/>
-                            </a:rPr>
-                            <m:t>𝑛</m:t>
-                          </m:r>
-                        </m:e>
-                        <m:sub>
-                          <m:r>
-                            <a:rPr lang="es-ES" b="0" i="1" smtClean="0">
-                              <a:latin typeface="Cambria Math" panose="02040503050406030204" pitchFamily="18" charset="0"/>
-                            </a:rPr>
-                            <m:t>𝑒𝑓𝑓</m:t>
-                          </m:r>
-                        </m:sub>
-                      </m:sSub>
-                      <m:d>
-                        <m:dPr>
-                          <m:ctrlPr>
-                            <a:rPr lang="es-ES" b="0" i="1" smtClean="0">
-                              <a:latin typeface="Cambria Math" panose="02040503050406030204" pitchFamily="18" charset="0"/>
-                            </a:rPr>
-                          </m:ctrlPr>
-                        </m:dPr>
-                        <m:e>
-                          <m:r>
-                            <a:rPr lang="es-ES" b="0" i="1" smtClean="0">
-                              <a:latin typeface="Cambria Math" panose="02040503050406030204" pitchFamily="18" charset="0"/>
-                            </a:rPr>
-                            <m:t>𝜆</m:t>
-                          </m:r>
-                        </m:e>
-                      </m:d>
-                      <m:r>
-                        <a:rPr lang="es-ES" b="0" i="1" smtClean="0">
-                          <a:latin typeface="Cambria Math" panose="02040503050406030204" pitchFamily="18" charset="0"/>
-                        </a:rPr>
-                        <m:t>=</m:t>
-                      </m:r>
-                      <m:sSub>
-                        <m:sSubPr>
-                          <m:ctrlPr>
-                            <a:rPr lang="es-ES" b="0" i="1" smtClean="0">
-                              <a:latin typeface="Cambria Math" panose="02040503050406030204" pitchFamily="18" charset="0"/>
-                            </a:rPr>
-                          </m:ctrlPr>
-                        </m:sSubPr>
-                        <m:e>
-                          <m:r>
-                            <a:rPr lang="es-ES" b="0" i="1" smtClean="0">
-                              <a:latin typeface="Cambria Math" panose="02040503050406030204" pitchFamily="18" charset="0"/>
-                            </a:rPr>
-                            <m:t>𝑛</m:t>
-                          </m:r>
-                        </m:e>
-                        <m:sub>
-                          <m:r>
-                            <a:rPr lang="es-ES" b="0" i="1" smtClean="0">
-                              <a:latin typeface="Cambria Math" panose="02040503050406030204" pitchFamily="18" charset="0"/>
-                            </a:rPr>
-                            <m:t>1</m:t>
-                          </m:r>
-                        </m:sub>
-                      </m:sSub>
-                      <m:r>
-                        <a:rPr lang="es-ES" b="0" i="1" smtClean="0">
-                          <a:latin typeface="Cambria Math" panose="02040503050406030204" pitchFamily="18" charset="0"/>
-                        </a:rPr>
-                        <m:t>+</m:t>
-                      </m:r>
-                      <m:sSub>
-                        <m:sSubPr>
-                          <m:ctrlPr>
-                            <a:rPr lang="es-ES" b="0" i="1" smtClean="0">
-                              <a:latin typeface="Cambria Math" panose="02040503050406030204" pitchFamily="18" charset="0"/>
-                            </a:rPr>
-                          </m:ctrlPr>
-                        </m:sSubPr>
-                        <m:e>
-                          <m:r>
-                            <a:rPr lang="es-ES" b="0" i="1" smtClean="0">
-                              <a:latin typeface="Cambria Math" panose="02040503050406030204" pitchFamily="18" charset="0"/>
-                            </a:rPr>
-                            <m:t>𝑛</m:t>
-                          </m:r>
-                        </m:e>
-                        <m:sub>
-                          <m:r>
-                            <a:rPr lang="es-ES" b="0" i="1" smtClean="0">
-                              <a:latin typeface="Cambria Math" panose="02040503050406030204" pitchFamily="18" charset="0"/>
-                            </a:rPr>
-                            <m:t>2</m:t>
-                          </m:r>
-                        </m:sub>
-                      </m:sSub>
-                      <m:d>
-                        <m:dPr>
-                          <m:ctrlPr>
-                            <a:rPr lang="es-ES" b="0" i="1" smtClean="0">
-                              <a:latin typeface="Cambria Math" panose="02040503050406030204" pitchFamily="18" charset="0"/>
-                            </a:rPr>
-                          </m:ctrlPr>
-                        </m:dPr>
-                        <m:e>
-                          <m:r>
-                            <a:rPr lang="es-ES" b="0" i="1" smtClean="0">
-                              <a:latin typeface="Cambria Math" panose="02040503050406030204" pitchFamily="18" charset="0"/>
-                            </a:rPr>
-                            <m:t>𝜆</m:t>
-                          </m:r>
-                          <m:r>
-                            <a:rPr lang="es-ES" b="0" i="1" smtClean="0">
-                              <a:latin typeface="Cambria Math" panose="02040503050406030204" pitchFamily="18" charset="0"/>
-                            </a:rPr>
-                            <m:t>−</m:t>
-                          </m:r>
-                          <m:sSub>
-                            <m:sSubPr>
-                              <m:ctrlPr>
-                                <a:rPr lang="es-ES" b="0" i="1" smtClean="0">
-                                  <a:latin typeface="Cambria Math" panose="02040503050406030204" pitchFamily="18" charset="0"/>
-                                </a:rPr>
-                              </m:ctrlPr>
-                            </m:sSubPr>
-                            <m:e>
-                              <m:r>
-                                <a:rPr lang="es-ES" b="0" i="1" smtClean="0">
-                                  <a:latin typeface="Cambria Math" panose="02040503050406030204" pitchFamily="18" charset="0"/>
-                                </a:rPr>
-                                <m:t>𝜆</m:t>
-                              </m:r>
-                            </m:e>
-                            <m:sub>
-                              <m:r>
-                                <a:rPr lang="es-ES" b="0" i="1" smtClean="0">
-                                  <a:latin typeface="Cambria Math" panose="02040503050406030204" pitchFamily="18" charset="0"/>
-                                </a:rPr>
-                                <m:t>0</m:t>
-                              </m:r>
-                            </m:sub>
-                          </m:sSub>
-                        </m:e>
-                      </m:d>
-                      <m:r>
-                        <a:rPr lang="es-ES" b="0" i="1" smtClean="0">
-                          <a:latin typeface="Cambria Math" panose="02040503050406030204" pitchFamily="18" charset="0"/>
-                        </a:rPr>
-                        <m:t>+</m:t>
-                      </m:r>
-                      <m:sSub>
-                        <m:sSubPr>
-                          <m:ctrlPr>
-                            <a:rPr lang="es-ES" b="0" i="1" smtClean="0">
-                              <a:latin typeface="Cambria Math" panose="02040503050406030204" pitchFamily="18" charset="0"/>
-                            </a:rPr>
-                          </m:ctrlPr>
-                        </m:sSubPr>
-                        <m:e>
-                          <m:r>
-                            <a:rPr lang="es-ES" b="0" i="1" smtClean="0">
-                              <a:latin typeface="Cambria Math" panose="02040503050406030204" pitchFamily="18" charset="0"/>
-                            </a:rPr>
-                            <m:t>𝑛</m:t>
-                          </m:r>
-                        </m:e>
-                        <m:sub>
-                          <m:r>
-                            <a:rPr lang="es-ES" b="0" i="1" smtClean="0">
-                              <a:latin typeface="Cambria Math" panose="02040503050406030204" pitchFamily="18" charset="0"/>
-                            </a:rPr>
-                            <m:t>3</m:t>
-                          </m:r>
-                        </m:sub>
-                      </m:sSub>
-                      <m:sSup>
-                        <m:sSupPr>
-                          <m:ctrlPr>
-                            <a:rPr lang="es-ES" b="0" i="1" smtClean="0">
-                              <a:latin typeface="Cambria Math" panose="02040503050406030204" pitchFamily="18" charset="0"/>
-                            </a:rPr>
-                          </m:ctrlPr>
-                        </m:sSupPr>
-                        <m:e>
-                          <m:d>
-                            <m:dPr>
-                              <m:ctrlPr>
-                                <a:rPr lang="es-ES" b="0" i="1" smtClean="0">
-                                  <a:latin typeface="Cambria Math" panose="02040503050406030204" pitchFamily="18" charset="0"/>
-                                </a:rPr>
-                              </m:ctrlPr>
-                            </m:dPr>
-                            <m:e>
-                              <m:r>
-                                <a:rPr lang="es-ES" b="0" i="1" smtClean="0">
-                                  <a:latin typeface="Cambria Math" panose="02040503050406030204" pitchFamily="18" charset="0"/>
-                                </a:rPr>
-                                <m:t>𝜆</m:t>
-                              </m:r>
-                              <m:r>
-                                <a:rPr lang="es-ES" b="0" i="1" smtClean="0">
-                                  <a:latin typeface="Cambria Math" panose="02040503050406030204" pitchFamily="18" charset="0"/>
-                                </a:rPr>
-                                <m:t>−</m:t>
-                              </m:r>
-                              <m:sSub>
-                                <m:sSubPr>
-                                  <m:ctrlPr>
-                                    <a:rPr lang="es-ES" b="0" i="1" smtClean="0">
-                                      <a:latin typeface="Cambria Math" panose="02040503050406030204" pitchFamily="18" charset="0"/>
-                                    </a:rPr>
-                                  </m:ctrlPr>
-                                </m:sSubPr>
-                                <m:e>
-                                  <m:r>
-                                    <a:rPr lang="es-ES" b="0" i="1" smtClean="0">
-                                      <a:latin typeface="Cambria Math" panose="02040503050406030204" pitchFamily="18" charset="0"/>
-                                    </a:rPr>
-                                    <m:t>𝜆</m:t>
-                                  </m:r>
-                                </m:e>
-                                <m:sub>
-                                  <m:r>
-                                    <a:rPr lang="es-ES" b="0" i="1" smtClean="0">
-                                      <a:latin typeface="Cambria Math" panose="02040503050406030204" pitchFamily="18" charset="0"/>
-                                    </a:rPr>
-                                    <m:t>0</m:t>
-                                  </m:r>
-                                </m:sub>
-                              </m:sSub>
-                            </m:e>
-                          </m:d>
-                        </m:e>
-                        <m:sup>
-                          <m:r>
-                            <a:rPr lang="es-ES" b="0" i="1" smtClean="0">
-                              <a:latin typeface="Cambria Math" panose="02040503050406030204" pitchFamily="18" charset="0"/>
-                            </a:rPr>
-                            <m:t>2</m:t>
-                          </m:r>
-                        </m:sup>
-                      </m:sSup>
-                    </m:oMath>
-                  </m:oMathPara>
+                  <m:oMath xmlns:m="http://schemas.openxmlformats.org/officeDocument/2006/math">
+                    <m:sSub>
+                      <m:sSubPr>
+                        <m:ctrlPr>
+                          <a:rPr lang="es-ES" b="0" i="1" smtClean="0">
+                            <a:latin typeface="Cambria Math" panose="02040503050406030204" pitchFamily="18" charset="0"/>
+                          </a:rPr>
+                        </m:ctrlPr>
+                      </m:sSubPr>
+                      <m:e>
+                        <m:r>
+                          <a:rPr lang="es-ES" b="0" i="1" smtClean="0">
+                            <a:latin typeface="Cambria Math" panose="02040503050406030204" pitchFamily="18" charset="0"/>
+                          </a:rPr>
+                          <m:t>𝑛</m:t>
+                        </m:r>
+                      </m:e>
+                      <m:sub>
+                        <m:r>
+                          <a:rPr lang="es-ES" b="0" i="1" smtClean="0">
+                            <a:latin typeface="Cambria Math" panose="02040503050406030204" pitchFamily="18" charset="0"/>
+                          </a:rPr>
+                          <m:t>𝑒𝑓𝑓</m:t>
+                        </m:r>
+                      </m:sub>
+                    </m:sSub>
+                    <m:d>
+                      <m:dPr>
+                        <m:ctrlPr>
+                          <a:rPr lang="es-ES" b="0" i="1" smtClean="0">
+                            <a:latin typeface="Cambria Math" panose="02040503050406030204" pitchFamily="18" charset="0"/>
+                          </a:rPr>
+                        </m:ctrlPr>
+                      </m:dPr>
+                      <m:e>
+                        <m:r>
+                          <a:rPr lang="es-ES" b="0" i="1" smtClean="0">
+                            <a:latin typeface="Cambria Math" panose="02040503050406030204" pitchFamily="18" charset="0"/>
+                          </a:rPr>
+                          <m:t>𝜆</m:t>
+                        </m:r>
+                      </m:e>
+                    </m:d>
+                    <m:r>
+                      <a:rPr lang="es-ES" b="0" i="1" smtClean="0">
+                        <a:latin typeface="Cambria Math" panose="02040503050406030204" pitchFamily="18" charset="0"/>
+                      </a:rPr>
+                      <m:t>=</m:t>
+                    </m:r>
+                    <m:sSub>
+                      <m:sSubPr>
+                        <m:ctrlPr>
+                          <a:rPr lang="es-ES" b="0" i="1" smtClean="0">
+                            <a:latin typeface="Cambria Math" panose="02040503050406030204" pitchFamily="18" charset="0"/>
+                          </a:rPr>
+                        </m:ctrlPr>
+                      </m:sSubPr>
+                      <m:e>
+                        <m:r>
+                          <a:rPr lang="es-ES" b="0" i="1" smtClean="0">
+                            <a:latin typeface="Cambria Math" panose="02040503050406030204" pitchFamily="18" charset="0"/>
+                          </a:rPr>
+                          <m:t>𝑛</m:t>
+                        </m:r>
+                      </m:e>
+                      <m:sub>
+                        <m:r>
+                          <a:rPr lang="es-ES" b="0" i="1" smtClean="0">
+                            <a:latin typeface="Cambria Math" panose="02040503050406030204" pitchFamily="18" charset="0"/>
+                          </a:rPr>
+                          <m:t>1</m:t>
+                        </m:r>
+                      </m:sub>
+                    </m:sSub>
+                    <m:r>
+                      <a:rPr lang="es-ES" b="0" i="1" smtClean="0">
+                        <a:latin typeface="Cambria Math" panose="02040503050406030204" pitchFamily="18" charset="0"/>
+                      </a:rPr>
+                      <m:t>+</m:t>
+                    </m:r>
+                    <m:sSub>
+                      <m:sSubPr>
+                        <m:ctrlPr>
+                          <a:rPr lang="es-ES" b="0" i="1" smtClean="0">
+                            <a:latin typeface="Cambria Math" panose="02040503050406030204" pitchFamily="18" charset="0"/>
+                          </a:rPr>
+                        </m:ctrlPr>
+                      </m:sSubPr>
+                      <m:e>
+                        <m:r>
+                          <a:rPr lang="es-ES" b="0" i="1" smtClean="0">
+                            <a:latin typeface="Cambria Math" panose="02040503050406030204" pitchFamily="18" charset="0"/>
+                          </a:rPr>
+                          <m:t>𝑛</m:t>
+                        </m:r>
+                      </m:e>
+                      <m:sub>
+                        <m:r>
+                          <a:rPr lang="es-ES" b="0" i="1" smtClean="0">
+                            <a:latin typeface="Cambria Math" panose="02040503050406030204" pitchFamily="18" charset="0"/>
+                          </a:rPr>
+                          <m:t>2</m:t>
+                        </m:r>
+                      </m:sub>
+                    </m:sSub>
+                    <m:d>
+                      <m:dPr>
+                        <m:ctrlPr>
+                          <a:rPr lang="es-ES" b="0" i="1" smtClean="0">
+                            <a:latin typeface="Cambria Math" panose="02040503050406030204" pitchFamily="18" charset="0"/>
+                          </a:rPr>
+                        </m:ctrlPr>
+                      </m:dPr>
+                      <m:e>
+                        <m:r>
+                          <a:rPr lang="es-ES" b="0" i="1" smtClean="0">
+                            <a:latin typeface="Cambria Math" panose="02040503050406030204" pitchFamily="18" charset="0"/>
+                          </a:rPr>
+                          <m:t>𝜆</m:t>
+                        </m:r>
+                        <m:r>
+                          <a:rPr lang="es-ES" b="0" i="1" smtClean="0">
+                            <a:latin typeface="Cambria Math" panose="02040503050406030204" pitchFamily="18" charset="0"/>
+                          </a:rPr>
+                          <m:t>−</m:t>
+                        </m:r>
+                        <m:sSub>
+                          <m:sSubPr>
+                            <m:ctrlPr>
+                              <a:rPr lang="es-ES" b="0" i="1" smtClean="0">
+                                <a:latin typeface="Cambria Math" panose="02040503050406030204" pitchFamily="18" charset="0"/>
+                              </a:rPr>
+                            </m:ctrlPr>
+                          </m:sSubPr>
+                          <m:e>
+                            <m:r>
+                              <a:rPr lang="es-ES" b="0" i="1" smtClean="0">
+                                <a:latin typeface="Cambria Math" panose="02040503050406030204" pitchFamily="18" charset="0"/>
+                              </a:rPr>
+                              <m:t>𝜆</m:t>
+                            </m:r>
+                          </m:e>
+                          <m:sub>
+                            <m:r>
+                              <a:rPr lang="es-ES" b="0" i="1" smtClean="0">
+                                <a:latin typeface="Cambria Math" panose="02040503050406030204" pitchFamily="18" charset="0"/>
+                              </a:rPr>
+                              <m:t>0</m:t>
+                            </m:r>
+                          </m:sub>
+                        </m:sSub>
+                      </m:e>
+                    </m:d>
+                    <m:r>
+                      <a:rPr lang="es-ES" b="0" i="1" smtClean="0">
+                        <a:latin typeface="Cambria Math" panose="02040503050406030204" pitchFamily="18" charset="0"/>
+                      </a:rPr>
+                      <m:t>+</m:t>
+                    </m:r>
+                    <m:sSub>
+                      <m:sSubPr>
+                        <m:ctrlPr>
+                          <a:rPr lang="es-ES" b="0" i="1" smtClean="0">
+                            <a:latin typeface="Cambria Math" panose="02040503050406030204" pitchFamily="18" charset="0"/>
+                          </a:rPr>
+                        </m:ctrlPr>
+                      </m:sSubPr>
+                      <m:e>
+                        <m:r>
+                          <a:rPr lang="es-ES" b="0" i="1" smtClean="0">
+                            <a:latin typeface="Cambria Math" panose="02040503050406030204" pitchFamily="18" charset="0"/>
+                          </a:rPr>
+                          <m:t>𝑛</m:t>
+                        </m:r>
+                      </m:e>
+                      <m:sub>
+                        <m:r>
+                          <a:rPr lang="es-ES" b="0" i="1" smtClean="0">
+                            <a:latin typeface="Cambria Math" panose="02040503050406030204" pitchFamily="18" charset="0"/>
+                          </a:rPr>
+                          <m:t>3</m:t>
+                        </m:r>
+                      </m:sub>
+                    </m:sSub>
+                    <m:sSup>
+                      <m:sSupPr>
+                        <m:ctrlPr>
+                          <a:rPr lang="es-ES" b="0" i="1" smtClean="0">
+                            <a:latin typeface="Cambria Math" panose="02040503050406030204" pitchFamily="18" charset="0"/>
+                          </a:rPr>
+                        </m:ctrlPr>
+                      </m:sSupPr>
+                      <m:e>
+                        <m:d>
+                          <m:dPr>
+                            <m:ctrlPr>
+                              <a:rPr lang="es-ES" b="0" i="1" smtClean="0">
+                                <a:latin typeface="Cambria Math" panose="02040503050406030204" pitchFamily="18" charset="0"/>
+                              </a:rPr>
+                            </m:ctrlPr>
+                          </m:dPr>
+                          <m:e>
+                            <m:r>
+                              <a:rPr lang="es-ES" b="0" i="1" smtClean="0">
+                                <a:latin typeface="Cambria Math" panose="02040503050406030204" pitchFamily="18" charset="0"/>
+                              </a:rPr>
+                              <m:t>𝜆</m:t>
+                            </m:r>
+                            <m:r>
+                              <a:rPr lang="es-ES" b="0" i="1" smtClean="0">
+                                <a:latin typeface="Cambria Math" panose="02040503050406030204" pitchFamily="18" charset="0"/>
+                              </a:rPr>
+                              <m:t>−</m:t>
+                            </m:r>
+                            <m:sSub>
+                              <m:sSubPr>
+                                <m:ctrlPr>
+                                  <a:rPr lang="es-ES" b="0" i="1" smtClean="0">
+                                    <a:latin typeface="Cambria Math" panose="02040503050406030204" pitchFamily="18" charset="0"/>
+                                  </a:rPr>
+                                </m:ctrlPr>
+                              </m:sSubPr>
+                              <m:e>
+                                <m:r>
+                                  <a:rPr lang="es-ES" b="0" i="1" smtClean="0">
+                                    <a:latin typeface="Cambria Math" panose="02040503050406030204" pitchFamily="18" charset="0"/>
+                                  </a:rPr>
+                                  <m:t>𝜆</m:t>
+                                </m:r>
+                              </m:e>
+                              <m:sub>
+                                <m:r>
+                                  <a:rPr lang="es-ES" b="0" i="1" smtClean="0">
+                                    <a:latin typeface="Cambria Math" panose="02040503050406030204" pitchFamily="18" charset="0"/>
+                                  </a:rPr>
+                                  <m:t>0</m:t>
+                                </m:r>
+                              </m:sub>
+                            </m:sSub>
+                          </m:e>
+                        </m:d>
+                      </m:e>
+                      <m:sup>
+                        <m:r>
+                          <a:rPr lang="es-ES" b="0" i="1" smtClean="0">
+                            <a:latin typeface="Cambria Math" panose="02040503050406030204" pitchFamily="18" charset="0"/>
+                          </a:rPr>
+                          <m:t>2</m:t>
+                        </m:r>
+                      </m:sup>
+                    </m:sSup>
+                  </m:oMath>
                 </a14:m>
+                <a:r>
+                  <a:rPr lang="en-US" b="0" dirty="0"/>
+                  <a:t> </a:t>
+                </a:r>
                 <a:br>
                   <a:rPr lang="en-US" b="0" dirty="0"/>
                 </a:br>
@@ -8366,7 +8366,7 @@
             <p:spPr>
               <a:xfrm>
                 <a:off x="685800" y="408883"/>
-                <a:ext cx="10994410" cy="1071255"/>
+                <a:ext cx="10994410" cy="1428661"/>
               </a:xfrm>
               <a:prstGeom prst="rect">
                 <a:avLst/>
@@ -8374,7 +8374,7 @@
               <a:blipFill>
                 <a:blip r:embed="rId3"/>
                 <a:stretch>
-                  <a:fillRect l="-1664" t="-7386" b="-4545"/>
+                  <a:fillRect l="-1664" t="-5556"/>
                 </a:stretch>
               </a:blipFill>
             </p:spPr>
@@ -8445,7 +8445,12 @@
             <p:ph type="sldNum" sz="quarter" idx="7"/>
           </p:nvPr>
         </p:nvSpPr>
-        <p:spPr/>
+        <p:spPr>
+          <a:xfrm>
+            <a:off x="9379811" y="6386169"/>
+            <a:ext cx="2804160" cy="342900"/>
+          </a:xfrm>
+        </p:spPr>
         <p:txBody>
           <a:bodyPr/>
           <a:lstStyle/>
@@ -8492,8 +8497,8 @@
           </a:p>
         </p:txBody>
       </p:sp>
-      <mc:AlternateContent xmlns:mc="http://schemas.openxmlformats.org/markup-compatibility/2006" xmlns:a14="http://schemas.microsoft.com/office/drawing/2010/main">
-        <mc:Choice Requires="a14">
+      <mc:AlternateContent xmlns:mc="http://schemas.openxmlformats.org/markup-compatibility/2006">
+        <mc:Choice xmlns:a14="http://schemas.microsoft.com/office/drawing/2010/main" Requires="a14">
           <p:sp>
             <p:nvSpPr>
               <p:cNvPr id="2" name="CuadroTexto 1">
@@ -8509,7 +8514,7 @@
             <p:spPr>
               <a:xfrm>
                 <a:off x="609441" y="4860334"/>
-                <a:ext cx="11198542" cy="1361911"/>
+                <a:ext cx="11198542" cy="1186863"/>
               </a:xfrm>
               <a:prstGeom prst="rect">
                 <a:avLst/>
@@ -8935,17 +8940,7 @@
                     <a:latin typeface="Arial" panose="020B0604020202020204" pitchFamily="34" charset="0"/>
                     <a:cs typeface="Arial" panose="020B0604020202020204" pitchFamily="34" charset="0"/>
                   </a:rPr>
-                  <a:t> </a:t>
-                </a:r>
-              </a:p>
-              <a:p>
-                <a:pPr algn="just"/>
-                <a:r>
-                  <a:rPr lang="en-US" sz="1200" dirty="0">
-                    <a:latin typeface="Arial" panose="020B0604020202020204" pitchFamily="34" charset="0"/>
-                    <a:cs typeface="Arial" panose="020B0604020202020204" pitchFamily="34" charset="0"/>
-                  </a:rPr>
-                  <a:t>Comment on the results found for the TE0 and TM0 for both deep and shallow waveguides. </a:t>
+                  <a:t>Comment on the results found for the TE0 and TM0 for both deep and shallow waveguides. . </a:t>
                 </a:r>
               </a:p>
               <a:p>
@@ -8958,7 +8953,7 @@
             </p:txBody>
           </p:sp>
         </mc:Choice>
-        <mc:Fallback xmlns="">
+        <mc:Fallback>
           <p:sp>
             <p:nvSpPr>
               <p:cNvPr id="2" name="CuadroTexto 1">
@@ -8976,7 +8971,7 @@
             <p:spPr>
               <a:xfrm>
                 <a:off x="609441" y="4860334"/>
-                <a:ext cx="11198542" cy="1361911"/>
+                <a:ext cx="11198542" cy="1186863"/>
               </a:xfrm>
               <a:prstGeom prst="rect">
                 <a:avLst/>
@@ -9453,6 +9448,66 @@
           </a:p>
         </p:txBody>
       </p:sp>
+      <p:pic>
+        <p:nvPicPr>
+          <p:cNvPr id="17" name="Imagen 16">
+            <a:extLst>
+              <a:ext uri="{FF2B5EF4-FFF2-40B4-BE49-F238E27FC236}">
+                <a16:creationId xmlns:a16="http://schemas.microsoft.com/office/drawing/2014/main" id="{CF0FE8FA-35BA-443D-AE0C-E5DBEEFC4EC3}"/>
+              </a:ext>
+            </a:extLst>
+          </p:cNvPr>
+          <p:cNvPicPr>
+            <a:picLocks noChangeAspect="1"/>
+          </p:cNvPicPr>
+          <p:nvPr/>
+        </p:nvPicPr>
+        <p:blipFill>
+          <a:blip r:embed="rId9"/>
+          <a:stretch>
+            <a:fillRect/>
+          </a:stretch>
+        </p:blipFill>
+        <p:spPr>
+          <a:xfrm>
+            <a:off x="760330" y="1475143"/>
+            <a:ext cx="5184777" cy="3215875"/>
+          </a:xfrm>
+          <a:prstGeom prst="rect">
+            <a:avLst/>
+          </a:prstGeom>
+        </p:spPr>
+      </p:pic>
+      <p:pic>
+        <p:nvPicPr>
+          <p:cNvPr id="19" name="Imagen 18">
+            <a:extLst>
+              <a:ext uri="{FF2B5EF4-FFF2-40B4-BE49-F238E27FC236}">
+                <a16:creationId xmlns:a16="http://schemas.microsoft.com/office/drawing/2014/main" id="{58FD4871-42C7-4EA6-B37B-B3D820E64C66}"/>
+              </a:ext>
+            </a:extLst>
+          </p:cNvPr>
+          <p:cNvPicPr>
+            <a:picLocks noChangeAspect="1"/>
+          </p:cNvPicPr>
+          <p:nvPr/>
+        </p:nvPicPr>
+        <p:blipFill>
+          <a:blip r:embed="rId10"/>
+          <a:stretch>
+            <a:fillRect/>
+          </a:stretch>
+        </p:blipFill>
+        <p:spPr>
+          <a:xfrm>
+            <a:off x="6397780" y="1465339"/>
+            <a:ext cx="5282429" cy="3276443"/>
+          </a:xfrm>
+          <a:prstGeom prst="rect">
+            <a:avLst/>
+          </a:prstGeom>
+        </p:spPr>
+      </p:pic>
     </p:spTree>
     <p:extLst>
       <p:ext uri="{BB962C8B-B14F-4D97-AF65-F5344CB8AC3E}">
@@ -9467,6 +9522,2685 @@
 </file>
 
 <file path=ppt/slides/slide6.xml><?xml version="1.0" encoding="utf-8"?>
+<p:sld xmlns:a="http://schemas.openxmlformats.org/drawingml/2006/main" xmlns:r="http://schemas.openxmlformats.org/officeDocument/2006/relationships" xmlns:p="http://schemas.openxmlformats.org/presentationml/2006/main">
+  <p:cSld>
+    <p:spTree>
+      <p:nvGrpSpPr>
+        <p:cNvPr id="1" name=""/>
+        <p:cNvGrpSpPr/>
+        <p:nvPr/>
+      </p:nvGrpSpPr>
+      <p:grpSpPr>
+        <a:xfrm>
+          <a:off x="0" y="0"/>
+          <a:ext cx="0" cy="0"/>
+          <a:chOff x="0" y="0"/>
+          <a:chExt cx="0" cy="0"/>
+        </a:xfrm>
+      </p:grpSpPr>
+      <p:sp>
+        <p:nvSpPr>
+          <p:cNvPr id="4" name="Marcador de pie de página 3">
+            <a:extLst>
+              <a:ext uri="{FF2B5EF4-FFF2-40B4-BE49-F238E27FC236}">
+                <a16:creationId xmlns:a16="http://schemas.microsoft.com/office/drawing/2014/main" id="{46961016-1845-43F6-8DE4-99158B8160DA}"/>
+              </a:ext>
+            </a:extLst>
+          </p:cNvPr>
+          <p:cNvSpPr>
+            <a:spLocks noGrp="1"/>
+          </p:cNvSpPr>
+          <p:nvPr>
+            <p:ph type="ftr" sz="quarter" idx="5"/>
+          </p:nvPr>
+        </p:nvSpPr>
+        <p:spPr/>
+        <p:txBody>
+          <a:bodyPr/>
+          <a:lstStyle/>
+          <a:p>
+            <a:pPr marL="12700">
+              <a:spcBef>
+                <a:spcPts val="15"/>
+              </a:spcBef>
+            </a:pPr>
+            <a:r>
+              <a:rPr lang="es-ES" spc="-5"/>
+              <a:t>LAB 1.0. WAVEGUIDES</a:t>
+            </a:r>
+            <a:endParaRPr lang="es-ES" spc="-5" dirty="0"/>
+          </a:p>
+        </p:txBody>
+      </p:sp>
+      <p:sp>
+        <p:nvSpPr>
+          <p:cNvPr id="5" name="Marcador de número de diapositiva 4">
+            <a:extLst>
+              <a:ext uri="{FF2B5EF4-FFF2-40B4-BE49-F238E27FC236}">
+                <a16:creationId xmlns:a16="http://schemas.microsoft.com/office/drawing/2014/main" id="{CC4E4585-65DB-4E7A-94E9-08420EACC537}"/>
+              </a:ext>
+            </a:extLst>
+          </p:cNvPr>
+          <p:cNvSpPr>
+            <a:spLocks noGrp="1"/>
+          </p:cNvSpPr>
+          <p:nvPr>
+            <p:ph type="sldNum" sz="quarter" idx="7"/>
+          </p:nvPr>
+        </p:nvSpPr>
+        <p:spPr/>
+        <p:txBody>
+          <a:bodyPr/>
+          <a:lstStyle/>
+          <a:p>
+            <a:fld id="{B6F15528-21DE-4FAA-801E-634DDDAF4B2B}" type="slidenum">
+              <a:rPr lang="es-ES" smtClean="0"/>
+              <a:t>6</a:t>
+            </a:fld>
+            <a:endParaRPr lang="es-ES"/>
+          </a:p>
+        </p:txBody>
+      </p:sp>
+      <p:graphicFrame>
+        <p:nvGraphicFramePr>
+          <p:cNvPr id="7" name="Tabla 7">
+            <a:extLst>
+              <a:ext uri="{FF2B5EF4-FFF2-40B4-BE49-F238E27FC236}">
+                <a16:creationId xmlns:a16="http://schemas.microsoft.com/office/drawing/2014/main" id="{1F24D5DC-817B-4365-8FEF-D118B0ABA117}"/>
+              </a:ext>
+            </a:extLst>
+          </p:cNvPr>
+          <p:cNvGraphicFramePr>
+            <a:graphicFrameLocks noGrp="1"/>
+          </p:cNvGraphicFramePr>
+          <p:nvPr>
+            <p:extLst>
+              <p:ext uri="{D42A27DB-BD31-4B8C-83A1-F6EECF244321}">
+                <p14:modId xmlns:p14="http://schemas.microsoft.com/office/powerpoint/2010/main" val="565399524"/>
+              </p:ext>
+            </p:extLst>
+          </p:nvPr>
+        </p:nvGraphicFramePr>
+        <p:xfrm>
+          <a:off x="609600" y="1094169"/>
+          <a:ext cx="5134688" cy="1155708"/>
+        </p:xfrm>
+        <a:graphic>
+          <a:graphicData uri="http://schemas.openxmlformats.org/drawingml/2006/table">
+            <a:tbl>
+              <a:tblPr firstRow="1" bandRow="1">
+                <a:tableStyleId>{5C22544A-7EE6-4342-B048-85BDC9FD1C3A}</a:tableStyleId>
+              </a:tblPr>
+              <a:tblGrid>
+                <a:gridCol w="1283672">
+                  <a:extLst>
+                    <a:ext uri="{9D8B030D-6E8A-4147-A177-3AD203B41FA5}">
+                      <a16:colId xmlns:a16="http://schemas.microsoft.com/office/drawing/2014/main" val="295643760"/>
+                    </a:ext>
+                  </a:extLst>
+                </a:gridCol>
+                <a:gridCol w="1283672">
+                  <a:extLst>
+                    <a:ext uri="{9D8B030D-6E8A-4147-A177-3AD203B41FA5}">
+                      <a16:colId xmlns:a16="http://schemas.microsoft.com/office/drawing/2014/main" val="147285642"/>
+                    </a:ext>
+                  </a:extLst>
+                </a:gridCol>
+                <a:gridCol w="1283672">
+                  <a:extLst>
+                    <a:ext uri="{9D8B030D-6E8A-4147-A177-3AD203B41FA5}">
+                      <a16:colId xmlns:a16="http://schemas.microsoft.com/office/drawing/2014/main" val="386221058"/>
+                    </a:ext>
+                  </a:extLst>
+                </a:gridCol>
+                <a:gridCol w="1283672">
+                  <a:extLst>
+                    <a:ext uri="{9D8B030D-6E8A-4147-A177-3AD203B41FA5}">
+                      <a16:colId xmlns:a16="http://schemas.microsoft.com/office/drawing/2014/main" val="3258529604"/>
+                    </a:ext>
+                  </a:extLst>
+                </a:gridCol>
+              </a:tblGrid>
+              <a:tr h="385236">
+                <a:tc>
+                  <a:txBody>
+                    <a:bodyPr/>
+                    <a:lstStyle/>
+                    <a:p>
+                      <a:endParaRPr lang="es-ES" dirty="0"/>
+                    </a:p>
+                  </a:txBody>
+                  <a:tcPr/>
+                </a:tc>
+                <a:tc>
+                  <a:txBody>
+                    <a:bodyPr/>
+                    <a:lstStyle/>
+                    <a:p>
+                      <a:r>
+                        <a:rPr lang="es-ES" dirty="0" err="1"/>
+                        <a:t>n_eff</a:t>
+                      </a:r>
+                      <a:endParaRPr lang="es-ES" dirty="0"/>
+                    </a:p>
+                  </a:txBody>
+                  <a:tcPr/>
+                </a:tc>
+                <a:tc>
+                  <a:txBody>
+                    <a:bodyPr/>
+                    <a:lstStyle/>
+                    <a:p>
+                      <a:r>
+                        <a:rPr lang="es-ES" dirty="0" err="1"/>
+                        <a:t>n_g</a:t>
+                      </a:r>
+                      <a:endParaRPr lang="es-ES" dirty="0"/>
+                    </a:p>
+                  </a:txBody>
+                  <a:tcPr/>
+                </a:tc>
+                <a:tc>
+                  <a:txBody>
+                    <a:bodyPr/>
+                    <a:lstStyle/>
+                    <a:p>
+                      <a:r>
+                        <a:rPr lang="es-ES" dirty="0"/>
+                        <a:t>D [s^2/m]</a:t>
+                      </a:r>
+                    </a:p>
+                  </a:txBody>
+                  <a:tcPr/>
+                </a:tc>
+                <a:extLst>
+                  <a:ext uri="{0D108BD9-81ED-4DB2-BD59-A6C34878D82A}">
+                    <a16:rowId xmlns:a16="http://schemas.microsoft.com/office/drawing/2014/main" val="4119770895"/>
+                  </a:ext>
+                </a:extLst>
+              </a:tr>
+              <a:tr h="385236">
+                <a:tc>
+                  <a:txBody>
+                    <a:bodyPr/>
+                    <a:lstStyle/>
+                    <a:p>
+                      <a:r>
+                        <a:rPr lang="es-ES" dirty="0"/>
+                        <a:t>Modo TE</a:t>
+                      </a:r>
+                    </a:p>
+                  </a:txBody>
+                  <a:tcPr/>
+                </a:tc>
+                <a:tc>
+                  <a:txBody>
+                    <a:bodyPr/>
+                    <a:lstStyle/>
+                    <a:p>
+                      <a:r>
+                        <a:rPr lang="es-ES" dirty="0"/>
+                        <a:t>1.6049</a:t>
+                      </a:r>
+                    </a:p>
+                  </a:txBody>
+                  <a:tcPr/>
+                </a:tc>
+                <a:tc>
+                  <a:txBody>
+                    <a:bodyPr/>
+                    <a:lstStyle/>
+                    <a:p>
+                      <a:r>
+                        <a:rPr lang="es-ES" dirty="0"/>
+                        <a:t>1.94</a:t>
+                      </a:r>
+                    </a:p>
+                  </a:txBody>
+                  <a:tcPr/>
+                </a:tc>
+                <a:tc>
+                  <a:txBody>
+                    <a:bodyPr/>
+                    <a:lstStyle/>
+                    <a:p>
+                      <a:r>
+                        <a:rPr lang="es-ES" dirty="0"/>
+                        <a:t>-1006.7</a:t>
+                      </a:r>
+                    </a:p>
+                  </a:txBody>
+                  <a:tcPr/>
+                </a:tc>
+                <a:extLst>
+                  <a:ext uri="{0D108BD9-81ED-4DB2-BD59-A6C34878D82A}">
+                    <a16:rowId xmlns:a16="http://schemas.microsoft.com/office/drawing/2014/main" val="2348515517"/>
+                  </a:ext>
+                </a:extLst>
+              </a:tr>
+              <a:tr h="385236">
+                <a:tc>
+                  <a:txBody>
+                    <a:bodyPr/>
+                    <a:lstStyle/>
+                    <a:p>
+                      <a:r>
+                        <a:rPr lang="es-ES" dirty="0"/>
+                        <a:t>Modo TM</a:t>
+                      </a:r>
+                    </a:p>
+                  </a:txBody>
+                  <a:tcPr/>
+                </a:tc>
+                <a:tc>
+                  <a:txBody>
+                    <a:bodyPr/>
+                    <a:lstStyle/>
+                    <a:p>
+                      <a:r>
+                        <a:rPr lang="es-ES" dirty="0"/>
+                        <a:t>1.5272</a:t>
+                      </a:r>
+                    </a:p>
+                  </a:txBody>
+                  <a:tcPr/>
+                </a:tc>
+                <a:tc>
+                  <a:txBody>
+                    <a:bodyPr/>
+                    <a:lstStyle/>
+                    <a:p>
+                      <a:r>
+                        <a:rPr lang="es-ES" dirty="0"/>
+                        <a:t>1.772</a:t>
+                      </a:r>
+                    </a:p>
+                  </a:txBody>
+                  <a:tcPr/>
+                </a:tc>
+                <a:tc>
+                  <a:txBody>
+                    <a:bodyPr/>
+                    <a:lstStyle/>
+                    <a:p>
+                      <a:r>
+                        <a:rPr lang="es-ES" dirty="0"/>
+                        <a:t>-1590.69</a:t>
+                      </a:r>
+                    </a:p>
+                  </a:txBody>
+                  <a:tcPr/>
+                </a:tc>
+                <a:extLst>
+                  <a:ext uri="{0D108BD9-81ED-4DB2-BD59-A6C34878D82A}">
+                    <a16:rowId xmlns:a16="http://schemas.microsoft.com/office/drawing/2014/main" val="3833824525"/>
+                  </a:ext>
+                </a:extLst>
+              </a:tr>
+            </a:tbl>
+          </a:graphicData>
+        </a:graphic>
+      </p:graphicFrame>
+      <p:sp>
+        <p:nvSpPr>
+          <p:cNvPr id="8" name="Título 1">
+            <a:extLst>
+              <a:ext uri="{FF2B5EF4-FFF2-40B4-BE49-F238E27FC236}">
+                <a16:creationId xmlns:a16="http://schemas.microsoft.com/office/drawing/2014/main" id="{A924A96F-A81A-45E8-8693-00CA2BBCF25E}"/>
+              </a:ext>
+            </a:extLst>
+          </p:cNvPr>
+          <p:cNvSpPr txBox="1">
+            <a:spLocks/>
+          </p:cNvSpPr>
+          <p:nvPr/>
+        </p:nvSpPr>
+        <p:spPr>
+          <a:xfrm>
+            <a:off x="2209799" y="634602"/>
+            <a:ext cx="2438400" cy="307777"/>
+          </a:xfrm>
+          <a:prstGeom prst="rect">
+            <a:avLst/>
+          </a:prstGeom>
+        </p:spPr>
+        <p:txBody>
+          <a:bodyPr wrap="square" lIns="0" tIns="0" rIns="0" bIns="0">
+            <a:spAutoFit/>
+          </a:bodyPr>
+          <a:lstStyle>
+            <a:lvl1pPr>
+              <a:defRPr sz="2000" b="1" i="0">
+                <a:solidFill>
+                  <a:schemeClr val="tx1"/>
+                </a:solidFill>
+                <a:latin typeface="Calibri"/>
+                <a:ea typeface="+mj-ea"/>
+                <a:cs typeface="Calibri"/>
+              </a:defRPr>
+            </a:lvl1pPr>
+          </a:lstStyle>
+          <a:p>
+            <a:r>
+              <a:rPr lang="es-ES" kern="0" dirty="0"/>
+              <a:t>Deep </a:t>
+            </a:r>
+            <a:r>
+              <a:rPr lang="es-ES" kern="0" dirty="0" err="1"/>
+              <a:t>waveguide</a:t>
+            </a:r>
+            <a:endParaRPr lang="es-ES" kern="0" dirty="0"/>
+          </a:p>
+        </p:txBody>
+      </p:sp>
+      <p:sp>
+        <p:nvSpPr>
+          <p:cNvPr id="9" name="Título 1">
+            <a:extLst>
+              <a:ext uri="{FF2B5EF4-FFF2-40B4-BE49-F238E27FC236}">
+                <a16:creationId xmlns:a16="http://schemas.microsoft.com/office/drawing/2014/main" id="{E22649E6-2376-4B26-90AF-426D16A1AB2A}"/>
+              </a:ext>
+            </a:extLst>
+          </p:cNvPr>
+          <p:cNvSpPr txBox="1">
+            <a:spLocks/>
+          </p:cNvSpPr>
+          <p:nvPr/>
+        </p:nvSpPr>
+        <p:spPr>
+          <a:xfrm>
+            <a:off x="7543801" y="634601"/>
+            <a:ext cx="2438400" cy="307777"/>
+          </a:xfrm>
+          <a:prstGeom prst="rect">
+            <a:avLst/>
+          </a:prstGeom>
+        </p:spPr>
+        <p:txBody>
+          <a:bodyPr wrap="square" lIns="0" tIns="0" rIns="0" bIns="0">
+            <a:spAutoFit/>
+          </a:bodyPr>
+          <a:lstStyle>
+            <a:lvl1pPr>
+              <a:defRPr sz="2000" b="1" i="0">
+                <a:solidFill>
+                  <a:schemeClr val="tx1"/>
+                </a:solidFill>
+                <a:latin typeface="Calibri"/>
+                <a:ea typeface="+mj-ea"/>
+                <a:cs typeface="Calibri"/>
+              </a:defRPr>
+            </a:lvl1pPr>
+          </a:lstStyle>
+          <a:p>
+            <a:r>
+              <a:rPr lang="es-ES" kern="0" dirty="0" err="1"/>
+              <a:t>Shallow</a:t>
+            </a:r>
+            <a:r>
+              <a:rPr lang="es-ES" kern="0" dirty="0"/>
+              <a:t> </a:t>
+            </a:r>
+            <a:r>
+              <a:rPr lang="es-ES" kern="0" dirty="0" err="1"/>
+              <a:t>waveguide</a:t>
+            </a:r>
+            <a:endParaRPr lang="es-ES" kern="0" dirty="0"/>
+          </a:p>
+        </p:txBody>
+      </p:sp>
+      <p:graphicFrame>
+        <p:nvGraphicFramePr>
+          <p:cNvPr id="10" name="Tabla 7">
+            <a:extLst>
+              <a:ext uri="{FF2B5EF4-FFF2-40B4-BE49-F238E27FC236}">
+                <a16:creationId xmlns:a16="http://schemas.microsoft.com/office/drawing/2014/main" id="{D2EDAF16-D22E-490E-9FC4-298B7508E780}"/>
+              </a:ext>
+            </a:extLst>
+          </p:cNvPr>
+          <p:cNvGraphicFramePr>
+            <a:graphicFrameLocks noGrp="1"/>
+          </p:cNvGraphicFramePr>
+          <p:nvPr>
+            <p:extLst>
+              <p:ext uri="{D42A27DB-BD31-4B8C-83A1-F6EECF244321}">
+                <p14:modId xmlns:p14="http://schemas.microsoft.com/office/powerpoint/2010/main" val="2678399013"/>
+              </p:ext>
+            </p:extLst>
+          </p:nvPr>
+        </p:nvGraphicFramePr>
+        <p:xfrm>
+          <a:off x="6195657" y="1104096"/>
+          <a:ext cx="5134688" cy="1186935"/>
+        </p:xfrm>
+        <a:graphic>
+          <a:graphicData uri="http://schemas.openxmlformats.org/drawingml/2006/table">
+            <a:tbl>
+              <a:tblPr firstRow="1" bandRow="1">
+                <a:tableStyleId>{5C22544A-7EE6-4342-B048-85BDC9FD1C3A}</a:tableStyleId>
+              </a:tblPr>
+              <a:tblGrid>
+                <a:gridCol w="1283672">
+                  <a:extLst>
+                    <a:ext uri="{9D8B030D-6E8A-4147-A177-3AD203B41FA5}">
+                      <a16:colId xmlns:a16="http://schemas.microsoft.com/office/drawing/2014/main" val="295643760"/>
+                    </a:ext>
+                  </a:extLst>
+                </a:gridCol>
+                <a:gridCol w="1283672">
+                  <a:extLst>
+                    <a:ext uri="{9D8B030D-6E8A-4147-A177-3AD203B41FA5}">
+                      <a16:colId xmlns:a16="http://schemas.microsoft.com/office/drawing/2014/main" val="147285642"/>
+                    </a:ext>
+                  </a:extLst>
+                </a:gridCol>
+                <a:gridCol w="1283672">
+                  <a:extLst>
+                    <a:ext uri="{9D8B030D-6E8A-4147-A177-3AD203B41FA5}">
+                      <a16:colId xmlns:a16="http://schemas.microsoft.com/office/drawing/2014/main" val="386221058"/>
+                    </a:ext>
+                  </a:extLst>
+                </a:gridCol>
+                <a:gridCol w="1283672">
+                  <a:extLst>
+                    <a:ext uri="{9D8B030D-6E8A-4147-A177-3AD203B41FA5}">
+                      <a16:colId xmlns:a16="http://schemas.microsoft.com/office/drawing/2014/main" val="3258529604"/>
+                    </a:ext>
+                  </a:extLst>
+                </a:gridCol>
+              </a:tblGrid>
+              <a:tr h="395645">
+                <a:tc>
+                  <a:txBody>
+                    <a:bodyPr/>
+                    <a:lstStyle/>
+                    <a:p>
+                      <a:endParaRPr lang="es-ES" dirty="0"/>
+                    </a:p>
+                  </a:txBody>
+                  <a:tcPr/>
+                </a:tc>
+                <a:tc>
+                  <a:txBody>
+                    <a:bodyPr/>
+                    <a:lstStyle/>
+                    <a:p>
+                      <a:r>
+                        <a:rPr lang="es-ES" dirty="0" err="1"/>
+                        <a:t>n_eff</a:t>
+                      </a:r>
+                      <a:endParaRPr lang="es-ES" dirty="0"/>
+                    </a:p>
+                  </a:txBody>
+                  <a:tcPr/>
+                </a:tc>
+                <a:tc>
+                  <a:txBody>
+                    <a:bodyPr/>
+                    <a:lstStyle/>
+                    <a:p>
+                      <a:r>
+                        <a:rPr lang="es-ES" dirty="0" err="1"/>
+                        <a:t>n_g</a:t>
+                      </a:r>
+                      <a:endParaRPr lang="es-ES" dirty="0"/>
+                    </a:p>
+                  </a:txBody>
+                  <a:tcPr/>
+                </a:tc>
+                <a:tc>
+                  <a:txBody>
+                    <a:bodyPr/>
+                    <a:lstStyle/>
+                    <a:p>
+                      <a:r>
+                        <a:rPr lang="es-ES" dirty="0"/>
+                        <a:t>D [s^2/m]</a:t>
+                      </a:r>
+                    </a:p>
+                  </a:txBody>
+                  <a:tcPr/>
+                </a:tc>
+                <a:extLst>
+                  <a:ext uri="{0D108BD9-81ED-4DB2-BD59-A6C34878D82A}">
+                    <a16:rowId xmlns:a16="http://schemas.microsoft.com/office/drawing/2014/main" val="4119770895"/>
+                  </a:ext>
+                </a:extLst>
+              </a:tr>
+              <a:tr h="395645">
+                <a:tc>
+                  <a:txBody>
+                    <a:bodyPr/>
+                    <a:lstStyle/>
+                    <a:p>
+                      <a:r>
+                        <a:rPr lang="es-ES" dirty="0"/>
+                        <a:t>Modo TE</a:t>
+                      </a:r>
+                    </a:p>
+                  </a:txBody>
+                  <a:tcPr/>
+                </a:tc>
+                <a:tc>
+                  <a:txBody>
+                    <a:bodyPr/>
+                    <a:lstStyle/>
+                    <a:p>
+                      <a:r>
+                        <a:rPr lang="es-ES" b="0" i="0" dirty="0">
+                          <a:solidFill>
+                            <a:schemeClr val="dk1"/>
+                          </a:solidFill>
+                          <a:effectLst/>
+                          <a:latin typeface="+mn-lt"/>
+                          <a:ea typeface="+mn-ea"/>
+                          <a:cs typeface="+mn-cs"/>
+                        </a:rPr>
+                        <a:t>1.6241</a:t>
+                      </a:r>
+                      <a:endParaRPr lang="es-ES" dirty="0"/>
+                    </a:p>
+                  </a:txBody>
+                  <a:tcPr/>
+                </a:tc>
+                <a:tc>
+                  <a:txBody>
+                    <a:bodyPr/>
+                    <a:lstStyle/>
+                    <a:p>
+                      <a:r>
+                        <a:rPr lang="es-ES" b="0" i="0" dirty="0">
+                          <a:solidFill>
+                            <a:schemeClr val="dk1"/>
+                          </a:solidFill>
+                          <a:effectLst/>
+                          <a:latin typeface="+mn-lt"/>
+                          <a:ea typeface="+mn-ea"/>
+                          <a:cs typeface="+mn-cs"/>
+                        </a:rPr>
+                        <a:t>1.9158</a:t>
+                      </a:r>
+                      <a:endParaRPr lang="es-ES" dirty="0"/>
+                    </a:p>
+                  </a:txBody>
+                  <a:tcPr/>
+                </a:tc>
+                <a:tc>
+                  <a:txBody>
+                    <a:bodyPr/>
+                    <a:lstStyle/>
+                    <a:p>
+                      <a:r>
+                        <a:rPr lang="es-ES" b="0" i="0" dirty="0">
+                          <a:solidFill>
+                            <a:schemeClr val="dk1"/>
+                          </a:solidFill>
+                          <a:effectLst/>
+                          <a:latin typeface="+mn-lt"/>
+                          <a:ea typeface="+mn-ea"/>
+                          <a:cs typeface="+mn-cs"/>
+                        </a:rPr>
+                        <a:t>-989.54</a:t>
+                      </a:r>
+                      <a:endParaRPr lang="es-ES" dirty="0"/>
+                    </a:p>
+                  </a:txBody>
+                  <a:tcPr/>
+                </a:tc>
+                <a:extLst>
+                  <a:ext uri="{0D108BD9-81ED-4DB2-BD59-A6C34878D82A}">
+                    <a16:rowId xmlns:a16="http://schemas.microsoft.com/office/drawing/2014/main" val="2348515517"/>
+                  </a:ext>
+                </a:extLst>
+              </a:tr>
+              <a:tr h="395645">
+                <a:tc>
+                  <a:txBody>
+                    <a:bodyPr/>
+                    <a:lstStyle/>
+                    <a:p>
+                      <a:r>
+                        <a:rPr lang="es-ES" dirty="0"/>
+                        <a:t>Modo TM</a:t>
+                      </a:r>
+                    </a:p>
+                  </a:txBody>
+                  <a:tcPr/>
+                </a:tc>
+                <a:tc>
+                  <a:txBody>
+                    <a:bodyPr/>
+                    <a:lstStyle/>
+                    <a:p>
+                      <a:r>
+                        <a:rPr lang="es-ES" b="0" i="0" dirty="0">
+                          <a:solidFill>
+                            <a:schemeClr val="dk1"/>
+                          </a:solidFill>
+                          <a:effectLst/>
+                          <a:latin typeface="+mn-lt"/>
+                          <a:ea typeface="+mn-ea"/>
+                          <a:cs typeface="+mn-cs"/>
+                        </a:rPr>
+                        <a:t>1.5419</a:t>
+                      </a:r>
+                      <a:endParaRPr lang="es-ES" dirty="0"/>
+                    </a:p>
+                  </a:txBody>
+                  <a:tcPr/>
+                </a:tc>
+                <a:tc>
+                  <a:txBody>
+                    <a:bodyPr/>
+                    <a:lstStyle/>
+                    <a:p>
+                      <a:r>
+                        <a:rPr lang="es-ES" b="0" i="0" dirty="0">
+                          <a:solidFill>
+                            <a:schemeClr val="dk1"/>
+                          </a:solidFill>
+                          <a:effectLst/>
+                          <a:latin typeface="+mn-lt"/>
+                          <a:ea typeface="+mn-ea"/>
+                          <a:cs typeface="+mn-cs"/>
+                        </a:rPr>
+                        <a:t>1.7474</a:t>
+                      </a:r>
+                      <a:endParaRPr lang="es-ES" dirty="0"/>
+                    </a:p>
+                  </a:txBody>
+                  <a:tcPr/>
+                </a:tc>
+                <a:tc>
+                  <a:txBody>
+                    <a:bodyPr/>
+                    <a:lstStyle/>
+                    <a:p>
+                      <a:r>
+                        <a:rPr lang="es-ES" b="0" i="0" dirty="0">
+                          <a:solidFill>
+                            <a:schemeClr val="dk1"/>
+                          </a:solidFill>
+                          <a:effectLst/>
+                          <a:latin typeface="+mn-lt"/>
+                          <a:ea typeface="+mn-ea"/>
+                          <a:cs typeface="+mn-cs"/>
+                        </a:rPr>
+                        <a:t>-1530.51</a:t>
+                      </a:r>
+                      <a:endParaRPr lang="es-ES" dirty="0"/>
+                    </a:p>
+                  </a:txBody>
+                  <a:tcPr/>
+                </a:tc>
+                <a:extLst>
+                  <a:ext uri="{0D108BD9-81ED-4DB2-BD59-A6C34878D82A}">
+                    <a16:rowId xmlns:a16="http://schemas.microsoft.com/office/drawing/2014/main" val="3833824525"/>
+                  </a:ext>
+                </a:extLst>
+              </a:tr>
+            </a:tbl>
+          </a:graphicData>
+        </a:graphic>
+      </p:graphicFrame>
+      <p:sp>
+        <p:nvSpPr>
+          <p:cNvPr id="13" name="CuadroTexto 12">
+            <a:extLst>
+              <a:ext uri="{FF2B5EF4-FFF2-40B4-BE49-F238E27FC236}">
+                <a16:creationId xmlns:a16="http://schemas.microsoft.com/office/drawing/2014/main" id="{D5B32F66-87B5-44D9-B5DF-CCFC0B1421FD}"/>
+              </a:ext>
+            </a:extLst>
+          </p:cNvPr>
+          <p:cNvSpPr txBox="1"/>
+          <p:nvPr/>
+        </p:nvSpPr>
+        <p:spPr>
+          <a:xfrm>
+            <a:off x="496729" y="2513497"/>
+            <a:ext cx="11198542" cy="3600986"/>
+          </a:xfrm>
+          <a:prstGeom prst="rect">
+            <a:avLst/>
+          </a:prstGeom>
+          <a:solidFill>
+            <a:schemeClr val="bg1">
+              <a:lumMod val="95000"/>
+            </a:schemeClr>
+          </a:solidFill>
+          <a:ln w="28575">
+            <a:solidFill>
+              <a:srgbClr val="E0700D"/>
+            </a:solidFill>
+          </a:ln>
+        </p:spPr>
+        <p:txBody>
+          <a:bodyPr wrap="square" rtlCol="0">
+            <a:spAutoFit/>
+          </a:bodyPr>
+          <a:lstStyle/>
+          <a:p>
+            <a:pPr algn="just"/>
+            <a:endParaRPr lang="en-US" sz="1200" dirty="0">
+              <a:latin typeface="Arial" panose="020B0604020202020204" pitchFamily="34" charset="0"/>
+              <a:cs typeface="Arial" panose="020B0604020202020204" pitchFamily="34" charset="0"/>
+            </a:endParaRPr>
+          </a:p>
+          <a:p>
+            <a:pPr algn="just"/>
+            <a:r>
+              <a:rPr lang="en-US" sz="1200" dirty="0" err="1">
+                <a:latin typeface="Arial" panose="020B0604020202020204" pitchFamily="34" charset="0"/>
+                <a:cs typeface="Arial" panose="020B0604020202020204" pitchFamily="34" charset="0"/>
+              </a:rPr>
+              <a:t>Ahora</a:t>
+            </a:r>
+            <a:r>
+              <a:rPr lang="en-US" sz="1200" dirty="0">
+                <a:latin typeface="Arial" panose="020B0604020202020204" pitchFamily="34" charset="0"/>
+                <a:cs typeface="Arial" panose="020B0604020202020204" pitchFamily="34" charset="0"/>
+              </a:rPr>
+              <a:t> </a:t>
+            </a:r>
+            <a:r>
+              <a:rPr lang="en-US" sz="1200" dirty="0" err="1">
+                <a:latin typeface="Arial" panose="020B0604020202020204" pitchFamily="34" charset="0"/>
+                <a:cs typeface="Arial" panose="020B0604020202020204" pitchFamily="34" charset="0"/>
+              </a:rPr>
+              <a:t>estamos</a:t>
+            </a:r>
+            <a:r>
+              <a:rPr lang="en-US" sz="1200" dirty="0">
+                <a:latin typeface="Arial" panose="020B0604020202020204" pitchFamily="34" charset="0"/>
+                <a:cs typeface="Arial" panose="020B0604020202020204" pitchFamily="34" charset="0"/>
+              </a:rPr>
+              <a:t> </a:t>
+            </a:r>
+            <a:r>
+              <a:rPr lang="en-US" sz="1200" dirty="0" err="1">
+                <a:latin typeface="Arial" panose="020B0604020202020204" pitchFamily="34" charset="0"/>
+                <a:cs typeface="Arial" panose="020B0604020202020204" pitchFamily="34" charset="0"/>
+              </a:rPr>
+              <a:t>analizando</a:t>
+            </a:r>
+            <a:r>
+              <a:rPr lang="en-US" sz="1200" dirty="0">
+                <a:latin typeface="Arial" panose="020B0604020202020204" pitchFamily="34" charset="0"/>
+                <a:cs typeface="Arial" panose="020B0604020202020204" pitchFamily="34" charset="0"/>
+              </a:rPr>
+              <a:t> </a:t>
+            </a:r>
+            <a:r>
+              <a:rPr lang="en-US" sz="1200" dirty="0" err="1">
+                <a:latin typeface="Arial" panose="020B0604020202020204" pitchFamily="34" charset="0"/>
+                <a:cs typeface="Arial" panose="020B0604020202020204" pitchFamily="34" charset="0"/>
+              </a:rPr>
+              <a:t>como</a:t>
+            </a:r>
+            <a:r>
+              <a:rPr lang="en-US" sz="1200" dirty="0">
+                <a:latin typeface="Arial" panose="020B0604020202020204" pitchFamily="34" charset="0"/>
+                <a:cs typeface="Arial" panose="020B0604020202020204" pitchFamily="34" charset="0"/>
+              </a:rPr>
+              <a:t> cambia </a:t>
+            </a:r>
+            <a:r>
+              <a:rPr lang="en-US" sz="1200" dirty="0" err="1">
+                <a:latin typeface="Arial" panose="020B0604020202020204" pitchFamily="34" charset="0"/>
+                <a:cs typeface="Arial" panose="020B0604020202020204" pitchFamily="34" charset="0"/>
+              </a:rPr>
+              <a:t>el</a:t>
+            </a:r>
+            <a:r>
+              <a:rPr lang="en-US" sz="1200" dirty="0">
+                <a:latin typeface="Arial" panose="020B0604020202020204" pitchFamily="34" charset="0"/>
+                <a:cs typeface="Arial" panose="020B0604020202020204" pitchFamily="34" charset="0"/>
+              </a:rPr>
+              <a:t> </a:t>
+            </a:r>
+            <a:r>
+              <a:rPr lang="en-US" sz="1200" dirty="0" err="1">
+                <a:latin typeface="Arial" panose="020B0604020202020204" pitchFamily="34" charset="0"/>
+                <a:cs typeface="Arial" panose="020B0604020202020204" pitchFamily="34" charset="0"/>
+              </a:rPr>
+              <a:t>índice</a:t>
+            </a:r>
+            <a:r>
+              <a:rPr lang="en-US" sz="1200" dirty="0">
+                <a:latin typeface="Arial" panose="020B0604020202020204" pitchFamily="34" charset="0"/>
+                <a:cs typeface="Arial" panose="020B0604020202020204" pitchFamily="34" charset="0"/>
+              </a:rPr>
+              <a:t> </a:t>
+            </a:r>
+            <a:r>
+              <a:rPr lang="en-US" sz="1200" dirty="0" err="1">
+                <a:latin typeface="Arial" panose="020B0604020202020204" pitchFamily="34" charset="0"/>
+                <a:cs typeface="Arial" panose="020B0604020202020204" pitchFamily="34" charset="0"/>
+              </a:rPr>
+              <a:t>efectivo</a:t>
+            </a:r>
+            <a:r>
+              <a:rPr lang="en-US" sz="1200" dirty="0">
+                <a:latin typeface="Arial" panose="020B0604020202020204" pitchFamily="34" charset="0"/>
+                <a:cs typeface="Arial" panose="020B0604020202020204" pitchFamily="34" charset="0"/>
+              </a:rPr>
+              <a:t> </a:t>
+            </a:r>
+            <a:r>
+              <a:rPr lang="en-US" sz="1200" dirty="0" err="1">
+                <a:latin typeface="Arial" panose="020B0604020202020204" pitchFamily="34" charset="0"/>
+                <a:cs typeface="Arial" panose="020B0604020202020204" pitchFamily="34" charset="0"/>
+              </a:rPr>
+              <a:t>en</a:t>
+            </a:r>
+            <a:r>
+              <a:rPr lang="en-US" sz="1200" dirty="0">
+                <a:latin typeface="Arial" panose="020B0604020202020204" pitchFamily="34" charset="0"/>
+                <a:cs typeface="Arial" panose="020B0604020202020204" pitchFamily="34" charset="0"/>
+              </a:rPr>
+              <a:t> </a:t>
+            </a:r>
+            <a:r>
+              <a:rPr lang="en-US" sz="1200" dirty="0" err="1">
+                <a:latin typeface="Arial" panose="020B0604020202020204" pitchFamily="34" charset="0"/>
+                <a:cs typeface="Arial" panose="020B0604020202020204" pitchFamily="34" charset="0"/>
+              </a:rPr>
+              <a:t>función</a:t>
+            </a:r>
+            <a:r>
+              <a:rPr lang="en-US" sz="1200" dirty="0">
+                <a:latin typeface="Arial" panose="020B0604020202020204" pitchFamily="34" charset="0"/>
+                <a:cs typeface="Arial" panose="020B0604020202020204" pitchFamily="34" charset="0"/>
+              </a:rPr>
+              <a:t> de la longitude de </a:t>
+            </a:r>
+            <a:r>
+              <a:rPr lang="en-US" sz="1200" dirty="0" err="1">
+                <a:latin typeface="Arial" panose="020B0604020202020204" pitchFamily="34" charset="0"/>
+                <a:cs typeface="Arial" panose="020B0604020202020204" pitchFamily="34" charset="0"/>
+              </a:rPr>
+              <a:t>onda</a:t>
+            </a:r>
+            <a:r>
+              <a:rPr lang="en-US" sz="1200" dirty="0">
+                <a:latin typeface="Arial" panose="020B0604020202020204" pitchFamily="34" charset="0"/>
+                <a:cs typeface="Arial" panose="020B0604020202020204" pitchFamily="34" charset="0"/>
+              </a:rPr>
+              <a:t> de 1.5 um a 1.6 um, </a:t>
+            </a:r>
+            <a:r>
+              <a:rPr lang="en-US" sz="1200" dirty="0" err="1">
+                <a:latin typeface="Arial" panose="020B0604020202020204" pitchFamily="34" charset="0"/>
+                <a:cs typeface="Arial" panose="020B0604020202020204" pitchFamily="34" charset="0"/>
+              </a:rPr>
+              <a:t>aproximando</a:t>
+            </a:r>
+            <a:r>
+              <a:rPr lang="en-US" sz="1200" dirty="0">
+                <a:latin typeface="Arial" panose="020B0604020202020204" pitchFamily="34" charset="0"/>
+                <a:cs typeface="Arial" panose="020B0604020202020204" pitchFamily="34" charset="0"/>
+              </a:rPr>
+              <a:t> </a:t>
+            </a:r>
+            <a:r>
+              <a:rPr lang="en-US" sz="1200" dirty="0" err="1">
+                <a:latin typeface="Arial" panose="020B0604020202020204" pitchFamily="34" charset="0"/>
+                <a:cs typeface="Arial" panose="020B0604020202020204" pitchFamily="34" charset="0"/>
+              </a:rPr>
+              <a:t>el</a:t>
+            </a:r>
+            <a:r>
+              <a:rPr lang="en-US" sz="1200" dirty="0">
+                <a:latin typeface="Arial" panose="020B0604020202020204" pitchFamily="34" charset="0"/>
+                <a:cs typeface="Arial" panose="020B0604020202020204" pitchFamily="34" charset="0"/>
+              </a:rPr>
+              <a:t> </a:t>
+            </a:r>
+            <a:r>
+              <a:rPr lang="en-US" sz="1200" dirty="0" err="1">
+                <a:latin typeface="Arial" panose="020B0604020202020204" pitchFamily="34" charset="0"/>
+                <a:cs typeface="Arial" panose="020B0604020202020204" pitchFamily="34" charset="0"/>
+              </a:rPr>
+              <a:t>índice</a:t>
+            </a:r>
+            <a:r>
+              <a:rPr lang="en-US" sz="1200" dirty="0">
+                <a:latin typeface="Arial" panose="020B0604020202020204" pitchFamily="34" charset="0"/>
+                <a:cs typeface="Arial" panose="020B0604020202020204" pitchFamily="34" charset="0"/>
+              </a:rPr>
+              <a:t> </a:t>
+            </a:r>
+            <a:r>
+              <a:rPr lang="en-US" sz="1200" dirty="0" err="1">
+                <a:latin typeface="Arial" panose="020B0604020202020204" pitchFamily="34" charset="0"/>
+                <a:cs typeface="Arial" panose="020B0604020202020204" pitchFamily="34" charset="0"/>
+              </a:rPr>
+              <a:t>efectivo</a:t>
+            </a:r>
+            <a:r>
+              <a:rPr lang="en-US" sz="1200" dirty="0">
+                <a:latin typeface="Arial" panose="020B0604020202020204" pitchFamily="34" charset="0"/>
+                <a:cs typeface="Arial" panose="020B0604020202020204" pitchFamily="34" charset="0"/>
+              </a:rPr>
+              <a:t> a un </a:t>
+            </a:r>
+            <a:r>
+              <a:rPr lang="en-US" sz="1200" dirty="0" err="1">
+                <a:latin typeface="Arial" panose="020B0604020202020204" pitchFamily="34" charset="0"/>
+                <a:cs typeface="Arial" panose="020B0604020202020204" pitchFamily="34" charset="0"/>
+              </a:rPr>
+              <a:t>polinomio</a:t>
+            </a:r>
+            <a:r>
+              <a:rPr lang="en-US" sz="1200" dirty="0">
+                <a:latin typeface="Arial" panose="020B0604020202020204" pitchFamily="34" charset="0"/>
+                <a:cs typeface="Arial" panose="020B0604020202020204" pitchFamily="34" charset="0"/>
+              </a:rPr>
+              <a:t> de Segundo </a:t>
+            </a:r>
+            <a:r>
+              <a:rPr lang="en-US" sz="1200" dirty="0" err="1">
+                <a:latin typeface="Arial" panose="020B0604020202020204" pitchFamily="34" charset="0"/>
+                <a:cs typeface="Arial" panose="020B0604020202020204" pitchFamily="34" charset="0"/>
+              </a:rPr>
+              <a:t>grado</a:t>
+            </a:r>
+            <a:r>
+              <a:rPr lang="en-US" sz="1200" dirty="0">
+                <a:latin typeface="Arial" panose="020B0604020202020204" pitchFamily="34" charset="0"/>
+                <a:cs typeface="Arial" panose="020B0604020202020204" pitchFamily="34" charset="0"/>
+              </a:rPr>
+              <a:t>. Por un </a:t>
+            </a:r>
+            <a:r>
+              <a:rPr lang="en-US" sz="1200" dirty="0" err="1">
+                <a:latin typeface="Arial" panose="020B0604020202020204" pitchFamily="34" charset="0"/>
+                <a:cs typeface="Arial" panose="020B0604020202020204" pitchFamily="34" charset="0"/>
+              </a:rPr>
+              <a:t>lado</a:t>
+            </a:r>
+            <a:r>
+              <a:rPr lang="en-US" sz="1200" dirty="0">
+                <a:latin typeface="Arial" panose="020B0604020202020204" pitchFamily="34" charset="0"/>
+                <a:cs typeface="Arial" panose="020B0604020202020204" pitchFamily="34" charset="0"/>
+              </a:rPr>
+              <a:t> para una </a:t>
+            </a:r>
+            <a:r>
+              <a:rPr lang="en-US" sz="1200" dirty="0" err="1">
+                <a:latin typeface="Arial" panose="020B0604020202020204" pitchFamily="34" charset="0"/>
+                <a:cs typeface="Arial" panose="020B0604020202020204" pitchFamily="34" charset="0"/>
+              </a:rPr>
+              <a:t>guia</a:t>
+            </a:r>
+            <a:r>
+              <a:rPr lang="en-US" sz="1200" dirty="0">
+                <a:latin typeface="Arial" panose="020B0604020202020204" pitchFamily="34" charset="0"/>
+                <a:cs typeface="Arial" panose="020B0604020202020204" pitchFamily="34" charset="0"/>
+              </a:rPr>
+              <a:t> de </a:t>
+            </a:r>
+            <a:r>
+              <a:rPr lang="en-US" sz="1200" dirty="0" err="1">
+                <a:latin typeface="Arial" panose="020B0604020202020204" pitchFamily="34" charset="0"/>
+                <a:cs typeface="Arial" panose="020B0604020202020204" pitchFamily="34" charset="0"/>
+              </a:rPr>
+              <a:t>onda</a:t>
+            </a:r>
+            <a:r>
+              <a:rPr lang="en-US" sz="1200" dirty="0">
+                <a:latin typeface="Arial" panose="020B0604020202020204" pitchFamily="34" charset="0"/>
+                <a:cs typeface="Arial" panose="020B0604020202020204" pitchFamily="34" charset="0"/>
+              </a:rPr>
+              <a:t> deep y por </a:t>
+            </a:r>
+            <a:r>
+              <a:rPr lang="en-US" sz="1200" dirty="0" err="1">
+                <a:latin typeface="Arial" panose="020B0604020202020204" pitchFamily="34" charset="0"/>
+                <a:cs typeface="Arial" panose="020B0604020202020204" pitchFamily="34" charset="0"/>
+              </a:rPr>
+              <a:t>otro</a:t>
+            </a:r>
+            <a:r>
+              <a:rPr lang="en-US" sz="1200" dirty="0">
+                <a:latin typeface="Arial" panose="020B0604020202020204" pitchFamily="34" charset="0"/>
+                <a:cs typeface="Arial" panose="020B0604020202020204" pitchFamily="34" charset="0"/>
+              </a:rPr>
+              <a:t> para una Shallow.</a:t>
+            </a:r>
+          </a:p>
+          <a:p>
+            <a:pPr algn="just"/>
+            <a:endParaRPr lang="en-US" sz="1200" dirty="0">
+              <a:latin typeface="Arial" panose="020B0604020202020204" pitchFamily="34" charset="0"/>
+              <a:cs typeface="Arial" panose="020B0604020202020204" pitchFamily="34" charset="0"/>
+            </a:endParaRPr>
+          </a:p>
+          <a:p>
+            <a:pPr algn="just"/>
+            <a:r>
+              <a:rPr lang="en-US" sz="1200" dirty="0">
+                <a:latin typeface="Arial" panose="020B0604020202020204" pitchFamily="34" charset="0"/>
+                <a:cs typeface="Arial" panose="020B0604020202020204" pitchFamily="34" charset="0"/>
+              </a:rPr>
+              <a:t>-  </a:t>
+            </a:r>
+            <a:r>
+              <a:rPr lang="en-US" sz="1200" dirty="0" err="1">
+                <a:latin typeface="Arial" panose="020B0604020202020204" pitchFamily="34" charset="0"/>
+                <a:cs typeface="Arial" panose="020B0604020202020204" pitchFamily="34" charset="0"/>
+              </a:rPr>
+              <a:t>En</a:t>
+            </a:r>
+            <a:r>
+              <a:rPr lang="en-US" sz="1200" dirty="0">
+                <a:latin typeface="Arial" panose="020B0604020202020204" pitchFamily="34" charset="0"/>
+                <a:cs typeface="Arial" panose="020B0604020202020204" pitchFamily="34" charset="0"/>
+              </a:rPr>
+              <a:t> ambas </a:t>
+            </a:r>
+            <a:r>
+              <a:rPr lang="en-US" sz="1200" dirty="0" err="1">
+                <a:latin typeface="Arial" panose="020B0604020202020204" pitchFamily="34" charset="0"/>
+                <a:cs typeface="Arial" panose="020B0604020202020204" pitchFamily="34" charset="0"/>
+              </a:rPr>
+              <a:t>gráficas</a:t>
+            </a:r>
+            <a:r>
+              <a:rPr lang="en-US" sz="1200" dirty="0">
+                <a:latin typeface="Arial" panose="020B0604020202020204" pitchFamily="34" charset="0"/>
+                <a:cs typeface="Arial" panose="020B0604020202020204" pitchFamily="34" charset="0"/>
+              </a:rPr>
+              <a:t> </a:t>
+            </a:r>
+            <a:r>
+              <a:rPr lang="en-US" sz="1200" dirty="0" err="1">
+                <a:latin typeface="Arial" panose="020B0604020202020204" pitchFamily="34" charset="0"/>
+                <a:cs typeface="Arial" panose="020B0604020202020204" pitchFamily="34" charset="0"/>
+              </a:rPr>
+              <a:t>el</a:t>
+            </a:r>
+            <a:r>
+              <a:rPr lang="en-US" sz="1200" dirty="0">
+                <a:latin typeface="Arial" panose="020B0604020202020204" pitchFamily="34" charset="0"/>
+                <a:cs typeface="Arial" panose="020B0604020202020204" pitchFamily="34" charset="0"/>
+              </a:rPr>
+              <a:t> modo TE0 </a:t>
+            </a:r>
+            <a:r>
+              <a:rPr lang="en-US" sz="1200" dirty="0" err="1">
+                <a:latin typeface="Arial" panose="020B0604020202020204" pitchFamily="34" charset="0"/>
+                <a:cs typeface="Arial" panose="020B0604020202020204" pitchFamily="34" charset="0"/>
+              </a:rPr>
+              <a:t>tiene</a:t>
+            </a:r>
+            <a:r>
+              <a:rPr lang="en-US" sz="1200" dirty="0">
+                <a:latin typeface="Arial" panose="020B0604020202020204" pitchFamily="34" charset="0"/>
+                <a:cs typeface="Arial" panose="020B0604020202020204" pitchFamily="34" charset="0"/>
+              </a:rPr>
+              <a:t> un </a:t>
+            </a:r>
+            <a:r>
+              <a:rPr lang="en-US" sz="1200" dirty="0" err="1">
+                <a:latin typeface="Arial" panose="020B0604020202020204" pitchFamily="34" charset="0"/>
+                <a:cs typeface="Arial" panose="020B0604020202020204" pitchFamily="34" charset="0"/>
+              </a:rPr>
+              <a:t>neff</a:t>
+            </a:r>
+            <a:r>
+              <a:rPr lang="en-US" sz="1200" dirty="0">
+                <a:latin typeface="Arial" panose="020B0604020202020204" pitchFamily="34" charset="0"/>
+                <a:cs typeface="Arial" panose="020B0604020202020204" pitchFamily="34" charset="0"/>
+              </a:rPr>
+              <a:t> </a:t>
+            </a:r>
+            <a:r>
+              <a:rPr lang="en-US" sz="1200" dirty="0" err="1">
+                <a:latin typeface="Arial" panose="020B0604020202020204" pitchFamily="34" charset="0"/>
+                <a:cs typeface="Arial" panose="020B0604020202020204" pitchFamily="34" charset="0"/>
+              </a:rPr>
+              <a:t>mucho</a:t>
+            </a:r>
+            <a:r>
+              <a:rPr lang="en-US" sz="1200" dirty="0">
+                <a:latin typeface="Arial" panose="020B0604020202020204" pitchFamily="34" charset="0"/>
+                <a:cs typeface="Arial" panose="020B0604020202020204" pitchFamily="34" charset="0"/>
+              </a:rPr>
+              <a:t> mayor ( entre 1.6-1.63) que </a:t>
+            </a:r>
+            <a:r>
+              <a:rPr lang="en-US" sz="1200" dirty="0" err="1">
+                <a:latin typeface="Arial" panose="020B0604020202020204" pitchFamily="34" charset="0"/>
+                <a:cs typeface="Arial" panose="020B0604020202020204" pitchFamily="34" charset="0"/>
+              </a:rPr>
+              <a:t>el</a:t>
+            </a:r>
+            <a:r>
+              <a:rPr lang="en-US" sz="1200" dirty="0">
+                <a:latin typeface="Arial" panose="020B0604020202020204" pitchFamily="34" charset="0"/>
+                <a:cs typeface="Arial" panose="020B0604020202020204" pitchFamily="34" charset="0"/>
+              </a:rPr>
+              <a:t> TM0 (1.52-1.54), lo que es </a:t>
+            </a:r>
+            <a:r>
+              <a:rPr lang="en-US" sz="1200" dirty="0" err="1">
+                <a:latin typeface="Arial" panose="020B0604020202020204" pitchFamily="34" charset="0"/>
+                <a:cs typeface="Arial" panose="020B0604020202020204" pitchFamily="34" charset="0"/>
+              </a:rPr>
+              <a:t>coherente</a:t>
+            </a:r>
+            <a:r>
+              <a:rPr lang="en-US" sz="1200" dirty="0">
+                <a:latin typeface="Arial" panose="020B0604020202020204" pitchFamily="34" charset="0"/>
+                <a:cs typeface="Arial" panose="020B0604020202020204" pitchFamily="34" charset="0"/>
+              </a:rPr>
+              <a:t> </a:t>
+            </a:r>
+            <a:r>
+              <a:rPr lang="en-US" sz="1200" dirty="0" err="1">
+                <a:latin typeface="Arial" panose="020B0604020202020204" pitchFamily="34" charset="0"/>
+                <a:cs typeface="Arial" panose="020B0604020202020204" pitchFamily="34" charset="0"/>
+              </a:rPr>
+              <a:t>pues</a:t>
+            </a:r>
+            <a:r>
+              <a:rPr lang="en-US" sz="1200" dirty="0">
+                <a:latin typeface="Arial" panose="020B0604020202020204" pitchFamily="34" charset="0"/>
+                <a:cs typeface="Arial" panose="020B0604020202020204" pitchFamily="34" charset="0"/>
+              </a:rPr>
+              <a:t> los </a:t>
+            </a:r>
+            <a:r>
+              <a:rPr lang="en-US" sz="1200" dirty="0" err="1">
+                <a:latin typeface="Arial" panose="020B0604020202020204" pitchFamily="34" charset="0"/>
+                <a:cs typeface="Arial" panose="020B0604020202020204" pitchFamily="34" charset="0"/>
+              </a:rPr>
+              <a:t>modos</a:t>
+            </a:r>
+            <a:r>
+              <a:rPr lang="en-US" sz="1200" dirty="0">
+                <a:latin typeface="Arial" panose="020B0604020202020204" pitchFamily="34" charset="0"/>
+                <a:cs typeface="Arial" panose="020B0604020202020204" pitchFamily="34" charset="0"/>
+              </a:rPr>
+              <a:t> </a:t>
+            </a:r>
+            <a:r>
+              <a:rPr lang="en-US" sz="1200" dirty="0" err="1">
+                <a:latin typeface="Arial" panose="020B0604020202020204" pitchFamily="34" charset="0"/>
+                <a:cs typeface="Arial" panose="020B0604020202020204" pitchFamily="34" charset="0"/>
+              </a:rPr>
+              <a:t>eléctricos</a:t>
+            </a:r>
+            <a:r>
+              <a:rPr lang="en-US" sz="1200" dirty="0">
+                <a:latin typeface="Arial" panose="020B0604020202020204" pitchFamily="34" charset="0"/>
+                <a:cs typeface="Arial" panose="020B0604020202020204" pitchFamily="34" charset="0"/>
+              </a:rPr>
+              <a:t> </a:t>
+            </a:r>
+            <a:r>
+              <a:rPr lang="en-US" sz="1200" dirty="0" err="1">
+                <a:latin typeface="Arial" panose="020B0604020202020204" pitchFamily="34" charset="0"/>
+                <a:cs typeface="Arial" panose="020B0604020202020204" pitchFamily="34" charset="0"/>
+              </a:rPr>
+              <a:t>suelen</a:t>
+            </a:r>
+            <a:r>
+              <a:rPr lang="en-US" sz="1200" dirty="0">
+                <a:latin typeface="Arial" panose="020B0604020202020204" pitchFamily="34" charset="0"/>
+                <a:cs typeface="Arial" panose="020B0604020202020204" pitchFamily="34" charset="0"/>
+              </a:rPr>
+              <a:t> </a:t>
+            </a:r>
+            <a:r>
+              <a:rPr lang="en-US" sz="1200" dirty="0" err="1">
+                <a:latin typeface="Arial" panose="020B0604020202020204" pitchFamily="34" charset="0"/>
+                <a:cs typeface="Arial" panose="020B0604020202020204" pitchFamily="34" charset="0"/>
+              </a:rPr>
+              <a:t>estar</a:t>
+            </a:r>
+            <a:r>
+              <a:rPr lang="en-US" sz="1200" dirty="0">
+                <a:latin typeface="Arial" panose="020B0604020202020204" pitchFamily="34" charset="0"/>
+                <a:cs typeface="Arial" panose="020B0604020202020204" pitchFamily="34" charset="0"/>
+              </a:rPr>
+              <a:t> </a:t>
+            </a:r>
+            <a:r>
+              <a:rPr lang="en-US" sz="1200" dirty="0" err="1">
+                <a:latin typeface="Arial" panose="020B0604020202020204" pitchFamily="34" charset="0"/>
+                <a:cs typeface="Arial" panose="020B0604020202020204" pitchFamily="34" charset="0"/>
+              </a:rPr>
+              <a:t>más</a:t>
+            </a:r>
+            <a:r>
+              <a:rPr lang="en-US" sz="1200" dirty="0">
+                <a:latin typeface="Arial" panose="020B0604020202020204" pitchFamily="34" charset="0"/>
+                <a:cs typeface="Arial" panose="020B0604020202020204" pitchFamily="34" charset="0"/>
+              </a:rPr>
+              <a:t> </a:t>
+            </a:r>
+            <a:r>
+              <a:rPr lang="en-US" sz="1200" dirty="0" err="1">
+                <a:latin typeface="Arial" panose="020B0604020202020204" pitchFamily="34" charset="0"/>
+                <a:cs typeface="Arial" panose="020B0604020202020204" pitchFamily="34" charset="0"/>
+              </a:rPr>
+              <a:t>confinados</a:t>
+            </a:r>
+            <a:r>
+              <a:rPr lang="en-US" sz="1200" dirty="0">
+                <a:latin typeface="Arial" panose="020B0604020202020204" pitchFamily="34" charset="0"/>
+                <a:cs typeface="Arial" panose="020B0604020202020204" pitchFamily="34" charset="0"/>
+              </a:rPr>
+              <a:t> </a:t>
+            </a:r>
+            <a:r>
+              <a:rPr lang="en-US" sz="1200" dirty="0" err="1">
+                <a:latin typeface="Arial" panose="020B0604020202020204" pitchFamily="34" charset="0"/>
+                <a:cs typeface="Arial" panose="020B0604020202020204" pitchFamily="34" charset="0"/>
+              </a:rPr>
+              <a:t>en</a:t>
+            </a:r>
+            <a:r>
+              <a:rPr lang="en-US" sz="1200" dirty="0">
+                <a:latin typeface="Arial" panose="020B0604020202020204" pitchFamily="34" charset="0"/>
+                <a:cs typeface="Arial" panose="020B0604020202020204" pitchFamily="34" charset="0"/>
+              </a:rPr>
+              <a:t> </a:t>
+            </a:r>
+            <a:r>
+              <a:rPr lang="en-US" sz="1200" dirty="0" err="1">
+                <a:latin typeface="Arial" panose="020B0604020202020204" pitchFamily="34" charset="0"/>
+                <a:cs typeface="Arial" panose="020B0604020202020204" pitchFamily="34" charset="0"/>
+              </a:rPr>
+              <a:t>el</a:t>
+            </a:r>
+            <a:r>
+              <a:rPr lang="en-US" sz="1200" dirty="0">
+                <a:latin typeface="Arial" panose="020B0604020202020204" pitchFamily="34" charset="0"/>
+                <a:cs typeface="Arial" panose="020B0604020202020204" pitchFamily="34" charset="0"/>
+              </a:rPr>
+              <a:t> </a:t>
+            </a:r>
+            <a:r>
+              <a:rPr lang="en-US" sz="1200" dirty="0" err="1">
+                <a:latin typeface="Arial" panose="020B0604020202020204" pitchFamily="34" charset="0"/>
+                <a:cs typeface="Arial" panose="020B0604020202020204" pitchFamily="34" charset="0"/>
+              </a:rPr>
+              <a:t>núcleo</a:t>
+            </a:r>
+            <a:r>
+              <a:rPr lang="en-US" sz="1200" dirty="0">
+                <a:latin typeface="Arial" panose="020B0604020202020204" pitchFamily="34" charset="0"/>
+                <a:cs typeface="Arial" panose="020B0604020202020204" pitchFamily="34" charset="0"/>
+              </a:rPr>
+              <a:t>.</a:t>
+            </a:r>
+          </a:p>
+          <a:p>
+            <a:pPr marL="171450" indent="-171450" algn="just">
+              <a:buFontTx/>
+              <a:buChar char="-"/>
+            </a:pPr>
+            <a:r>
+              <a:rPr lang="en-US" sz="1200" dirty="0" err="1">
+                <a:latin typeface="Arial" panose="020B0604020202020204" pitchFamily="34" charset="0"/>
+                <a:cs typeface="Arial" panose="020B0604020202020204" pitchFamily="34" charset="0"/>
+              </a:rPr>
+              <a:t>Observamos</a:t>
+            </a:r>
+            <a:r>
+              <a:rPr lang="en-US" sz="1200" dirty="0">
+                <a:latin typeface="Arial" panose="020B0604020202020204" pitchFamily="34" charset="0"/>
+                <a:cs typeface="Arial" panose="020B0604020202020204" pitchFamily="34" charset="0"/>
+              </a:rPr>
+              <a:t> que los puntos de la </a:t>
+            </a:r>
+            <a:r>
+              <a:rPr lang="en-US" sz="1200" dirty="0" err="1">
+                <a:latin typeface="Arial" panose="020B0604020202020204" pitchFamily="34" charset="0"/>
+                <a:cs typeface="Arial" panose="020B0604020202020204" pitchFamily="34" charset="0"/>
+              </a:rPr>
+              <a:t>simulación</a:t>
+            </a:r>
+            <a:r>
+              <a:rPr lang="en-US" sz="1200" dirty="0">
+                <a:latin typeface="Arial" panose="020B0604020202020204" pitchFamily="34" charset="0"/>
+                <a:cs typeface="Arial" panose="020B0604020202020204" pitchFamily="34" charset="0"/>
+              </a:rPr>
+              <a:t>, que </a:t>
+            </a:r>
+            <a:r>
+              <a:rPr lang="en-US" sz="1200" dirty="0" err="1">
+                <a:latin typeface="Arial" panose="020B0604020202020204" pitchFamily="34" charset="0"/>
+                <a:cs typeface="Arial" panose="020B0604020202020204" pitchFamily="34" charset="0"/>
+              </a:rPr>
+              <a:t>corresponden</a:t>
+            </a:r>
+            <a:r>
+              <a:rPr lang="en-US" sz="1200" dirty="0">
+                <a:latin typeface="Arial" panose="020B0604020202020204" pitchFamily="34" charset="0"/>
+                <a:cs typeface="Arial" panose="020B0604020202020204" pitchFamily="34" charset="0"/>
+              </a:rPr>
+              <a:t> con las cruces, </a:t>
+            </a:r>
+            <a:r>
+              <a:rPr lang="en-US" sz="1200" dirty="0" err="1">
+                <a:latin typeface="Arial" panose="020B0604020202020204" pitchFamily="34" charset="0"/>
+                <a:cs typeface="Arial" panose="020B0604020202020204" pitchFamily="34" charset="0"/>
+              </a:rPr>
+              <a:t>coinciden</a:t>
+            </a:r>
+            <a:r>
+              <a:rPr lang="en-US" sz="1200" dirty="0">
+                <a:latin typeface="Arial" panose="020B0604020202020204" pitchFamily="34" charset="0"/>
+                <a:cs typeface="Arial" panose="020B0604020202020204" pitchFamily="34" charset="0"/>
+              </a:rPr>
+              <a:t> </a:t>
+            </a:r>
+            <a:r>
+              <a:rPr lang="en-US" sz="1200" dirty="0" err="1">
+                <a:latin typeface="Arial" panose="020B0604020202020204" pitchFamily="34" charset="0"/>
+                <a:cs typeface="Arial" panose="020B0604020202020204" pitchFamily="34" charset="0"/>
+              </a:rPr>
+              <a:t>perfectamente</a:t>
+            </a:r>
+            <a:r>
+              <a:rPr lang="en-US" sz="1200" dirty="0">
+                <a:latin typeface="Arial" panose="020B0604020202020204" pitchFamily="34" charset="0"/>
+                <a:cs typeface="Arial" panose="020B0604020202020204" pitchFamily="34" charset="0"/>
+              </a:rPr>
+              <a:t> con las </a:t>
+            </a:r>
+            <a:r>
+              <a:rPr lang="en-US" sz="1200" dirty="0" err="1">
+                <a:latin typeface="Arial" panose="020B0604020202020204" pitchFamily="34" charset="0"/>
+                <a:cs typeface="Arial" panose="020B0604020202020204" pitchFamily="34" charset="0"/>
+              </a:rPr>
+              <a:t>líneas</a:t>
+            </a:r>
+            <a:r>
+              <a:rPr lang="en-US" sz="1200" dirty="0">
+                <a:latin typeface="Arial" panose="020B0604020202020204" pitchFamily="34" charset="0"/>
+                <a:cs typeface="Arial" panose="020B0604020202020204" pitchFamily="34" charset="0"/>
+              </a:rPr>
+              <a:t> del </a:t>
+            </a:r>
+            <a:r>
+              <a:rPr lang="en-US" sz="1200" dirty="0" err="1">
+                <a:latin typeface="Arial" panose="020B0604020202020204" pitchFamily="34" charset="0"/>
+                <a:cs typeface="Arial" panose="020B0604020202020204" pitchFamily="34" charset="0"/>
+              </a:rPr>
+              <a:t>ajuste</a:t>
+            </a:r>
+            <a:r>
+              <a:rPr lang="en-US" sz="1200" dirty="0">
+                <a:latin typeface="Arial" panose="020B0604020202020204" pitchFamily="34" charset="0"/>
+                <a:cs typeface="Arial" panose="020B0604020202020204" pitchFamily="34" charset="0"/>
+              </a:rPr>
+              <a:t> </a:t>
+            </a:r>
+            <a:r>
+              <a:rPr lang="en-US" sz="1200" dirty="0" err="1">
+                <a:latin typeface="Arial" panose="020B0604020202020204" pitchFamily="34" charset="0"/>
+                <a:cs typeface="Arial" panose="020B0604020202020204" pitchFamily="34" charset="0"/>
+              </a:rPr>
+              <a:t>polinómico</a:t>
+            </a:r>
+            <a:r>
+              <a:rPr lang="en-US" sz="1200" dirty="0">
+                <a:latin typeface="Arial" panose="020B0604020202020204" pitchFamily="34" charset="0"/>
+                <a:cs typeface="Arial" panose="020B0604020202020204" pitchFamily="34" charset="0"/>
+              </a:rPr>
+              <a:t>.</a:t>
+            </a:r>
+          </a:p>
+          <a:p>
+            <a:pPr marL="171450" indent="-171450" algn="just">
+              <a:buFontTx/>
+              <a:buChar char="-"/>
+            </a:pPr>
+            <a:r>
+              <a:rPr lang="en-US" sz="1200" dirty="0" err="1">
+                <a:latin typeface="Arial" panose="020B0604020202020204" pitchFamily="34" charset="0"/>
+                <a:cs typeface="Arial" panose="020B0604020202020204" pitchFamily="34" charset="0"/>
+              </a:rPr>
+              <a:t>Conforme</a:t>
+            </a:r>
+            <a:r>
+              <a:rPr lang="en-US" sz="1200" dirty="0">
+                <a:latin typeface="Arial" panose="020B0604020202020204" pitchFamily="34" charset="0"/>
+                <a:cs typeface="Arial" panose="020B0604020202020204" pitchFamily="34" charset="0"/>
+              </a:rPr>
+              <a:t> </a:t>
+            </a:r>
+            <a:r>
+              <a:rPr lang="en-US" sz="1200" dirty="0" err="1">
+                <a:latin typeface="Arial" panose="020B0604020202020204" pitchFamily="34" charset="0"/>
+                <a:cs typeface="Arial" panose="020B0604020202020204" pitchFamily="34" charset="0"/>
+              </a:rPr>
+              <a:t>abanzamos</a:t>
+            </a:r>
+            <a:r>
+              <a:rPr lang="en-US" sz="1200" dirty="0">
+                <a:latin typeface="Arial" panose="020B0604020202020204" pitchFamily="34" charset="0"/>
+                <a:cs typeface="Arial" panose="020B0604020202020204" pitchFamily="34" charset="0"/>
+              </a:rPr>
+              <a:t> </a:t>
+            </a:r>
+            <a:r>
+              <a:rPr lang="en-US" sz="1200" dirty="0" err="1">
+                <a:latin typeface="Arial" panose="020B0604020202020204" pitchFamily="34" charset="0"/>
+                <a:cs typeface="Arial" panose="020B0604020202020204" pitchFamily="34" charset="0"/>
+              </a:rPr>
+              <a:t>en</a:t>
+            </a:r>
+            <a:r>
+              <a:rPr lang="en-US" sz="1200" dirty="0">
+                <a:latin typeface="Arial" panose="020B0604020202020204" pitchFamily="34" charset="0"/>
+                <a:cs typeface="Arial" panose="020B0604020202020204" pitchFamily="34" charset="0"/>
+              </a:rPr>
+              <a:t> longitude de </a:t>
+            </a:r>
+            <a:r>
+              <a:rPr lang="en-US" sz="1200" dirty="0" err="1">
+                <a:latin typeface="Arial" panose="020B0604020202020204" pitchFamily="34" charset="0"/>
+                <a:cs typeface="Arial" panose="020B0604020202020204" pitchFamily="34" charset="0"/>
+              </a:rPr>
+              <a:t>onda</a:t>
+            </a:r>
+            <a:r>
+              <a:rPr lang="en-US" sz="1200" dirty="0">
+                <a:latin typeface="Arial" panose="020B0604020202020204" pitchFamily="34" charset="0"/>
+                <a:cs typeface="Arial" panose="020B0604020202020204" pitchFamily="34" charset="0"/>
+              </a:rPr>
+              <a:t> </a:t>
+            </a:r>
+            <a:r>
+              <a:rPr lang="en-US" sz="1200" dirty="0" err="1">
+                <a:latin typeface="Arial" panose="020B0604020202020204" pitchFamily="34" charset="0"/>
+                <a:cs typeface="Arial" panose="020B0604020202020204" pitchFamily="34" charset="0"/>
+              </a:rPr>
+              <a:t>el</a:t>
+            </a:r>
+            <a:r>
+              <a:rPr lang="en-US" sz="1200" dirty="0">
+                <a:latin typeface="Arial" panose="020B0604020202020204" pitchFamily="34" charset="0"/>
+                <a:cs typeface="Arial" panose="020B0604020202020204" pitchFamily="34" charset="0"/>
+              </a:rPr>
+              <a:t> </a:t>
+            </a:r>
+            <a:r>
+              <a:rPr lang="en-US" sz="1200" dirty="0" err="1">
+                <a:latin typeface="Arial" panose="020B0604020202020204" pitchFamily="34" charset="0"/>
+                <a:cs typeface="Arial" panose="020B0604020202020204" pitchFamily="34" charset="0"/>
+              </a:rPr>
+              <a:t>índice</a:t>
+            </a:r>
+            <a:r>
+              <a:rPr lang="en-US" sz="1200" dirty="0">
+                <a:latin typeface="Arial" panose="020B0604020202020204" pitchFamily="34" charset="0"/>
+                <a:cs typeface="Arial" panose="020B0604020202020204" pitchFamily="34" charset="0"/>
+              </a:rPr>
+              <a:t> </a:t>
+            </a:r>
+            <a:r>
+              <a:rPr lang="en-US" sz="1200" dirty="0" err="1">
+                <a:latin typeface="Arial" panose="020B0604020202020204" pitchFamily="34" charset="0"/>
+                <a:cs typeface="Arial" panose="020B0604020202020204" pitchFamily="34" charset="0"/>
+              </a:rPr>
+              <a:t>efectivo</a:t>
+            </a:r>
+            <a:r>
+              <a:rPr lang="en-US" sz="1200" dirty="0">
+                <a:latin typeface="Arial" panose="020B0604020202020204" pitchFamily="34" charset="0"/>
+                <a:cs typeface="Arial" panose="020B0604020202020204" pitchFamily="34" charset="0"/>
+              </a:rPr>
+              <a:t> </a:t>
+            </a:r>
+            <a:r>
+              <a:rPr lang="en-US" sz="1200" dirty="0" err="1">
+                <a:latin typeface="Arial" panose="020B0604020202020204" pitchFamily="34" charset="0"/>
+                <a:cs typeface="Arial" panose="020B0604020202020204" pitchFamily="34" charset="0"/>
+              </a:rPr>
+              <a:t>va</a:t>
+            </a:r>
+            <a:r>
+              <a:rPr lang="en-US" sz="1200" dirty="0">
+                <a:latin typeface="Arial" panose="020B0604020202020204" pitchFamily="34" charset="0"/>
+                <a:cs typeface="Arial" panose="020B0604020202020204" pitchFamily="34" charset="0"/>
+              </a:rPr>
+              <a:t> </a:t>
+            </a:r>
+            <a:r>
+              <a:rPr lang="en-US" sz="1200" dirty="0" err="1">
+                <a:latin typeface="Arial" panose="020B0604020202020204" pitchFamily="34" charset="0"/>
+                <a:cs typeface="Arial" panose="020B0604020202020204" pitchFamily="34" charset="0"/>
+              </a:rPr>
+              <a:t>disminuyendo</a:t>
+            </a:r>
+            <a:r>
+              <a:rPr lang="en-US" sz="1200" dirty="0">
+                <a:latin typeface="Arial" panose="020B0604020202020204" pitchFamily="34" charset="0"/>
+                <a:cs typeface="Arial" panose="020B0604020202020204" pitchFamily="34" charset="0"/>
+              </a:rPr>
+              <a:t>, lo que </a:t>
+            </a:r>
+            <a:r>
+              <a:rPr lang="en-US" sz="1200" dirty="0" err="1">
+                <a:latin typeface="Arial" panose="020B0604020202020204" pitchFamily="34" charset="0"/>
+                <a:cs typeface="Arial" panose="020B0604020202020204" pitchFamily="34" charset="0"/>
+              </a:rPr>
+              <a:t>corresponde</a:t>
+            </a:r>
+            <a:r>
+              <a:rPr lang="en-US" sz="1200" dirty="0">
+                <a:latin typeface="Arial" panose="020B0604020202020204" pitchFamily="34" charset="0"/>
+                <a:cs typeface="Arial" panose="020B0604020202020204" pitchFamily="34" charset="0"/>
+              </a:rPr>
+              <a:t> con una </a:t>
+            </a:r>
+            <a:r>
+              <a:rPr lang="en-US" sz="1200" dirty="0" err="1">
+                <a:latin typeface="Arial" panose="020B0604020202020204" pitchFamily="34" charset="0"/>
+                <a:cs typeface="Arial" panose="020B0604020202020204" pitchFamily="34" charset="0"/>
+              </a:rPr>
+              <a:t>pendiente</a:t>
+            </a:r>
+            <a:r>
+              <a:rPr lang="en-US" sz="1200" dirty="0">
+                <a:latin typeface="Arial" panose="020B0604020202020204" pitchFamily="34" charset="0"/>
+                <a:cs typeface="Arial" panose="020B0604020202020204" pitchFamily="34" charset="0"/>
+              </a:rPr>
+              <a:t> negative, n2 que me </a:t>
+            </a:r>
+            <a:r>
+              <a:rPr lang="en-US" sz="1200" dirty="0" err="1">
+                <a:latin typeface="Arial" panose="020B0604020202020204" pitchFamily="34" charset="0"/>
+                <a:cs typeface="Arial" panose="020B0604020202020204" pitchFamily="34" charset="0"/>
+              </a:rPr>
+              <a:t>influirá</a:t>
+            </a:r>
+            <a:r>
+              <a:rPr lang="en-US" sz="1200" dirty="0">
+                <a:latin typeface="Arial" panose="020B0604020202020204" pitchFamily="34" charset="0"/>
+                <a:cs typeface="Arial" panose="020B0604020202020204" pitchFamily="34" charset="0"/>
+              </a:rPr>
+              <a:t> </a:t>
+            </a:r>
+            <a:r>
+              <a:rPr lang="en-US" sz="1200" dirty="0" err="1">
+                <a:latin typeface="Arial" panose="020B0604020202020204" pitchFamily="34" charset="0"/>
+                <a:cs typeface="Arial" panose="020B0604020202020204" pitchFamily="34" charset="0"/>
+              </a:rPr>
+              <a:t>en</a:t>
+            </a:r>
+            <a:r>
+              <a:rPr lang="en-US" sz="1200" dirty="0">
+                <a:latin typeface="Arial" panose="020B0604020202020204" pitchFamily="34" charset="0"/>
+                <a:cs typeface="Arial" panose="020B0604020202020204" pitchFamily="34" charset="0"/>
+              </a:rPr>
+              <a:t> </a:t>
+            </a:r>
+            <a:r>
+              <a:rPr lang="en-US" sz="1200" dirty="0" err="1">
+                <a:latin typeface="Arial" panose="020B0604020202020204" pitchFamily="34" charset="0"/>
+                <a:cs typeface="Arial" panose="020B0604020202020204" pitchFamily="34" charset="0"/>
+              </a:rPr>
+              <a:t>el</a:t>
+            </a:r>
+            <a:r>
+              <a:rPr lang="en-US" sz="1200" dirty="0">
+                <a:latin typeface="Arial" panose="020B0604020202020204" pitchFamily="34" charset="0"/>
+                <a:cs typeface="Arial" panose="020B0604020202020204" pitchFamily="34" charset="0"/>
+              </a:rPr>
+              <a:t> </a:t>
+            </a:r>
+            <a:r>
+              <a:rPr lang="en-US" sz="1200" dirty="0" err="1">
+                <a:latin typeface="Arial" panose="020B0604020202020204" pitchFamily="34" charset="0"/>
+                <a:cs typeface="Arial" panose="020B0604020202020204" pitchFamily="34" charset="0"/>
+              </a:rPr>
+              <a:t>cálculo</a:t>
+            </a:r>
+            <a:r>
+              <a:rPr lang="en-US" sz="1200" dirty="0">
+                <a:latin typeface="Arial" panose="020B0604020202020204" pitchFamily="34" charset="0"/>
+                <a:cs typeface="Arial" panose="020B0604020202020204" pitchFamily="34" charset="0"/>
+              </a:rPr>
+              <a:t> del </a:t>
+            </a:r>
+            <a:r>
+              <a:rPr lang="en-US" sz="1200" dirty="0" err="1">
+                <a:latin typeface="Arial" panose="020B0604020202020204" pitchFamily="34" charset="0"/>
+                <a:cs typeface="Arial" panose="020B0604020202020204" pitchFamily="34" charset="0"/>
+              </a:rPr>
+              <a:t>índice</a:t>
+            </a:r>
+            <a:r>
+              <a:rPr lang="en-US" sz="1200" dirty="0">
+                <a:latin typeface="Arial" panose="020B0604020202020204" pitchFamily="34" charset="0"/>
+                <a:cs typeface="Arial" panose="020B0604020202020204" pitchFamily="34" charset="0"/>
+              </a:rPr>
+              <a:t> de </a:t>
+            </a:r>
+            <a:r>
+              <a:rPr lang="en-US" sz="1200" dirty="0" err="1">
+                <a:latin typeface="Arial" panose="020B0604020202020204" pitchFamily="34" charset="0"/>
+                <a:cs typeface="Arial" panose="020B0604020202020204" pitchFamily="34" charset="0"/>
+              </a:rPr>
+              <a:t>grupo</a:t>
+            </a:r>
+            <a:r>
+              <a:rPr lang="en-US" sz="1200" dirty="0">
+                <a:latin typeface="Arial" panose="020B0604020202020204" pitchFamily="34" charset="0"/>
+                <a:cs typeface="Arial" panose="020B0604020202020204" pitchFamily="34" charset="0"/>
+              </a:rPr>
+              <a:t>.</a:t>
+            </a:r>
+          </a:p>
+          <a:p>
+            <a:pPr algn="just"/>
+            <a:endParaRPr lang="en-US" sz="1200" dirty="0">
+              <a:latin typeface="Arial" panose="020B0604020202020204" pitchFamily="34" charset="0"/>
+              <a:cs typeface="Arial" panose="020B0604020202020204" pitchFamily="34" charset="0"/>
+            </a:endParaRPr>
+          </a:p>
+          <a:p>
+            <a:pPr algn="just"/>
+            <a:r>
+              <a:rPr lang="en-US" sz="1200" dirty="0">
+                <a:latin typeface="Arial" panose="020B0604020202020204" pitchFamily="34" charset="0"/>
+                <a:cs typeface="Arial" panose="020B0604020202020204" pitchFamily="34" charset="0"/>
+              </a:rPr>
+              <a:t>Si </a:t>
+            </a:r>
+            <a:r>
+              <a:rPr lang="en-US" sz="1200" dirty="0" err="1">
+                <a:latin typeface="Arial" panose="020B0604020202020204" pitchFamily="34" charset="0"/>
+                <a:cs typeface="Arial" panose="020B0604020202020204" pitchFamily="34" charset="0"/>
+              </a:rPr>
+              <a:t>comparamos</a:t>
+            </a:r>
+            <a:r>
+              <a:rPr lang="en-US" sz="1200" dirty="0">
+                <a:latin typeface="Arial" panose="020B0604020202020204" pitchFamily="34" charset="0"/>
+                <a:cs typeface="Arial" panose="020B0604020202020204" pitchFamily="34" charset="0"/>
+              </a:rPr>
+              <a:t> ambas </a:t>
+            </a:r>
+            <a:r>
+              <a:rPr lang="en-US" sz="1200" dirty="0" err="1">
+                <a:latin typeface="Arial" panose="020B0604020202020204" pitchFamily="34" charset="0"/>
+                <a:cs typeface="Arial" panose="020B0604020202020204" pitchFamily="34" charset="0"/>
+              </a:rPr>
+              <a:t>gráficas</a:t>
+            </a:r>
+            <a:r>
+              <a:rPr lang="en-US" sz="1200" dirty="0">
+                <a:latin typeface="Arial" panose="020B0604020202020204" pitchFamily="34" charset="0"/>
+                <a:cs typeface="Arial" panose="020B0604020202020204" pitchFamily="34" charset="0"/>
+              </a:rPr>
+              <a:t>, a </a:t>
+            </a:r>
+            <a:r>
+              <a:rPr lang="en-US" sz="1200" dirty="0" err="1">
+                <a:latin typeface="Arial" panose="020B0604020202020204" pitchFamily="34" charset="0"/>
+                <a:cs typeface="Arial" panose="020B0604020202020204" pitchFamily="34" charset="0"/>
+              </a:rPr>
+              <a:t>pesar</a:t>
+            </a:r>
+            <a:r>
+              <a:rPr lang="en-US" sz="1200" dirty="0">
+                <a:latin typeface="Arial" panose="020B0604020202020204" pitchFamily="34" charset="0"/>
+                <a:cs typeface="Arial" panose="020B0604020202020204" pitchFamily="34" charset="0"/>
+              </a:rPr>
+              <a:t> de ser </a:t>
+            </a:r>
+            <a:r>
+              <a:rPr lang="en-US" sz="1200" dirty="0" err="1">
+                <a:latin typeface="Arial" panose="020B0604020202020204" pitchFamily="34" charset="0"/>
+                <a:cs typeface="Arial" panose="020B0604020202020204" pitchFamily="34" charset="0"/>
+              </a:rPr>
+              <a:t>muy</a:t>
+            </a:r>
+            <a:r>
+              <a:rPr lang="en-US" sz="1200" dirty="0">
+                <a:latin typeface="Arial" panose="020B0604020202020204" pitchFamily="34" charset="0"/>
+                <a:cs typeface="Arial" panose="020B0604020202020204" pitchFamily="34" charset="0"/>
+              </a:rPr>
+              <a:t> </a:t>
+            </a:r>
+            <a:r>
+              <a:rPr lang="en-US" sz="1200" dirty="0" err="1">
+                <a:latin typeface="Arial" panose="020B0604020202020204" pitchFamily="34" charset="0"/>
+                <a:cs typeface="Arial" panose="020B0604020202020204" pitchFamily="34" charset="0"/>
+              </a:rPr>
+              <a:t>similares</a:t>
+            </a:r>
+            <a:r>
+              <a:rPr lang="en-US" sz="1200" dirty="0">
+                <a:latin typeface="Arial" panose="020B0604020202020204" pitchFamily="34" charset="0"/>
+                <a:cs typeface="Arial" panose="020B0604020202020204" pitchFamily="34" charset="0"/>
+              </a:rPr>
+              <a:t>, </a:t>
+            </a:r>
+            <a:r>
+              <a:rPr lang="en-US" sz="1200" dirty="0" err="1">
+                <a:latin typeface="Arial" panose="020B0604020202020204" pitchFamily="34" charset="0"/>
+                <a:cs typeface="Arial" panose="020B0604020202020204" pitchFamily="34" charset="0"/>
+              </a:rPr>
+              <a:t>vemos</a:t>
+            </a:r>
+            <a:r>
+              <a:rPr lang="en-US" sz="1200" dirty="0">
+                <a:latin typeface="Arial" panose="020B0604020202020204" pitchFamily="34" charset="0"/>
+                <a:cs typeface="Arial" panose="020B0604020202020204" pitchFamily="34" charset="0"/>
+              </a:rPr>
+              <a:t>  que los </a:t>
+            </a:r>
+            <a:r>
+              <a:rPr lang="en-US" sz="1200" dirty="0" err="1">
+                <a:latin typeface="Arial" panose="020B0604020202020204" pitchFamily="34" charset="0"/>
+                <a:cs typeface="Arial" panose="020B0604020202020204" pitchFamily="34" charset="0"/>
+              </a:rPr>
+              <a:t>valores</a:t>
+            </a:r>
+            <a:r>
+              <a:rPr lang="en-US" sz="1200" dirty="0">
+                <a:latin typeface="Arial" panose="020B0604020202020204" pitchFamily="34" charset="0"/>
+                <a:cs typeface="Arial" panose="020B0604020202020204" pitchFamily="34" charset="0"/>
+              </a:rPr>
+              <a:t> de la </a:t>
+            </a:r>
+            <a:r>
+              <a:rPr lang="en-US" sz="1200" dirty="0" err="1">
+                <a:latin typeface="Arial" panose="020B0604020202020204" pitchFamily="34" charset="0"/>
+                <a:cs typeface="Arial" panose="020B0604020202020204" pitchFamily="34" charset="0"/>
+              </a:rPr>
+              <a:t>guía</a:t>
+            </a:r>
+            <a:r>
+              <a:rPr lang="en-US" sz="1200" dirty="0">
+                <a:latin typeface="Arial" panose="020B0604020202020204" pitchFamily="34" charset="0"/>
+                <a:cs typeface="Arial" panose="020B0604020202020204" pitchFamily="34" charset="0"/>
+              </a:rPr>
+              <a:t> Shallow son un poco </a:t>
+            </a:r>
+            <a:r>
+              <a:rPr lang="en-US" sz="1200" dirty="0" err="1">
+                <a:latin typeface="Arial" panose="020B0604020202020204" pitchFamily="34" charset="0"/>
+                <a:cs typeface="Arial" panose="020B0604020202020204" pitchFamily="34" charset="0"/>
+              </a:rPr>
+              <a:t>más</a:t>
+            </a:r>
+            <a:r>
+              <a:rPr lang="en-US" sz="1200" dirty="0">
+                <a:latin typeface="Arial" panose="020B0604020202020204" pitchFamily="34" charset="0"/>
+                <a:cs typeface="Arial" panose="020B0604020202020204" pitchFamily="34" charset="0"/>
+              </a:rPr>
+              <a:t> altos que la Deep, </a:t>
+            </a:r>
+            <a:r>
+              <a:rPr lang="en-US" sz="1200" dirty="0" err="1">
+                <a:latin typeface="Arial" panose="020B0604020202020204" pitchFamily="34" charset="0"/>
+                <a:cs typeface="Arial" panose="020B0604020202020204" pitchFamily="34" charset="0"/>
+              </a:rPr>
+              <a:t>esto</a:t>
+            </a:r>
+            <a:r>
+              <a:rPr lang="en-US" sz="1200" dirty="0">
+                <a:latin typeface="Arial" panose="020B0604020202020204" pitchFamily="34" charset="0"/>
+                <a:cs typeface="Arial" panose="020B0604020202020204" pitchFamily="34" charset="0"/>
+              </a:rPr>
+              <a:t> se debe a que la </a:t>
+            </a:r>
+            <a:r>
+              <a:rPr lang="en-US" sz="1200" dirty="0" err="1">
+                <a:latin typeface="Arial" panose="020B0604020202020204" pitchFamily="34" charset="0"/>
+                <a:cs typeface="Arial" panose="020B0604020202020204" pitchFamily="34" charset="0"/>
+              </a:rPr>
+              <a:t>estructura</a:t>
+            </a:r>
+            <a:r>
+              <a:rPr lang="en-US" sz="1200" dirty="0">
+                <a:latin typeface="Arial" panose="020B0604020202020204" pitchFamily="34" charset="0"/>
+                <a:cs typeface="Arial" panose="020B0604020202020204" pitchFamily="34" charset="0"/>
+              </a:rPr>
+              <a:t> de la </a:t>
+            </a:r>
+            <a:r>
+              <a:rPr lang="en-US" sz="1200" dirty="0" err="1">
+                <a:latin typeface="Arial" panose="020B0604020202020204" pitchFamily="34" charset="0"/>
+                <a:cs typeface="Arial" panose="020B0604020202020204" pitchFamily="34" charset="0"/>
+              </a:rPr>
+              <a:t>guía</a:t>
+            </a:r>
+            <a:r>
+              <a:rPr lang="en-US" sz="1200" dirty="0">
+                <a:latin typeface="Arial" panose="020B0604020202020204" pitchFamily="34" charset="0"/>
+                <a:cs typeface="Arial" panose="020B0604020202020204" pitchFamily="34" charset="0"/>
+              </a:rPr>
+              <a:t> shallow </a:t>
+            </a:r>
+            <a:r>
+              <a:rPr lang="en-US" sz="1200" dirty="0" err="1">
+                <a:latin typeface="Arial" panose="020B0604020202020204" pitchFamily="34" charset="0"/>
+                <a:cs typeface="Arial" panose="020B0604020202020204" pitchFamily="34" charset="0"/>
+              </a:rPr>
+              <a:t>hace</a:t>
+            </a:r>
+            <a:r>
+              <a:rPr lang="en-US" sz="1200" dirty="0">
+                <a:latin typeface="Arial" panose="020B0604020202020204" pitchFamily="34" charset="0"/>
+                <a:cs typeface="Arial" panose="020B0604020202020204" pitchFamily="34" charset="0"/>
+              </a:rPr>
+              <a:t> que </a:t>
+            </a:r>
+            <a:r>
+              <a:rPr lang="en-US" sz="1200" dirty="0" err="1">
+                <a:latin typeface="Arial" panose="020B0604020202020204" pitchFamily="34" charset="0"/>
+                <a:cs typeface="Arial" panose="020B0604020202020204" pitchFamily="34" charset="0"/>
+              </a:rPr>
+              <a:t>el</a:t>
+            </a:r>
+            <a:r>
+              <a:rPr lang="en-US" sz="1200" dirty="0">
+                <a:latin typeface="Arial" panose="020B0604020202020204" pitchFamily="34" charset="0"/>
+                <a:cs typeface="Arial" panose="020B0604020202020204" pitchFamily="34" charset="0"/>
+              </a:rPr>
+              <a:t> modo </a:t>
+            </a:r>
+            <a:r>
+              <a:rPr lang="en-US" sz="1200" dirty="0" err="1">
+                <a:latin typeface="Arial" panose="020B0604020202020204" pitchFamily="34" charset="0"/>
+                <a:cs typeface="Arial" panose="020B0604020202020204" pitchFamily="34" charset="0"/>
+              </a:rPr>
+              <a:t>esté</a:t>
+            </a:r>
+            <a:r>
+              <a:rPr lang="en-US" sz="1200" dirty="0">
+                <a:latin typeface="Arial" panose="020B0604020202020204" pitchFamily="34" charset="0"/>
+                <a:cs typeface="Arial" panose="020B0604020202020204" pitchFamily="34" charset="0"/>
+              </a:rPr>
+              <a:t> </a:t>
+            </a:r>
+            <a:r>
+              <a:rPr lang="en-US" sz="1200" dirty="0" err="1">
+                <a:latin typeface="Arial" panose="020B0604020202020204" pitchFamily="34" charset="0"/>
+                <a:cs typeface="Arial" panose="020B0604020202020204" pitchFamily="34" charset="0"/>
+              </a:rPr>
+              <a:t>menos</a:t>
+            </a:r>
+            <a:r>
+              <a:rPr lang="en-US" sz="1200" dirty="0">
+                <a:latin typeface="Arial" panose="020B0604020202020204" pitchFamily="34" charset="0"/>
+                <a:cs typeface="Arial" panose="020B0604020202020204" pitchFamily="34" charset="0"/>
+              </a:rPr>
+              <a:t> </a:t>
+            </a:r>
+            <a:r>
+              <a:rPr lang="en-US" sz="1200" dirty="0" err="1">
+                <a:latin typeface="Arial" panose="020B0604020202020204" pitchFamily="34" charset="0"/>
+                <a:cs typeface="Arial" panose="020B0604020202020204" pitchFamily="34" charset="0"/>
+              </a:rPr>
+              <a:t>confinado</a:t>
+            </a:r>
+            <a:r>
+              <a:rPr lang="en-US" sz="1200" dirty="0">
+                <a:latin typeface="Arial" panose="020B0604020202020204" pitchFamily="34" charset="0"/>
+                <a:cs typeface="Arial" panose="020B0604020202020204" pitchFamily="34" charset="0"/>
+              </a:rPr>
+              <a:t> </a:t>
+            </a:r>
+            <a:r>
+              <a:rPr lang="en-US" sz="1200" dirty="0" err="1">
+                <a:latin typeface="Arial" panose="020B0604020202020204" pitchFamily="34" charset="0"/>
+                <a:cs typeface="Arial" panose="020B0604020202020204" pitchFamily="34" charset="0"/>
+              </a:rPr>
+              <a:t>lateralmente</a:t>
+            </a:r>
+            <a:r>
+              <a:rPr lang="en-US" sz="1200" dirty="0">
+                <a:latin typeface="Arial" panose="020B0604020202020204" pitchFamily="34" charset="0"/>
+                <a:cs typeface="Arial" panose="020B0604020202020204" pitchFamily="34" charset="0"/>
+              </a:rPr>
+              <a:t> lo que </a:t>
+            </a:r>
+            <a:r>
+              <a:rPr lang="en-US" sz="1200" dirty="0" err="1">
+                <a:latin typeface="Arial" panose="020B0604020202020204" pitchFamily="34" charset="0"/>
+                <a:cs typeface="Arial" panose="020B0604020202020204" pitchFamily="34" charset="0"/>
+              </a:rPr>
+              <a:t>afecta</a:t>
+            </a:r>
+            <a:r>
+              <a:rPr lang="en-US" sz="1200" dirty="0">
+                <a:latin typeface="Arial" panose="020B0604020202020204" pitchFamily="34" charset="0"/>
+                <a:cs typeface="Arial" panose="020B0604020202020204" pitchFamily="34" charset="0"/>
+              </a:rPr>
+              <a:t> al </a:t>
+            </a:r>
+            <a:r>
+              <a:rPr lang="en-US" sz="1200" dirty="0" err="1">
+                <a:latin typeface="Arial" panose="020B0604020202020204" pitchFamily="34" charset="0"/>
+                <a:cs typeface="Arial" panose="020B0604020202020204" pitchFamily="34" charset="0"/>
+              </a:rPr>
+              <a:t>índice</a:t>
+            </a:r>
+            <a:r>
+              <a:rPr lang="en-US" sz="1200" dirty="0">
+                <a:latin typeface="Arial" panose="020B0604020202020204" pitchFamily="34" charset="0"/>
+                <a:cs typeface="Arial" panose="020B0604020202020204" pitchFamily="34" charset="0"/>
+              </a:rPr>
+              <a:t> </a:t>
+            </a:r>
+            <a:r>
+              <a:rPr lang="en-US" sz="1200" dirty="0" err="1">
+                <a:latin typeface="Arial" panose="020B0604020202020204" pitchFamily="34" charset="0"/>
+                <a:cs typeface="Arial" panose="020B0604020202020204" pitchFamily="34" charset="0"/>
+              </a:rPr>
+              <a:t>efectivo</a:t>
+            </a:r>
+            <a:r>
+              <a:rPr lang="en-US" sz="1200" dirty="0">
+                <a:latin typeface="Arial" panose="020B0604020202020204" pitchFamily="34" charset="0"/>
+                <a:cs typeface="Arial" panose="020B0604020202020204" pitchFamily="34" charset="0"/>
+              </a:rPr>
+              <a:t>.</a:t>
+            </a:r>
+          </a:p>
+          <a:p>
+            <a:pPr algn="just"/>
+            <a:endParaRPr lang="en-US" sz="1200" dirty="0">
+              <a:latin typeface="Arial" panose="020B0604020202020204" pitchFamily="34" charset="0"/>
+              <a:cs typeface="Arial" panose="020B0604020202020204" pitchFamily="34" charset="0"/>
+            </a:endParaRPr>
+          </a:p>
+          <a:p>
+            <a:pPr algn="just"/>
+            <a:r>
+              <a:rPr lang="en-US" sz="1200" dirty="0" err="1">
+                <a:latin typeface="Arial" panose="020B0604020202020204" pitchFamily="34" charset="0"/>
+                <a:cs typeface="Arial" panose="020B0604020202020204" pitchFamily="34" charset="0"/>
+              </a:rPr>
+              <a:t>Observamos</a:t>
+            </a:r>
+            <a:r>
+              <a:rPr lang="en-US" sz="1200" dirty="0">
+                <a:latin typeface="Arial" panose="020B0604020202020204" pitchFamily="34" charset="0"/>
+                <a:cs typeface="Arial" panose="020B0604020202020204" pitchFamily="34" charset="0"/>
+              </a:rPr>
+              <a:t> que </a:t>
+            </a:r>
+            <a:r>
+              <a:rPr lang="en-US" sz="1200" dirty="0" err="1">
+                <a:latin typeface="Arial" panose="020B0604020202020204" pitchFamily="34" charset="0"/>
+                <a:cs typeface="Arial" panose="020B0604020202020204" pitchFamily="34" charset="0"/>
+              </a:rPr>
+              <a:t>el</a:t>
+            </a:r>
+            <a:r>
+              <a:rPr lang="en-US" sz="1200" dirty="0">
+                <a:latin typeface="Arial" panose="020B0604020202020204" pitchFamily="34" charset="0"/>
+                <a:cs typeface="Arial" panose="020B0604020202020204" pitchFamily="34" charset="0"/>
+              </a:rPr>
+              <a:t> </a:t>
+            </a:r>
+            <a:r>
+              <a:rPr lang="en-US" sz="1200" dirty="0" err="1">
+                <a:latin typeface="Arial" panose="020B0604020202020204" pitchFamily="34" charset="0"/>
+                <a:cs typeface="Arial" panose="020B0604020202020204" pitchFamily="34" charset="0"/>
+              </a:rPr>
+              <a:t>índice</a:t>
+            </a:r>
+            <a:r>
+              <a:rPr lang="en-US" sz="1200" dirty="0">
+                <a:latin typeface="Arial" panose="020B0604020202020204" pitchFamily="34" charset="0"/>
+                <a:cs typeface="Arial" panose="020B0604020202020204" pitchFamily="34" charset="0"/>
+              </a:rPr>
+              <a:t> de </a:t>
+            </a:r>
+            <a:r>
+              <a:rPr lang="en-US" sz="1200" dirty="0" err="1">
+                <a:latin typeface="Arial" panose="020B0604020202020204" pitchFamily="34" charset="0"/>
+                <a:cs typeface="Arial" panose="020B0604020202020204" pitchFamily="34" charset="0"/>
+              </a:rPr>
+              <a:t>grupo</a:t>
+            </a:r>
+            <a:r>
+              <a:rPr lang="en-US" sz="1200" dirty="0">
+                <a:latin typeface="Arial" panose="020B0604020202020204" pitchFamily="34" charset="0"/>
+                <a:cs typeface="Arial" panose="020B0604020202020204" pitchFamily="34" charset="0"/>
+              </a:rPr>
+              <a:t> </a:t>
+            </a:r>
+            <a:r>
+              <a:rPr lang="en-US" sz="1200" dirty="0" err="1">
+                <a:latin typeface="Arial" panose="020B0604020202020204" pitchFamily="34" charset="0"/>
+                <a:cs typeface="Arial" panose="020B0604020202020204" pitchFamily="34" charset="0"/>
+              </a:rPr>
+              <a:t>nos</a:t>
+            </a:r>
+            <a:r>
+              <a:rPr lang="en-US" sz="1200" dirty="0">
+                <a:latin typeface="Arial" panose="020B0604020202020204" pitchFamily="34" charset="0"/>
+                <a:cs typeface="Arial" panose="020B0604020202020204" pitchFamily="34" charset="0"/>
+              </a:rPr>
+              <a:t> sale mayor que </a:t>
+            </a:r>
+            <a:r>
+              <a:rPr lang="en-US" sz="1200" dirty="0" err="1">
+                <a:latin typeface="Arial" panose="020B0604020202020204" pitchFamily="34" charset="0"/>
+                <a:cs typeface="Arial" panose="020B0604020202020204" pitchFamily="34" charset="0"/>
+              </a:rPr>
+              <a:t>el</a:t>
+            </a:r>
+            <a:r>
+              <a:rPr lang="en-US" sz="1200" dirty="0">
+                <a:latin typeface="Arial" panose="020B0604020202020204" pitchFamily="34" charset="0"/>
+                <a:cs typeface="Arial" panose="020B0604020202020204" pitchFamily="34" charset="0"/>
+              </a:rPr>
+              <a:t> </a:t>
+            </a:r>
+            <a:r>
+              <a:rPr lang="en-US" sz="1200" dirty="0" err="1">
+                <a:latin typeface="Arial" panose="020B0604020202020204" pitchFamily="34" charset="0"/>
+                <a:cs typeface="Arial" panose="020B0604020202020204" pitchFamily="34" charset="0"/>
+              </a:rPr>
+              <a:t>índice</a:t>
+            </a:r>
+            <a:r>
+              <a:rPr lang="en-US" sz="1200" dirty="0">
+                <a:latin typeface="Arial" panose="020B0604020202020204" pitchFamily="34" charset="0"/>
+                <a:cs typeface="Arial" panose="020B0604020202020204" pitchFamily="34" charset="0"/>
+              </a:rPr>
+              <a:t> </a:t>
+            </a:r>
+            <a:r>
+              <a:rPr lang="en-US" sz="1200" dirty="0" err="1">
+                <a:latin typeface="Arial" panose="020B0604020202020204" pitchFamily="34" charset="0"/>
+                <a:cs typeface="Arial" panose="020B0604020202020204" pitchFamily="34" charset="0"/>
+              </a:rPr>
+              <a:t>efectivo</a:t>
+            </a:r>
+            <a:r>
+              <a:rPr lang="en-US" sz="1200" dirty="0">
+                <a:latin typeface="Arial" panose="020B0604020202020204" pitchFamily="34" charset="0"/>
+                <a:cs typeface="Arial" panose="020B0604020202020204" pitchFamily="34" charset="0"/>
+              </a:rPr>
+              <a:t>, y </a:t>
+            </a:r>
+            <a:r>
+              <a:rPr lang="en-US" sz="1200" dirty="0" err="1">
+                <a:latin typeface="Arial" panose="020B0604020202020204" pitchFamily="34" charset="0"/>
+                <a:cs typeface="Arial" panose="020B0604020202020204" pitchFamily="34" charset="0"/>
+              </a:rPr>
+              <a:t>muy</a:t>
+            </a:r>
+            <a:r>
+              <a:rPr lang="en-US" sz="1200" dirty="0">
+                <a:latin typeface="Arial" panose="020B0604020202020204" pitchFamily="34" charset="0"/>
+                <a:cs typeface="Arial" panose="020B0604020202020204" pitchFamily="34" charset="0"/>
+              </a:rPr>
+              <a:t> </a:t>
+            </a:r>
+            <a:r>
+              <a:rPr lang="en-US" sz="1200" dirty="0" err="1">
+                <a:latin typeface="Arial" panose="020B0604020202020204" pitchFamily="34" charset="0"/>
+                <a:cs typeface="Arial" panose="020B0604020202020204" pitchFamily="34" charset="0"/>
+              </a:rPr>
+              <a:t>similares</a:t>
+            </a:r>
+            <a:r>
+              <a:rPr lang="en-US" sz="1200" dirty="0">
+                <a:latin typeface="Arial" panose="020B0604020202020204" pitchFamily="34" charset="0"/>
+                <a:cs typeface="Arial" panose="020B0604020202020204" pitchFamily="34" charset="0"/>
+              </a:rPr>
+              <a:t> para ambas </a:t>
+            </a:r>
+            <a:r>
+              <a:rPr lang="en-US" sz="1200" dirty="0" err="1">
+                <a:latin typeface="Arial" panose="020B0604020202020204" pitchFamily="34" charset="0"/>
+                <a:cs typeface="Arial" panose="020B0604020202020204" pitchFamily="34" charset="0"/>
+              </a:rPr>
+              <a:t>guías</a:t>
+            </a:r>
+            <a:r>
+              <a:rPr lang="en-US" sz="1200" dirty="0">
+                <a:latin typeface="Arial" panose="020B0604020202020204" pitchFamily="34" charset="0"/>
+                <a:cs typeface="Arial" panose="020B0604020202020204" pitchFamily="34" charset="0"/>
+              </a:rPr>
+              <a:t>, </a:t>
+            </a:r>
+            <a:r>
+              <a:rPr lang="en-US" sz="1200" dirty="0" err="1">
+                <a:latin typeface="Arial" panose="020B0604020202020204" pitchFamily="34" charset="0"/>
+                <a:cs typeface="Arial" panose="020B0604020202020204" pitchFamily="34" charset="0"/>
+              </a:rPr>
+              <a:t>siendo</a:t>
+            </a:r>
+            <a:r>
+              <a:rPr lang="en-US" sz="1200" dirty="0">
+                <a:latin typeface="Arial" panose="020B0604020202020204" pitchFamily="34" charset="0"/>
+                <a:cs typeface="Arial" panose="020B0604020202020204" pitchFamily="34" charset="0"/>
+              </a:rPr>
+              <a:t> </a:t>
+            </a:r>
+            <a:r>
+              <a:rPr lang="en-US" sz="1200" dirty="0" err="1">
+                <a:latin typeface="Arial" panose="020B0604020202020204" pitchFamily="34" charset="0"/>
+                <a:cs typeface="Arial" panose="020B0604020202020204" pitchFamily="34" charset="0"/>
+              </a:rPr>
+              <a:t>inferiores</a:t>
+            </a:r>
+            <a:r>
+              <a:rPr lang="en-US" sz="1200" dirty="0">
+                <a:latin typeface="Arial" panose="020B0604020202020204" pitchFamily="34" charset="0"/>
+                <a:cs typeface="Arial" panose="020B0604020202020204" pitchFamily="34" charset="0"/>
+              </a:rPr>
+              <a:t> para Shallow. </a:t>
+            </a:r>
+            <a:r>
+              <a:rPr lang="en-US" sz="1200" dirty="0" err="1">
+                <a:latin typeface="Arial" panose="020B0604020202020204" pitchFamily="34" charset="0"/>
+                <a:cs typeface="Arial" panose="020B0604020202020204" pitchFamily="34" charset="0"/>
+              </a:rPr>
+              <a:t>Esto</a:t>
+            </a:r>
+            <a:r>
+              <a:rPr lang="en-US" sz="1200" dirty="0">
+                <a:latin typeface="Arial" panose="020B0604020202020204" pitchFamily="34" charset="0"/>
+                <a:cs typeface="Arial" panose="020B0604020202020204" pitchFamily="34" charset="0"/>
+              </a:rPr>
+              <a:t> </a:t>
+            </a:r>
+            <a:r>
+              <a:rPr lang="en-US" sz="1200" dirty="0" err="1">
+                <a:latin typeface="Arial" panose="020B0604020202020204" pitchFamily="34" charset="0"/>
+                <a:cs typeface="Arial" panose="020B0604020202020204" pitchFamily="34" charset="0"/>
+              </a:rPr>
+              <a:t>nos</a:t>
+            </a:r>
+            <a:r>
+              <a:rPr lang="en-US" sz="1200" dirty="0">
+                <a:latin typeface="Arial" panose="020B0604020202020204" pitchFamily="34" charset="0"/>
+                <a:cs typeface="Arial" panose="020B0604020202020204" pitchFamily="34" charset="0"/>
+              </a:rPr>
+              <a:t> indica que la </a:t>
+            </a:r>
+            <a:r>
+              <a:rPr lang="en-US" sz="1200" dirty="0" err="1">
+                <a:latin typeface="Arial" panose="020B0604020202020204" pitchFamily="34" charset="0"/>
+                <a:cs typeface="Arial" panose="020B0604020202020204" pitchFamily="34" charset="0"/>
+              </a:rPr>
+              <a:t>velocidad</a:t>
+            </a:r>
+            <a:r>
+              <a:rPr lang="en-US" sz="1200" dirty="0">
+                <a:latin typeface="Arial" panose="020B0604020202020204" pitchFamily="34" charset="0"/>
+                <a:cs typeface="Arial" panose="020B0604020202020204" pitchFamily="34" charset="0"/>
+              </a:rPr>
+              <a:t> de </a:t>
+            </a:r>
+            <a:r>
+              <a:rPr lang="en-US" sz="1200" dirty="0" err="1">
+                <a:latin typeface="Arial" panose="020B0604020202020204" pitchFamily="34" charset="0"/>
+                <a:cs typeface="Arial" panose="020B0604020202020204" pitchFamily="34" charset="0"/>
+              </a:rPr>
+              <a:t>grupo</a:t>
+            </a:r>
+            <a:r>
+              <a:rPr lang="en-US" sz="1200" dirty="0">
+                <a:latin typeface="Arial" panose="020B0604020202020204" pitchFamily="34" charset="0"/>
+                <a:cs typeface="Arial" panose="020B0604020202020204" pitchFamily="34" charset="0"/>
+              </a:rPr>
+              <a:t> </a:t>
+            </a:r>
+            <a:r>
+              <a:rPr lang="en-US" sz="1200" dirty="0" err="1">
+                <a:latin typeface="Arial" panose="020B0604020202020204" pitchFamily="34" charset="0"/>
+                <a:cs typeface="Arial" panose="020B0604020202020204" pitchFamily="34" charset="0"/>
+              </a:rPr>
+              <a:t>será</a:t>
+            </a:r>
+            <a:r>
+              <a:rPr lang="en-US" sz="1200" dirty="0">
+                <a:latin typeface="Arial" panose="020B0604020202020204" pitchFamily="34" charset="0"/>
+                <a:cs typeface="Arial" panose="020B0604020202020204" pitchFamily="34" charset="0"/>
+              </a:rPr>
+              <a:t> </a:t>
+            </a:r>
+            <a:r>
+              <a:rPr lang="en-US" sz="1200" dirty="0" err="1">
+                <a:latin typeface="Arial" panose="020B0604020202020204" pitchFamily="34" charset="0"/>
+                <a:cs typeface="Arial" panose="020B0604020202020204" pitchFamily="34" charset="0"/>
+              </a:rPr>
+              <a:t>más</a:t>
+            </a:r>
+            <a:r>
+              <a:rPr lang="en-US" sz="1200" dirty="0">
+                <a:latin typeface="Arial" panose="020B0604020202020204" pitchFamily="34" charset="0"/>
+                <a:cs typeface="Arial" panose="020B0604020202020204" pitchFamily="34" charset="0"/>
+              </a:rPr>
+              <a:t> </a:t>
+            </a:r>
+            <a:r>
+              <a:rPr lang="en-US" sz="1200" dirty="0" err="1">
+                <a:latin typeface="Arial" panose="020B0604020202020204" pitchFamily="34" charset="0"/>
+                <a:cs typeface="Arial" panose="020B0604020202020204" pitchFamily="34" charset="0"/>
+              </a:rPr>
+              <a:t>lenta</a:t>
+            </a:r>
+            <a:r>
+              <a:rPr lang="en-US" sz="1200" dirty="0">
+                <a:latin typeface="Arial" panose="020B0604020202020204" pitchFamily="34" charset="0"/>
+                <a:cs typeface="Arial" panose="020B0604020202020204" pitchFamily="34" charset="0"/>
+              </a:rPr>
+              <a:t> que la </a:t>
+            </a:r>
+            <a:r>
+              <a:rPr lang="en-US" sz="1200" dirty="0" err="1">
+                <a:latin typeface="Arial" panose="020B0604020202020204" pitchFamily="34" charset="0"/>
+                <a:cs typeface="Arial" panose="020B0604020202020204" pitchFamily="34" charset="0"/>
+              </a:rPr>
+              <a:t>velocidad</a:t>
+            </a:r>
+            <a:r>
+              <a:rPr lang="en-US" sz="1200" dirty="0">
+                <a:latin typeface="Arial" panose="020B0604020202020204" pitchFamily="34" charset="0"/>
+                <a:cs typeface="Arial" panose="020B0604020202020204" pitchFamily="34" charset="0"/>
+              </a:rPr>
+              <a:t> de </a:t>
+            </a:r>
+            <a:r>
+              <a:rPr lang="en-US" sz="1200" dirty="0" err="1">
+                <a:latin typeface="Arial" panose="020B0604020202020204" pitchFamily="34" charset="0"/>
+                <a:cs typeface="Arial" panose="020B0604020202020204" pitchFamily="34" charset="0"/>
+              </a:rPr>
+              <a:t>fase</a:t>
+            </a:r>
+            <a:r>
+              <a:rPr lang="en-US" sz="1200" dirty="0">
+                <a:latin typeface="Arial" panose="020B0604020202020204" pitchFamily="34" charset="0"/>
+                <a:cs typeface="Arial" panose="020B0604020202020204" pitchFamily="34" charset="0"/>
+              </a:rPr>
+              <a:t>. </a:t>
+            </a:r>
+          </a:p>
+          <a:p>
+            <a:pPr algn="just"/>
+            <a:endParaRPr lang="en-US" sz="1200" dirty="0">
+              <a:latin typeface="Arial" panose="020B0604020202020204" pitchFamily="34" charset="0"/>
+              <a:cs typeface="Arial" panose="020B0604020202020204" pitchFamily="34" charset="0"/>
+            </a:endParaRPr>
+          </a:p>
+          <a:p>
+            <a:pPr algn="just"/>
+            <a:r>
+              <a:rPr lang="en-US" sz="1200" dirty="0" err="1">
+                <a:latin typeface="Arial" panose="020B0604020202020204" pitchFamily="34" charset="0"/>
+                <a:cs typeface="Arial" panose="020B0604020202020204" pitchFamily="34" charset="0"/>
+              </a:rPr>
+              <a:t>Comparando</a:t>
+            </a:r>
+            <a:r>
+              <a:rPr lang="en-US" sz="1200" dirty="0">
+                <a:latin typeface="Arial" panose="020B0604020202020204" pitchFamily="34" charset="0"/>
+                <a:cs typeface="Arial" panose="020B0604020202020204" pitchFamily="34" charset="0"/>
+              </a:rPr>
+              <a:t> los </a:t>
+            </a:r>
+            <a:r>
+              <a:rPr lang="en-US" sz="1200" dirty="0" err="1">
+                <a:latin typeface="Arial" panose="020B0604020202020204" pitchFamily="34" charset="0"/>
+                <a:cs typeface="Arial" panose="020B0604020202020204" pitchFamily="34" charset="0"/>
+              </a:rPr>
+              <a:t>parámetros</a:t>
+            </a:r>
+            <a:r>
+              <a:rPr lang="en-US" sz="1200" dirty="0">
+                <a:latin typeface="Arial" panose="020B0604020202020204" pitchFamily="34" charset="0"/>
+                <a:cs typeface="Arial" panose="020B0604020202020204" pitchFamily="34" charset="0"/>
+              </a:rPr>
+              <a:t> de dispersion, </a:t>
+            </a:r>
+            <a:r>
+              <a:rPr lang="en-US" sz="1200" dirty="0" err="1">
+                <a:latin typeface="Arial" panose="020B0604020202020204" pitchFamily="34" charset="0"/>
+                <a:cs typeface="Arial" panose="020B0604020202020204" pitchFamily="34" charset="0"/>
+              </a:rPr>
+              <a:t>vemos</a:t>
+            </a:r>
+            <a:r>
+              <a:rPr lang="en-US" sz="1200" dirty="0">
+                <a:latin typeface="Arial" panose="020B0604020202020204" pitchFamily="34" charset="0"/>
+                <a:cs typeface="Arial" panose="020B0604020202020204" pitchFamily="34" charset="0"/>
+              </a:rPr>
+              <a:t> que </a:t>
+            </a:r>
+            <a:r>
+              <a:rPr lang="en-US" sz="1200" dirty="0" err="1">
+                <a:latin typeface="Arial" panose="020B0604020202020204" pitchFamily="34" charset="0"/>
+                <a:cs typeface="Arial" panose="020B0604020202020204" pitchFamily="34" charset="0"/>
+              </a:rPr>
+              <a:t>el</a:t>
+            </a:r>
+            <a:r>
+              <a:rPr lang="en-US" sz="1200" dirty="0">
+                <a:latin typeface="Arial" panose="020B0604020202020204" pitchFamily="34" charset="0"/>
+                <a:cs typeface="Arial" panose="020B0604020202020204" pitchFamily="34" charset="0"/>
+              </a:rPr>
+              <a:t> modo TM es </a:t>
+            </a:r>
+            <a:r>
+              <a:rPr lang="en-US" sz="1200" dirty="0" err="1">
+                <a:latin typeface="Arial" panose="020B0604020202020204" pitchFamily="34" charset="0"/>
+                <a:cs typeface="Arial" panose="020B0604020202020204" pitchFamily="34" charset="0"/>
+              </a:rPr>
+              <a:t>mucho</a:t>
+            </a:r>
+            <a:r>
+              <a:rPr lang="en-US" sz="1200" dirty="0">
+                <a:latin typeface="Arial" panose="020B0604020202020204" pitchFamily="34" charset="0"/>
+                <a:cs typeface="Arial" panose="020B0604020202020204" pitchFamily="34" charset="0"/>
+              </a:rPr>
+              <a:t> </a:t>
+            </a:r>
+            <a:r>
+              <a:rPr lang="en-US" sz="1200" dirty="0" err="1">
+                <a:latin typeface="Arial" panose="020B0604020202020204" pitchFamily="34" charset="0"/>
+                <a:cs typeface="Arial" panose="020B0604020202020204" pitchFamily="34" charset="0"/>
+              </a:rPr>
+              <a:t>más</a:t>
+            </a:r>
+            <a:r>
+              <a:rPr lang="en-US" sz="1200" dirty="0">
+                <a:latin typeface="Arial" panose="020B0604020202020204" pitchFamily="34" charset="0"/>
+                <a:cs typeface="Arial" panose="020B0604020202020204" pitchFamily="34" charset="0"/>
+              </a:rPr>
+              <a:t> </a:t>
+            </a:r>
+            <a:r>
+              <a:rPr lang="en-US" sz="1200" dirty="0" err="1">
+                <a:latin typeface="Arial" panose="020B0604020202020204" pitchFamily="34" charset="0"/>
+                <a:cs typeface="Arial" panose="020B0604020202020204" pitchFamily="34" charset="0"/>
+              </a:rPr>
+              <a:t>dispersivo</a:t>
+            </a:r>
+            <a:r>
+              <a:rPr lang="en-US" sz="1200" dirty="0">
+                <a:latin typeface="Arial" panose="020B0604020202020204" pitchFamily="34" charset="0"/>
+                <a:cs typeface="Arial" panose="020B0604020202020204" pitchFamily="34" charset="0"/>
+              </a:rPr>
+              <a:t>, </a:t>
+            </a:r>
+            <a:r>
+              <a:rPr lang="en-US" sz="1200" dirty="0" err="1">
+                <a:latin typeface="Arial" panose="020B0604020202020204" pitchFamily="34" charset="0"/>
+                <a:cs typeface="Arial" panose="020B0604020202020204" pitchFamily="34" charset="0"/>
+              </a:rPr>
+              <a:t>entonces</a:t>
+            </a:r>
+            <a:r>
+              <a:rPr lang="en-US" sz="1200" dirty="0">
+                <a:latin typeface="Arial" panose="020B0604020202020204" pitchFamily="34" charset="0"/>
+                <a:cs typeface="Arial" panose="020B0604020202020204" pitchFamily="34" charset="0"/>
+              </a:rPr>
+              <a:t> </a:t>
+            </a:r>
+            <a:r>
+              <a:rPr lang="en-US" sz="1200" dirty="0" err="1">
+                <a:latin typeface="Arial" panose="020B0604020202020204" pitchFamily="34" charset="0"/>
+                <a:cs typeface="Arial" panose="020B0604020202020204" pitchFamily="34" charset="0"/>
+              </a:rPr>
+              <a:t>aunque</a:t>
+            </a:r>
+            <a:r>
+              <a:rPr lang="en-US" sz="1200" dirty="0">
+                <a:latin typeface="Arial" panose="020B0604020202020204" pitchFamily="34" charset="0"/>
+                <a:cs typeface="Arial" panose="020B0604020202020204" pitchFamily="34" charset="0"/>
+              </a:rPr>
+              <a:t> TM sea </a:t>
+            </a:r>
+            <a:r>
+              <a:rPr lang="en-US" sz="1200" dirty="0" err="1">
+                <a:latin typeface="Arial" panose="020B0604020202020204" pitchFamily="34" charset="0"/>
+                <a:cs typeface="Arial" panose="020B0604020202020204" pitchFamily="34" charset="0"/>
+              </a:rPr>
+              <a:t>más</a:t>
+            </a:r>
+            <a:r>
+              <a:rPr lang="en-US" sz="1200" dirty="0">
+                <a:latin typeface="Arial" panose="020B0604020202020204" pitchFamily="34" charset="0"/>
+                <a:cs typeface="Arial" panose="020B0604020202020204" pitchFamily="34" charset="0"/>
+              </a:rPr>
+              <a:t> “</a:t>
+            </a:r>
+            <a:r>
+              <a:rPr lang="en-US" sz="1200" dirty="0" err="1">
+                <a:latin typeface="Arial" panose="020B0604020202020204" pitchFamily="34" charset="0"/>
+                <a:cs typeface="Arial" panose="020B0604020202020204" pitchFamily="34" charset="0"/>
+              </a:rPr>
+              <a:t>rápida</a:t>
+            </a:r>
+            <a:r>
+              <a:rPr lang="en-US" sz="1200" dirty="0">
+                <a:latin typeface="Arial" panose="020B0604020202020204" pitchFamily="34" charset="0"/>
+                <a:cs typeface="Arial" panose="020B0604020202020204" pitchFamily="34" charset="0"/>
+              </a:rPr>
+              <a:t>” (</a:t>
+            </a:r>
+            <a:r>
+              <a:rPr lang="en-US" sz="1200" dirty="0" err="1">
+                <a:latin typeface="Arial" panose="020B0604020202020204" pitchFamily="34" charset="0"/>
+                <a:cs typeface="Arial" panose="020B0604020202020204" pitchFamily="34" charset="0"/>
+              </a:rPr>
+              <a:t>menor</a:t>
+            </a:r>
+            <a:r>
+              <a:rPr lang="en-US" sz="1200" dirty="0">
+                <a:latin typeface="Arial" panose="020B0604020202020204" pitchFamily="34" charset="0"/>
+                <a:cs typeface="Arial" panose="020B0604020202020204" pitchFamily="34" charset="0"/>
+              </a:rPr>
+              <a:t> ng) es </a:t>
+            </a:r>
+            <a:r>
+              <a:rPr lang="en-US" sz="1200" dirty="0" err="1">
+                <a:latin typeface="Arial" panose="020B0604020202020204" pitchFamily="34" charset="0"/>
+                <a:cs typeface="Arial" panose="020B0604020202020204" pitchFamily="34" charset="0"/>
+              </a:rPr>
+              <a:t>mucho</a:t>
+            </a:r>
+            <a:r>
+              <a:rPr lang="en-US" sz="1200" dirty="0">
+                <a:latin typeface="Arial" panose="020B0604020202020204" pitchFamily="34" charset="0"/>
+                <a:cs typeface="Arial" panose="020B0604020202020204" pitchFamily="34" charset="0"/>
+              </a:rPr>
+              <a:t> </a:t>
+            </a:r>
+            <a:r>
+              <a:rPr lang="en-US" sz="1200" dirty="0" err="1">
+                <a:latin typeface="Arial" panose="020B0604020202020204" pitchFamily="34" charset="0"/>
+                <a:cs typeface="Arial" panose="020B0604020202020204" pitchFamily="34" charset="0"/>
+              </a:rPr>
+              <a:t>menos</a:t>
+            </a:r>
+            <a:r>
+              <a:rPr lang="en-US" sz="1200" dirty="0">
+                <a:latin typeface="Arial" panose="020B0604020202020204" pitchFamily="34" charset="0"/>
+                <a:cs typeface="Arial" panose="020B0604020202020204" pitchFamily="34" charset="0"/>
+              </a:rPr>
+              <a:t> </a:t>
+            </a:r>
+            <a:r>
+              <a:rPr lang="en-US" sz="1200" dirty="0" err="1">
+                <a:latin typeface="Arial" panose="020B0604020202020204" pitchFamily="34" charset="0"/>
+                <a:cs typeface="Arial" panose="020B0604020202020204" pitchFamily="34" charset="0"/>
+              </a:rPr>
+              <a:t>estable</a:t>
+            </a:r>
+            <a:r>
+              <a:rPr lang="en-US" sz="1200" dirty="0">
+                <a:latin typeface="Arial" panose="020B0604020202020204" pitchFamily="34" charset="0"/>
+                <a:cs typeface="Arial" panose="020B0604020202020204" pitchFamily="34" charset="0"/>
+              </a:rPr>
+              <a:t>. Por </a:t>
+            </a:r>
+            <a:r>
+              <a:rPr lang="en-US" sz="1200" dirty="0" err="1">
+                <a:latin typeface="Arial" panose="020B0604020202020204" pitchFamily="34" charset="0"/>
+                <a:cs typeface="Arial" panose="020B0604020202020204" pitchFamily="34" charset="0"/>
+              </a:rPr>
+              <a:t>otro</a:t>
+            </a:r>
+            <a:r>
+              <a:rPr lang="en-US" sz="1200" dirty="0">
+                <a:latin typeface="Arial" panose="020B0604020202020204" pitchFamily="34" charset="0"/>
+                <a:cs typeface="Arial" panose="020B0604020202020204" pitchFamily="34" charset="0"/>
+              </a:rPr>
+              <a:t> </a:t>
+            </a:r>
+            <a:r>
+              <a:rPr lang="en-US" sz="1200" dirty="0" err="1">
+                <a:latin typeface="Arial" panose="020B0604020202020204" pitchFamily="34" charset="0"/>
+                <a:cs typeface="Arial" panose="020B0604020202020204" pitchFamily="34" charset="0"/>
+              </a:rPr>
+              <a:t>lado</a:t>
+            </a:r>
+            <a:r>
+              <a:rPr lang="en-US" sz="1200" dirty="0">
+                <a:latin typeface="Arial" panose="020B0604020202020204" pitchFamily="34" charset="0"/>
+                <a:cs typeface="Arial" panose="020B0604020202020204" pitchFamily="34" charset="0"/>
+              </a:rPr>
+              <a:t> la </a:t>
+            </a:r>
+            <a:r>
+              <a:rPr lang="en-US" sz="1200" dirty="0" err="1">
+                <a:latin typeface="Arial" panose="020B0604020202020204" pitchFamily="34" charset="0"/>
+                <a:cs typeface="Arial" panose="020B0604020202020204" pitchFamily="34" charset="0"/>
+              </a:rPr>
+              <a:t>guía</a:t>
+            </a:r>
+            <a:r>
+              <a:rPr lang="en-US" sz="1200" dirty="0">
+                <a:latin typeface="Arial" panose="020B0604020202020204" pitchFamily="34" charset="0"/>
+                <a:cs typeface="Arial" panose="020B0604020202020204" pitchFamily="34" charset="0"/>
+              </a:rPr>
+              <a:t> Deep es </a:t>
+            </a:r>
+            <a:r>
+              <a:rPr lang="en-US" sz="1200" dirty="0" err="1">
+                <a:latin typeface="Arial" panose="020B0604020202020204" pitchFamily="34" charset="0"/>
+                <a:cs typeface="Arial" panose="020B0604020202020204" pitchFamily="34" charset="0"/>
+              </a:rPr>
+              <a:t>más</a:t>
+            </a:r>
+            <a:r>
+              <a:rPr lang="en-US" sz="1200" dirty="0">
+                <a:latin typeface="Arial" panose="020B0604020202020204" pitchFamily="34" charset="0"/>
+                <a:cs typeface="Arial" panose="020B0604020202020204" pitchFamily="34" charset="0"/>
+              </a:rPr>
+              <a:t> </a:t>
+            </a:r>
+            <a:r>
+              <a:rPr lang="en-US" sz="1200" dirty="0" err="1">
+                <a:latin typeface="Arial" panose="020B0604020202020204" pitchFamily="34" charset="0"/>
+                <a:cs typeface="Arial" panose="020B0604020202020204" pitchFamily="34" charset="0"/>
+              </a:rPr>
+              <a:t>dispersiva</a:t>
+            </a:r>
+            <a:r>
+              <a:rPr lang="en-US" sz="1200" dirty="0">
+                <a:latin typeface="Arial" panose="020B0604020202020204" pitchFamily="34" charset="0"/>
+                <a:cs typeface="Arial" panose="020B0604020202020204" pitchFamily="34" charset="0"/>
+              </a:rPr>
+              <a:t> </a:t>
+            </a:r>
+            <a:r>
+              <a:rPr lang="en-US" sz="1200" dirty="0" err="1">
+                <a:latin typeface="Arial" panose="020B0604020202020204" pitchFamily="34" charset="0"/>
+                <a:cs typeface="Arial" panose="020B0604020202020204" pitchFamily="34" charset="0"/>
+              </a:rPr>
+              <a:t>respecto</a:t>
+            </a:r>
+            <a:r>
+              <a:rPr lang="en-US" sz="1200" dirty="0">
+                <a:latin typeface="Arial" panose="020B0604020202020204" pitchFamily="34" charset="0"/>
+                <a:cs typeface="Arial" panose="020B0604020202020204" pitchFamily="34" charset="0"/>
+              </a:rPr>
+              <a:t> a la </a:t>
+            </a:r>
+            <a:r>
+              <a:rPr lang="en-US" sz="1200" dirty="0" err="1">
+                <a:latin typeface="Arial" panose="020B0604020202020204" pitchFamily="34" charset="0"/>
+                <a:cs typeface="Arial" panose="020B0604020202020204" pitchFamily="34" charset="0"/>
+              </a:rPr>
+              <a:t>guía</a:t>
+            </a:r>
+            <a:r>
+              <a:rPr lang="en-US" sz="1200" dirty="0">
+                <a:latin typeface="Arial" panose="020B0604020202020204" pitchFamily="34" charset="0"/>
+                <a:cs typeface="Arial" panose="020B0604020202020204" pitchFamily="34" charset="0"/>
+              </a:rPr>
+              <a:t> Shallow por la forma de </a:t>
+            </a:r>
+            <a:r>
+              <a:rPr lang="en-US" sz="1200" dirty="0" err="1">
+                <a:latin typeface="Arial" panose="020B0604020202020204" pitchFamily="34" charset="0"/>
+                <a:cs typeface="Arial" panose="020B0604020202020204" pitchFamily="34" charset="0"/>
+              </a:rPr>
+              <a:t>su</a:t>
+            </a:r>
+            <a:r>
+              <a:rPr lang="en-US" sz="1200" dirty="0">
+                <a:latin typeface="Arial" panose="020B0604020202020204" pitchFamily="34" charset="0"/>
+                <a:cs typeface="Arial" panose="020B0604020202020204" pitchFamily="34" charset="0"/>
+              </a:rPr>
+              <a:t> </a:t>
+            </a:r>
+            <a:r>
+              <a:rPr lang="en-US" sz="1200" dirty="0" err="1">
+                <a:latin typeface="Arial" panose="020B0604020202020204" pitchFamily="34" charset="0"/>
+                <a:cs typeface="Arial" panose="020B0604020202020204" pitchFamily="34" charset="0"/>
+              </a:rPr>
+              <a:t>geometría</a:t>
+            </a:r>
+            <a:r>
+              <a:rPr lang="en-US" sz="1200" dirty="0">
+                <a:latin typeface="Arial" panose="020B0604020202020204" pitchFamily="34" charset="0"/>
+                <a:cs typeface="Arial" panose="020B0604020202020204" pitchFamily="34" charset="0"/>
+              </a:rPr>
+              <a:t> rectangular. </a:t>
+            </a:r>
+          </a:p>
+          <a:p>
+            <a:pPr marL="171450" indent="-171450" algn="just">
+              <a:buFontTx/>
+              <a:buChar char="-"/>
+            </a:pPr>
+            <a:endParaRPr lang="en-US" sz="1200" dirty="0">
+              <a:latin typeface="Arial" panose="020B0604020202020204" pitchFamily="34" charset="0"/>
+              <a:cs typeface="Arial" panose="020B0604020202020204" pitchFamily="34" charset="0"/>
+            </a:endParaRPr>
+          </a:p>
+        </p:txBody>
+      </p:sp>
+    </p:spTree>
+    <p:extLst>
+      <p:ext uri="{BB962C8B-B14F-4D97-AF65-F5344CB8AC3E}">
+        <p14:creationId xmlns:p14="http://schemas.microsoft.com/office/powerpoint/2010/main" val="3602336162"/>
+      </p:ext>
+    </p:extLst>
+  </p:cSld>
+  <p:clrMapOvr>
+    <a:masterClrMapping/>
+  </p:clrMapOvr>
+</p:sld>
+</file>
+
+<file path=ppt/slides/slide7.xml><?xml version="1.0" encoding="utf-8"?>
 <p:sld xmlns:a="http://schemas.openxmlformats.org/drawingml/2006/main" xmlns:r="http://schemas.openxmlformats.org/officeDocument/2006/relationships" xmlns:p="http://schemas.openxmlformats.org/presentationml/2006/main">
   <p:cSld>
     <p:spTree>
@@ -9616,7 +12350,7 @@
           <a:p>
             <a:fld id="{B6F15528-21DE-4FAA-801E-634DDDAF4B2B}" type="slidenum">
               <a:rPr lang="es-ES" smtClean="0"/>
-              <a:t>6</a:t>
+              <a:t>7</a:t>
             </a:fld>
             <a:endParaRPr lang="es-ES"/>
           </a:p>
@@ -9670,8 +12404,8 @@
         </p:nvSpPr>
         <p:spPr>
           <a:xfrm>
-            <a:off x="609441" y="4860334"/>
-            <a:ext cx="11199971" cy="1569660"/>
+            <a:off x="590123" y="4321729"/>
+            <a:ext cx="11199971" cy="1754326"/>
           </a:xfrm>
           <a:prstGeom prst="rect">
             <a:avLst/>
@@ -9711,17 +12445,510 @@
           </a:p>
           <a:p>
             <a:pPr algn="just"/>
-            <a:endParaRPr lang="en-US" sz="1200" dirty="0">
-              <a:latin typeface="Arial" panose="020B0604020202020204" pitchFamily="34" charset="0"/>
-              <a:cs typeface="Arial" panose="020B0604020202020204" pitchFamily="34" charset="0"/>
-            </a:endParaRPr>
-          </a:p>
-          <a:p>
-            <a:pPr algn="just"/>
-            <a:endParaRPr lang="en-US" sz="1200" u="sng" dirty="0">
-              <a:latin typeface="Arial" panose="020B0604020202020204" pitchFamily="34" charset="0"/>
-              <a:cs typeface="Arial" panose="020B0604020202020204" pitchFamily="34" charset="0"/>
-            </a:endParaRPr>
+            <a:r>
+              <a:rPr lang="en-US" sz="1200" dirty="0" err="1">
+                <a:latin typeface="Arial" panose="020B0604020202020204" pitchFamily="34" charset="0"/>
+                <a:cs typeface="Arial" panose="020B0604020202020204" pitchFamily="34" charset="0"/>
+              </a:rPr>
+              <a:t>En</a:t>
+            </a:r>
+            <a:r>
+              <a:rPr lang="en-US" sz="1200" dirty="0">
+                <a:latin typeface="Arial" panose="020B0604020202020204" pitchFamily="34" charset="0"/>
+                <a:cs typeface="Arial" panose="020B0604020202020204" pitchFamily="34" charset="0"/>
+              </a:rPr>
+              <a:t> la </a:t>
+            </a:r>
+            <a:r>
+              <a:rPr lang="en-US" sz="1200" dirty="0" err="1">
+                <a:latin typeface="Arial" panose="020B0604020202020204" pitchFamily="34" charset="0"/>
+                <a:cs typeface="Arial" panose="020B0604020202020204" pitchFamily="34" charset="0"/>
+              </a:rPr>
+              <a:t>gráfica</a:t>
+            </a:r>
+            <a:r>
+              <a:rPr lang="en-US" sz="1200" dirty="0">
+                <a:latin typeface="Arial" panose="020B0604020202020204" pitchFamily="34" charset="0"/>
+                <a:cs typeface="Arial" panose="020B0604020202020204" pitchFamily="34" charset="0"/>
+              </a:rPr>
+              <a:t> de la </a:t>
+            </a:r>
+            <a:r>
+              <a:rPr lang="en-US" sz="1200" dirty="0" err="1">
+                <a:latin typeface="Arial" panose="020B0604020202020204" pitchFamily="34" charset="0"/>
+                <a:cs typeface="Arial" panose="020B0604020202020204" pitchFamily="34" charset="0"/>
+              </a:rPr>
+              <a:t>izquierda</a:t>
+            </a:r>
+            <a:r>
+              <a:rPr lang="en-US" sz="1200" dirty="0">
+                <a:latin typeface="Arial" panose="020B0604020202020204" pitchFamily="34" charset="0"/>
+                <a:cs typeface="Arial" panose="020B0604020202020204" pitchFamily="34" charset="0"/>
+              </a:rPr>
+              <a:t> </a:t>
+            </a:r>
+            <a:r>
+              <a:rPr lang="en-US" sz="1200" dirty="0" err="1">
+                <a:latin typeface="Arial" panose="020B0604020202020204" pitchFamily="34" charset="0"/>
+                <a:cs typeface="Arial" panose="020B0604020202020204" pitchFamily="34" charset="0"/>
+              </a:rPr>
+              <a:t>estamos</a:t>
+            </a:r>
+            <a:r>
+              <a:rPr lang="en-US" sz="1200" dirty="0">
+                <a:latin typeface="Arial" panose="020B0604020202020204" pitchFamily="34" charset="0"/>
+                <a:cs typeface="Arial" panose="020B0604020202020204" pitchFamily="34" charset="0"/>
+              </a:rPr>
+              <a:t> </a:t>
+            </a:r>
+            <a:r>
+              <a:rPr lang="en-US" sz="1200" dirty="0" err="1">
+                <a:latin typeface="Arial" panose="020B0604020202020204" pitchFamily="34" charset="0"/>
+                <a:cs typeface="Arial" panose="020B0604020202020204" pitchFamily="34" charset="0"/>
+              </a:rPr>
+              <a:t>viendo</a:t>
+            </a:r>
+            <a:r>
+              <a:rPr lang="en-US" sz="1200" dirty="0">
+                <a:latin typeface="Arial" panose="020B0604020202020204" pitchFamily="34" charset="0"/>
+                <a:cs typeface="Arial" panose="020B0604020202020204" pitchFamily="34" charset="0"/>
+              </a:rPr>
+              <a:t> las </a:t>
+            </a:r>
+            <a:r>
+              <a:rPr lang="en-US" sz="1200" dirty="0" err="1">
+                <a:latin typeface="Arial" panose="020B0604020202020204" pitchFamily="34" charset="0"/>
+                <a:cs typeface="Arial" panose="020B0604020202020204" pitchFamily="34" charset="0"/>
+              </a:rPr>
+              <a:t>pérdidas</a:t>
+            </a:r>
+            <a:r>
+              <a:rPr lang="en-US" sz="1200" dirty="0">
+                <a:latin typeface="Arial" panose="020B0604020202020204" pitchFamily="34" charset="0"/>
+                <a:cs typeface="Arial" panose="020B0604020202020204" pitchFamily="34" charset="0"/>
+              </a:rPr>
+              <a:t> </a:t>
+            </a:r>
+            <a:r>
+              <a:rPr lang="en-US" sz="1200" dirty="0" err="1">
+                <a:latin typeface="Arial" panose="020B0604020202020204" pitchFamily="34" charset="0"/>
+                <a:cs typeface="Arial" panose="020B0604020202020204" pitchFamily="34" charset="0"/>
+              </a:rPr>
+              <a:t>en</a:t>
+            </a:r>
+            <a:r>
+              <a:rPr lang="en-US" sz="1200" dirty="0">
+                <a:latin typeface="Arial" panose="020B0604020202020204" pitchFamily="34" charset="0"/>
+                <a:cs typeface="Arial" panose="020B0604020202020204" pitchFamily="34" charset="0"/>
+              </a:rPr>
+              <a:t> </a:t>
+            </a:r>
+            <a:r>
+              <a:rPr lang="en-US" sz="1200" dirty="0" err="1">
+                <a:latin typeface="Arial" panose="020B0604020202020204" pitchFamily="34" charset="0"/>
+                <a:cs typeface="Arial" panose="020B0604020202020204" pitchFamily="34" charset="0"/>
+              </a:rPr>
+              <a:t>funcion</a:t>
+            </a:r>
+            <a:r>
+              <a:rPr lang="en-US" sz="1200" dirty="0">
+                <a:latin typeface="Arial" panose="020B0604020202020204" pitchFamily="34" charset="0"/>
+                <a:cs typeface="Arial" panose="020B0604020202020204" pitchFamily="34" charset="0"/>
+              </a:rPr>
+              <a:t> del radio de </a:t>
+            </a:r>
+            <a:r>
+              <a:rPr lang="en-US" sz="1200" dirty="0" err="1">
+                <a:latin typeface="Arial" panose="020B0604020202020204" pitchFamily="34" charset="0"/>
+                <a:cs typeface="Arial" panose="020B0604020202020204" pitchFamily="34" charset="0"/>
+              </a:rPr>
+              <a:t>curvatura</a:t>
+            </a:r>
+            <a:r>
+              <a:rPr lang="en-US" sz="1200" dirty="0">
+                <a:latin typeface="Arial" panose="020B0604020202020204" pitchFamily="34" charset="0"/>
+                <a:cs typeface="Arial" panose="020B0604020202020204" pitchFamily="34" charset="0"/>
+              </a:rPr>
+              <a:t>. </a:t>
+            </a:r>
+            <a:r>
+              <a:rPr lang="en-US" sz="1200" dirty="0" err="1">
+                <a:latin typeface="Arial" panose="020B0604020202020204" pitchFamily="34" charset="0"/>
+                <a:cs typeface="Arial" panose="020B0604020202020204" pitchFamily="34" charset="0"/>
+              </a:rPr>
+              <a:t>Vemos</a:t>
+            </a:r>
+            <a:r>
+              <a:rPr lang="en-US" sz="1200" dirty="0">
+                <a:latin typeface="Arial" panose="020B0604020202020204" pitchFamily="34" charset="0"/>
+                <a:cs typeface="Arial" panose="020B0604020202020204" pitchFamily="34" charset="0"/>
+              </a:rPr>
+              <a:t> que al principio la </a:t>
+            </a:r>
+            <a:r>
+              <a:rPr lang="en-US" sz="1200" dirty="0" err="1">
+                <a:latin typeface="Arial" panose="020B0604020202020204" pitchFamily="34" charset="0"/>
+                <a:cs typeface="Arial" panose="020B0604020202020204" pitchFamily="34" charset="0"/>
+              </a:rPr>
+              <a:t>dependendia</a:t>
+            </a:r>
+            <a:r>
+              <a:rPr lang="en-US" sz="1200" dirty="0">
+                <a:latin typeface="Arial" panose="020B0604020202020204" pitchFamily="34" charset="0"/>
+                <a:cs typeface="Arial" panose="020B0604020202020204" pitchFamily="34" charset="0"/>
+              </a:rPr>
+              <a:t> de la </a:t>
+            </a:r>
+            <a:r>
+              <a:rPr lang="en-US" sz="1200" dirty="0" err="1">
+                <a:latin typeface="Arial" panose="020B0604020202020204" pitchFamily="34" charset="0"/>
+                <a:cs typeface="Arial" panose="020B0604020202020204" pitchFamily="34" charset="0"/>
+              </a:rPr>
+              <a:t>curva</a:t>
+            </a:r>
+            <a:r>
+              <a:rPr lang="en-US" sz="1200" dirty="0">
+                <a:latin typeface="Arial" panose="020B0604020202020204" pitchFamily="34" charset="0"/>
+                <a:cs typeface="Arial" panose="020B0604020202020204" pitchFamily="34" charset="0"/>
+              </a:rPr>
+              <a:t> global reside </a:t>
+            </a:r>
+            <a:r>
+              <a:rPr lang="en-US" sz="1200" dirty="0" err="1">
+                <a:latin typeface="Arial" panose="020B0604020202020204" pitchFamily="34" charset="0"/>
+                <a:cs typeface="Arial" panose="020B0604020202020204" pitchFamily="34" charset="0"/>
+              </a:rPr>
+              <a:t>en</a:t>
+            </a:r>
+            <a:r>
+              <a:rPr lang="en-US" sz="1200" dirty="0">
+                <a:latin typeface="Arial" panose="020B0604020202020204" pitchFamily="34" charset="0"/>
+                <a:cs typeface="Arial" panose="020B0604020202020204" pitchFamily="34" charset="0"/>
+              </a:rPr>
+              <a:t> las </a:t>
+            </a:r>
+            <a:r>
+              <a:rPr lang="en-US" sz="1200" dirty="0" err="1">
+                <a:latin typeface="Arial" panose="020B0604020202020204" pitchFamily="34" charset="0"/>
+                <a:cs typeface="Arial" panose="020B0604020202020204" pitchFamily="34" charset="0"/>
+              </a:rPr>
+              <a:t>perdidas</a:t>
+            </a:r>
+            <a:r>
+              <a:rPr lang="en-US" sz="1200" dirty="0">
+                <a:latin typeface="Arial" panose="020B0604020202020204" pitchFamily="34" charset="0"/>
+                <a:cs typeface="Arial" panose="020B0604020202020204" pitchFamily="34" charset="0"/>
+              </a:rPr>
+              <a:t> por </a:t>
+            </a:r>
+            <a:r>
+              <a:rPr lang="en-US" sz="1200" dirty="0" err="1">
+                <a:latin typeface="Arial" panose="020B0604020202020204" pitchFamily="34" charset="0"/>
+                <a:cs typeface="Arial" panose="020B0604020202020204" pitchFamily="34" charset="0"/>
+              </a:rPr>
+              <a:t>el</a:t>
+            </a:r>
+            <a:r>
+              <a:rPr lang="en-US" sz="1200" dirty="0">
+                <a:latin typeface="Arial" panose="020B0604020202020204" pitchFamily="34" charset="0"/>
+                <a:cs typeface="Arial" panose="020B0604020202020204" pitchFamily="34" charset="0"/>
+              </a:rPr>
+              <a:t> </a:t>
+            </a:r>
+            <a:r>
+              <a:rPr lang="en-US" sz="1200" dirty="0" err="1">
+                <a:latin typeface="Arial" panose="020B0604020202020204" pitchFamily="34" charset="0"/>
+                <a:cs typeface="Arial" panose="020B0604020202020204" pitchFamily="34" charset="0"/>
+              </a:rPr>
+              <a:t>acoplamiento</a:t>
+            </a:r>
+            <a:r>
+              <a:rPr lang="en-US" sz="1200" dirty="0">
+                <a:latin typeface="Arial" panose="020B0604020202020204" pitchFamily="34" charset="0"/>
+                <a:cs typeface="Arial" panose="020B0604020202020204" pitchFamily="34" charset="0"/>
+              </a:rPr>
+              <a:t> de los </a:t>
+            </a:r>
+            <a:r>
+              <a:rPr lang="en-US" sz="1200" dirty="0" err="1">
+                <a:latin typeface="Arial" panose="020B0604020202020204" pitchFamily="34" charset="0"/>
+                <a:cs typeface="Arial" panose="020B0604020202020204" pitchFamily="34" charset="0"/>
+              </a:rPr>
+              <a:t>modos</a:t>
+            </a:r>
+            <a:r>
+              <a:rPr lang="en-US" sz="1200" dirty="0">
+                <a:latin typeface="Arial" panose="020B0604020202020204" pitchFamily="34" charset="0"/>
+                <a:cs typeface="Arial" panose="020B0604020202020204" pitchFamily="34" charset="0"/>
+              </a:rPr>
+              <a:t>, </a:t>
+            </a:r>
+            <a:r>
+              <a:rPr lang="en-US" sz="1200" dirty="0" err="1">
+                <a:latin typeface="Arial" panose="020B0604020202020204" pitchFamily="34" charset="0"/>
+                <a:cs typeface="Arial" panose="020B0604020202020204" pitchFamily="34" charset="0"/>
+              </a:rPr>
+              <a:t>luego</a:t>
+            </a:r>
+            <a:r>
+              <a:rPr lang="en-US" sz="1200" dirty="0">
+                <a:latin typeface="Arial" panose="020B0604020202020204" pitchFamily="34" charset="0"/>
+                <a:cs typeface="Arial" panose="020B0604020202020204" pitchFamily="34" charset="0"/>
+              </a:rPr>
+              <a:t> </a:t>
+            </a:r>
+            <a:r>
+              <a:rPr lang="en-US" sz="1200" dirty="0" err="1">
+                <a:latin typeface="Arial" panose="020B0604020202020204" pitchFamily="34" charset="0"/>
+                <a:cs typeface="Arial" panose="020B0604020202020204" pitchFamily="34" charset="0"/>
+              </a:rPr>
+              <a:t>llega</a:t>
+            </a:r>
+            <a:r>
+              <a:rPr lang="en-US" sz="1200" dirty="0">
+                <a:latin typeface="Arial" panose="020B0604020202020204" pitchFamily="34" charset="0"/>
+                <a:cs typeface="Arial" panose="020B0604020202020204" pitchFamily="34" charset="0"/>
+              </a:rPr>
+              <a:t> un punto </a:t>
+            </a:r>
+            <a:r>
+              <a:rPr lang="en-US" sz="1200" dirty="0" err="1">
+                <a:latin typeface="Arial" panose="020B0604020202020204" pitchFamily="34" charset="0"/>
+                <a:cs typeface="Arial" panose="020B0604020202020204" pitchFamily="34" charset="0"/>
+              </a:rPr>
+              <a:t>donde</a:t>
+            </a:r>
+            <a:r>
+              <a:rPr lang="en-US" sz="1200" dirty="0">
+                <a:latin typeface="Arial" panose="020B0604020202020204" pitchFamily="34" charset="0"/>
+                <a:cs typeface="Arial" panose="020B0604020202020204" pitchFamily="34" charset="0"/>
+              </a:rPr>
+              <a:t> la </a:t>
+            </a:r>
+            <a:r>
+              <a:rPr lang="en-US" sz="1200" dirty="0" err="1">
+                <a:latin typeface="Arial" panose="020B0604020202020204" pitchFamily="34" charset="0"/>
+                <a:cs typeface="Arial" panose="020B0604020202020204" pitchFamily="34" charset="0"/>
+              </a:rPr>
+              <a:t>dependencia</a:t>
+            </a:r>
+            <a:r>
+              <a:rPr lang="en-US" sz="1200" dirty="0">
+                <a:latin typeface="Arial" panose="020B0604020202020204" pitchFamily="34" charset="0"/>
+                <a:cs typeface="Arial" panose="020B0604020202020204" pitchFamily="34" charset="0"/>
+              </a:rPr>
+              <a:t> </a:t>
+            </a:r>
+            <a:r>
+              <a:rPr lang="en-US" sz="1200" dirty="0" err="1">
+                <a:latin typeface="Arial" panose="020B0604020202020204" pitchFamily="34" charset="0"/>
+                <a:cs typeface="Arial" panose="020B0604020202020204" pitchFamily="34" charset="0"/>
+              </a:rPr>
+              <a:t>residirá</a:t>
+            </a:r>
+            <a:r>
+              <a:rPr lang="en-US" sz="1200" dirty="0">
+                <a:latin typeface="Arial" panose="020B0604020202020204" pitchFamily="34" charset="0"/>
+                <a:cs typeface="Arial" panose="020B0604020202020204" pitchFamily="34" charset="0"/>
+              </a:rPr>
+              <a:t> </a:t>
+            </a:r>
+            <a:r>
+              <a:rPr lang="en-US" sz="1200" dirty="0" err="1">
+                <a:latin typeface="Arial" panose="020B0604020202020204" pitchFamily="34" charset="0"/>
+                <a:cs typeface="Arial" panose="020B0604020202020204" pitchFamily="34" charset="0"/>
+              </a:rPr>
+              <a:t>en</a:t>
+            </a:r>
+            <a:r>
+              <a:rPr lang="en-US" sz="1200" dirty="0">
+                <a:latin typeface="Arial" panose="020B0604020202020204" pitchFamily="34" charset="0"/>
+                <a:cs typeface="Arial" panose="020B0604020202020204" pitchFamily="34" charset="0"/>
+              </a:rPr>
+              <a:t> las </a:t>
+            </a:r>
+            <a:r>
+              <a:rPr lang="en-US" sz="1200" dirty="0" err="1">
+                <a:latin typeface="Arial" panose="020B0604020202020204" pitchFamily="34" charset="0"/>
+                <a:cs typeface="Arial" panose="020B0604020202020204" pitchFamily="34" charset="0"/>
+              </a:rPr>
+              <a:t>pérdidas</a:t>
+            </a:r>
+            <a:r>
+              <a:rPr lang="en-US" sz="1200" dirty="0">
+                <a:latin typeface="Arial" panose="020B0604020202020204" pitchFamily="34" charset="0"/>
+                <a:cs typeface="Arial" panose="020B0604020202020204" pitchFamily="34" charset="0"/>
+              </a:rPr>
+              <a:t> de </a:t>
+            </a:r>
+            <a:r>
+              <a:rPr lang="en-US" sz="1200" dirty="0" err="1">
+                <a:latin typeface="Arial" panose="020B0604020202020204" pitchFamily="34" charset="0"/>
+                <a:cs typeface="Arial" panose="020B0604020202020204" pitchFamily="34" charset="0"/>
+              </a:rPr>
+              <a:t>propagación</a:t>
+            </a:r>
+            <a:r>
+              <a:rPr lang="en-US" sz="1200" dirty="0">
+                <a:latin typeface="Arial" panose="020B0604020202020204" pitchFamily="34" charset="0"/>
+                <a:cs typeface="Arial" panose="020B0604020202020204" pitchFamily="34" charset="0"/>
+              </a:rPr>
+              <a:t>. Ese punto </a:t>
+            </a:r>
+            <a:r>
+              <a:rPr lang="en-US" sz="1200" dirty="0" err="1">
+                <a:latin typeface="Arial" panose="020B0604020202020204" pitchFamily="34" charset="0"/>
+                <a:cs typeface="Arial" panose="020B0604020202020204" pitchFamily="34" charset="0"/>
+              </a:rPr>
+              <a:t>donde</a:t>
+            </a:r>
+            <a:r>
+              <a:rPr lang="en-US" sz="1200" dirty="0">
+                <a:latin typeface="Arial" panose="020B0604020202020204" pitchFamily="34" charset="0"/>
+                <a:cs typeface="Arial" panose="020B0604020202020204" pitchFamily="34" charset="0"/>
+              </a:rPr>
+              <a:t> se </a:t>
+            </a:r>
+            <a:r>
+              <a:rPr lang="en-US" sz="1200" dirty="0" err="1">
+                <a:latin typeface="Arial" panose="020B0604020202020204" pitchFamily="34" charset="0"/>
+                <a:cs typeface="Arial" panose="020B0604020202020204" pitchFamily="34" charset="0"/>
+              </a:rPr>
+              <a:t>cruzan</a:t>
+            </a:r>
+            <a:r>
+              <a:rPr lang="en-US" sz="1200" dirty="0">
+                <a:latin typeface="Arial" panose="020B0604020202020204" pitchFamily="34" charset="0"/>
+                <a:cs typeface="Arial" panose="020B0604020202020204" pitchFamily="34" charset="0"/>
+              </a:rPr>
+              <a:t> </a:t>
+            </a:r>
+            <a:r>
+              <a:rPr lang="en-US" sz="1200" dirty="0" err="1">
+                <a:latin typeface="Arial" panose="020B0604020202020204" pitchFamily="34" charset="0"/>
+                <a:cs typeface="Arial" panose="020B0604020202020204" pitchFamily="34" charset="0"/>
+              </a:rPr>
+              <a:t>estas</a:t>
+            </a:r>
+            <a:r>
+              <a:rPr lang="en-US" sz="1200" dirty="0">
+                <a:latin typeface="Arial" panose="020B0604020202020204" pitchFamily="34" charset="0"/>
+                <a:cs typeface="Arial" panose="020B0604020202020204" pitchFamily="34" charset="0"/>
+              </a:rPr>
+              <a:t> dos </a:t>
+            </a:r>
+            <a:r>
+              <a:rPr lang="en-US" sz="1200" dirty="0" err="1">
+                <a:latin typeface="Arial" panose="020B0604020202020204" pitchFamily="34" charset="0"/>
+                <a:cs typeface="Arial" panose="020B0604020202020204" pitchFamily="34" charset="0"/>
+              </a:rPr>
+              <a:t>curvas</a:t>
+            </a:r>
+            <a:r>
+              <a:rPr lang="en-US" sz="1200" dirty="0">
+                <a:latin typeface="Arial" panose="020B0604020202020204" pitchFamily="34" charset="0"/>
+                <a:cs typeface="Arial" panose="020B0604020202020204" pitchFamily="34" charset="0"/>
+              </a:rPr>
+              <a:t>, </a:t>
+            </a:r>
+            <a:r>
+              <a:rPr lang="en-US" sz="1200" dirty="0" err="1">
+                <a:latin typeface="Arial" panose="020B0604020202020204" pitchFamily="34" charset="0"/>
+                <a:cs typeface="Arial" panose="020B0604020202020204" pitchFamily="34" charset="0"/>
+              </a:rPr>
+              <a:t>alrededor</a:t>
+            </a:r>
+            <a:r>
+              <a:rPr lang="en-US" sz="1200" dirty="0">
+                <a:latin typeface="Arial" panose="020B0604020202020204" pitchFamily="34" charset="0"/>
+                <a:cs typeface="Arial" panose="020B0604020202020204" pitchFamily="34" charset="0"/>
+              </a:rPr>
+              <a:t> de 75 um, </a:t>
+            </a:r>
+            <a:r>
+              <a:rPr lang="en-US" sz="1200" dirty="0" err="1">
+                <a:latin typeface="Arial" panose="020B0604020202020204" pitchFamily="34" charset="0"/>
+                <a:cs typeface="Arial" panose="020B0604020202020204" pitchFamily="34" charset="0"/>
+              </a:rPr>
+              <a:t>será</a:t>
+            </a:r>
+            <a:r>
+              <a:rPr lang="en-US" sz="1200" dirty="0">
+                <a:latin typeface="Arial" panose="020B0604020202020204" pitchFamily="34" charset="0"/>
+                <a:cs typeface="Arial" panose="020B0604020202020204" pitchFamily="34" charset="0"/>
+              </a:rPr>
+              <a:t> </a:t>
+            </a:r>
+            <a:r>
+              <a:rPr lang="en-US" sz="1200" dirty="0" err="1">
+                <a:latin typeface="Arial" panose="020B0604020202020204" pitchFamily="34" charset="0"/>
+                <a:cs typeface="Arial" panose="020B0604020202020204" pitchFamily="34" charset="0"/>
+              </a:rPr>
+              <a:t>donde</a:t>
+            </a:r>
+            <a:r>
+              <a:rPr lang="en-US" sz="1200" dirty="0">
+                <a:latin typeface="Arial" panose="020B0604020202020204" pitchFamily="34" charset="0"/>
+                <a:cs typeface="Arial" panose="020B0604020202020204" pitchFamily="34" charset="0"/>
+              </a:rPr>
+              <a:t> </a:t>
+            </a:r>
+            <a:r>
+              <a:rPr lang="en-US" sz="1200" dirty="0" err="1">
+                <a:latin typeface="Arial" panose="020B0604020202020204" pitchFamily="34" charset="0"/>
+                <a:cs typeface="Arial" panose="020B0604020202020204" pitchFamily="34" charset="0"/>
+              </a:rPr>
+              <a:t>menos</a:t>
+            </a:r>
+            <a:r>
+              <a:rPr lang="en-US" sz="1200" dirty="0">
+                <a:latin typeface="Arial" panose="020B0604020202020204" pitchFamily="34" charset="0"/>
+                <a:cs typeface="Arial" panose="020B0604020202020204" pitchFamily="34" charset="0"/>
+              </a:rPr>
+              <a:t> </a:t>
+            </a:r>
+            <a:r>
+              <a:rPr lang="en-US" sz="1200" dirty="0" err="1">
+                <a:latin typeface="Arial" panose="020B0604020202020204" pitchFamily="34" charset="0"/>
+                <a:cs typeface="Arial" panose="020B0604020202020204" pitchFamily="34" charset="0"/>
+              </a:rPr>
+              <a:t>pérdidas</a:t>
+            </a:r>
+            <a:r>
+              <a:rPr lang="en-US" sz="1200" dirty="0">
+                <a:latin typeface="Arial" panose="020B0604020202020204" pitchFamily="34" charset="0"/>
+                <a:cs typeface="Arial" panose="020B0604020202020204" pitchFamily="34" charset="0"/>
+              </a:rPr>
+              <a:t> </a:t>
+            </a:r>
+            <a:r>
+              <a:rPr lang="en-US" sz="1200" dirty="0" err="1">
+                <a:latin typeface="Arial" panose="020B0604020202020204" pitchFamily="34" charset="0"/>
+                <a:cs typeface="Arial" panose="020B0604020202020204" pitchFamily="34" charset="0"/>
+              </a:rPr>
+              <a:t>tendremos</a:t>
+            </a:r>
+            <a:r>
+              <a:rPr lang="en-US" sz="1200" dirty="0">
+                <a:latin typeface="Arial" panose="020B0604020202020204" pitchFamily="34" charset="0"/>
+                <a:cs typeface="Arial" panose="020B0604020202020204" pitchFamily="34" charset="0"/>
+              </a:rPr>
+              <a:t>. El safe radius </a:t>
+            </a:r>
+            <a:r>
+              <a:rPr lang="en-US" sz="1200" dirty="0" err="1">
+                <a:latin typeface="Arial" panose="020B0604020202020204" pitchFamily="34" charset="0"/>
+                <a:cs typeface="Arial" panose="020B0604020202020204" pitchFamily="34" charset="0"/>
+              </a:rPr>
+              <a:t>será</a:t>
+            </a:r>
+            <a:r>
+              <a:rPr lang="en-US" sz="1200" dirty="0">
+                <a:latin typeface="Arial" panose="020B0604020202020204" pitchFamily="34" charset="0"/>
+                <a:cs typeface="Arial" panose="020B0604020202020204" pitchFamily="34" charset="0"/>
+              </a:rPr>
+              <a:t> 75um.</a:t>
+            </a:r>
           </a:p>
           <a:p>
             <a:pPr algn="just"/>
@@ -9732,10 +12959,286 @@
           </a:p>
           <a:p>
             <a:pPr algn="just"/>
-            <a:endParaRPr lang="en-US" sz="1200" dirty="0">
-              <a:latin typeface="Arial" panose="020B0604020202020204" pitchFamily="34" charset="0"/>
-              <a:cs typeface="Arial" panose="020B0604020202020204" pitchFamily="34" charset="0"/>
-            </a:endParaRPr>
+            <a:r>
+              <a:rPr lang="en-US" sz="1200" dirty="0" err="1">
+                <a:latin typeface="Arial" panose="020B0604020202020204" pitchFamily="34" charset="0"/>
+                <a:cs typeface="Arial" panose="020B0604020202020204" pitchFamily="34" charset="0"/>
+              </a:rPr>
+              <a:t>En</a:t>
+            </a:r>
+            <a:r>
+              <a:rPr lang="en-US" sz="1200" dirty="0">
+                <a:latin typeface="Arial" panose="020B0604020202020204" pitchFamily="34" charset="0"/>
+                <a:cs typeface="Arial" panose="020B0604020202020204" pitchFamily="34" charset="0"/>
+              </a:rPr>
+              <a:t> la de la </a:t>
+            </a:r>
+            <a:r>
+              <a:rPr lang="en-US" sz="1200" dirty="0" err="1">
+                <a:latin typeface="Arial" panose="020B0604020202020204" pitchFamily="34" charset="0"/>
+                <a:cs typeface="Arial" panose="020B0604020202020204" pitchFamily="34" charset="0"/>
+              </a:rPr>
+              <a:t>derecha</a:t>
+            </a:r>
+            <a:r>
+              <a:rPr lang="en-US" sz="1200" dirty="0">
+                <a:latin typeface="Arial" panose="020B0604020202020204" pitchFamily="34" charset="0"/>
+                <a:cs typeface="Arial" panose="020B0604020202020204" pitchFamily="34" charset="0"/>
+              </a:rPr>
+              <a:t> </a:t>
+            </a:r>
+            <a:r>
+              <a:rPr lang="en-US" sz="1200" dirty="0" err="1">
+                <a:latin typeface="Arial" panose="020B0604020202020204" pitchFamily="34" charset="0"/>
+                <a:cs typeface="Arial" panose="020B0604020202020204" pitchFamily="34" charset="0"/>
+              </a:rPr>
+              <a:t>vemos</a:t>
+            </a:r>
+            <a:r>
+              <a:rPr lang="en-US" sz="1200" dirty="0">
+                <a:latin typeface="Arial" panose="020B0604020202020204" pitchFamily="34" charset="0"/>
+                <a:cs typeface="Arial" panose="020B0604020202020204" pitchFamily="34" charset="0"/>
+              </a:rPr>
+              <a:t> que </a:t>
+            </a:r>
+            <a:r>
+              <a:rPr lang="en-US" sz="1200" dirty="0" err="1">
+                <a:latin typeface="Arial" panose="020B0604020202020204" pitchFamily="34" charset="0"/>
+                <a:cs typeface="Arial" panose="020B0604020202020204" pitchFamily="34" charset="0"/>
+              </a:rPr>
+              <a:t>el</a:t>
+            </a:r>
+            <a:r>
+              <a:rPr lang="en-US" sz="1200" dirty="0">
+                <a:latin typeface="Arial" panose="020B0604020202020204" pitchFamily="34" charset="0"/>
+                <a:cs typeface="Arial" panose="020B0604020202020204" pitchFamily="34" charset="0"/>
+              </a:rPr>
+              <a:t> </a:t>
+            </a:r>
+            <a:r>
+              <a:rPr lang="en-US" sz="1200" dirty="0" err="1">
+                <a:latin typeface="Arial" panose="020B0604020202020204" pitchFamily="34" charset="0"/>
+                <a:cs typeface="Arial" panose="020B0604020202020204" pitchFamily="34" charset="0"/>
+              </a:rPr>
+              <a:t>índice</a:t>
+            </a:r>
+            <a:r>
+              <a:rPr lang="en-US" sz="1200" dirty="0">
+                <a:latin typeface="Arial" panose="020B0604020202020204" pitchFamily="34" charset="0"/>
+                <a:cs typeface="Arial" panose="020B0604020202020204" pitchFamily="34" charset="0"/>
+              </a:rPr>
+              <a:t> </a:t>
+            </a:r>
+            <a:r>
+              <a:rPr lang="en-US" sz="1200" dirty="0" err="1">
+                <a:latin typeface="Arial" panose="020B0604020202020204" pitchFamily="34" charset="0"/>
+                <a:cs typeface="Arial" panose="020B0604020202020204" pitchFamily="34" charset="0"/>
+              </a:rPr>
+              <a:t>efectivo</a:t>
+            </a:r>
+            <a:r>
+              <a:rPr lang="en-US" sz="1200" dirty="0">
+                <a:latin typeface="Arial" panose="020B0604020202020204" pitchFamily="34" charset="0"/>
+                <a:cs typeface="Arial" panose="020B0604020202020204" pitchFamily="34" charset="0"/>
+              </a:rPr>
+              <a:t> del modo TE0 </a:t>
+            </a:r>
+            <a:r>
+              <a:rPr lang="en-US" sz="1200" dirty="0" err="1">
+                <a:latin typeface="Arial" panose="020B0604020202020204" pitchFamily="34" charset="0"/>
+                <a:cs typeface="Arial" panose="020B0604020202020204" pitchFamily="34" charset="0"/>
+              </a:rPr>
+              <a:t>cae</a:t>
+            </a:r>
+            <a:r>
+              <a:rPr lang="en-US" sz="1200" dirty="0">
+                <a:latin typeface="Arial" panose="020B0604020202020204" pitchFamily="34" charset="0"/>
+                <a:cs typeface="Arial" panose="020B0604020202020204" pitchFamily="34" charset="0"/>
+              </a:rPr>
+              <a:t> </a:t>
+            </a:r>
+            <a:r>
+              <a:rPr lang="en-US" sz="1200" dirty="0" err="1">
+                <a:latin typeface="Arial" panose="020B0604020202020204" pitchFamily="34" charset="0"/>
+                <a:cs typeface="Arial" panose="020B0604020202020204" pitchFamily="34" charset="0"/>
+              </a:rPr>
+              <a:t>bruscamente</a:t>
+            </a:r>
+            <a:r>
+              <a:rPr lang="en-US" sz="1200" dirty="0">
+                <a:latin typeface="Arial" panose="020B0604020202020204" pitchFamily="34" charset="0"/>
+                <a:cs typeface="Arial" panose="020B0604020202020204" pitchFamily="34" charset="0"/>
+              </a:rPr>
+              <a:t> con radios </a:t>
+            </a:r>
+            <a:r>
+              <a:rPr lang="en-US" sz="1200" dirty="0" err="1">
+                <a:latin typeface="Arial" panose="020B0604020202020204" pitchFamily="34" charset="0"/>
+                <a:cs typeface="Arial" panose="020B0604020202020204" pitchFamily="34" charset="0"/>
+              </a:rPr>
+              <a:t>pequeños</a:t>
+            </a:r>
+            <a:r>
+              <a:rPr lang="en-US" sz="1200" dirty="0">
+                <a:latin typeface="Arial" panose="020B0604020202020204" pitchFamily="34" charset="0"/>
+                <a:cs typeface="Arial" panose="020B0604020202020204" pitchFamily="34" charset="0"/>
+              </a:rPr>
+              <a:t> y </a:t>
+            </a:r>
+            <a:r>
+              <a:rPr lang="en-US" sz="1200" dirty="0" err="1">
+                <a:latin typeface="Arial" panose="020B0604020202020204" pitchFamily="34" charset="0"/>
+                <a:cs typeface="Arial" panose="020B0604020202020204" pitchFamily="34" charset="0"/>
+              </a:rPr>
+              <a:t>tiende</a:t>
+            </a:r>
+            <a:r>
+              <a:rPr lang="en-US" sz="1200" dirty="0">
+                <a:latin typeface="Arial" panose="020B0604020202020204" pitchFamily="34" charset="0"/>
+                <a:cs typeface="Arial" panose="020B0604020202020204" pitchFamily="34" charset="0"/>
+              </a:rPr>
+              <a:t> a </a:t>
+            </a:r>
+            <a:r>
+              <a:rPr lang="en-US" sz="1200" dirty="0" err="1">
+                <a:latin typeface="Arial" panose="020B0604020202020204" pitchFamily="34" charset="0"/>
+                <a:cs typeface="Arial" panose="020B0604020202020204" pitchFamily="34" charset="0"/>
+              </a:rPr>
+              <a:t>estabilizarse</a:t>
+            </a:r>
+            <a:r>
+              <a:rPr lang="en-US" sz="1200" dirty="0">
+                <a:latin typeface="Arial" panose="020B0604020202020204" pitchFamily="34" charset="0"/>
+                <a:cs typeface="Arial" panose="020B0604020202020204" pitchFamily="34" charset="0"/>
+              </a:rPr>
+              <a:t> a </a:t>
+            </a:r>
+            <a:r>
+              <a:rPr lang="en-US" sz="1200" dirty="0" err="1">
+                <a:latin typeface="Arial" panose="020B0604020202020204" pitchFamily="34" charset="0"/>
+                <a:cs typeface="Arial" panose="020B0604020202020204" pitchFamily="34" charset="0"/>
+              </a:rPr>
+              <a:t>partir</a:t>
+            </a:r>
+            <a:r>
+              <a:rPr lang="en-US" sz="1200" dirty="0">
+                <a:latin typeface="Arial" panose="020B0604020202020204" pitchFamily="34" charset="0"/>
+                <a:cs typeface="Arial" panose="020B0604020202020204" pitchFamily="34" charset="0"/>
+              </a:rPr>
+              <a:t> de los 75-80um, lo que indica que para radios </a:t>
+            </a:r>
+            <a:r>
+              <a:rPr lang="en-US" sz="1200" dirty="0" err="1">
+                <a:latin typeface="Arial" panose="020B0604020202020204" pitchFamily="34" charset="0"/>
+                <a:cs typeface="Arial" panose="020B0604020202020204" pitchFamily="34" charset="0"/>
+              </a:rPr>
+              <a:t>grandes</a:t>
+            </a:r>
+            <a:r>
+              <a:rPr lang="en-US" sz="1200" dirty="0">
+                <a:latin typeface="Arial" panose="020B0604020202020204" pitchFamily="34" charset="0"/>
+                <a:cs typeface="Arial" panose="020B0604020202020204" pitchFamily="34" charset="0"/>
+              </a:rPr>
+              <a:t> </a:t>
+            </a:r>
+            <a:r>
+              <a:rPr lang="en-US" sz="1200" dirty="0" err="1">
+                <a:latin typeface="Arial" panose="020B0604020202020204" pitchFamily="34" charset="0"/>
+                <a:cs typeface="Arial" panose="020B0604020202020204" pitchFamily="34" charset="0"/>
+              </a:rPr>
+              <a:t>el</a:t>
+            </a:r>
+            <a:r>
+              <a:rPr lang="en-US" sz="1200" dirty="0">
+                <a:latin typeface="Arial" panose="020B0604020202020204" pitchFamily="34" charset="0"/>
+                <a:cs typeface="Arial" panose="020B0604020202020204" pitchFamily="34" charset="0"/>
+              </a:rPr>
+              <a:t> modo se </a:t>
+            </a:r>
+            <a:r>
+              <a:rPr lang="en-US" sz="1200" dirty="0" err="1">
+                <a:latin typeface="Arial" panose="020B0604020202020204" pitchFamily="34" charset="0"/>
+                <a:cs typeface="Arial" panose="020B0604020202020204" pitchFamily="34" charset="0"/>
+              </a:rPr>
+              <a:t>estabiliza</a:t>
+            </a:r>
+            <a:r>
+              <a:rPr lang="en-US" sz="1200" dirty="0">
+                <a:latin typeface="Arial" panose="020B0604020202020204" pitchFamily="34" charset="0"/>
+                <a:cs typeface="Arial" panose="020B0604020202020204" pitchFamily="34" charset="0"/>
+              </a:rPr>
+              <a:t> </a:t>
+            </a:r>
+            <a:r>
+              <a:rPr lang="en-US" sz="1200" dirty="0" err="1">
+                <a:latin typeface="Arial" panose="020B0604020202020204" pitchFamily="34" charset="0"/>
+                <a:cs typeface="Arial" panose="020B0604020202020204" pitchFamily="34" charset="0"/>
+              </a:rPr>
+              <a:t>más</a:t>
+            </a:r>
+            <a:r>
+              <a:rPr lang="en-US" sz="1200" dirty="0">
+                <a:latin typeface="Arial" panose="020B0604020202020204" pitchFamily="34" charset="0"/>
+                <a:cs typeface="Arial" panose="020B0604020202020204" pitchFamily="34" charset="0"/>
+              </a:rPr>
+              <a:t>, </a:t>
+            </a:r>
+            <a:r>
+              <a:rPr lang="en-US" sz="1200" dirty="0" err="1">
+                <a:latin typeface="Arial" panose="020B0604020202020204" pitchFamily="34" charset="0"/>
+                <a:cs typeface="Arial" panose="020B0604020202020204" pitchFamily="34" charset="0"/>
+              </a:rPr>
+              <a:t>casi</a:t>
+            </a:r>
+            <a:r>
+              <a:rPr lang="en-US" sz="1200" dirty="0">
+                <a:latin typeface="Arial" panose="020B0604020202020204" pitchFamily="34" charset="0"/>
+                <a:cs typeface="Arial" panose="020B0604020202020204" pitchFamily="34" charset="0"/>
+              </a:rPr>
+              <a:t> </a:t>
+            </a:r>
+            <a:r>
+              <a:rPr lang="en-US" sz="1200" dirty="0" err="1">
+                <a:latin typeface="Arial" panose="020B0604020202020204" pitchFamily="34" charset="0"/>
+                <a:cs typeface="Arial" panose="020B0604020202020204" pitchFamily="34" charset="0"/>
+              </a:rPr>
+              <a:t>como</a:t>
+            </a:r>
+            <a:r>
+              <a:rPr lang="en-US" sz="1200" dirty="0">
+                <a:latin typeface="Arial" panose="020B0604020202020204" pitchFamily="34" charset="0"/>
+                <a:cs typeface="Arial" panose="020B0604020202020204" pitchFamily="34" charset="0"/>
+              </a:rPr>
+              <a:t> </a:t>
+            </a:r>
+            <a:r>
+              <a:rPr lang="en-US" sz="1200" dirty="0" err="1">
+                <a:latin typeface="Arial" panose="020B0604020202020204" pitchFamily="34" charset="0"/>
+                <a:cs typeface="Arial" panose="020B0604020202020204" pitchFamily="34" charset="0"/>
+              </a:rPr>
+              <a:t>en</a:t>
+            </a:r>
+            <a:r>
+              <a:rPr lang="en-US" sz="1200" dirty="0">
+                <a:latin typeface="Arial" panose="020B0604020202020204" pitchFamily="34" charset="0"/>
+                <a:cs typeface="Arial" panose="020B0604020202020204" pitchFamily="34" charset="0"/>
+              </a:rPr>
+              <a:t> una </a:t>
+            </a:r>
+            <a:r>
+              <a:rPr lang="en-US" sz="1200" dirty="0" err="1">
+                <a:latin typeface="Arial" panose="020B0604020202020204" pitchFamily="34" charset="0"/>
+                <a:cs typeface="Arial" panose="020B0604020202020204" pitchFamily="34" charset="0"/>
+              </a:rPr>
+              <a:t>guía</a:t>
+            </a:r>
+            <a:r>
+              <a:rPr lang="en-US" sz="1200" dirty="0">
+                <a:latin typeface="Arial" panose="020B0604020202020204" pitchFamily="34" charset="0"/>
+                <a:cs typeface="Arial" panose="020B0604020202020204" pitchFamily="34" charset="0"/>
+              </a:rPr>
+              <a:t> recta.</a:t>
+            </a:r>
           </a:p>
           <a:p>
             <a:pPr algn="just"/>
@@ -9744,17 +13247,10 @@
               <a:cs typeface="Arial" panose="020B0604020202020204" pitchFamily="34" charset="0"/>
             </a:endParaRPr>
           </a:p>
-          <a:p>
-            <a:pPr algn="just"/>
-            <a:endParaRPr lang="en-US" sz="1200" dirty="0">
-              <a:latin typeface="Arial" panose="020B0604020202020204" pitchFamily="34" charset="0"/>
-              <a:cs typeface="Arial" panose="020B0604020202020204" pitchFamily="34" charset="0"/>
-            </a:endParaRPr>
-          </a:p>
         </p:txBody>
       </p:sp>
-      <mc:AlternateContent xmlns:mc="http://schemas.openxmlformats.org/markup-compatibility/2006" xmlns:a14="http://schemas.microsoft.com/office/drawing/2010/main">
-        <mc:Choice Requires="a14">
+      <mc:AlternateContent xmlns:mc="http://schemas.openxmlformats.org/markup-compatibility/2006">
+        <mc:Choice xmlns:a14="http://schemas.microsoft.com/office/drawing/2010/main" Requires="a14">
           <p:sp>
             <p:nvSpPr>
               <p:cNvPr id="6" name="CuadroTexto 5">
@@ -9769,7 +13265,7 @@
             </p:nvSpPr>
             <p:spPr>
               <a:xfrm>
-                <a:off x="9941529" y="4179383"/>
+                <a:off x="9598047" y="3152464"/>
                 <a:ext cx="1856534" cy="439608"/>
               </a:xfrm>
               <a:prstGeom prst="rect">
@@ -9941,7 +13437,7 @@
             </p:txBody>
           </p:sp>
         </mc:Choice>
-        <mc:Fallback xmlns="">
+        <mc:Fallback>
           <p:sp>
             <p:nvSpPr>
               <p:cNvPr id="6" name="CuadroTexto 5">
@@ -9958,7 +13454,7 @@
             </p:nvSpPr>
             <p:spPr>
               <a:xfrm>
-                <a:off x="9941529" y="4179383"/>
+                <a:off x="9598047" y="3152464"/>
                 <a:ext cx="1856534" cy="439608"/>
               </a:xfrm>
               <a:prstGeom prst="rect">
@@ -9967,7 +13463,7 @@
               <a:blipFill>
                 <a:blip r:embed="rId5"/>
                 <a:stretch>
-                  <a:fillRect l="-3289" b="-13889"/>
+                  <a:fillRect l="-3279" b="-15278"/>
                 </a:stretch>
               </a:blipFill>
             </p:spPr>
@@ -10001,7 +13497,7 @@
         <p:spPr>
           <a:xfrm>
             <a:off x="609441" y="1418373"/>
-            <a:ext cx="11199971" cy="3306028"/>
+            <a:ext cx="11199971" cy="2772627"/>
           </a:xfrm>
           <a:prstGeom prst="rect">
             <a:avLst/>
@@ -10053,7 +13549,7 @@
         <p:spPr>
           <a:xfrm>
             <a:off x="7384749" y="1454159"/>
-            <a:ext cx="4787917" cy="923330"/>
+            <a:ext cx="4787917" cy="1477328"/>
           </a:xfrm>
           <a:prstGeom prst="rect">
             <a:avLst/>
@@ -10084,17 +13580,28 @@
             <a:pPr algn="ctr"/>
             <a:r>
               <a:rPr lang="en-US" dirty="0"/>
-              <a:t>Paste dB/90º neff_TE0 &amp; neff_TM0 vs R</a:t>
-            </a:r>
+              <a:t>Paste dB/90º vs R</a:t>
+            </a:r>
+          </a:p>
+          <a:p>
+            <a:pPr algn="ctr"/>
+            <a:r>
+              <a:rPr lang="en-US" dirty="0"/>
+              <a:t>neff_TE0 vs R</a:t>
+            </a:r>
+          </a:p>
+          <a:p>
+            <a:pPr algn="ctr"/>
+            <a:endParaRPr lang="en-US" dirty="0"/>
           </a:p>
         </p:txBody>
       </p:sp>
       <p:pic>
         <p:nvPicPr>
-          <p:cNvPr id="5" name="Imagen 4">
+          <p:cNvPr id="10" name="Imagen 9">
             <a:extLst>
               <a:ext uri="{FF2B5EF4-FFF2-40B4-BE49-F238E27FC236}">
-                <a16:creationId xmlns:a16="http://schemas.microsoft.com/office/drawing/2014/main" id="{8F0FC54B-C373-4C33-8B01-4EC55B8AF274}"/>
+                <a16:creationId xmlns:a16="http://schemas.microsoft.com/office/drawing/2014/main" id="{3930F783-CE36-43E1-85D9-BDA07B3EF219}"/>
               </a:ext>
             </a:extLst>
           </p:cNvPr>
@@ -10111,8 +13618,38 @@
         </p:blipFill>
         <p:spPr>
           <a:xfrm>
-            <a:off x="3386650" y="1498925"/>
-            <a:ext cx="3956043" cy="3124999"/>
+            <a:off x="930571" y="1654411"/>
+            <a:ext cx="3031829" cy="2394935"/>
+          </a:xfrm>
+          <a:prstGeom prst="rect">
+            <a:avLst/>
+          </a:prstGeom>
+        </p:spPr>
+      </p:pic>
+      <p:pic>
+        <p:nvPicPr>
+          <p:cNvPr id="12" name="Imagen 11">
+            <a:extLst>
+              <a:ext uri="{FF2B5EF4-FFF2-40B4-BE49-F238E27FC236}">
+                <a16:creationId xmlns:a16="http://schemas.microsoft.com/office/drawing/2014/main" id="{B010E059-E618-4FBF-9123-688086FB0CEF}"/>
+              </a:ext>
+            </a:extLst>
+          </p:cNvPr>
+          <p:cNvPicPr>
+            <a:picLocks noChangeAspect="1"/>
+          </p:cNvPicPr>
+          <p:nvPr/>
+        </p:nvPicPr>
+        <p:blipFill>
+          <a:blip r:embed="rId7"/>
+          <a:stretch>
+            <a:fillRect/>
+          </a:stretch>
+        </p:blipFill>
+        <p:spPr>
+          <a:xfrm>
+            <a:off x="4461418" y="1677267"/>
+            <a:ext cx="3082381" cy="2319034"/>
           </a:xfrm>
           <a:prstGeom prst="rect">
             <a:avLst/>
@@ -10132,7 +13669,7 @@
 </p:sld>
 </file>
 
-<file path=ppt/slides/slide7.xml><?xml version="1.0" encoding="utf-8"?>
+<file path=ppt/slides/slide8.xml><?xml version="1.0" encoding="utf-8"?>
 <p:sld xmlns:a="http://schemas.openxmlformats.org/drawingml/2006/main" xmlns:r="http://schemas.openxmlformats.org/officeDocument/2006/relationships" xmlns:p="http://schemas.openxmlformats.org/presentationml/2006/main">
   <p:cSld>
     <p:spTree>
@@ -10271,7 +13808,7 @@
           <a:p>
             <a:fld id="{B6F15528-21DE-4FAA-801E-634DDDAF4B2B}" type="slidenum">
               <a:rPr lang="es-ES" smtClean="0"/>
-              <a:t>7</a:t>
+              <a:t>8</a:t>
             </a:fld>
             <a:endParaRPr lang="es-ES"/>
           </a:p>

--- a/LabBook_10.pptx
+++ b/LabBook_10.pptx
@@ -5,10 +5,10 @@
     <p:sldMasterId id="2147483648" r:id="rId1"/>
   </p:sldMasterIdLst>
   <p:notesMasterIdLst>
-    <p:notesMasterId r:id="rId10"/>
+    <p:notesMasterId r:id="rId13"/>
   </p:notesMasterIdLst>
   <p:handoutMasterIdLst>
-    <p:handoutMasterId r:id="rId11"/>
+    <p:handoutMasterId r:id="rId14"/>
   </p:handoutMasterIdLst>
   <p:sldIdLst>
     <p:sldId id="256" r:id="rId2"/>
@@ -18,7 +18,10 @@
     <p:sldId id="297" r:id="rId6"/>
     <p:sldId id="298" r:id="rId7"/>
     <p:sldId id="293" r:id="rId8"/>
-    <p:sldId id="288" r:id="rId9"/>
+    <p:sldId id="300" r:id="rId9"/>
+    <p:sldId id="302" r:id="rId10"/>
+    <p:sldId id="303" r:id="rId11"/>
+    <p:sldId id="288" r:id="rId12"/>
   </p:sldIdLst>
   <p:sldSz cx="12192000" cy="6858000"/>
   <p:notesSz cx="12192000" cy="6858000"/>
@@ -393,7 +396,7 @@
           <a:p>
             <a:fld id="{8438F8DC-35B0-48E6-A86E-42F1F08DD00F}" type="datetimeFigureOut">
               <a:rPr lang="es-ES" smtClean="0"/>
-              <a:t>02/03/2026</a:t>
+              <a:t>03/03/2026</a:t>
             </a:fld>
             <a:endParaRPr lang="es-ES"/>
           </a:p>
@@ -570,7 +573,7 @@
           <a:p>
             <a:fld id="{FACBDC12-F39B-4B97-8F4D-6734F9D366FF}" type="datetimeFigureOut">
               <a:rPr lang="es-ES" smtClean="0"/>
-              <a:t>02/03/2026</a:t>
+              <a:t>03/03/2026</a:t>
             </a:fld>
             <a:endParaRPr lang="es-ES"/>
           </a:p>
@@ -1236,6 +1239,222 @@
     <p:extLst>
       <p:ext uri="{BB962C8B-B14F-4D97-AF65-F5344CB8AC3E}">
         <p14:creationId xmlns:p14="http://schemas.microsoft.com/office/powerpoint/2010/main" val="2917382716"/>
+      </p:ext>
+    </p:extLst>
+  </p:cSld>
+  <p:clrMapOvr>
+    <a:masterClrMapping/>
+  </p:clrMapOvr>
+</p:notes>
+</file>
+
+<file path=ppt/notesSlides/notesSlide5.xml><?xml version="1.0" encoding="utf-8"?>
+<p:notes xmlns:a="http://schemas.openxmlformats.org/drawingml/2006/main" xmlns:r="http://schemas.openxmlformats.org/officeDocument/2006/relationships" xmlns:p="http://schemas.openxmlformats.org/presentationml/2006/main">
+  <p:cSld>
+    <p:spTree>
+      <p:nvGrpSpPr>
+        <p:cNvPr id="1" name="">
+          <a:extLst>
+            <a:ext uri="{FF2B5EF4-FFF2-40B4-BE49-F238E27FC236}">
+              <a16:creationId xmlns:a16="http://schemas.microsoft.com/office/drawing/2014/main" id="{7A69AA65-166B-474B-A6C9-9858D86A9448}"/>
+            </a:ext>
+          </a:extLst>
+        </p:cNvPr>
+        <p:cNvGrpSpPr/>
+        <p:nvPr/>
+      </p:nvGrpSpPr>
+      <p:grpSpPr>
+        <a:xfrm>
+          <a:off x="0" y="0"/>
+          <a:ext cx="0" cy="0"/>
+          <a:chOff x="0" y="0"/>
+          <a:chExt cx="0" cy="0"/>
+        </a:xfrm>
+      </p:grpSpPr>
+      <p:sp>
+        <p:nvSpPr>
+          <p:cNvPr id="2" name="Marcador de imagen de diapositiva 1">
+            <a:extLst>
+              <a:ext uri="{FF2B5EF4-FFF2-40B4-BE49-F238E27FC236}">
+                <a16:creationId xmlns:a16="http://schemas.microsoft.com/office/drawing/2014/main" id="{38158223-A8BA-05F6-464C-EC03A9FB8C56}"/>
+              </a:ext>
+            </a:extLst>
+          </p:cNvPr>
+          <p:cNvSpPr>
+            <a:spLocks noGrp="1" noRot="1" noChangeAspect="1"/>
+          </p:cNvSpPr>
+          <p:nvPr>
+            <p:ph type="sldImg"/>
+          </p:nvPr>
+        </p:nvSpPr>
+        <p:spPr/>
+      </p:sp>
+      <p:sp>
+        <p:nvSpPr>
+          <p:cNvPr id="3" name="Marcador de notas 2">
+            <a:extLst>
+              <a:ext uri="{FF2B5EF4-FFF2-40B4-BE49-F238E27FC236}">
+                <a16:creationId xmlns:a16="http://schemas.microsoft.com/office/drawing/2014/main" id="{F6ECB4DF-C329-8F47-9ECE-661B5B2BF9AC}"/>
+              </a:ext>
+            </a:extLst>
+          </p:cNvPr>
+          <p:cNvSpPr>
+            <a:spLocks noGrp="1"/>
+          </p:cNvSpPr>
+          <p:nvPr>
+            <p:ph type="body" idx="1"/>
+          </p:nvPr>
+        </p:nvSpPr>
+        <p:spPr/>
+        <p:txBody>
+          <a:bodyPr/>
+          <a:lstStyle/>
+          <a:p>
+            <a:endParaRPr lang="es-ES" dirty="0"/>
+          </a:p>
+        </p:txBody>
+      </p:sp>
+      <p:sp>
+        <p:nvSpPr>
+          <p:cNvPr id="4" name="Marcador de número de diapositiva 3">
+            <a:extLst>
+              <a:ext uri="{FF2B5EF4-FFF2-40B4-BE49-F238E27FC236}">
+                <a16:creationId xmlns:a16="http://schemas.microsoft.com/office/drawing/2014/main" id="{041B2276-A4E2-DFBF-0088-6997E86C9FE1}"/>
+              </a:ext>
+            </a:extLst>
+          </p:cNvPr>
+          <p:cNvSpPr>
+            <a:spLocks noGrp="1"/>
+          </p:cNvSpPr>
+          <p:nvPr>
+            <p:ph type="sldNum" sz="quarter" idx="5"/>
+          </p:nvPr>
+        </p:nvSpPr>
+        <p:spPr/>
+        <p:txBody>
+          <a:bodyPr/>
+          <a:lstStyle/>
+          <a:p>
+            <a:fld id="{676223B9-C868-4436-87D9-1A3152E1157A}" type="slidenum">
+              <a:rPr lang="es-ES" smtClean="0"/>
+              <a:t>9</a:t>
+            </a:fld>
+            <a:endParaRPr lang="es-ES"/>
+          </a:p>
+        </p:txBody>
+      </p:sp>
+    </p:spTree>
+    <p:extLst>
+      <p:ext uri="{BB962C8B-B14F-4D97-AF65-F5344CB8AC3E}">
+        <p14:creationId xmlns:p14="http://schemas.microsoft.com/office/powerpoint/2010/main" val="2929506952"/>
+      </p:ext>
+    </p:extLst>
+  </p:cSld>
+  <p:clrMapOvr>
+    <a:masterClrMapping/>
+  </p:clrMapOvr>
+</p:notes>
+</file>
+
+<file path=ppt/notesSlides/notesSlide6.xml><?xml version="1.0" encoding="utf-8"?>
+<p:notes xmlns:a="http://schemas.openxmlformats.org/drawingml/2006/main" xmlns:r="http://schemas.openxmlformats.org/officeDocument/2006/relationships" xmlns:p="http://schemas.openxmlformats.org/presentationml/2006/main">
+  <p:cSld>
+    <p:spTree>
+      <p:nvGrpSpPr>
+        <p:cNvPr id="1" name="">
+          <a:extLst>
+            <a:ext uri="{FF2B5EF4-FFF2-40B4-BE49-F238E27FC236}">
+              <a16:creationId xmlns:a16="http://schemas.microsoft.com/office/drawing/2014/main" id="{7B023B86-D15F-9CD8-C5EA-3EAAD8BACCF7}"/>
+            </a:ext>
+          </a:extLst>
+        </p:cNvPr>
+        <p:cNvGrpSpPr/>
+        <p:nvPr/>
+      </p:nvGrpSpPr>
+      <p:grpSpPr>
+        <a:xfrm>
+          <a:off x="0" y="0"/>
+          <a:ext cx="0" cy="0"/>
+          <a:chOff x="0" y="0"/>
+          <a:chExt cx="0" cy="0"/>
+        </a:xfrm>
+      </p:grpSpPr>
+      <p:sp>
+        <p:nvSpPr>
+          <p:cNvPr id="2" name="Marcador de imagen de diapositiva 1">
+            <a:extLst>
+              <a:ext uri="{FF2B5EF4-FFF2-40B4-BE49-F238E27FC236}">
+                <a16:creationId xmlns:a16="http://schemas.microsoft.com/office/drawing/2014/main" id="{5C73881A-26A5-ECF9-C6F2-3DEFA77AEFCC}"/>
+              </a:ext>
+            </a:extLst>
+          </p:cNvPr>
+          <p:cNvSpPr>
+            <a:spLocks noGrp="1" noRot="1" noChangeAspect="1"/>
+          </p:cNvSpPr>
+          <p:nvPr>
+            <p:ph type="sldImg"/>
+          </p:nvPr>
+        </p:nvSpPr>
+        <p:spPr/>
+      </p:sp>
+      <p:sp>
+        <p:nvSpPr>
+          <p:cNvPr id="3" name="Marcador de notas 2">
+            <a:extLst>
+              <a:ext uri="{FF2B5EF4-FFF2-40B4-BE49-F238E27FC236}">
+                <a16:creationId xmlns:a16="http://schemas.microsoft.com/office/drawing/2014/main" id="{3B7AFC79-4973-3930-959B-AEF8810CFE6A}"/>
+              </a:ext>
+            </a:extLst>
+          </p:cNvPr>
+          <p:cNvSpPr>
+            <a:spLocks noGrp="1"/>
+          </p:cNvSpPr>
+          <p:nvPr>
+            <p:ph type="body" idx="1"/>
+          </p:nvPr>
+        </p:nvSpPr>
+        <p:spPr/>
+        <p:txBody>
+          <a:bodyPr/>
+          <a:lstStyle/>
+          <a:p>
+            <a:endParaRPr lang="es-ES" dirty="0"/>
+          </a:p>
+        </p:txBody>
+      </p:sp>
+      <p:sp>
+        <p:nvSpPr>
+          <p:cNvPr id="4" name="Marcador de número de diapositiva 3">
+            <a:extLst>
+              <a:ext uri="{FF2B5EF4-FFF2-40B4-BE49-F238E27FC236}">
+                <a16:creationId xmlns:a16="http://schemas.microsoft.com/office/drawing/2014/main" id="{8345D0F3-6273-0338-FCDA-175B73D7C9EB}"/>
+              </a:ext>
+            </a:extLst>
+          </p:cNvPr>
+          <p:cNvSpPr>
+            <a:spLocks noGrp="1"/>
+          </p:cNvSpPr>
+          <p:nvPr>
+            <p:ph type="sldNum" sz="quarter" idx="5"/>
+          </p:nvPr>
+        </p:nvSpPr>
+        <p:spPr/>
+        <p:txBody>
+          <a:bodyPr/>
+          <a:lstStyle/>
+          <a:p>
+            <a:fld id="{676223B9-C868-4436-87D9-1A3152E1157A}" type="slidenum">
+              <a:rPr lang="es-ES" smtClean="0"/>
+              <a:t>10</a:t>
+            </a:fld>
+            <a:endParaRPr lang="es-ES"/>
+          </a:p>
+        </p:txBody>
+      </p:sp>
+    </p:spTree>
+    <p:extLst>
+      <p:ext uri="{BB962C8B-B14F-4D97-AF65-F5344CB8AC3E}">
+        <p14:creationId xmlns:p14="http://schemas.microsoft.com/office/powerpoint/2010/main" val="2976832491"/>
       </p:ext>
     </p:extLst>
   </p:cSld>
@@ -2762,7 +2981,7 @@
                 <a:latin typeface="Arial"/>
                 <a:cs typeface="Arial"/>
               </a:rPr>
-              <a:t>: </a:t>
+              <a:t>: Nadia Martí García</a:t>
             </a:r>
             <a:endParaRPr sz="1800" dirty="0">
               <a:latin typeface="Arial"/>
@@ -2824,6 +3043,1311 @@
             <a:fld id="{B6F15528-21DE-4FAA-801E-634DDDAF4B2B}" type="slidenum">
               <a:rPr lang="es-ES" smtClean="0"/>
               <a:t>1</a:t>
+            </a:fld>
+            <a:endParaRPr lang="es-ES"/>
+          </a:p>
+        </p:txBody>
+      </p:sp>
+    </p:spTree>
+  </p:cSld>
+  <p:clrMapOvr>
+    <a:masterClrMapping/>
+  </p:clrMapOvr>
+</p:sld>
+</file>
+
+<file path=ppt/slides/slide10.xml><?xml version="1.0" encoding="utf-8"?>
+<p:sld xmlns:a="http://schemas.openxmlformats.org/drawingml/2006/main" xmlns:r="http://schemas.openxmlformats.org/officeDocument/2006/relationships" xmlns:p="http://schemas.openxmlformats.org/presentationml/2006/main">
+  <p:cSld>
+    <p:spTree>
+      <p:nvGrpSpPr>
+        <p:cNvPr id="1" name="">
+          <a:extLst>
+            <a:ext uri="{FF2B5EF4-FFF2-40B4-BE49-F238E27FC236}">
+              <a16:creationId xmlns:a16="http://schemas.microsoft.com/office/drawing/2014/main" id="{25434E70-43B1-3881-1771-20FB4358471D}"/>
+            </a:ext>
+          </a:extLst>
+        </p:cNvPr>
+        <p:cNvGrpSpPr/>
+        <p:nvPr/>
+      </p:nvGrpSpPr>
+      <p:grpSpPr>
+        <a:xfrm>
+          <a:off x="0" y="0"/>
+          <a:ext cx="0" cy="0"/>
+          <a:chOff x="0" y="0"/>
+          <a:chExt cx="0" cy="0"/>
+        </a:xfrm>
+      </p:grpSpPr>
+      <p:sp>
+        <p:nvSpPr>
+          <p:cNvPr id="16" name="object 16">
+            <a:extLst>
+              <a:ext uri="{FF2B5EF4-FFF2-40B4-BE49-F238E27FC236}">
+                <a16:creationId xmlns:a16="http://schemas.microsoft.com/office/drawing/2014/main" id="{742C31CE-19F0-B995-0997-9A2D6A879BF7}"/>
+              </a:ext>
+            </a:extLst>
+          </p:cNvPr>
+          <p:cNvSpPr txBox="1">
+            <a:spLocks noGrp="1"/>
+          </p:cNvSpPr>
+          <p:nvPr>
+            <p:ph type="title"/>
+          </p:nvPr>
+        </p:nvSpPr>
+        <p:spPr>
+          <a:xfrm>
+            <a:off x="1551916" y="351630"/>
+            <a:ext cx="10994410" cy="1090042"/>
+          </a:xfrm>
+          <a:prstGeom prst="rect">
+            <a:avLst/>
+          </a:prstGeom>
+        </p:spPr>
+        <p:txBody>
+          <a:bodyPr vert="horz" wrap="square" lIns="0" tIns="12700" rIns="0" bIns="0" rtlCol="0">
+            <a:spAutoFit/>
+          </a:bodyPr>
+          <a:lstStyle/>
+          <a:p>
+            <a:pPr marL="12700">
+              <a:lnSpc>
+                <a:spcPct val="100000"/>
+              </a:lnSpc>
+              <a:spcBef>
+                <a:spcPts val="100"/>
+              </a:spcBef>
+            </a:pPr>
+            <a:r>
+              <a:rPr lang="en-US" sz="2500" dirty="0"/>
+              <a:t>Learning outcome #4 – Bend waveguide radius vs. loss – deep</a:t>
+            </a:r>
+            <a:br>
+              <a:rPr lang="en-US" sz="2500" dirty="0"/>
+            </a:br>
+            <a:r>
+              <a:rPr lang="en-US" b="0" dirty="0"/>
+              <a:t>Find  neff_TE0 for </a:t>
+            </a:r>
+            <a:r>
+              <a:rPr lang="en-US" b="0" dirty="0" err="1"/>
+              <a:t>wvl</a:t>
+            </a:r>
+            <a:r>
+              <a:rPr lang="en-US" b="0" dirty="0"/>
+              <a:t> 1.55 µm, width 0.5 µm for R=[5,30]µm Core= Si</a:t>
+            </a:r>
+            <a:br>
+              <a:rPr lang="en-US" sz="2500" dirty="0"/>
+            </a:br>
+            <a:endParaRPr lang="en-US" sz="2500" b="0" dirty="0">
+              <a:latin typeface="+mj-lt"/>
+              <a:cs typeface="Lucida Sans"/>
+            </a:endParaRPr>
+          </a:p>
+        </p:txBody>
+      </p:sp>
+      <p:pic>
+        <p:nvPicPr>
+          <p:cNvPr id="83" name="Gráfico 82">
+            <a:extLst>
+              <a:ext uri="{FF2B5EF4-FFF2-40B4-BE49-F238E27FC236}">
+                <a16:creationId xmlns:a16="http://schemas.microsoft.com/office/drawing/2014/main" id="{D688A609-F3DC-EE34-C536-683E70F32EAE}"/>
+              </a:ext>
+            </a:extLst>
+          </p:cNvPr>
+          <p:cNvPicPr>
+            <a:picLocks noChangeAspect="1"/>
+          </p:cNvPicPr>
+          <p:nvPr/>
+        </p:nvPicPr>
+        <p:blipFill>
+          <a:blip r:embed="rId3">
+            <a:extLst>
+              <a:ext uri="{96DAC541-7B7A-43D3-8B79-37D633B846F1}">
+                <asvg:svgBlip xmlns:asvg="http://schemas.microsoft.com/office/drawing/2016/SVG/main" r:embed="rId4"/>
+              </a:ext>
+            </a:extLst>
+          </a:blip>
+          <a:stretch>
+            <a:fillRect/>
+          </a:stretch>
+        </p:blipFill>
+        <p:spPr>
+          <a:xfrm>
+            <a:off x="5045006" y="6356057"/>
+            <a:ext cx="6409575" cy="363174"/>
+          </a:xfrm>
+          <a:prstGeom prst="rect">
+            <a:avLst/>
+          </a:prstGeom>
+        </p:spPr>
+      </p:pic>
+      <p:sp>
+        <p:nvSpPr>
+          <p:cNvPr id="84" name="Marcador de número de diapositiva 83">
+            <a:extLst>
+              <a:ext uri="{FF2B5EF4-FFF2-40B4-BE49-F238E27FC236}">
+                <a16:creationId xmlns:a16="http://schemas.microsoft.com/office/drawing/2014/main" id="{B6C672C6-89D4-7E67-2B94-811D081786A7}"/>
+              </a:ext>
+            </a:extLst>
+          </p:cNvPr>
+          <p:cNvSpPr>
+            <a:spLocks noGrp="1"/>
+          </p:cNvSpPr>
+          <p:nvPr>
+            <p:ph type="sldNum" sz="quarter" idx="7"/>
+          </p:nvPr>
+        </p:nvSpPr>
+        <p:spPr/>
+        <p:txBody>
+          <a:bodyPr/>
+          <a:lstStyle/>
+          <a:p>
+            <a:fld id="{B6F15528-21DE-4FAA-801E-634DDDAF4B2B}" type="slidenum">
+              <a:rPr lang="es-ES" smtClean="0"/>
+              <a:t>10</a:t>
+            </a:fld>
+            <a:endParaRPr lang="es-ES"/>
+          </a:p>
+        </p:txBody>
+      </p:sp>
+      <p:sp>
+        <p:nvSpPr>
+          <p:cNvPr id="3" name="Marcador de pie de página 2">
+            <a:extLst>
+              <a:ext uri="{FF2B5EF4-FFF2-40B4-BE49-F238E27FC236}">
+                <a16:creationId xmlns:a16="http://schemas.microsoft.com/office/drawing/2014/main" id="{AA1F4313-D710-7A3E-7A8F-EB77DEE3C1A7}"/>
+              </a:ext>
+            </a:extLst>
+          </p:cNvPr>
+          <p:cNvSpPr>
+            <a:spLocks noGrp="1"/>
+          </p:cNvSpPr>
+          <p:nvPr>
+            <p:ph type="ftr" sz="quarter" idx="5"/>
+          </p:nvPr>
+        </p:nvSpPr>
+        <p:spPr/>
+        <p:txBody>
+          <a:bodyPr/>
+          <a:lstStyle/>
+          <a:p>
+            <a:pPr marL="12700">
+              <a:spcBef>
+                <a:spcPts val="15"/>
+              </a:spcBef>
+            </a:pPr>
+            <a:r>
+              <a:rPr lang="es-ES" spc="-5" dirty="0"/>
+              <a:t>LAB 1.0. WAVEGUIDES</a:t>
+            </a:r>
+          </a:p>
+        </p:txBody>
+      </p:sp>
+      <p:sp>
+        <p:nvSpPr>
+          <p:cNvPr id="2" name="CuadroTexto 1">
+            <a:extLst>
+              <a:ext uri="{FF2B5EF4-FFF2-40B4-BE49-F238E27FC236}">
+                <a16:creationId xmlns:a16="http://schemas.microsoft.com/office/drawing/2014/main" id="{FDE3A197-9508-F9F1-1FEB-FF883D78C151}"/>
+              </a:ext>
+            </a:extLst>
+          </p:cNvPr>
+          <p:cNvSpPr txBox="1"/>
+          <p:nvPr/>
+        </p:nvSpPr>
+        <p:spPr>
+          <a:xfrm>
+            <a:off x="708660" y="4635272"/>
+            <a:ext cx="11199971" cy="1569660"/>
+          </a:xfrm>
+          <a:prstGeom prst="rect">
+            <a:avLst/>
+          </a:prstGeom>
+          <a:solidFill>
+            <a:schemeClr val="bg1">
+              <a:lumMod val="95000"/>
+            </a:schemeClr>
+          </a:solidFill>
+          <a:ln w="28575">
+            <a:solidFill>
+              <a:srgbClr val="E0700D"/>
+            </a:solidFill>
+          </a:ln>
+        </p:spPr>
+        <p:txBody>
+          <a:bodyPr wrap="square" rtlCol="0">
+            <a:spAutoFit/>
+          </a:bodyPr>
+          <a:lstStyle/>
+          <a:p>
+            <a:pPr algn="just"/>
+            <a:r>
+              <a:rPr lang="en-US" sz="1200" dirty="0">
+                <a:latin typeface="Arial" panose="020B0604020202020204" pitchFamily="34" charset="0"/>
+                <a:cs typeface="Arial" panose="020B0604020202020204" pitchFamily="34" charset="0"/>
+              </a:rPr>
+              <a:t>Comment results, which is the safe radius, consider safe means less than 0.1 dB/90º.</a:t>
+            </a:r>
+          </a:p>
+          <a:p>
+            <a:pPr algn="just"/>
+            <a:endParaRPr lang="en-US" sz="1200" dirty="0">
+              <a:latin typeface="Arial" panose="020B0604020202020204" pitchFamily="34" charset="0"/>
+              <a:cs typeface="Arial" panose="020B0604020202020204" pitchFamily="34" charset="0"/>
+            </a:endParaRPr>
+          </a:p>
+          <a:p>
+            <a:pPr algn="just"/>
+            <a:r>
+              <a:rPr lang="en-US" sz="1200" dirty="0" err="1">
+                <a:latin typeface="Arial" panose="020B0604020202020204" pitchFamily="34" charset="0"/>
+                <a:cs typeface="Arial" panose="020B0604020202020204" pitchFamily="34" charset="0"/>
+              </a:rPr>
+              <a:t>En</a:t>
+            </a:r>
+            <a:r>
+              <a:rPr lang="en-US" sz="1200" dirty="0">
+                <a:latin typeface="Arial" panose="020B0604020202020204" pitchFamily="34" charset="0"/>
+                <a:cs typeface="Arial" panose="020B0604020202020204" pitchFamily="34" charset="0"/>
+              </a:rPr>
+              <a:t> </a:t>
+            </a:r>
+            <a:r>
+              <a:rPr lang="en-US" sz="1200" dirty="0" err="1">
+                <a:latin typeface="Arial" panose="020B0604020202020204" pitchFamily="34" charset="0"/>
+                <a:cs typeface="Arial" panose="020B0604020202020204" pitchFamily="34" charset="0"/>
+              </a:rPr>
+              <a:t>este</a:t>
+            </a:r>
+            <a:r>
+              <a:rPr lang="en-US" sz="1200" dirty="0">
+                <a:latin typeface="Arial" panose="020B0604020202020204" pitchFamily="34" charset="0"/>
+                <a:cs typeface="Arial" panose="020B0604020202020204" pitchFamily="34" charset="0"/>
+              </a:rPr>
+              <a:t> </a:t>
+            </a:r>
+            <a:r>
+              <a:rPr lang="en-US" sz="1200" dirty="0" err="1">
+                <a:latin typeface="Arial" panose="020B0604020202020204" pitchFamily="34" charset="0"/>
+                <a:cs typeface="Arial" panose="020B0604020202020204" pitchFamily="34" charset="0"/>
+              </a:rPr>
+              <a:t>caso</a:t>
+            </a:r>
+            <a:r>
+              <a:rPr lang="en-US" sz="1200" dirty="0">
+                <a:latin typeface="Arial" panose="020B0604020202020204" pitchFamily="34" charset="0"/>
+                <a:cs typeface="Arial" panose="020B0604020202020204" pitchFamily="34" charset="0"/>
+              </a:rPr>
+              <a:t> </a:t>
+            </a:r>
+            <a:r>
+              <a:rPr lang="en-US" sz="1200" dirty="0" err="1">
+                <a:latin typeface="Arial" panose="020B0604020202020204" pitchFamily="34" charset="0"/>
+                <a:cs typeface="Arial" panose="020B0604020202020204" pitchFamily="34" charset="0"/>
+              </a:rPr>
+              <a:t>analizando</a:t>
+            </a:r>
+            <a:r>
+              <a:rPr lang="en-US" sz="1200" dirty="0">
+                <a:latin typeface="Arial" panose="020B0604020202020204" pitchFamily="34" charset="0"/>
+                <a:cs typeface="Arial" panose="020B0604020202020204" pitchFamily="34" charset="0"/>
+              </a:rPr>
+              <a:t> los </a:t>
+            </a:r>
+            <a:r>
+              <a:rPr lang="en-US" sz="1200" dirty="0" err="1">
+                <a:latin typeface="Arial" panose="020B0604020202020204" pitchFamily="34" charset="0"/>
+                <a:cs typeface="Arial" panose="020B0604020202020204" pitchFamily="34" charset="0"/>
+              </a:rPr>
+              <a:t>resultados</a:t>
+            </a:r>
+            <a:r>
+              <a:rPr lang="en-US" sz="1200" dirty="0">
+                <a:latin typeface="Arial" panose="020B0604020202020204" pitchFamily="34" charset="0"/>
+                <a:cs typeface="Arial" panose="020B0604020202020204" pitchFamily="34" charset="0"/>
+              </a:rPr>
+              <a:t> </a:t>
+            </a:r>
+            <a:r>
+              <a:rPr lang="en-US" sz="1200" dirty="0" err="1">
+                <a:latin typeface="Arial" panose="020B0604020202020204" pitchFamily="34" charset="0"/>
+                <a:cs typeface="Arial" panose="020B0604020202020204" pitchFamily="34" charset="0"/>
+              </a:rPr>
+              <a:t>escogería</a:t>
+            </a:r>
+            <a:r>
+              <a:rPr lang="en-US" sz="1200" dirty="0">
+                <a:latin typeface="Arial" panose="020B0604020202020204" pitchFamily="34" charset="0"/>
+                <a:cs typeface="Arial" panose="020B0604020202020204" pitchFamily="34" charset="0"/>
+              </a:rPr>
+              <a:t> un safe radius de 10 um, </a:t>
+            </a:r>
+            <a:r>
+              <a:rPr lang="en-US" sz="1200" dirty="0" err="1">
+                <a:latin typeface="Arial" panose="020B0604020202020204" pitchFamily="34" charset="0"/>
+                <a:cs typeface="Arial" panose="020B0604020202020204" pitchFamily="34" charset="0"/>
+              </a:rPr>
+              <a:t>pues</a:t>
+            </a:r>
+            <a:r>
+              <a:rPr lang="en-US" sz="1200" dirty="0">
+                <a:latin typeface="Arial" panose="020B0604020202020204" pitchFamily="34" charset="0"/>
+                <a:cs typeface="Arial" panose="020B0604020202020204" pitchFamily="34" charset="0"/>
+              </a:rPr>
+              <a:t> es </a:t>
+            </a:r>
+            <a:r>
+              <a:rPr lang="en-US" sz="1200" dirty="0" err="1">
+                <a:latin typeface="Arial" panose="020B0604020202020204" pitchFamily="34" charset="0"/>
+                <a:cs typeface="Arial" panose="020B0604020202020204" pitchFamily="34" charset="0"/>
+              </a:rPr>
+              <a:t>el</a:t>
+            </a:r>
+            <a:r>
+              <a:rPr lang="en-US" sz="1200" dirty="0">
+                <a:latin typeface="Arial" panose="020B0604020202020204" pitchFamily="34" charset="0"/>
+                <a:cs typeface="Arial" panose="020B0604020202020204" pitchFamily="34" charset="0"/>
+              </a:rPr>
+              <a:t> valor </a:t>
+            </a:r>
+            <a:r>
+              <a:rPr lang="en-US" sz="1200" dirty="0" err="1">
+                <a:latin typeface="Arial" panose="020B0604020202020204" pitchFamily="34" charset="0"/>
+                <a:cs typeface="Arial" panose="020B0604020202020204" pitchFamily="34" charset="0"/>
+              </a:rPr>
+              <a:t>donde</a:t>
+            </a:r>
+            <a:r>
+              <a:rPr lang="en-US" sz="1200" dirty="0">
+                <a:latin typeface="Arial" panose="020B0604020202020204" pitchFamily="34" charset="0"/>
+                <a:cs typeface="Arial" panose="020B0604020202020204" pitchFamily="34" charset="0"/>
+              </a:rPr>
+              <a:t> las </a:t>
+            </a:r>
+            <a:r>
+              <a:rPr lang="en-US" sz="1200" dirty="0" err="1">
+                <a:latin typeface="Arial" panose="020B0604020202020204" pitchFamily="34" charset="0"/>
+                <a:cs typeface="Arial" panose="020B0604020202020204" pitchFamily="34" charset="0"/>
+              </a:rPr>
+              <a:t>perdidas</a:t>
+            </a:r>
+            <a:r>
+              <a:rPr lang="en-US" sz="1200" dirty="0">
+                <a:latin typeface="Arial" panose="020B0604020202020204" pitchFamily="34" charset="0"/>
+                <a:cs typeface="Arial" panose="020B0604020202020204" pitchFamily="34" charset="0"/>
+              </a:rPr>
+              <a:t> de los </a:t>
+            </a:r>
+            <a:r>
+              <a:rPr lang="en-US" sz="1200" dirty="0" err="1">
+                <a:latin typeface="Arial" panose="020B0604020202020204" pitchFamily="34" charset="0"/>
+                <a:cs typeface="Arial" panose="020B0604020202020204" pitchFamily="34" charset="0"/>
+              </a:rPr>
+              <a:t>modos</a:t>
+            </a:r>
+            <a:r>
+              <a:rPr lang="en-US" sz="1200" dirty="0">
+                <a:latin typeface="Arial" panose="020B0604020202020204" pitchFamily="34" charset="0"/>
+                <a:cs typeface="Arial" panose="020B0604020202020204" pitchFamily="34" charset="0"/>
+              </a:rPr>
+              <a:t> y las </a:t>
+            </a:r>
+            <a:r>
+              <a:rPr lang="en-US" sz="1200" dirty="0" err="1">
+                <a:latin typeface="Arial" panose="020B0604020202020204" pitchFamily="34" charset="0"/>
+                <a:cs typeface="Arial" panose="020B0604020202020204" pitchFamily="34" charset="0"/>
+              </a:rPr>
+              <a:t>perdidas</a:t>
+            </a:r>
+            <a:r>
+              <a:rPr lang="en-US" sz="1200" dirty="0">
+                <a:latin typeface="Arial" panose="020B0604020202020204" pitchFamily="34" charset="0"/>
+                <a:cs typeface="Arial" panose="020B0604020202020204" pitchFamily="34" charset="0"/>
+              </a:rPr>
+              <a:t> de </a:t>
+            </a:r>
+            <a:r>
+              <a:rPr lang="en-US" sz="1200" dirty="0" err="1">
+                <a:latin typeface="Arial" panose="020B0604020202020204" pitchFamily="34" charset="0"/>
+                <a:cs typeface="Arial" panose="020B0604020202020204" pitchFamily="34" charset="0"/>
+              </a:rPr>
+              <a:t>propagación</a:t>
+            </a:r>
+            <a:r>
+              <a:rPr lang="en-US" sz="1200" dirty="0">
+                <a:latin typeface="Arial" panose="020B0604020202020204" pitchFamily="34" charset="0"/>
+                <a:cs typeface="Arial" panose="020B0604020202020204" pitchFamily="34" charset="0"/>
+              </a:rPr>
+              <a:t> se Cruzan, y las </a:t>
+            </a:r>
+            <a:r>
+              <a:rPr lang="en-US" sz="1200" dirty="0" err="1">
+                <a:latin typeface="Arial" panose="020B0604020202020204" pitchFamily="34" charset="0"/>
+                <a:cs typeface="Arial" panose="020B0604020202020204" pitchFamily="34" charset="0"/>
+              </a:rPr>
+              <a:t>perdidas</a:t>
+            </a:r>
+            <a:r>
+              <a:rPr lang="en-US" sz="1200" dirty="0">
+                <a:latin typeface="Arial" panose="020B0604020202020204" pitchFamily="34" charset="0"/>
+                <a:cs typeface="Arial" panose="020B0604020202020204" pitchFamily="34" charset="0"/>
+              </a:rPr>
+              <a:t> totals </a:t>
+            </a:r>
+            <a:r>
+              <a:rPr lang="en-US" sz="1200" dirty="0" err="1">
+                <a:latin typeface="Arial" panose="020B0604020202020204" pitchFamily="34" charset="0"/>
+                <a:cs typeface="Arial" panose="020B0604020202020204" pitchFamily="34" charset="0"/>
+              </a:rPr>
+              <a:t>pasa</a:t>
+            </a:r>
+            <a:r>
+              <a:rPr lang="en-US" sz="1200" dirty="0">
+                <a:latin typeface="Arial" panose="020B0604020202020204" pitchFamily="34" charset="0"/>
+                <a:cs typeface="Arial" panose="020B0604020202020204" pitchFamily="34" charset="0"/>
+              </a:rPr>
+              <a:t> de </a:t>
+            </a:r>
+            <a:r>
+              <a:rPr lang="en-US" sz="1200" dirty="0" err="1">
+                <a:latin typeface="Arial" panose="020B0604020202020204" pitchFamily="34" charset="0"/>
+                <a:cs typeface="Arial" panose="020B0604020202020204" pitchFamily="34" charset="0"/>
+              </a:rPr>
+              <a:t>depender</a:t>
+            </a:r>
+            <a:r>
+              <a:rPr lang="en-US" sz="1200" dirty="0">
+                <a:latin typeface="Arial" panose="020B0604020202020204" pitchFamily="34" charset="0"/>
+                <a:cs typeface="Arial" panose="020B0604020202020204" pitchFamily="34" charset="0"/>
+              </a:rPr>
+              <a:t> de una a </a:t>
+            </a:r>
+            <a:r>
+              <a:rPr lang="en-US" sz="1200" dirty="0" err="1">
+                <a:latin typeface="Arial" panose="020B0604020202020204" pitchFamily="34" charset="0"/>
+                <a:cs typeface="Arial" panose="020B0604020202020204" pitchFamily="34" charset="0"/>
+              </a:rPr>
+              <a:t>otra</a:t>
+            </a:r>
+            <a:r>
+              <a:rPr lang="en-US" sz="1200" dirty="0">
+                <a:latin typeface="Arial" panose="020B0604020202020204" pitchFamily="34" charset="0"/>
+                <a:cs typeface="Arial" panose="020B0604020202020204" pitchFamily="34" charset="0"/>
+              </a:rPr>
+              <a:t> </a:t>
+            </a:r>
+            <a:r>
+              <a:rPr lang="en-US" sz="1200" dirty="0" err="1">
+                <a:latin typeface="Arial" panose="020B0604020202020204" pitchFamily="34" charset="0"/>
+                <a:cs typeface="Arial" panose="020B0604020202020204" pitchFamily="34" charset="0"/>
+              </a:rPr>
+              <a:t>alcanzando</a:t>
+            </a:r>
+            <a:r>
+              <a:rPr lang="en-US" sz="1200" dirty="0">
+                <a:latin typeface="Arial" panose="020B0604020202020204" pitchFamily="34" charset="0"/>
+                <a:cs typeface="Arial" panose="020B0604020202020204" pitchFamily="34" charset="0"/>
+              </a:rPr>
+              <a:t> </a:t>
+            </a:r>
+            <a:r>
+              <a:rPr lang="en-US" sz="1200" dirty="0" err="1">
+                <a:latin typeface="Arial" panose="020B0604020202020204" pitchFamily="34" charset="0"/>
+                <a:cs typeface="Arial" panose="020B0604020202020204" pitchFamily="34" charset="0"/>
+              </a:rPr>
+              <a:t>su</a:t>
+            </a:r>
+            <a:r>
+              <a:rPr lang="en-US" sz="1200" dirty="0">
+                <a:latin typeface="Arial" panose="020B0604020202020204" pitchFamily="34" charset="0"/>
+                <a:cs typeface="Arial" panose="020B0604020202020204" pitchFamily="34" charset="0"/>
+              </a:rPr>
+              <a:t> valor </a:t>
+            </a:r>
+            <a:r>
+              <a:rPr lang="en-US" sz="1200" dirty="0" err="1">
+                <a:latin typeface="Arial" panose="020B0604020202020204" pitchFamily="34" charset="0"/>
+                <a:cs typeface="Arial" panose="020B0604020202020204" pitchFamily="34" charset="0"/>
+              </a:rPr>
+              <a:t>mínimo</a:t>
+            </a:r>
+            <a:r>
+              <a:rPr lang="en-US" sz="1200" dirty="0">
+                <a:latin typeface="Arial" panose="020B0604020202020204" pitchFamily="34" charset="0"/>
+                <a:cs typeface="Arial" panose="020B0604020202020204" pitchFamily="34" charset="0"/>
+              </a:rPr>
+              <a:t> </a:t>
+            </a:r>
+            <a:r>
+              <a:rPr lang="en-US" sz="1200" dirty="0" err="1">
+                <a:latin typeface="Arial" panose="020B0604020202020204" pitchFamily="34" charset="0"/>
+                <a:cs typeface="Arial" panose="020B0604020202020204" pitchFamily="34" charset="0"/>
+              </a:rPr>
+              <a:t>en</a:t>
+            </a:r>
+            <a:r>
+              <a:rPr lang="en-US" sz="1200" dirty="0">
+                <a:latin typeface="Arial" panose="020B0604020202020204" pitchFamily="34" charset="0"/>
+                <a:cs typeface="Arial" panose="020B0604020202020204" pitchFamily="34" charset="0"/>
+              </a:rPr>
+              <a:t> </a:t>
+            </a:r>
+            <a:r>
+              <a:rPr lang="en-US" sz="1200" dirty="0" err="1">
+                <a:latin typeface="Arial" panose="020B0604020202020204" pitchFamily="34" charset="0"/>
+                <a:cs typeface="Arial" panose="020B0604020202020204" pitchFamily="34" charset="0"/>
+              </a:rPr>
+              <a:t>pérdidas</a:t>
+            </a:r>
+            <a:r>
+              <a:rPr lang="en-US" sz="1200" dirty="0">
+                <a:latin typeface="Arial" panose="020B0604020202020204" pitchFamily="34" charset="0"/>
+                <a:cs typeface="Arial" panose="020B0604020202020204" pitchFamily="34" charset="0"/>
+              </a:rPr>
+              <a:t>. Tambien </a:t>
+            </a:r>
+            <a:r>
+              <a:rPr lang="en-US" sz="1200" dirty="0" err="1">
+                <a:latin typeface="Arial" panose="020B0604020202020204" pitchFamily="34" charset="0"/>
+                <a:cs typeface="Arial" panose="020B0604020202020204" pitchFamily="34" charset="0"/>
+              </a:rPr>
+              <a:t>vemos</a:t>
+            </a:r>
+            <a:r>
+              <a:rPr lang="en-US" sz="1200" dirty="0">
+                <a:latin typeface="Arial" panose="020B0604020202020204" pitchFamily="34" charset="0"/>
+                <a:cs typeface="Arial" panose="020B0604020202020204" pitchFamily="34" charset="0"/>
+              </a:rPr>
+              <a:t> que </a:t>
+            </a:r>
+            <a:r>
+              <a:rPr lang="en-US" sz="1200" dirty="0" err="1">
+                <a:latin typeface="Arial" panose="020B0604020202020204" pitchFamily="34" charset="0"/>
+                <a:cs typeface="Arial" panose="020B0604020202020204" pitchFamily="34" charset="0"/>
+              </a:rPr>
+              <a:t>corresponde</a:t>
+            </a:r>
+            <a:r>
+              <a:rPr lang="en-US" sz="1200" dirty="0">
+                <a:latin typeface="Arial" panose="020B0604020202020204" pitchFamily="34" charset="0"/>
+                <a:cs typeface="Arial" panose="020B0604020202020204" pitchFamily="34" charset="0"/>
+              </a:rPr>
+              <a:t> </a:t>
+            </a:r>
+            <a:r>
+              <a:rPr lang="en-US" sz="1200" dirty="0" err="1">
+                <a:latin typeface="Arial" panose="020B0604020202020204" pitchFamily="34" charset="0"/>
+                <a:cs typeface="Arial" panose="020B0604020202020204" pitchFamily="34" charset="0"/>
+              </a:rPr>
+              <a:t>justo</a:t>
+            </a:r>
+            <a:r>
+              <a:rPr lang="en-US" sz="1200" dirty="0">
+                <a:latin typeface="Arial" panose="020B0604020202020204" pitchFamily="34" charset="0"/>
+                <a:cs typeface="Arial" panose="020B0604020202020204" pitchFamily="34" charset="0"/>
+              </a:rPr>
+              <a:t> con </a:t>
+            </a:r>
+            <a:r>
+              <a:rPr lang="en-US" sz="1200" dirty="0" err="1">
+                <a:latin typeface="Arial" panose="020B0604020202020204" pitchFamily="34" charset="0"/>
+                <a:cs typeface="Arial" panose="020B0604020202020204" pitchFamily="34" charset="0"/>
+              </a:rPr>
+              <a:t>el</a:t>
+            </a:r>
+            <a:r>
+              <a:rPr lang="en-US" sz="1200" dirty="0">
+                <a:latin typeface="Arial" panose="020B0604020202020204" pitchFamily="34" charset="0"/>
+                <a:cs typeface="Arial" panose="020B0604020202020204" pitchFamily="34" charset="0"/>
+              </a:rPr>
+              <a:t> valor </a:t>
+            </a:r>
+            <a:r>
+              <a:rPr lang="en-US" sz="1200" dirty="0" err="1">
+                <a:latin typeface="Arial" panose="020B0604020202020204" pitchFamily="34" charset="0"/>
+                <a:cs typeface="Arial" panose="020B0604020202020204" pitchFamily="34" charset="0"/>
+              </a:rPr>
+              <a:t>mínimo</a:t>
+            </a:r>
+            <a:r>
+              <a:rPr lang="en-US" sz="1200" dirty="0">
+                <a:latin typeface="Arial" panose="020B0604020202020204" pitchFamily="34" charset="0"/>
+                <a:cs typeface="Arial" panose="020B0604020202020204" pitchFamily="34" charset="0"/>
+              </a:rPr>
+              <a:t> de </a:t>
+            </a:r>
+            <a:r>
+              <a:rPr lang="en-US" sz="1200" dirty="0" err="1">
+                <a:latin typeface="Arial" panose="020B0604020202020204" pitchFamily="34" charset="0"/>
+                <a:cs typeface="Arial" panose="020B0604020202020204" pitchFamily="34" charset="0"/>
+              </a:rPr>
+              <a:t>índice</a:t>
+            </a:r>
+            <a:r>
+              <a:rPr lang="en-US" sz="1200" dirty="0">
+                <a:latin typeface="Arial" panose="020B0604020202020204" pitchFamily="34" charset="0"/>
+                <a:cs typeface="Arial" panose="020B0604020202020204" pitchFamily="34" charset="0"/>
+              </a:rPr>
+              <a:t> </a:t>
+            </a:r>
+            <a:r>
+              <a:rPr lang="en-US" sz="1200" dirty="0" err="1">
+                <a:latin typeface="Arial" panose="020B0604020202020204" pitchFamily="34" charset="0"/>
+                <a:cs typeface="Arial" panose="020B0604020202020204" pitchFamily="34" charset="0"/>
+              </a:rPr>
+              <a:t>efectivo</a:t>
+            </a:r>
+            <a:r>
+              <a:rPr lang="en-US" sz="1200" dirty="0">
+                <a:latin typeface="Arial" panose="020B0604020202020204" pitchFamily="34" charset="0"/>
+                <a:cs typeface="Arial" panose="020B0604020202020204" pitchFamily="34" charset="0"/>
+              </a:rPr>
+              <a:t>.</a:t>
+            </a:r>
+          </a:p>
+          <a:p>
+            <a:pPr algn="just"/>
+            <a:endParaRPr lang="en-US" sz="1200" dirty="0">
+              <a:latin typeface="Arial" panose="020B0604020202020204" pitchFamily="34" charset="0"/>
+              <a:cs typeface="Arial" panose="020B0604020202020204" pitchFamily="34" charset="0"/>
+            </a:endParaRPr>
+          </a:p>
+          <a:p>
+            <a:pPr algn="just"/>
+            <a:r>
+              <a:rPr lang="en-US" sz="1200" dirty="0">
+                <a:latin typeface="Arial" panose="020B0604020202020204" pitchFamily="34" charset="0"/>
+                <a:cs typeface="Arial" panose="020B0604020202020204" pitchFamily="34" charset="0"/>
+              </a:rPr>
+              <a:t>Para </a:t>
+            </a:r>
+            <a:r>
+              <a:rPr lang="en-US" sz="1200" dirty="0" err="1">
+                <a:latin typeface="Arial" panose="020B0604020202020204" pitchFamily="34" charset="0"/>
+                <a:cs typeface="Arial" panose="020B0604020202020204" pitchFamily="34" charset="0"/>
+              </a:rPr>
+              <a:t>el</a:t>
+            </a:r>
+            <a:r>
+              <a:rPr lang="en-US" sz="1200" dirty="0">
+                <a:latin typeface="Arial" panose="020B0604020202020204" pitchFamily="34" charset="0"/>
+                <a:cs typeface="Arial" panose="020B0604020202020204" pitchFamily="34" charset="0"/>
+              </a:rPr>
+              <a:t> </a:t>
+            </a:r>
+            <a:r>
+              <a:rPr lang="en-US" sz="1200" dirty="0" err="1">
+                <a:latin typeface="Arial" panose="020B0604020202020204" pitchFamily="34" charset="0"/>
+                <a:cs typeface="Arial" panose="020B0604020202020204" pitchFamily="34" charset="0"/>
+              </a:rPr>
+              <a:t>nitruro</a:t>
+            </a:r>
+            <a:r>
+              <a:rPr lang="en-US" sz="1200" dirty="0">
+                <a:latin typeface="Arial" panose="020B0604020202020204" pitchFamily="34" charset="0"/>
+                <a:cs typeface="Arial" panose="020B0604020202020204" pitchFamily="34" charset="0"/>
+              </a:rPr>
+              <a:t> de </a:t>
+            </a:r>
+            <a:r>
+              <a:rPr lang="en-US" sz="1200" dirty="0" err="1">
+                <a:latin typeface="Arial" panose="020B0604020202020204" pitchFamily="34" charset="0"/>
+                <a:cs typeface="Arial" panose="020B0604020202020204" pitchFamily="34" charset="0"/>
+              </a:rPr>
+              <a:t>silicio</a:t>
+            </a:r>
+            <a:r>
+              <a:rPr lang="en-US" sz="1200" dirty="0">
+                <a:latin typeface="Arial" panose="020B0604020202020204" pitchFamily="34" charset="0"/>
+                <a:cs typeface="Arial" panose="020B0604020202020204" pitchFamily="34" charset="0"/>
+              </a:rPr>
+              <a:t> </a:t>
+            </a:r>
+            <a:r>
+              <a:rPr lang="en-US" sz="1200" dirty="0" err="1">
+                <a:latin typeface="Arial" panose="020B0604020202020204" pitchFamily="34" charset="0"/>
+                <a:cs typeface="Arial" panose="020B0604020202020204" pitchFamily="34" charset="0"/>
+              </a:rPr>
+              <a:t>habíamos</a:t>
+            </a:r>
+            <a:r>
+              <a:rPr lang="en-US" sz="1200" dirty="0">
+                <a:latin typeface="Arial" panose="020B0604020202020204" pitchFamily="34" charset="0"/>
+                <a:cs typeface="Arial" panose="020B0604020202020204" pitchFamily="34" charset="0"/>
+              </a:rPr>
+              <a:t> visto que </a:t>
+            </a:r>
+            <a:r>
+              <a:rPr lang="en-US" sz="1200" dirty="0" err="1">
+                <a:latin typeface="Arial" panose="020B0604020202020204" pitchFamily="34" charset="0"/>
+                <a:cs typeface="Arial" panose="020B0604020202020204" pitchFamily="34" charset="0"/>
+              </a:rPr>
+              <a:t>necesitábamos</a:t>
+            </a:r>
+            <a:r>
+              <a:rPr lang="en-US" sz="1200" dirty="0">
+                <a:latin typeface="Arial" panose="020B0604020202020204" pitchFamily="34" charset="0"/>
+                <a:cs typeface="Arial" panose="020B0604020202020204" pitchFamily="34" charset="0"/>
+              </a:rPr>
+              <a:t> un radio de 75 um para que las </a:t>
+            </a:r>
+            <a:r>
+              <a:rPr lang="en-US" sz="1200" dirty="0" err="1">
+                <a:latin typeface="Arial" panose="020B0604020202020204" pitchFamily="34" charset="0"/>
+                <a:cs typeface="Arial" panose="020B0604020202020204" pitchFamily="34" charset="0"/>
+              </a:rPr>
+              <a:t>pérdidas</a:t>
+            </a:r>
+            <a:r>
+              <a:rPr lang="en-US" sz="1200" dirty="0">
+                <a:latin typeface="Arial" panose="020B0604020202020204" pitchFamily="34" charset="0"/>
+                <a:cs typeface="Arial" panose="020B0604020202020204" pitchFamily="34" charset="0"/>
+              </a:rPr>
+              <a:t> no </a:t>
+            </a:r>
+            <a:r>
+              <a:rPr lang="en-US" sz="1200" dirty="0" err="1">
+                <a:latin typeface="Arial" panose="020B0604020202020204" pitchFamily="34" charset="0"/>
+                <a:cs typeface="Arial" panose="020B0604020202020204" pitchFamily="34" charset="0"/>
+              </a:rPr>
+              <a:t>superaran</a:t>
+            </a:r>
+            <a:r>
+              <a:rPr lang="en-US" sz="1200" dirty="0">
+                <a:latin typeface="Arial" panose="020B0604020202020204" pitchFamily="34" charset="0"/>
+                <a:cs typeface="Arial" panose="020B0604020202020204" pitchFamily="34" charset="0"/>
+              </a:rPr>
+              <a:t> </a:t>
+            </a:r>
+            <a:r>
+              <a:rPr lang="en-US" sz="1200" dirty="0" err="1">
+                <a:latin typeface="Arial" panose="020B0604020202020204" pitchFamily="34" charset="0"/>
+                <a:cs typeface="Arial" panose="020B0604020202020204" pitchFamily="34" charset="0"/>
+              </a:rPr>
+              <a:t>el</a:t>
+            </a:r>
+            <a:r>
+              <a:rPr lang="en-US" sz="1200" dirty="0">
+                <a:latin typeface="Arial" panose="020B0604020202020204" pitchFamily="34" charset="0"/>
+                <a:cs typeface="Arial" panose="020B0604020202020204" pitchFamily="34" charset="0"/>
+              </a:rPr>
+              <a:t> </a:t>
+            </a:r>
+            <a:r>
+              <a:rPr lang="en-US" sz="1200" dirty="0" err="1">
+                <a:latin typeface="Arial" panose="020B0604020202020204" pitchFamily="34" charset="0"/>
+                <a:cs typeface="Arial" panose="020B0604020202020204" pitchFamily="34" charset="0"/>
+              </a:rPr>
+              <a:t>límite</a:t>
+            </a:r>
+            <a:r>
+              <a:rPr lang="en-US" sz="1200" dirty="0">
+                <a:latin typeface="Arial" panose="020B0604020202020204" pitchFamily="34" charset="0"/>
+                <a:cs typeface="Arial" panose="020B0604020202020204" pitchFamily="34" charset="0"/>
+              </a:rPr>
+              <a:t> de 0.1 dB/90º, </a:t>
+            </a:r>
+            <a:r>
+              <a:rPr lang="en-US" sz="1200" dirty="0" err="1">
+                <a:latin typeface="Arial" panose="020B0604020202020204" pitchFamily="34" charset="0"/>
+                <a:cs typeface="Arial" panose="020B0604020202020204" pitchFamily="34" charset="0"/>
+              </a:rPr>
+              <a:t>esto</a:t>
+            </a:r>
+            <a:r>
+              <a:rPr lang="en-US" sz="1200" dirty="0">
+                <a:latin typeface="Arial" panose="020B0604020202020204" pitchFamily="34" charset="0"/>
+                <a:cs typeface="Arial" panose="020B0604020202020204" pitchFamily="34" charset="0"/>
+              </a:rPr>
+              <a:t> </a:t>
+            </a:r>
+            <a:r>
+              <a:rPr lang="en-US" sz="1200" dirty="0" err="1">
+                <a:latin typeface="Arial" panose="020B0604020202020204" pitchFamily="34" charset="0"/>
+                <a:cs typeface="Arial" panose="020B0604020202020204" pitchFamily="34" charset="0"/>
+              </a:rPr>
+              <a:t>significa</a:t>
+            </a:r>
+            <a:r>
+              <a:rPr lang="en-US" sz="1200" dirty="0">
+                <a:latin typeface="Arial" panose="020B0604020202020204" pitchFamily="34" charset="0"/>
+                <a:cs typeface="Arial" panose="020B0604020202020204" pitchFamily="34" charset="0"/>
+              </a:rPr>
+              <a:t> que </a:t>
+            </a:r>
+            <a:r>
+              <a:rPr lang="en-US" sz="1200" dirty="0" err="1">
+                <a:latin typeface="Arial" panose="020B0604020202020204" pitchFamily="34" charset="0"/>
+                <a:cs typeface="Arial" panose="020B0604020202020204" pitchFamily="34" charset="0"/>
+              </a:rPr>
+              <a:t>el</a:t>
+            </a:r>
+            <a:r>
+              <a:rPr lang="en-US" sz="1200" dirty="0">
+                <a:latin typeface="Arial" panose="020B0604020202020204" pitchFamily="34" charset="0"/>
+                <a:cs typeface="Arial" panose="020B0604020202020204" pitchFamily="34" charset="0"/>
+              </a:rPr>
+              <a:t> Si </a:t>
+            </a:r>
+            <a:r>
+              <a:rPr lang="en-US" sz="1200" dirty="0" err="1">
+                <a:latin typeface="Arial" panose="020B0604020202020204" pitchFamily="34" charset="0"/>
+                <a:cs typeface="Arial" panose="020B0604020202020204" pitchFamily="34" charset="0"/>
+              </a:rPr>
+              <a:t>tiene</a:t>
+            </a:r>
+            <a:r>
+              <a:rPr lang="en-US" sz="1200" dirty="0">
+                <a:latin typeface="Arial" panose="020B0604020202020204" pitchFamily="34" charset="0"/>
+                <a:cs typeface="Arial" panose="020B0604020202020204" pitchFamily="34" charset="0"/>
+              </a:rPr>
+              <a:t> una gran </a:t>
+            </a:r>
+            <a:r>
+              <a:rPr lang="en-US" sz="1200" dirty="0" err="1">
+                <a:latin typeface="Arial" panose="020B0604020202020204" pitchFamily="34" charset="0"/>
+                <a:cs typeface="Arial" panose="020B0604020202020204" pitchFamily="34" charset="0"/>
+              </a:rPr>
+              <a:t>ventaja</a:t>
+            </a:r>
+            <a:r>
+              <a:rPr lang="en-US" sz="1200" dirty="0">
+                <a:latin typeface="Arial" panose="020B0604020202020204" pitchFamily="34" charset="0"/>
+                <a:cs typeface="Arial" panose="020B0604020202020204" pitchFamily="34" charset="0"/>
+              </a:rPr>
+              <a:t> </a:t>
+            </a:r>
+            <a:r>
+              <a:rPr lang="en-US" sz="1200" dirty="0" err="1">
+                <a:latin typeface="Arial" panose="020B0604020202020204" pitchFamily="34" charset="0"/>
+                <a:cs typeface="Arial" panose="020B0604020202020204" pitchFamily="34" charset="0"/>
+              </a:rPr>
+              <a:t>respecto</a:t>
+            </a:r>
+            <a:r>
+              <a:rPr lang="en-US" sz="1200" dirty="0">
+                <a:latin typeface="Arial" panose="020B0604020202020204" pitchFamily="34" charset="0"/>
+                <a:cs typeface="Arial" panose="020B0604020202020204" pitchFamily="34" charset="0"/>
+              </a:rPr>
+              <a:t> al </a:t>
+            </a:r>
+            <a:r>
+              <a:rPr lang="en-US" sz="1200" dirty="0" err="1">
+                <a:latin typeface="Arial" panose="020B0604020202020204" pitchFamily="34" charset="0"/>
+                <a:cs typeface="Arial" panose="020B0604020202020204" pitchFamily="34" charset="0"/>
+              </a:rPr>
+              <a:t>SiN</a:t>
+            </a:r>
+            <a:r>
+              <a:rPr lang="en-US" sz="1200" dirty="0">
+                <a:latin typeface="Arial" panose="020B0604020202020204" pitchFamily="34" charset="0"/>
+                <a:cs typeface="Arial" panose="020B0604020202020204" pitchFamily="34" charset="0"/>
+              </a:rPr>
+              <a:t> a la hora de </a:t>
+            </a:r>
+            <a:r>
+              <a:rPr lang="en-US" sz="1200" dirty="0" err="1">
+                <a:latin typeface="Arial" panose="020B0604020202020204" pitchFamily="34" charset="0"/>
+                <a:cs typeface="Arial" panose="020B0604020202020204" pitchFamily="34" charset="0"/>
+              </a:rPr>
+              <a:t>poder</a:t>
+            </a:r>
+            <a:r>
+              <a:rPr lang="en-US" sz="1200" dirty="0">
+                <a:latin typeface="Arial" panose="020B0604020202020204" pitchFamily="34" charset="0"/>
+                <a:cs typeface="Arial" panose="020B0604020202020204" pitchFamily="34" charset="0"/>
+              </a:rPr>
+              <a:t> de </a:t>
+            </a:r>
+            <a:r>
+              <a:rPr lang="en-US" sz="1200" dirty="0" err="1">
+                <a:latin typeface="Arial" panose="020B0604020202020204" pitchFamily="34" charset="0"/>
+                <a:cs typeface="Arial" panose="020B0604020202020204" pitchFamily="34" charset="0"/>
+              </a:rPr>
+              <a:t>compactar</a:t>
+            </a:r>
+            <a:r>
+              <a:rPr lang="en-US" sz="1200" dirty="0">
+                <a:latin typeface="Arial" panose="020B0604020202020204" pitchFamily="34" charset="0"/>
+                <a:cs typeface="Arial" panose="020B0604020202020204" pitchFamily="34" charset="0"/>
+              </a:rPr>
+              <a:t> </a:t>
+            </a:r>
+            <a:r>
+              <a:rPr lang="en-US" sz="1200" dirty="0" err="1">
+                <a:latin typeface="Arial" panose="020B0604020202020204" pitchFamily="34" charset="0"/>
+                <a:cs typeface="Arial" panose="020B0604020202020204" pitchFamily="34" charset="0"/>
+              </a:rPr>
+              <a:t>el</a:t>
+            </a:r>
+            <a:r>
+              <a:rPr lang="en-US" sz="1200" dirty="0">
+                <a:latin typeface="Arial" panose="020B0604020202020204" pitchFamily="34" charset="0"/>
+                <a:cs typeface="Arial" panose="020B0604020202020204" pitchFamily="34" charset="0"/>
+              </a:rPr>
+              <a:t> </a:t>
+            </a:r>
+            <a:r>
+              <a:rPr lang="en-US" sz="1200" dirty="0" err="1">
+                <a:latin typeface="Arial" panose="020B0604020202020204" pitchFamily="34" charset="0"/>
+                <a:cs typeface="Arial" panose="020B0604020202020204" pitchFamily="34" charset="0"/>
+              </a:rPr>
+              <a:t>circuito</a:t>
+            </a:r>
+            <a:r>
+              <a:rPr lang="en-US" sz="1200" dirty="0">
+                <a:latin typeface="Arial" panose="020B0604020202020204" pitchFamily="34" charset="0"/>
+                <a:cs typeface="Arial" panose="020B0604020202020204" pitchFamily="34" charset="0"/>
+              </a:rPr>
+              <a:t> y </a:t>
+            </a:r>
+            <a:r>
+              <a:rPr lang="en-US" sz="1200" dirty="0" err="1">
+                <a:latin typeface="Arial" panose="020B0604020202020204" pitchFamily="34" charset="0"/>
+                <a:cs typeface="Arial" panose="020B0604020202020204" pitchFamily="34" charset="0"/>
+              </a:rPr>
+              <a:t>hacerlo</a:t>
+            </a:r>
+            <a:r>
+              <a:rPr lang="en-US" sz="1200" dirty="0">
+                <a:latin typeface="Arial" panose="020B0604020202020204" pitchFamily="34" charset="0"/>
+                <a:cs typeface="Arial" panose="020B0604020202020204" pitchFamily="34" charset="0"/>
+              </a:rPr>
+              <a:t> </a:t>
+            </a:r>
+            <a:r>
+              <a:rPr lang="en-US" sz="1200" dirty="0" err="1">
+                <a:latin typeface="Arial" panose="020B0604020202020204" pitchFamily="34" charset="0"/>
+                <a:cs typeface="Arial" panose="020B0604020202020204" pitchFamily="34" charset="0"/>
+              </a:rPr>
+              <a:t>más</a:t>
+            </a:r>
+            <a:r>
+              <a:rPr lang="en-US" sz="1200" dirty="0">
+                <a:latin typeface="Arial" panose="020B0604020202020204" pitchFamily="34" charset="0"/>
+                <a:cs typeface="Arial" panose="020B0604020202020204" pitchFamily="34" charset="0"/>
+              </a:rPr>
+              <a:t> </a:t>
+            </a:r>
+            <a:r>
+              <a:rPr lang="en-US" sz="1200" dirty="0" err="1">
+                <a:latin typeface="Arial" panose="020B0604020202020204" pitchFamily="34" charset="0"/>
+                <a:cs typeface="Arial" panose="020B0604020202020204" pitchFamily="34" charset="0"/>
+              </a:rPr>
+              <a:t>pequeño</a:t>
+            </a:r>
+            <a:r>
+              <a:rPr lang="en-US" sz="1200" dirty="0">
+                <a:latin typeface="Arial" panose="020B0604020202020204" pitchFamily="34" charset="0"/>
+                <a:cs typeface="Arial" panose="020B0604020202020204" pitchFamily="34" charset="0"/>
+              </a:rPr>
+              <a:t>.</a:t>
+            </a:r>
+          </a:p>
+        </p:txBody>
+      </p:sp>
+      <p:sp>
+        <p:nvSpPr>
+          <p:cNvPr id="7" name="Rectángulo 6">
+            <a:extLst>
+              <a:ext uri="{FF2B5EF4-FFF2-40B4-BE49-F238E27FC236}">
+                <a16:creationId xmlns:a16="http://schemas.microsoft.com/office/drawing/2014/main" id="{B5FE8755-B0BF-14B7-64E6-4BBB2560B9A6}"/>
+              </a:ext>
+            </a:extLst>
+          </p:cNvPr>
+          <p:cNvSpPr/>
+          <p:nvPr/>
+        </p:nvSpPr>
+        <p:spPr>
+          <a:xfrm>
+            <a:off x="689271" y="1295400"/>
+            <a:ext cx="11199971" cy="3150894"/>
+          </a:xfrm>
+          <a:prstGeom prst="rect">
+            <a:avLst/>
+          </a:prstGeom>
+          <a:noFill/>
+          <a:ln w="28575">
+            <a:solidFill>
+              <a:srgbClr val="E0700D"/>
+            </a:solidFill>
+          </a:ln>
+        </p:spPr>
+        <p:style>
+          <a:lnRef idx="2">
+            <a:schemeClr val="accent1">
+              <a:shade val="15000"/>
+            </a:schemeClr>
+          </a:lnRef>
+          <a:fillRef idx="1">
+            <a:schemeClr val="accent1"/>
+          </a:fillRef>
+          <a:effectRef idx="0">
+            <a:schemeClr val="accent1"/>
+          </a:effectRef>
+          <a:fontRef idx="minor">
+            <a:schemeClr val="lt1"/>
+          </a:fontRef>
+        </p:style>
+        <p:txBody>
+          <a:bodyPr rtlCol="0" anchor="ctr"/>
+          <a:lstStyle/>
+          <a:p>
+            <a:pPr algn="ctr"/>
+            <a:endParaRPr lang="en-US"/>
+          </a:p>
+        </p:txBody>
+      </p:sp>
+      <p:pic>
+        <p:nvPicPr>
+          <p:cNvPr id="11" name="Imagen 10">
+            <a:extLst>
+              <a:ext uri="{FF2B5EF4-FFF2-40B4-BE49-F238E27FC236}">
+                <a16:creationId xmlns:a16="http://schemas.microsoft.com/office/drawing/2014/main" id="{F92B9098-C5CD-4D87-8AE3-C71C77E2D191}"/>
+              </a:ext>
+            </a:extLst>
+          </p:cNvPr>
+          <p:cNvPicPr>
+            <a:picLocks noChangeAspect="1"/>
+          </p:cNvPicPr>
+          <p:nvPr/>
+        </p:nvPicPr>
+        <p:blipFill>
+          <a:blip r:embed="rId5"/>
+          <a:stretch>
+            <a:fillRect/>
+          </a:stretch>
+        </p:blipFill>
+        <p:spPr>
+          <a:xfrm>
+            <a:off x="1551916" y="1484378"/>
+            <a:ext cx="3601768" cy="2806172"/>
+          </a:xfrm>
+          <a:prstGeom prst="rect">
+            <a:avLst/>
+          </a:prstGeom>
+        </p:spPr>
+      </p:pic>
+      <p:pic>
+        <p:nvPicPr>
+          <p:cNvPr id="14" name="Imagen 13">
+            <a:extLst>
+              <a:ext uri="{FF2B5EF4-FFF2-40B4-BE49-F238E27FC236}">
+                <a16:creationId xmlns:a16="http://schemas.microsoft.com/office/drawing/2014/main" id="{CC37F6FC-98B4-434C-8D5A-127D513C1C29}"/>
+              </a:ext>
+            </a:extLst>
+          </p:cNvPr>
+          <p:cNvPicPr>
+            <a:picLocks noChangeAspect="1"/>
+          </p:cNvPicPr>
+          <p:nvPr/>
+        </p:nvPicPr>
+        <p:blipFill>
+          <a:blip r:embed="rId6"/>
+          <a:stretch>
+            <a:fillRect/>
+          </a:stretch>
+        </p:blipFill>
+        <p:spPr>
+          <a:xfrm>
+            <a:off x="6073140" y="1506261"/>
+            <a:ext cx="3611879" cy="2699600"/>
+          </a:xfrm>
+          <a:prstGeom prst="rect">
+            <a:avLst/>
+          </a:prstGeom>
+        </p:spPr>
+      </p:pic>
+      <p:sp>
+        <p:nvSpPr>
+          <p:cNvPr id="18" name="CuadroTexto 17">
+            <a:extLst>
+              <a:ext uri="{FF2B5EF4-FFF2-40B4-BE49-F238E27FC236}">
+                <a16:creationId xmlns:a16="http://schemas.microsoft.com/office/drawing/2014/main" id="{CE32F9C0-83B7-46E4-A638-D2F2C8EF067C}"/>
+              </a:ext>
+            </a:extLst>
+          </p:cNvPr>
+          <p:cNvSpPr txBox="1"/>
+          <p:nvPr/>
+        </p:nvSpPr>
+        <p:spPr>
+          <a:xfrm>
+            <a:off x="640987" y="371094"/>
+            <a:ext cx="6129336" cy="369332"/>
+          </a:xfrm>
+          <a:prstGeom prst="rect">
+            <a:avLst/>
+          </a:prstGeom>
+          <a:noFill/>
+        </p:spPr>
+        <p:txBody>
+          <a:bodyPr wrap="square">
+            <a:spAutoFit/>
+          </a:bodyPr>
+          <a:lstStyle/>
+          <a:p>
+            <a:r>
+              <a:rPr lang="es-ES" dirty="0"/>
+              <a:t>EXTRA:</a:t>
+            </a:r>
+          </a:p>
+        </p:txBody>
+      </p:sp>
+    </p:spTree>
+    <p:extLst>
+      <p:ext uri="{BB962C8B-B14F-4D97-AF65-F5344CB8AC3E}">
+        <p14:creationId xmlns:p14="http://schemas.microsoft.com/office/powerpoint/2010/main" val="2842462235"/>
+      </p:ext>
+    </p:extLst>
+  </p:cSld>
+  <p:clrMapOvr>
+    <a:masterClrMapping/>
+  </p:clrMapOvr>
+</p:sld>
+</file>
+
+<file path=ppt/slides/slide11.xml><?xml version="1.0" encoding="utf-8"?>
+<p:sld xmlns:a="http://schemas.openxmlformats.org/drawingml/2006/main" xmlns:r="http://schemas.openxmlformats.org/officeDocument/2006/relationships" xmlns:p="http://schemas.openxmlformats.org/presentationml/2006/main">
+  <p:cSld>
+    <p:spTree>
+      <p:nvGrpSpPr>
+        <p:cNvPr id="1" name=""/>
+        <p:cNvGrpSpPr/>
+        <p:nvPr/>
+      </p:nvGrpSpPr>
+      <p:grpSpPr>
+        <a:xfrm>
+          <a:off x="0" y="0"/>
+          <a:ext cx="0" cy="0"/>
+          <a:chOff x="0" y="0"/>
+          <a:chExt cx="0" cy="0"/>
+        </a:xfrm>
+      </p:grpSpPr>
+      <p:sp>
+        <p:nvSpPr>
+          <p:cNvPr id="3" name="object 3"/>
+          <p:cNvSpPr/>
+          <p:nvPr/>
+        </p:nvSpPr>
+        <p:spPr>
+          <a:xfrm>
+            <a:off x="3945635" y="2636520"/>
+            <a:ext cx="8246363" cy="1584959"/>
+          </a:xfrm>
+          <a:prstGeom prst="rect">
+            <a:avLst/>
+          </a:prstGeom>
+          <a:blipFill>
+            <a:blip r:embed="rId2" cstate="print"/>
+            <a:stretch>
+              <a:fillRect/>
+            </a:stretch>
+          </a:blipFill>
+        </p:spPr>
+        <p:txBody>
+          <a:bodyPr wrap="square" lIns="0" tIns="0" rIns="0" bIns="0" rtlCol="0"/>
+          <a:lstStyle/>
+          <a:p>
+            <a:endParaRPr/>
+          </a:p>
+        </p:txBody>
+      </p:sp>
+      <p:sp>
+        <p:nvSpPr>
+          <p:cNvPr id="4" name="object 4"/>
+          <p:cNvSpPr txBox="1">
+            <a:spLocks noGrp="1"/>
+          </p:cNvSpPr>
+          <p:nvPr>
+            <p:ph type="title"/>
+          </p:nvPr>
+        </p:nvSpPr>
+        <p:spPr>
+          <a:xfrm>
+            <a:off x="4513326" y="3165729"/>
+            <a:ext cx="2233295" cy="513715"/>
+          </a:xfrm>
+          <a:prstGeom prst="rect">
+            <a:avLst/>
+          </a:prstGeom>
+        </p:spPr>
+        <p:txBody>
+          <a:bodyPr vert="horz" wrap="square" lIns="0" tIns="13335" rIns="0" bIns="0" rtlCol="0">
+            <a:spAutoFit/>
+          </a:bodyPr>
+          <a:lstStyle/>
+          <a:p>
+            <a:pPr marL="12700">
+              <a:lnSpc>
+                <a:spcPct val="100000"/>
+              </a:lnSpc>
+              <a:spcBef>
+                <a:spcPts val="105"/>
+              </a:spcBef>
+            </a:pPr>
+            <a:r>
+              <a:rPr sz="3200" b="1" spc="-5" dirty="0">
+                <a:solidFill>
+                  <a:srgbClr val="FFFFFF"/>
+                </a:solidFill>
+                <a:latin typeface="Lucida Sans"/>
+                <a:cs typeface="Lucida Sans"/>
+              </a:rPr>
+              <a:t>Thank</a:t>
+            </a:r>
+            <a:r>
+              <a:rPr sz="3200" b="1" spc="-55" dirty="0">
+                <a:solidFill>
+                  <a:srgbClr val="FFFFFF"/>
+                </a:solidFill>
+                <a:latin typeface="Lucida Sans"/>
+                <a:cs typeface="Lucida Sans"/>
+              </a:rPr>
+              <a:t> </a:t>
+            </a:r>
+            <a:r>
+              <a:rPr sz="3200" b="1" dirty="0">
+                <a:solidFill>
+                  <a:srgbClr val="FFFFFF"/>
+                </a:solidFill>
+                <a:latin typeface="Lucida Sans"/>
+                <a:cs typeface="Lucida Sans"/>
+              </a:rPr>
+              <a:t>you</a:t>
+            </a:r>
+            <a:endParaRPr sz="3200">
+              <a:latin typeface="Lucida Sans"/>
+              <a:cs typeface="Lucida Sans"/>
+            </a:endParaRPr>
+          </a:p>
+        </p:txBody>
+      </p:sp>
+      <p:sp>
+        <p:nvSpPr>
+          <p:cNvPr id="5" name="Marcador de número de diapositiva 4">
+            <a:extLst>
+              <a:ext uri="{FF2B5EF4-FFF2-40B4-BE49-F238E27FC236}">
+                <a16:creationId xmlns:a16="http://schemas.microsoft.com/office/drawing/2014/main" id="{B052DA19-AD24-7D24-2AE9-51F8F5A7F5E0}"/>
+              </a:ext>
+            </a:extLst>
+          </p:cNvPr>
+          <p:cNvSpPr>
+            <a:spLocks noGrp="1"/>
+          </p:cNvSpPr>
+          <p:nvPr>
+            <p:ph type="sldNum" sz="quarter" idx="7"/>
+          </p:nvPr>
+        </p:nvSpPr>
+        <p:spPr/>
+        <p:txBody>
+          <a:bodyPr/>
+          <a:lstStyle/>
+          <a:p>
+            <a:fld id="{B6F15528-21DE-4FAA-801E-634DDDAF4B2B}" type="slidenum">
+              <a:rPr lang="es-ES" smtClean="0"/>
+              <a:t>11</a:t>
             </a:fld>
             <a:endParaRPr lang="es-ES"/>
           </a:p>
@@ -6185,7 +7709,7 @@
         </p:blipFill>
         <p:spPr>
           <a:xfrm>
-            <a:off x="1447800" y="1579745"/>
+            <a:off x="1292939" y="1600265"/>
             <a:ext cx="4119562" cy="3042138"/>
           </a:xfrm>
           <a:prstGeom prst="rect">
@@ -7976,7 +9500,7 @@
         <p:spPr>
           <a:xfrm>
             <a:off x="5791200" y="1599809"/>
-            <a:ext cx="3648001" cy="2123658"/>
+            <a:ext cx="3810000" cy="2217965"/>
           </a:xfrm>
           <a:prstGeom prst="rect">
             <a:avLst/>
@@ -8497,8 +10021,8 @@
           </a:p>
         </p:txBody>
       </p:sp>
-      <mc:AlternateContent xmlns:mc="http://schemas.openxmlformats.org/markup-compatibility/2006">
-        <mc:Choice xmlns:a14="http://schemas.microsoft.com/office/drawing/2010/main" Requires="a14">
+      <mc:AlternateContent xmlns:mc="http://schemas.openxmlformats.org/markup-compatibility/2006" xmlns:a14="http://schemas.microsoft.com/office/drawing/2010/main">
+        <mc:Choice Requires="a14">
           <p:sp>
             <p:nvSpPr>
               <p:cNvPr id="2" name="CuadroTexto 1">
@@ -8953,7 +10477,7 @@
             </p:txBody>
           </p:sp>
         </mc:Choice>
-        <mc:Fallback>
+        <mc:Fallback xmlns="">
           <p:sp>
             <p:nvSpPr>
               <p:cNvPr id="2" name="CuadroTexto 1">
@@ -13249,8 +14773,8 @@
           </a:p>
         </p:txBody>
       </p:sp>
-      <mc:AlternateContent xmlns:mc="http://schemas.openxmlformats.org/markup-compatibility/2006">
-        <mc:Choice xmlns:a14="http://schemas.microsoft.com/office/drawing/2010/main" Requires="a14">
+      <mc:AlternateContent xmlns:mc="http://schemas.openxmlformats.org/markup-compatibility/2006" xmlns:a14="http://schemas.microsoft.com/office/drawing/2010/main">
+        <mc:Choice Requires="a14">
           <p:sp>
             <p:nvSpPr>
               <p:cNvPr id="6" name="CuadroTexto 5">
@@ -13437,7 +14961,7 @@
             </p:txBody>
           </p:sp>
         </mc:Choice>
-        <mc:Fallback>
+        <mc:Fallback xmlns="">
           <p:sp>
             <p:nvSpPr>
               <p:cNvPr id="6" name="CuadroTexto 5">
@@ -13688,100 +15212,35 @@
       </p:grpSpPr>
       <p:sp>
         <p:nvSpPr>
-          <p:cNvPr id="3" name="object 3"/>
-          <p:cNvSpPr/>
-          <p:nvPr/>
-        </p:nvSpPr>
-        <p:spPr>
-          <a:xfrm>
-            <a:off x="3945635" y="2636520"/>
-            <a:ext cx="8246363" cy="1584959"/>
-          </a:xfrm>
-          <a:prstGeom prst="rect">
-            <a:avLst/>
-          </a:prstGeom>
-          <a:blipFill>
-            <a:blip r:embed="rId2" cstate="print"/>
-            <a:stretch>
-              <a:fillRect/>
-            </a:stretch>
-          </a:blipFill>
-        </p:spPr>
-        <p:txBody>
-          <a:bodyPr wrap="square" lIns="0" tIns="0" rIns="0" bIns="0" rtlCol="0"/>
-          <a:lstStyle/>
-          <a:p>
-            <a:endParaRPr/>
-          </a:p>
-        </p:txBody>
-      </p:sp>
-      <p:sp>
-        <p:nvSpPr>
-          <p:cNvPr id="4" name="object 4"/>
-          <p:cNvSpPr txBox="1">
+          <p:cNvPr id="4" name="Marcador de pie de página 3">
+            <a:extLst>
+              <a:ext uri="{FF2B5EF4-FFF2-40B4-BE49-F238E27FC236}">
+                <a16:creationId xmlns:a16="http://schemas.microsoft.com/office/drawing/2014/main" id="{FFA6FB84-1935-4165-B237-640CA1EB4216}"/>
+              </a:ext>
+            </a:extLst>
+          </p:cNvPr>
+          <p:cNvSpPr>
             <a:spLocks noGrp="1"/>
           </p:cNvSpPr>
           <p:nvPr>
-            <p:ph type="title"/>
+            <p:ph type="ftr" sz="quarter" idx="5"/>
           </p:nvPr>
         </p:nvSpPr>
-        <p:spPr>
-          <a:xfrm>
-            <a:off x="4513326" y="3165729"/>
-            <a:ext cx="2233295" cy="513715"/>
-          </a:xfrm>
-          <a:prstGeom prst="rect">
-            <a:avLst/>
-          </a:prstGeom>
-        </p:spPr>
+        <p:spPr/>
         <p:txBody>
-          <a:bodyPr vert="horz" wrap="square" lIns="0" tIns="13335" rIns="0" bIns="0" rtlCol="0">
-            <a:spAutoFit/>
-          </a:bodyPr>
+          <a:bodyPr/>
           <a:lstStyle/>
           <a:p>
             <a:pPr marL="12700">
-              <a:lnSpc>
-                <a:spcPct val="100000"/>
-              </a:lnSpc>
               <a:spcBef>
-                <a:spcPts val="105"/>
+                <a:spcPts val="15"/>
               </a:spcBef>
             </a:pPr>
             <a:r>
-              <a:rPr sz="3200" b="1" spc="-5" dirty="0">
-                <a:solidFill>
-                  <a:srgbClr val="FFFFFF"/>
-                </a:solidFill>
-                <a:latin typeface="Lucida Sans"/>
-                <a:cs typeface="Lucida Sans"/>
-              </a:rPr>
-              <a:t>Thank</a:t>
-            </a:r>
-            <a:r>
-              <a:rPr sz="3200" b="1" spc="-55" dirty="0">
-                <a:solidFill>
-                  <a:srgbClr val="FFFFFF"/>
-                </a:solidFill>
-                <a:latin typeface="Lucida Sans"/>
-                <a:cs typeface="Lucida Sans"/>
-              </a:rPr>
-              <a:t> </a:t>
-            </a:r>
-            <a:r>
-              <a:rPr sz="3200" b="1" dirty="0">
-                <a:solidFill>
-                  <a:srgbClr val="FFFFFF"/>
-                </a:solidFill>
-                <a:latin typeface="Lucida Sans"/>
-                <a:cs typeface="Lucida Sans"/>
-              </a:rPr>
-              <a:t>you</a:t>
-            </a:r>
-            <a:endParaRPr sz="3200">
-              <a:latin typeface="Lucida Sans"/>
-              <a:cs typeface="Lucida Sans"/>
-            </a:endParaRPr>
+              <a:rPr lang="es-ES" spc="-5"/>
+              <a:t>LAB 1.0. WAVEGUIDES</a:t>
+            </a:r>
+            <a:endParaRPr lang="es-ES" spc="-5" dirty="0"/>
           </a:p>
         </p:txBody>
       </p:sp>
@@ -13790,7 +15249,7 @@
           <p:cNvPr id="5" name="Marcador de número de diapositiva 4">
             <a:extLst>
               <a:ext uri="{FF2B5EF4-FFF2-40B4-BE49-F238E27FC236}">
-                <a16:creationId xmlns:a16="http://schemas.microsoft.com/office/drawing/2014/main" id="{B052DA19-AD24-7D24-2AE9-51F8F5A7F5E0}"/>
+                <a16:creationId xmlns:a16="http://schemas.microsoft.com/office/drawing/2014/main" id="{0F1EDB49-4DD2-40F9-880E-604C17E17B90}"/>
               </a:ext>
             </a:extLst>
           </p:cNvPr>
@@ -13814,7 +15273,2351 @@
           </a:p>
         </p:txBody>
       </p:sp>
+      <p:sp>
+        <p:nvSpPr>
+          <p:cNvPr id="6" name="Rectángulo 5">
+            <a:extLst>
+              <a:ext uri="{FF2B5EF4-FFF2-40B4-BE49-F238E27FC236}">
+                <a16:creationId xmlns:a16="http://schemas.microsoft.com/office/drawing/2014/main" id="{19B07A2A-F816-4C87-83D3-4290E0635607}"/>
+              </a:ext>
+            </a:extLst>
+          </p:cNvPr>
+          <p:cNvSpPr/>
+          <p:nvPr/>
+        </p:nvSpPr>
+        <p:spPr>
+          <a:xfrm>
+            <a:off x="609441" y="1066800"/>
+            <a:ext cx="5486559" cy="3306028"/>
+          </a:xfrm>
+          <a:prstGeom prst="rect">
+            <a:avLst/>
+          </a:prstGeom>
+          <a:noFill/>
+          <a:ln w="28575">
+            <a:solidFill>
+              <a:srgbClr val="E0700D"/>
+            </a:solidFill>
+          </a:ln>
+        </p:spPr>
+        <p:style>
+          <a:lnRef idx="2">
+            <a:schemeClr val="accent1">
+              <a:shade val="15000"/>
+            </a:schemeClr>
+          </a:lnRef>
+          <a:fillRef idx="1">
+            <a:schemeClr val="accent1"/>
+          </a:fillRef>
+          <a:effectRef idx="0">
+            <a:schemeClr val="accent1"/>
+          </a:effectRef>
+          <a:fontRef idx="minor">
+            <a:schemeClr val="lt1"/>
+          </a:fontRef>
+        </p:style>
+        <p:txBody>
+          <a:bodyPr rtlCol="0" anchor="ctr"/>
+          <a:lstStyle/>
+          <a:p>
+            <a:pPr algn="ctr"/>
+            <a:endParaRPr lang="en-US"/>
+          </a:p>
+        </p:txBody>
+      </p:sp>
+      <p:sp>
+        <p:nvSpPr>
+          <p:cNvPr id="7" name="CuadroTexto 6">
+            <a:extLst>
+              <a:ext uri="{FF2B5EF4-FFF2-40B4-BE49-F238E27FC236}">
+                <a16:creationId xmlns:a16="http://schemas.microsoft.com/office/drawing/2014/main" id="{FDC86445-0F36-4C4E-A99A-5F8CAABDA5D8}"/>
+              </a:ext>
+            </a:extLst>
+          </p:cNvPr>
+          <p:cNvSpPr txBox="1"/>
+          <p:nvPr/>
+        </p:nvSpPr>
+        <p:spPr>
+          <a:xfrm>
+            <a:off x="609441" y="4479334"/>
+            <a:ext cx="11199971" cy="1200329"/>
+          </a:xfrm>
+          <a:prstGeom prst="rect">
+            <a:avLst/>
+          </a:prstGeom>
+          <a:solidFill>
+            <a:schemeClr val="bg1">
+              <a:lumMod val="95000"/>
+            </a:schemeClr>
+          </a:solidFill>
+          <a:ln w="28575">
+            <a:solidFill>
+              <a:srgbClr val="E0700D"/>
+            </a:solidFill>
+          </a:ln>
+        </p:spPr>
+        <p:txBody>
+          <a:bodyPr wrap="square" rtlCol="0">
+            <a:spAutoFit/>
+          </a:bodyPr>
+          <a:lstStyle/>
+          <a:p>
+            <a:pPr algn="just"/>
+            <a:endParaRPr lang="en-US" sz="1200" dirty="0">
+              <a:latin typeface="Arial" panose="020B0604020202020204" pitchFamily="34" charset="0"/>
+              <a:cs typeface="Arial" panose="020B0604020202020204" pitchFamily="34" charset="0"/>
+            </a:endParaRPr>
+          </a:p>
+          <a:p>
+            <a:pPr algn="just"/>
+            <a:r>
+              <a:rPr lang="en-US" sz="1200" dirty="0">
+                <a:latin typeface="Arial" panose="020B0604020202020204" pitchFamily="34" charset="0"/>
+                <a:cs typeface="Arial" panose="020B0604020202020204" pitchFamily="34" charset="0"/>
+              </a:rPr>
+              <a:t>Grid resolution: </a:t>
+            </a:r>
+            <a:r>
+              <a:rPr lang="en-US" sz="1200" dirty="0" err="1">
+                <a:latin typeface="Arial" panose="020B0604020202020204" pitchFamily="34" charset="0"/>
+                <a:cs typeface="Arial" panose="020B0604020202020204" pitchFamily="34" charset="0"/>
+              </a:rPr>
+              <a:t>vemos</a:t>
+            </a:r>
+            <a:r>
+              <a:rPr lang="en-US" sz="1200" dirty="0">
+                <a:latin typeface="Arial" panose="020B0604020202020204" pitchFamily="34" charset="0"/>
+                <a:cs typeface="Arial" panose="020B0604020202020204" pitchFamily="34" charset="0"/>
+              </a:rPr>
+              <a:t> que </a:t>
+            </a:r>
+            <a:r>
+              <a:rPr lang="en-US" sz="1200" dirty="0" err="1">
+                <a:latin typeface="Arial" panose="020B0604020202020204" pitchFamily="34" charset="0"/>
+                <a:cs typeface="Arial" panose="020B0604020202020204" pitchFamily="34" charset="0"/>
+              </a:rPr>
+              <a:t>el</a:t>
+            </a:r>
+            <a:r>
+              <a:rPr lang="en-US" sz="1200" dirty="0">
+                <a:latin typeface="Arial" panose="020B0604020202020204" pitchFamily="34" charset="0"/>
+                <a:cs typeface="Arial" panose="020B0604020202020204" pitchFamily="34" charset="0"/>
+              </a:rPr>
+              <a:t> valor de </a:t>
+            </a:r>
+            <a:r>
+              <a:rPr lang="en-US" sz="1200" dirty="0" err="1">
+                <a:latin typeface="Arial" panose="020B0604020202020204" pitchFamily="34" charset="0"/>
+                <a:cs typeface="Arial" panose="020B0604020202020204" pitchFamily="34" charset="0"/>
+              </a:rPr>
+              <a:t>neff</a:t>
+            </a:r>
+            <a:r>
+              <a:rPr lang="en-US" sz="1200" dirty="0">
+                <a:latin typeface="Arial" panose="020B0604020202020204" pitchFamily="34" charset="0"/>
+                <a:cs typeface="Arial" panose="020B0604020202020204" pitchFamily="34" charset="0"/>
+              </a:rPr>
+              <a:t> </a:t>
+            </a:r>
+            <a:r>
+              <a:rPr lang="en-US" sz="1200" dirty="0" err="1">
+                <a:latin typeface="Arial" panose="020B0604020202020204" pitchFamily="34" charset="0"/>
+                <a:cs typeface="Arial" panose="020B0604020202020204" pitchFamily="34" charset="0"/>
+              </a:rPr>
+              <a:t>oscila</a:t>
+            </a:r>
+            <a:r>
+              <a:rPr lang="en-US" sz="1200" dirty="0">
+                <a:latin typeface="Arial" panose="020B0604020202020204" pitchFamily="34" charset="0"/>
+                <a:cs typeface="Arial" panose="020B0604020202020204" pitchFamily="34" charset="0"/>
+              </a:rPr>
+              <a:t> </a:t>
+            </a:r>
+            <a:r>
+              <a:rPr lang="en-US" sz="1200" dirty="0" err="1">
+                <a:latin typeface="Arial" panose="020B0604020202020204" pitchFamily="34" charset="0"/>
+                <a:cs typeface="Arial" panose="020B0604020202020204" pitchFamily="34" charset="0"/>
+              </a:rPr>
+              <a:t>durante</a:t>
+            </a:r>
+            <a:r>
+              <a:rPr lang="en-US" sz="1200" dirty="0">
+                <a:latin typeface="Arial" panose="020B0604020202020204" pitchFamily="34" charset="0"/>
+                <a:cs typeface="Arial" panose="020B0604020202020204" pitchFamily="34" charset="0"/>
+              </a:rPr>
+              <a:t> </a:t>
+            </a:r>
+            <a:r>
+              <a:rPr lang="en-US" sz="1200" dirty="0" err="1">
+                <a:latin typeface="Arial" panose="020B0604020202020204" pitchFamily="34" charset="0"/>
+                <a:cs typeface="Arial" panose="020B0604020202020204" pitchFamily="34" charset="0"/>
+              </a:rPr>
+              <a:t>todo</a:t>
+            </a:r>
+            <a:r>
+              <a:rPr lang="en-US" sz="1200" dirty="0">
+                <a:latin typeface="Arial" panose="020B0604020202020204" pitchFamily="34" charset="0"/>
+                <a:cs typeface="Arial" panose="020B0604020202020204" pitchFamily="34" charset="0"/>
+              </a:rPr>
+              <a:t> </a:t>
+            </a:r>
+            <a:r>
+              <a:rPr lang="en-US" sz="1200" dirty="0" err="1">
+                <a:latin typeface="Arial" panose="020B0604020202020204" pitchFamily="34" charset="0"/>
+                <a:cs typeface="Arial" panose="020B0604020202020204" pitchFamily="34" charset="0"/>
+              </a:rPr>
+              <a:t>el</a:t>
+            </a:r>
+            <a:r>
+              <a:rPr lang="en-US" sz="1200" dirty="0">
+                <a:latin typeface="Arial" panose="020B0604020202020204" pitchFamily="34" charset="0"/>
+                <a:cs typeface="Arial" panose="020B0604020202020204" pitchFamily="34" charset="0"/>
+              </a:rPr>
+              <a:t> </a:t>
+            </a:r>
+            <a:r>
+              <a:rPr lang="en-US" sz="1200" dirty="0" err="1">
+                <a:latin typeface="Arial" panose="020B0604020202020204" pitchFamily="34" charset="0"/>
+                <a:cs typeface="Arial" panose="020B0604020202020204" pitchFamily="34" charset="0"/>
+              </a:rPr>
+              <a:t>rango</a:t>
+            </a:r>
+            <a:r>
+              <a:rPr lang="en-US" sz="1200" dirty="0">
+                <a:latin typeface="Arial" panose="020B0604020202020204" pitchFamily="34" charset="0"/>
+                <a:cs typeface="Arial" panose="020B0604020202020204" pitchFamily="34" charset="0"/>
+              </a:rPr>
+              <a:t> de </a:t>
+            </a:r>
+            <a:r>
+              <a:rPr lang="en-US" sz="1200" dirty="0" err="1">
+                <a:latin typeface="Arial" panose="020B0604020202020204" pitchFamily="34" charset="0"/>
+                <a:cs typeface="Arial" panose="020B0604020202020204" pitchFamily="34" charset="0"/>
+              </a:rPr>
+              <a:t>valores</a:t>
+            </a:r>
+            <a:r>
+              <a:rPr lang="en-US" sz="1200" dirty="0">
+                <a:latin typeface="Arial" panose="020B0604020202020204" pitchFamily="34" charset="0"/>
+                <a:cs typeface="Arial" panose="020B0604020202020204" pitchFamily="34" charset="0"/>
+              </a:rPr>
+              <a:t>, sin embargo cambia </a:t>
+            </a:r>
+            <a:r>
+              <a:rPr lang="en-US" sz="1200" dirty="0" err="1">
+                <a:latin typeface="Arial" panose="020B0604020202020204" pitchFamily="34" charset="0"/>
+                <a:cs typeface="Arial" panose="020B0604020202020204" pitchFamily="34" charset="0"/>
+              </a:rPr>
+              <a:t>alrededor</a:t>
+            </a:r>
+            <a:r>
+              <a:rPr lang="en-US" sz="1200" dirty="0">
+                <a:latin typeface="Arial" panose="020B0604020202020204" pitchFamily="34" charset="0"/>
+                <a:cs typeface="Arial" panose="020B0604020202020204" pitchFamily="34" charset="0"/>
+              </a:rPr>
+              <a:t> de la </a:t>
+            </a:r>
+            <a:r>
+              <a:rPr lang="en-US" sz="1200" dirty="0" err="1">
+                <a:latin typeface="Arial" panose="020B0604020202020204" pitchFamily="34" charset="0"/>
+                <a:cs typeface="Arial" panose="020B0604020202020204" pitchFamily="34" charset="0"/>
+              </a:rPr>
+              <a:t>tercera</a:t>
+            </a:r>
+            <a:r>
+              <a:rPr lang="en-US" sz="1200" dirty="0">
+                <a:latin typeface="Arial" panose="020B0604020202020204" pitchFamily="34" charset="0"/>
+                <a:cs typeface="Arial" panose="020B0604020202020204" pitchFamily="34" charset="0"/>
+              </a:rPr>
+              <a:t> </a:t>
+            </a:r>
+            <a:r>
+              <a:rPr lang="en-US" sz="1200" dirty="0" err="1">
+                <a:latin typeface="Arial" panose="020B0604020202020204" pitchFamily="34" charset="0"/>
+                <a:cs typeface="Arial" panose="020B0604020202020204" pitchFamily="34" charset="0"/>
+              </a:rPr>
+              <a:t>cifra</a:t>
+            </a:r>
+            <a:r>
+              <a:rPr lang="en-US" sz="1200" dirty="0">
+                <a:latin typeface="Arial" panose="020B0604020202020204" pitchFamily="34" charset="0"/>
+                <a:cs typeface="Arial" panose="020B0604020202020204" pitchFamily="34" charset="0"/>
+              </a:rPr>
+              <a:t> decimal del </a:t>
+            </a:r>
+            <a:r>
+              <a:rPr lang="en-US" sz="1200" dirty="0" err="1">
+                <a:latin typeface="Arial" panose="020B0604020202020204" pitchFamily="34" charset="0"/>
+                <a:cs typeface="Arial" panose="020B0604020202020204" pitchFamily="34" charset="0"/>
+              </a:rPr>
+              <a:t>índice</a:t>
+            </a:r>
+            <a:r>
+              <a:rPr lang="en-US" sz="1200" dirty="0">
+                <a:latin typeface="Arial" panose="020B0604020202020204" pitchFamily="34" charset="0"/>
+                <a:cs typeface="Arial" panose="020B0604020202020204" pitchFamily="34" charset="0"/>
+              </a:rPr>
+              <a:t> </a:t>
+            </a:r>
+            <a:r>
+              <a:rPr lang="en-US" sz="1200" dirty="0" err="1">
+                <a:latin typeface="Arial" panose="020B0604020202020204" pitchFamily="34" charset="0"/>
+                <a:cs typeface="Arial" panose="020B0604020202020204" pitchFamily="34" charset="0"/>
+              </a:rPr>
+              <a:t>efectivo</a:t>
+            </a:r>
+            <a:r>
+              <a:rPr lang="en-US" sz="1200" dirty="0">
+                <a:latin typeface="Arial" panose="020B0604020202020204" pitchFamily="34" charset="0"/>
+                <a:cs typeface="Arial" panose="020B0604020202020204" pitchFamily="34" charset="0"/>
+              </a:rPr>
+              <a:t>, </a:t>
+            </a:r>
+            <a:r>
+              <a:rPr lang="en-US" sz="1200" dirty="0" err="1">
+                <a:latin typeface="Arial" panose="020B0604020202020204" pitchFamily="34" charset="0"/>
+                <a:cs typeface="Arial" panose="020B0604020202020204" pitchFamily="34" charset="0"/>
+              </a:rPr>
+              <a:t>cogería</a:t>
+            </a:r>
+            <a:r>
+              <a:rPr lang="en-US" sz="1200" dirty="0">
+                <a:latin typeface="Arial" panose="020B0604020202020204" pitchFamily="34" charset="0"/>
+                <a:cs typeface="Arial" panose="020B0604020202020204" pitchFamily="34" charset="0"/>
+              </a:rPr>
+              <a:t> </a:t>
+            </a:r>
+            <a:r>
+              <a:rPr lang="en-US" sz="1200" dirty="0" err="1">
+                <a:latin typeface="Arial" panose="020B0604020202020204" pitchFamily="34" charset="0"/>
+                <a:cs typeface="Arial" panose="020B0604020202020204" pitchFamily="34" charset="0"/>
+              </a:rPr>
+              <a:t>como</a:t>
+            </a:r>
+            <a:r>
+              <a:rPr lang="en-US" sz="1200" dirty="0">
+                <a:latin typeface="Arial" panose="020B0604020202020204" pitchFamily="34" charset="0"/>
+                <a:cs typeface="Arial" panose="020B0604020202020204" pitchFamily="34" charset="0"/>
+              </a:rPr>
+              <a:t> </a:t>
+            </a:r>
+            <a:r>
+              <a:rPr lang="en-US" sz="1200" dirty="0" err="1">
+                <a:latin typeface="Arial" panose="020B0604020202020204" pitchFamily="34" charset="0"/>
+                <a:cs typeface="Arial" panose="020B0604020202020204" pitchFamily="34" charset="0"/>
+              </a:rPr>
+              <a:t>configuración</a:t>
+            </a:r>
+            <a:r>
+              <a:rPr lang="en-US" sz="1200" dirty="0">
+                <a:latin typeface="Arial" panose="020B0604020202020204" pitchFamily="34" charset="0"/>
+                <a:cs typeface="Arial" panose="020B0604020202020204" pitchFamily="34" charset="0"/>
+              </a:rPr>
+              <a:t> un grid </a:t>
+            </a:r>
+            <a:r>
+              <a:rPr lang="en-US" sz="1200" dirty="0" err="1">
+                <a:latin typeface="Arial" panose="020B0604020202020204" pitchFamily="34" charset="0"/>
+                <a:cs typeface="Arial" panose="020B0604020202020204" pitchFamily="34" charset="0"/>
+              </a:rPr>
+              <a:t>resolutón</a:t>
+            </a:r>
+            <a:r>
+              <a:rPr lang="en-US" sz="1200" dirty="0">
+                <a:latin typeface="Arial" panose="020B0604020202020204" pitchFamily="34" charset="0"/>
+                <a:cs typeface="Arial" panose="020B0604020202020204" pitchFamily="34" charset="0"/>
+              </a:rPr>
+              <a:t> de 70.</a:t>
+            </a:r>
+          </a:p>
+          <a:p>
+            <a:pPr algn="just"/>
+            <a:endParaRPr lang="en-US" sz="1200" dirty="0">
+              <a:latin typeface="Arial" panose="020B0604020202020204" pitchFamily="34" charset="0"/>
+              <a:cs typeface="Arial" panose="020B0604020202020204" pitchFamily="34" charset="0"/>
+            </a:endParaRPr>
+          </a:p>
+          <a:p>
+            <a:pPr algn="just"/>
+            <a:r>
+              <a:rPr lang="en-US" sz="1200" dirty="0">
+                <a:latin typeface="Arial" panose="020B0604020202020204" pitchFamily="34" charset="0"/>
+                <a:cs typeface="Arial" panose="020B0604020202020204" pitchFamily="34" charset="0"/>
+              </a:rPr>
+              <a:t>Max grid </a:t>
+            </a:r>
+            <a:r>
+              <a:rPr lang="en-US" sz="1200" dirty="0" err="1">
+                <a:latin typeface="Arial" panose="020B0604020202020204" pitchFamily="34" charset="0"/>
+                <a:cs typeface="Arial" panose="020B0604020202020204" pitchFamily="34" charset="0"/>
+              </a:rPr>
+              <a:t>scalling</a:t>
+            </a:r>
+            <a:r>
+              <a:rPr lang="en-US" sz="1200" dirty="0">
+                <a:latin typeface="Arial" panose="020B0604020202020204" pitchFamily="34" charset="0"/>
+                <a:cs typeface="Arial" panose="020B0604020202020204" pitchFamily="34" charset="0"/>
+              </a:rPr>
+              <a:t>: </a:t>
+            </a:r>
+            <a:r>
+              <a:rPr lang="en-US" sz="1200" dirty="0" err="1">
+                <a:latin typeface="Arial" panose="020B0604020202020204" pitchFamily="34" charset="0"/>
+                <a:cs typeface="Arial" panose="020B0604020202020204" pitchFamily="34" charset="0"/>
+              </a:rPr>
+              <a:t>en</a:t>
+            </a:r>
+            <a:r>
+              <a:rPr lang="en-US" sz="1200" dirty="0">
+                <a:latin typeface="Arial" panose="020B0604020202020204" pitchFamily="34" charset="0"/>
+                <a:cs typeface="Arial" panose="020B0604020202020204" pitchFamily="34" charset="0"/>
+              </a:rPr>
+              <a:t> </a:t>
+            </a:r>
+            <a:r>
+              <a:rPr lang="en-US" sz="1200" dirty="0" err="1">
+                <a:latin typeface="Arial" panose="020B0604020202020204" pitchFamily="34" charset="0"/>
+                <a:cs typeface="Arial" panose="020B0604020202020204" pitchFamily="34" charset="0"/>
+              </a:rPr>
+              <a:t>este</a:t>
+            </a:r>
+            <a:r>
+              <a:rPr lang="en-US" sz="1200" dirty="0">
+                <a:latin typeface="Arial" panose="020B0604020202020204" pitchFamily="34" charset="0"/>
+                <a:cs typeface="Arial" panose="020B0604020202020204" pitchFamily="34" charset="0"/>
+              </a:rPr>
+              <a:t> </a:t>
+            </a:r>
+            <a:r>
+              <a:rPr lang="en-US" sz="1200" dirty="0" err="1">
+                <a:latin typeface="Arial" panose="020B0604020202020204" pitchFamily="34" charset="0"/>
+                <a:cs typeface="Arial" panose="020B0604020202020204" pitchFamily="34" charset="0"/>
+              </a:rPr>
+              <a:t>caso</a:t>
+            </a:r>
+            <a:r>
+              <a:rPr lang="en-US" sz="1200" dirty="0">
+                <a:latin typeface="Arial" panose="020B0604020202020204" pitchFamily="34" charset="0"/>
+                <a:cs typeface="Arial" panose="020B0604020202020204" pitchFamily="34" charset="0"/>
+              </a:rPr>
+              <a:t> </a:t>
+            </a:r>
+            <a:r>
+              <a:rPr lang="en-US" sz="1200" dirty="0" err="1">
+                <a:latin typeface="Arial" panose="020B0604020202020204" pitchFamily="34" charset="0"/>
+                <a:cs typeface="Arial" panose="020B0604020202020204" pitchFamily="34" charset="0"/>
+              </a:rPr>
+              <a:t>si</a:t>
+            </a:r>
+            <a:r>
+              <a:rPr lang="en-US" sz="1200" dirty="0">
+                <a:latin typeface="Arial" panose="020B0604020202020204" pitchFamily="34" charset="0"/>
+                <a:cs typeface="Arial" panose="020B0604020202020204" pitchFamily="34" charset="0"/>
+              </a:rPr>
+              <a:t> que </a:t>
+            </a:r>
+            <a:r>
+              <a:rPr lang="en-US" sz="1200" dirty="0" err="1">
+                <a:latin typeface="Arial" panose="020B0604020202020204" pitchFamily="34" charset="0"/>
+                <a:cs typeface="Arial" panose="020B0604020202020204" pitchFamily="34" charset="0"/>
+              </a:rPr>
+              <a:t>vemos</a:t>
+            </a:r>
+            <a:r>
+              <a:rPr lang="en-US" sz="1200" dirty="0">
+                <a:latin typeface="Arial" panose="020B0604020202020204" pitchFamily="34" charset="0"/>
+                <a:cs typeface="Arial" panose="020B0604020202020204" pitchFamily="34" charset="0"/>
+              </a:rPr>
+              <a:t> que </a:t>
+            </a:r>
+            <a:r>
+              <a:rPr lang="en-US" sz="1200" dirty="0" err="1">
+                <a:latin typeface="Arial" panose="020B0604020202020204" pitchFamily="34" charset="0"/>
+                <a:cs typeface="Arial" panose="020B0604020202020204" pitchFamily="34" charset="0"/>
+              </a:rPr>
+              <a:t>llega</a:t>
+            </a:r>
+            <a:r>
+              <a:rPr lang="en-US" sz="1200" dirty="0">
+                <a:latin typeface="Arial" panose="020B0604020202020204" pitchFamily="34" charset="0"/>
+                <a:cs typeface="Arial" panose="020B0604020202020204" pitchFamily="34" charset="0"/>
+              </a:rPr>
+              <a:t> un punto </a:t>
+            </a:r>
+            <a:r>
+              <a:rPr lang="en-US" sz="1200" dirty="0" err="1">
+                <a:latin typeface="Arial" panose="020B0604020202020204" pitchFamily="34" charset="0"/>
+                <a:cs typeface="Arial" panose="020B0604020202020204" pitchFamily="34" charset="0"/>
+              </a:rPr>
+              <a:t>en</a:t>
+            </a:r>
+            <a:r>
+              <a:rPr lang="en-US" sz="1200" dirty="0">
+                <a:latin typeface="Arial" panose="020B0604020202020204" pitchFamily="34" charset="0"/>
+                <a:cs typeface="Arial" panose="020B0604020202020204" pitchFamily="34" charset="0"/>
+              </a:rPr>
+              <a:t> </a:t>
+            </a:r>
+            <a:r>
+              <a:rPr lang="en-US" sz="1200" dirty="0" err="1">
+                <a:latin typeface="Arial" panose="020B0604020202020204" pitchFamily="34" charset="0"/>
+                <a:cs typeface="Arial" panose="020B0604020202020204" pitchFamily="34" charset="0"/>
+              </a:rPr>
+              <a:t>el</a:t>
+            </a:r>
+            <a:r>
+              <a:rPr lang="en-US" sz="1200" dirty="0">
+                <a:latin typeface="Arial" panose="020B0604020202020204" pitchFamily="34" charset="0"/>
+                <a:cs typeface="Arial" panose="020B0604020202020204" pitchFamily="34" charset="0"/>
+              </a:rPr>
+              <a:t> que se </a:t>
+            </a:r>
+            <a:r>
+              <a:rPr lang="en-US" sz="1200" dirty="0" err="1">
+                <a:latin typeface="Arial" panose="020B0604020202020204" pitchFamily="34" charset="0"/>
+                <a:cs typeface="Arial" panose="020B0604020202020204" pitchFamily="34" charset="0"/>
+              </a:rPr>
+              <a:t>estabilida</a:t>
+            </a:r>
+            <a:r>
+              <a:rPr lang="en-US" sz="1200" dirty="0">
+                <a:latin typeface="Arial" panose="020B0604020202020204" pitchFamily="34" charset="0"/>
+                <a:cs typeface="Arial" panose="020B0604020202020204" pitchFamily="34" charset="0"/>
+              </a:rPr>
+              <a:t> </a:t>
+            </a:r>
+            <a:r>
+              <a:rPr lang="en-US" sz="1200" dirty="0" err="1">
+                <a:latin typeface="Arial" panose="020B0604020202020204" pitchFamily="34" charset="0"/>
+                <a:cs typeface="Arial" panose="020B0604020202020204" pitchFamily="34" charset="0"/>
+              </a:rPr>
+              <a:t>alrededor</a:t>
+            </a:r>
+            <a:r>
+              <a:rPr lang="en-US" sz="1200" dirty="0">
+                <a:latin typeface="Arial" panose="020B0604020202020204" pitchFamily="34" charset="0"/>
+                <a:cs typeface="Arial" panose="020B0604020202020204" pitchFamily="34" charset="0"/>
+              </a:rPr>
+              <a:t> del valor 1.7, por lo que </a:t>
+            </a:r>
+            <a:r>
+              <a:rPr lang="en-US" sz="1200" dirty="0" err="1">
+                <a:latin typeface="Arial" panose="020B0604020202020204" pitchFamily="34" charset="0"/>
+                <a:cs typeface="Arial" panose="020B0604020202020204" pitchFamily="34" charset="0"/>
+              </a:rPr>
+              <a:t>escogeremos</a:t>
+            </a:r>
+            <a:r>
+              <a:rPr lang="en-US" sz="1200" dirty="0">
+                <a:latin typeface="Arial" panose="020B0604020202020204" pitchFamily="34" charset="0"/>
+                <a:cs typeface="Arial" panose="020B0604020202020204" pitchFamily="34" charset="0"/>
+              </a:rPr>
+              <a:t> </a:t>
+            </a:r>
+            <a:r>
+              <a:rPr lang="en-US" sz="1200" dirty="0" err="1">
+                <a:latin typeface="Arial" panose="020B0604020202020204" pitchFamily="34" charset="0"/>
+                <a:cs typeface="Arial" panose="020B0604020202020204" pitchFamily="34" charset="0"/>
+              </a:rPr>
+              <a:t>esta</a:t>
+            </a:r>
+            <a:r>
+              <a:rPr lang="en-US" sz="1200" dirty="0">
+                <a:latin typeface="Arial" panose="020B0604020202020204" pitchFamily="34" charset="0"/>
+                <a:cs typeface="Arial" panose="020B0604020202020204" pitchFamily="34" charset="0"/>
+              </a:rPr>
+              <a:t> </a:t>
+            </a:r>
+            <a:r>
+              <a:rPr lang="en-US" sz="1200" dirty="0" err="1">
+                <a:latin typeface="Arial" panose="020B0604020202020204" pitchFamily="34" charset="0"/>
+                <a:cs typeface="Arial" panose="020B0604020202020204" pitchFamily="34" charset="0"/>
+              </a:rPr>
+              <a:t>configuración</a:t>
+            </a:r>
+            <a:r>
+              <a:rPr lang="en-US" sz="1200" dirty="0">
+                <a:latin typeface="Arial" panose="020B0604020202020204" pitchFamily="34" charset="0"/>
+                <a:cs typeface="Arial" panose="020B0604020202020204" pitchFamily="34" charset="0"/>
+              </a:rPr>
+              <a:t>.</a:t>
+            </a:r>
+          </a:p>
+          <a:p>
+            <a:pPr algn="just"/>
+            <a:endParaRPr lang="en-US" sz="1200" dirty="0">
+              <a:latin typeface="Arial" panose="020B0604020202020204" pitchFamily="34" charset="0"/>
+              <a:cs typeface="Arial" panose="020B0604020202020204" pitchFamily="34" charset="0"/>
+            </a:endParaRPr>
+          </a:p>
+        </p:txBody>
+      </p:sp>
+      <p:sp>
+        <p:nvSpPr>
+          <p:cNvPr id="8" name="Rectángulo 7">
+            <a:extLst>
+              <a:ext uri="{FF2B5EF4-FFF2-40B4-BE49-F238E27FC236}">
+                <a16:creationId xmlns:a16="http://schemas.microsoft.com/office/drawing/2014/main" id="{A530E92C-F0E4-42F3-A849-0E197D7BB34C}"/>
+              </a:ext>
+            </a:extLst>
+          </p:cNvPr>
+          <p:cNvSpPr/>
+          <p:nvPr/>
+        </p:nvSpPr>
+        <p:spPr>
+          <a:xfrm>
+            <a:off x="6322853" y="1066800"/>
+            <a:ext cx="5486559" cy="3306028"/>
+          </a:xfrm>
+          <a:prstGeom prst="rect">
+            <a:avLst/>
+          </a:prstGeom>
+          <a:noFill/>
+          <a:ln w="28575">
+            <a:solidFill>
+              <a:srgbClr val="E0700D"/>
+            </a:solidFill>
+          </a:ln>
+        </p:spPr>
+        <p:style>
+          <a:lnRef idx="2">
+            <a:schemeClr val="accent1">
+              <a:shade val="15000"/>
+            </a:schemeClr>
+          </a:lnRef>
+          <a:fillRef idx="1">
+            <a:schemeClr val="accent1"/>
+          </a:fillRef>
+          <a:effectRef idx="0">
+            <a:schemeClr val="accent1"/>
+          </a:effectRef>
+          <a:fontRef idx="minor">
+            <a:schemeClr val="lt1"/>
+          </a:fontRef>
+        </p:style>
+        <p:txBody>
+          <a:bodyPr rtlCol="0" anchor="ctr"/>
+          <a:lstStyle/>
+          <a:p>
+            <a:pPr algn="ctr"/>
+            <a:endParaRPr lang="en-US"/>
+          </a:p>
+        </p:txBody>
+      </p:sp>
+      <p:sp>
+        <p:nvSpPr>
+          <p:cNvPr id="12" name="CuadroTexto 11">
+            <a:extLst>
+              <a:ext uri="{FF2B5EF4-FFF2-40B4-BE49-F238E27FC236}">
+                <a16:creationId xmlns:a16="http://schemas.microsoft.com/office/drawing/2014/main" id="{1E421EB8-AB9C-464E-8075-C348432DEE58}"/>
+              </a:ext>
+            </a:extLst>
+          </p:cNvPr>
+          <p:cNvSpPr txBox="1"/>
+          <p:nvPr/>
+        </p:nvSpPr>
+        <p:spPr>
+          <a:xfrm>
+            <a:off x="628491" y="243280"/>
+            <a:ext cx="6129336" cy="369332"/>
+          </a:xfrm>
+          <a:prstGeom prst="rect">
+            <a:avLst/>
+          </a:prstGeom>
+          <a:noFill/>
+        </p:spPr>
+        <p:txBody>
+          <a:bodyPr wrap="square">
+            <a:spAutoFit/>
+          </a:bodyPr>
+          <a:lstStyle/>
+          <a:p>
+            <a:r>
+              <a:rPr lang="es-ES" dirty="0"/>
+              <a:t>EXTRA:</a:t>
+            </a:r>
+          </a:p>
+        </p:txBody>
+      </p:sp>
+      <p:sp>
+        <p:nvSpPr>
+          <p:cNvPr id="14" name="CuadroTexto 13">
+            <a:extLst>
+              <a:ext uri="{FF2B5EF4-FFF2-40B4-BE49-F238E27FC236}">
+                <a16:creationId xmlns:a16="http://schemas.microsoft.com/office/drawing/2014/main" id="{AC02492B-4971-400F-B43C-D91E5D75E382}"/>
+              </a:ext>
+            </a:extLst>
+          </p:cNvPr>
+          <p:cNvSpPr txBox="1"/>
+          <p:nvPr/>
+        </p:nvSpPr>
+        <p:spPr>
+          <a:xfrm>
+            <a:off x="1447800" y="186666"/>
+            <a:ext cx="9448800" cy="738664"/>
+          </a:xfrm>
+          <a:prstGeom prst="rect">
+            <a:avLst/>
+          </a:prstGeom>
+          <a:noFill/>
+        </p:spPr>
+        <p:txBody>
+          <a:bodyPr wrap="square">
+            <a:spAutoFit/>
+          </a:bodyPr>
+          <a:lstStyle/>
+          <a:p>
+            <a:r>
+              <a:rPr lang="en-US" sz="2400" b="1" dirty="0"/>
+              <a:t>Learning outcome #1 – Convergence tests</a:t>
+            </a:r>
+            <a:br>
+              <a:rPr lang="en-US" sz="2400" dirty="0"/>
+            </a:br>
+            <a:r>
+              <a:rPr lang="nl-NL" b="0" dirty="0"/>
+              <a:t>DE waveguide</a:t>
+            </a:r>
+            <a:r>
+              <a:rPr lang="nl-NL" dirty="0"/>
+              <a:t> Silicon-On-Insulator:</a:t>
+            </a:r>
+            <a:r>
+              <a:rPr lang="nl-NL" b="0" dirty="0"/>
+              <a:t> w = </a:t>
+            </a:r>
+            <a:r>
+              <a:rPr lang="nl-NL" dirty="0"/>
+              <a:t>0.5</a:t>
+            </a:r>
+            <a:r>
+              <a:rPr lang="nl-NL" b="0" dirty="0"/>
+              <a:t> µm, </a:t>
+            </a:r>
+            <a:r>
+              <a:rPr lang="nl-NL" dirty="0"/>
+              <a:t>thickness= 220nm, </a:t>
+            </a:r>
+            <a:r>
+              <a:rPr lang="nl-NL" b="0" dirty="0"/>
+              <a:t>neff_TE0, wvl 1.55 µm. </a:t>
+            </a:r>
+            <a:endParaRPr lang="es-ES" dirty="0"/>
+          </a:p>
+        </p:txBody>
+      </p:sp>
+      <p:pic>
+        <p:nvPicPr>
+          <p:cNvPr id="15" name="Imagen 14">
+            <a:extLst>
+              <a:ext uri="{FF2B5EF4-FFF2-40B4-BE49-F238E27FC236}">
+                <a16:creationId xmlns:a16="http://schemas.microsoft.com/office/drawing/2014/main" id="{B1962ACC-D091-4DFB-9AD8-96D26E82EE41}"/>
+              </a:ext>
+            </a:extLst>
+          </p:cNvPr>
+          <p:cNvPicPr>
+            <a:picLocks noChangeAspect="1"/>
+          </p:cNvPicPr>
+          <p:nvPr/>
+        </p:nvPicPr>
+        <p:blipFill>
+          <a:blip r:embed="rId2"/>
+          <a:stretch>
+            <a:fillRect/>
+          </a:stretch>
+        </p:blipFill>
+        <p:spPr>
+          <a:xfrm>
+            <a:off x="7041387" y="1203767"/>
+            <a:ext cx="4049489" cy="3037116"/>
+          </a:xfrm>
+          <a:prstGeom prst="rect">
+            <a:avLst/>
+          </a:prstGeom>
+        </p:spPr>
+      </p:pic>
+      <p:pic>
+        <p:nvPicPr>
+          <p:cNvPr id="17" name="Imagen 16">
+            <a:extLst>
+              <a:ext uri="{FF2B5EF4-FFF2-40B4-BE49-F238E27FC236}">
+                <a16:creationId xmlns:a16="http://schemas.microsoft.com/office/drawing/2014/main" id="{01F296E9-DCCE-437D-BAA1-006ECF70FE59}"/>
+              </a:ext>
+            </a:extLst>
+          </p:cNvPr>
+          <p:cNvPicPr>
+            <a:picLocks noChangeAspect="1"/>
+          </p:cNvPicPr>
+          <p:nvPr/>
+        </p:nvPicPr>
+        <p:blipFill>
+          <a:blip r:embed="rId3"/>
+          <a:stretch>
+            <a:fillRect/>
+          </a:stretch>
+        </p:blipFill>
+        <p:spPr>
+          <a:xfrm>
+            <a:off x="1101124" y="1203767"/>
+            <a:ext cx="4191000" cy="3100192"/>
+          </a:xfrm>
+          <a:prstGeom prst="rect">
+            <a:avLst/>
+          </a:prstGeom>
+        </p:spPr>
+      </p:pic>
     </p:spTree>
+    <p:extLst>
+      <p:ext uri="{BB962C8B-B14F-4D97-AF65-F5344CB8AC3E}">
+        <p14:creationId xmlns:p14="http://schemas.microsoft.com/office/powerpoint/2010/main" val="2620067919"/>
+      </p:ext>
+    </p:extLst>
+  </p:cSld>
+  <p:clrMapOvr>
+    <a:masterClrMapping/>
+  </p:clrMapOvr>
+</p:sld>
+</file>
+
+<file path=ppt/slides/slide9.xml><?xml version="1.0" encoding="utf-8"?>
+<p:sld xmlns:a="http://schemas.openxmlformats.org/drawingml/2006/main" xmlns:r="http://schemas.openxmlformats.org/officeDocument/2006/relationships" xmlns:p="http://schemas.openxmlformats.org/presentationml/2006/main">
+  <p:cSld>
+    <p:spTree>
+      <p:nvGrpSpPr>
+        <p:cNvPr id="1" name="">
+          <a:extLst>
+            <a:ext uri="{FF2B5EF4-FFF2-40B4-BE49-F238E27FC236}">
+              <a16:creationId xmlns:a16="http://schemas.microsoft.com/office/drawing/2014/main" id="{9E1DA0F9-B230-D9FC-3CE7-03BD08CF54F7}"/>
+            </a:ext>
+          </a:extLst>
+        </p:cNvPr>
+        <p:cNvGrpSpPr/>
+        <p:nvPr/>
+      </p:nvGrpSpPr>
+      <p:grpSpPr>
+        <a:xfrm>
+          <a:off x="0" y="0"/>
+          <a:ext cx="0" cy="0"/>
+          <a:chOff x="0" y="0"/>
+          <a:chExt cx="0" cy="0"/>
+        </a:xfrm>
+      </p:grpSpPr>
+      <p:pic>
+        <p:nvPicPr>
+          <p:cNvPr id="83" name="Gráfico 82">
+            <a:extLst>
+              <a:ext uri="{FF2B5EF4-FFF2-40B4-BE49-F238E27FC236}">
+                <a16:creationId xmlns:a16="http://schemas.microsoft.com/office/drawing/2014/main" id="{4D53B68D-17ED-7EFB-F2B4-10DA7A772E17}"/>
+              </a:ext>
+            </a:extLst>
+          </p:cNvPr>
+          <p:cNvPicPr>
+            <a:picLocks noChangeAspect="1"/>
+          </p:cNvPicPr>
+          <p:nvPr/>
+        </p:nvPicPr>
+        <p:blipFill>
+          <a:blip r:embed="rId3">
+            <a:extLst>
+              <a:ext uri="{96DAC541-7B7A-43D3-8B79-37D633B846F1}">
+                <asvg:svgBlip xmlns:asvg="http://schemas.microsoft.com/office/drawing/2016/SVG/main" r:embed="rId4"/>
+              </a:ext>
+            </a:extLst>
+          </a:blip>
+          <a:stretch>
+            <a:fillRect/>
+          </a:stretch>
+        </p:blipFill>
+        <p:spPr>
+          <a:xfrm>
+            <a:off x="5045006" y="6356057"/>
+            <a:ext cx="6409575" cy="363174"/>
+          </a:xfrm>
+          <a:prstGeom prst="rect">
+            <a:avLst/>
+          </a:prstGeom>
+        </p:spPr>
+      </p:pic>
+      <p:sp>
+        <p:nvSpPr>
+          <p:cNvPr id="84" name="Marcador de número de diapositiva 83">
+            <a:extLst>
+              <a:ext uri="{FF2B5EF4-FFF2-40B4-BE49-F238E27FC236}">
+                <a16:creationId xmlns:a16="http://schemas.microsoft.com/office/drawing/2014/main" id="{09AB8697-C1EE-6E9A-6550-ACA2C3AE6630}"/>
+              </a:ext>
+            </a:extLst>
+          </p:cNvPr>
+          <p:cNvSpPr>
+            <a:spLocks noGrp="1"/>
+          </p:cNvSpPr>
+          <p:nvPr>
+            <p:ph type="sldNum" sz="quarter" idx="7"/>
+          </p:nvPr>
+        </p:nvSpPr>
+        <p:spPr>
+          <a:xfrm>
+            <a:off x="9379811" y="6386169"/>
+            <a:ext cx="2804160" cy="342900"/>
+          </a:xfrm>
+        </p:spPr>
+        <p:txBody>
+          <a:bodyPr/>
+          <a:lstStyle/>
+          <a:p>
+            <a:fld id="{B6F15528-21DE-4FAA-801E-634DDDAF4B2B}" type="slidenum">
+              <a:rPr lang="es-ES" smtClean="0"/>
+              <a:t>9</a:t>
+            </a:fld>
+            <a:endParaRPr lang="es-ES"/>
+          </a:p>
+        </p:txBody>
+      </p:sp>
+      <p:sp>
+        <p:nvSpPr>
+          <p:cNvPr id="3" name="Marcador de pie de página 2">
+            <a:extLst>
+              <a:ext uri="{FF2B5EF4-FFF2-40B4-BE49-F238E27FC236}">
+                <a16:creationId xmlns:a16="http://schemas.microsoft.com/office/drawing/2014/main" id="{970D4A6C-5B37-EDF5-6242-74B16127E96B}"/>
+              </a:ext>
+            </a:extLst>
+          </p:cNvPr>
+          <p:cNvSpPr>
+            <a:spLocks noGrp="1"/>
+          </p:cNvSpPr>
+          <p:nvPr>
+            <p:ph type="ftr" sz="quarter" idx="5"/>
+          </p:nvPr>
+        </p:nvSpPr>
+        <p:spPr/>
+        <p:txBody>
+          <a:bodyPr/>
+          <a:lstStyle/>
+          <a:p>
+            <a:pPr marL="12700">
+              <a:spcBef>
+                <a:spcPts val="15"/>
+              </a:spcBef>
+            </a:pPr>
+            <a:r>
+              <a:rPr lang="es-ES" spc="-5"/>
+              <a:t>LAB 1.0. WAVEGUIDES</a:t>
+            </a:r>
+            <a:endParaRPr lang="es-ES" spc="-5" dirty="0"/>
+          </a:p>
+        </p:txBody>
+      </p:sp>
+      <p:sp>
+        <p:nvSpPr>
+          <p:cNvPr id="5" name="Rectángulo 4">
+            <a:extLst>
+              <a:ext uri="{FF2B5EF4-FFF2-40B4-BE49-F238E27FC236}">
+                <a16:creationId xmlns:a16="http://schemas.microsoft.com/office/drawing/2014/main" id="{A6B92C76-6772-2E00-346F-532321092C04}"/>
+              </a:ext>
+            </a:extLst>
+          </p:cNvPr>
+          <p:cNvSpPr/>
+          <p:nvPr/>
+        </p:nvSpPr>
+        <p:spPr>
+          <a:xfrm>
+            <a:off x="472653" y="1396534"/>
+            <a:ext cx="5486559" cy="3404066"/>
+          </a:xfrm>
+          <a:prstGeom prst="rect">
+            <a:avLst/>
+          </a:prstGeom>
+          <a:noFill/>
+          <a:ln w="28575">
+            <a:solidFill>
+              <a:srgbClr val="E0700D"/>
+            </a:solidFill>
+          </a:ln>
+        </p:spPr>
+        <p:style>
+          <a:lnRef idx="2">
+            <a:schemeClr val="accent1">
+              <a:shade val="15000"/>
+            </a:schemeClr>
+          </a:lnRef>
+          <a:fillRef idx="1">
+            <a:schemeClr val="accent1"/>
+          </a:fillRef>
+          <a:effectRef idx="0">
+            <a:schemeClr val="accent1"/>
+          </a:effectRef>
+          <a:fontRef idx="minor">
+            <a:schemeClr val="lt1"/>
+          </a:fontRef>
+        </p:style>
+        <p:txBody>
+          <a:bodyPr rtlCol="0" anchor="ctr"/>
+          <a:lstStyle/>
+          <a:p>
+            <a:pPr algn="ctr"/>
+            <a:endParaRPr lang="en-US"/>
+          </a:p>
+        </p:txBody>
+      </p:sp>
+      <p:sp>
+        <p:nvSpPr>
+          <p:cNvPr id="14" name="CuadroTexto 13">
+            <a:extLst>
+              <a:ext uri="{FF2B5EF4-FFF2-40B4-BE49-F238E27FC236}">
+                <a16:creationId xmlns:a16="http://schemas.microsoft.com/office/drawing/2014/main" id="{3BA4C38A-AE66-42D4-B814-B7F7C31C3079}"/>
+              </a:ext>
+            </a:extLst>
+          </p:cNvPr>
+          <p:cNvSpPr txBox="1"/>
+          <p:nvPr/>
+        </p:nvSpPr>
+        <p:spPr>
+          <a:xfrm>
+            <a:off x="6222087" y="1396534"/>
+            <a:ext cx="5497260" cy="3416320"/>
+          </a:xfrm>
+          <a:prstGeom prst="rect">
+            <a:avLst/>
+          </a:prstGeom>
+          <a:solidFill>
+            <a:schemeClr val="bg1">
+              <a:lumMod val="95000"/>
+            </a:schemeClr>
+          </a:solidFill>
+          <a:ln w="28575">
+            <a:solidFill>
+              <a:srgbClr val="E0700D"/>
+            </a:solidFill>
+          </a:ln>
+        </p:spPr>
+        <p:txBody>
+          <a:bodyPr wrap="square" rtlCol="0">
+            <a:spAutoFit/>
+          </a:bodyPr>
+          <a:lstStyle/>
+          <a:p>
+            <a:pPr algn="just"/>
+            <a:endParaRPr lang="en-US" sz="1200" dirty="0">
+              <a:latin typeface="Arial" panose="020B0604020202020204" pitchFamily="34" charset="0"/>
+              <a:cs typeface="Arial" panose="020B0604020202020204" pitchFamily="34" charset="0"/>
+            </a:endParaRPr>
+          </a:p>
+          <a:p>
+            <a:pPr algn="just"/>
+            <a:endParaRPr lang="en-US" sz="1200" dirty="0">
+              <a:latin typeface="Arial" panose="020B0604020202020204" pitchFamily="34" charset="0"/>
+              <a:cs typeface="Arial" panose="020B0604020202020204" pitchFamily="34" charset="0"/>
+            </a:endParaRPr>
+          </a:p>
+          <a:p>
+            <a:pPr algn="just"/>
+            <a:r>
+              <a:rPr lang="en-US" sz="1200" dirty="0" err="1">
+                <a:latin typeface="Arial" panose="020B0604020202020204" pitchFamily="34" charset="0"/>
+                <a:cs typeface="Arial" panose="020B0604020202020204" pitchFamily="34" charset="0"/>
+              </a:rPr>
+              <a:t>Comparando</a:t>
+            </a:r>
+            <a:r>
+              <a:rPr lang="en-US" sz="1200" dirty="0">
+                <a:latin typeface="Arial" panose="020B0604020202020204" pitchFamily="34" charset="0"/>
+                <a:cs typeface="Arial" panose="020B0604020202020204" pitchFamily="34" charset="0"/>
+              </a:rPr>
+              <a:t> </a:t>
+            </a:r>
+            <a:r>
+              <a:rPr lang="en-US" sz="1200" dirty="0" err="1">
+                <a:latin typeface="Arial" panose="020B0604020202020204" pitchFamily="34" charset="0"/>
+                <a:cs typeface="Arial" panose="020B0604020202020204" pitchFamily="34" charset="0"/>
+              </a:rPr>
+              <a:t>estos</a:t>
+            </a:r>
+            <a:r>
+              <a:rPr lang="en-US" sz="1200" dirty="0">
+                <a:latin typeface="Arial" panose="020B0604020202020204" pitchFamily="34" charset="0"/>
+                <a:cs typeface="Arial" panose="020B0604020202020204" pitchFamily="34" charset="0"/>
+              </a:rPr>
+              <a:t> </a:t>
+            </a:r>
+            <a:r>
+              <a:rPr lang="en-US" sz="1200" dirty="0" err="1">
+                <a:latin typeface="Arial" panose="020B0604020202020204" pitchFamily="34" charset="0"/>
+                <a:cs typeface="Arial" panose="020B0604020202020204" pitchFamily="34" charset="0"/>
+              </a:rPr>
+              <a:t>resultados</a:t>
+            </a:r>
+            <a:r>
+              <a:rPr lang="en-US" sz="1200" dirty="0">
+                <a:latin typeface="Arial" panose="020B0604020202020204" pitchFamily="34" charset="0"/>
+                <a:cs typeface="Arial" panose="020B0604020202020204" pitchFamily="34" charset="0"/>
+              </a:rPr>
+              <a:t> con los </a:t>
+            </a:r>
+            <a:r>
+              <a:rPr lang="en-US" sz="1200" dirty="0" err="1">
+                <a:latin typeface="Arial" panose="020B0604020202020204" pitchFamily="34" charset="0"/>
+                <a:cs typeface="Arial" panose="020B0604020202020204" pitchFamily="34" charset="0"/>
+              </a:rPr>
+              <a:t>obtenidos</a:t>
+            </a:r>
+            <a:r>
+              <a:rPr lang="en-US" sz="1200" dirty="0">
+                <a:latin typeface="Arial" panose="020B0604020202020204" pitchFamily="34" charset="0"/>
+                <a:cs typeface="Arial" panose="020B0604020202020204" pitchFamily="34" charset="0"/>
+              </a:rPr>
+              <a:t> </a:t>
+            </a:r>
+            <a:r>
+              <a:rPr lang="en-US" sz="1200" dirty="0" err="1">
+                <a:latin typeface="Arial" panose="020B0604020202020204" pitchFamily="34" charset="0"/>
+                <a:cs typeface="Arial" panose="020B0604020202020204" pitchFamily="34" charset="0"/>
+              </a:rPr>
+              <a:t>en</a:t>
+            </a:r>
+            <a:r>
+              <a:rPr lang="en-US" sz="1200" dirty="0">
+                <a:latin typeface="Arial" panose="020B0604020202020204" pitchFamily="34" charset="0"/>
+                <a:cs typeface="Arial" panose="020B0604020202020204" pitchFamily="34" charset="0"/>
+              </a:rPr>
+              <a:t> la </a:t>
+            </a:r>
+            <a:r>
+              <a:rPr lang="en-US" sz="1200" dirty="0" err="1">
+                <a:latin typeface="Arial" panose="020B0604020202020204" pitchFamily="34" charset="0"/>
+                <a:cs typeface="Arial" panose="020B0604020202020204" pitchFamily="34" charset="0"/>
+              </a:rPr>
+              <a:t>configuración</a:t>
+            </a:r>
+            <a:r>
+              <a:rPr lang="en-US" sz="1200" dirty="0">
+                <a:latin typeface="Arial" panose="020B0604020202020204" pitchFamily="34" charset="0"/>
+                <a:cs typeface="Arial" panose="020B0604020202020204" pitchFamily="34" charset="0"/>
+              </a:rPr>
+              <a:t> de </a:t>
+            </a:r>
+            <a:r>
+              <a:rPr lang="en-US" sz="1200" dirty="0" err="1">
+                <a:latin typeface="Arial" panose="020B0604020202020204" pitchFamily="34" charset="0"/>
+                <a:cs typeface="Arial" panose="020B0604020202020204" pitchFamily="34" charset="0"/>
+              </a:rPr>
+              <a:t>SiN</a:t>
+            </a:r>
+            <a:r>
+              <a:rPr lang="en-US" sz="1200" dirty="0">
+                <a:latin typeface="Arial" panose="020B0604020202020204" pitchFamily="34" charset="0"/>
+                <a:cs typeface="Arial" panose="020B0604020202020204" pitchFamily="34" charset="0"/>
+              </a:rPr>
+              <a:t> </a:t>
+            </a:r>
+            <a:r>
+              <a:rPr lang="en-US" sz="1200" dirty="0" err="1">
+                <a:latin typeface="Arial" panose="020B0604020202020204" pitchFamily="34" charset="0"/>
+                <a:cs typeface="Arial" panose="020B0604020202020204" pitchFamily="34" charset="0"/>
+              </a:rPr>
+              <a:t>en</a:t>
+            </a:r>
+            <a:r>
+              <a:rPr lang="en-US" sz="1200" dirty="0">
+                <a:latin typeface="Arial" panose="020B0604020202020204" pitchFamily="34" charset="0"/>
+                <a:cs typeface="Arial" panose="020B0604020202020204" pitchFamily="34" charset="0"/>
+              </a:rPr>
+              <a:t> </a:t>
+            </a:r>
+            <a:r>
+              <a:rPr lang="en-US" sz="1200" dirty="0" err="1">
+                <a:latin typeface="Arial" panose="020B0604020202020204" pitchFamily="34" charset="0"/>
+                <a:cs typeface="Arial" panose="020B0604020202020204" pitchFamily="34" charset="0"/>
+              </a:rPr>
+              <a:t>el</a:t>
+            </a:r>
+            <a:r>
+              <a:rPr lang="en-US" sz="1200" dirty="0">
+                <a:latin typeface="Arial" panose="020B0604020202020204" pitchFamily="34" charset="0"/>
+                <a:cs typeface="Arial" panose="020B0604020202020204" pitchFamily="34" charset="0"/>
+              </a:rPr>
+              <a:t> </a:t>
+            </a:r>
+            <a:r>
+              <a:rPr lang="en-US" sz="1200" dirty="0" err="1">
+                <a:latin typeface="Arial" panose="020B0604020202020204" pitchFamily="34" charset="0"/>
+                <a:cs typeface="Arial" panose="020B0604020202020204" pitchFamily="34" charset="0"/>
+              </a:rPr>
+              <a:t>nucleo</a:t>
+            </a:r>
+            <a:r>
+              <a:rPr lang="en-US" sz="1200" dirty="0">
+                <a:latin typeface="Arial" panose="020B0604020202020204" pitchFamily="34" charset="0"/>
+                <a:cs typeface="Arial" panose="020B0604020202020204" pitchFamily="34" charset="0"/>
+              </a:rPr>
+              <a:t>, </a:t>
+            </a:r>
+            <a:r>
+              <a:rPr lang="en-US" sz="1200" dirty="0" err="1">
+                <a:latin typeface="Arial" panose="020B0604020202020204" pitchFamily="34" charset="0"/>
+                <a:cs typeface="Arial" panose="020B0604020202020204" pitchFamily="34" charset="0"/>
+              </a:rPr>
+              <a:t>podemos</a:t>
+            </a:r>
+            <a:r>
+              <a:rPr lang="en-US" sz="1200" dirty="0">
+                <a:latin typeface="Arial" panose="020B0604020202020204" pitchFamily="34" charset="0"/>
+                <a:cs typeface="Arial" panose="020B0604020202020204" pitchFamily="34" charset="0"/>
+              </a:rPr>
+              <a:t> </a:t>
+            </a:r>
+            <a:r>
+              <a:rPr lang="en-US" sz="1200" dirty="0" err="1">
+                <a:latin typeface="Arial" panose="020B0604020202020204" pitchFamily="34" charset="0"/>
+                <a:cs typeface="Arial" panose="020B0604020202020204" pitchFamily="34" charset="0"/>
+              </a:rPr>
+              <a:t>destacar</a:t>
+            </a:r>
+            <a:r>
+              <a:rPr lang="en-US" sz="1200" dirty="0">
+                <a:latin typeface="Arial" panose="020B0604020202020204" pitchFamily="34" charset="0"/>
+                <a:cs typeface="Arial" panose="020B0604020202020204" pitchFamily="34" charset="0"/>
+              </a:rPr>
+              <a:t> </a:t>
+            </a:r>
+            <a:r>
+              <a:rPr lang="en-US" sz="1200" dirty="0" err="1">
+                <a:latin typeface="Arial" panose="020B0604020202020204" pitchFamily="34" charset="0"/>
+                <a:cs typeface="Arial" panose="020B0604020202020204" pitchFamily="34" charset="0"/>
+              </a:rPr>
+              <a:t>varios</a:t>
+            </a:r>
+            <a:r>
+              <a:rPr lang="en-US" sz="1200" dirty="0">
+                <a:latin typeface="Arial" panose="020B0604020202020204" pitchFamily="34" charset="0"/>
+                <a:cs typeface="Arial" panose="020B0604020202020204" pitchFamily="34" charset="0"/>
+              </a:rPr>
+              <a:t> puntos.</a:t>
+            </a:r>
+          </a:p>
+          <a:p>
+            <a:pPr algn="just"/>
+            <a:endParaRPr lang="en-US" sz="1200" dirty="0">
+              <a:latin typeface="Arial" panose="020B0604020202020204" pitchFamily="34" charset="0"/>
+              <a:cs typeface="Arial" panose="020B0604020202020204" pitchFamily="34" charset="0"/>
+            </a:endParaRPr>
+          </a:p>
+          <a:p>
+            <a:pPr marL="171450" indent="-171450" algn="just">
+              <a:buFontTx/>
+              <a:buChar char="-"/>
+            </a:pPr>
+            <a:r>
+              <a:rPr lang="en-US" sz="1200" dirty="0">
+                <a:latin typeface="Arial" panose="020B0604020202020204" pitchFamily="34" charset="0"/>
+                <a:cs typeface="Arial" panose="020B0604020202020204" pitchFamily="34" charset="0"/>
+              </a:rPr>
+              <a:t>Los </a:t>
+            </a:r>
+            <a:r>
+              <a:rPr lang="en-US" sz="1200" dirty="0" err="1">
+                <a:latin typeface="Arial" panose="020B0604020202020204" pitchFamily="34" charset="0"/>
+                <a:cs typeface="Arial" panose="020B0604020202020204" pitchFamily="34" charset="0"/>
+              </a:rPr>
+              <a:t>valores</a:t>
+            </a:r>
+            <a:r>
+              <a:rPr lang="en-US" sz="1200" dirty="0">
+                <a:latin typeface="Arial" panose="020B0604020202020204" pitchFamily="34" charset="0"/>
+                <a:cs typeface="Arial" panose="020B0604020202020204" pitchFamily="34" charset="0"/>
+              </a:rPr>
+              <a:t> de </a:t>
+            </a:r>
+            <a:r>
+              <a:rPr lang="en-US" sz="1200" dirty="0" err="1">
+                <a:latin typeface="Arial" panose="020B0604020202020204" pitchFamily="34" charset="0"/>
+                <a:cs typeface="Arial" panose="020B0604020202020204" pitchFamily="34" charset="0"/>
+              </a:rPr>
+              <a:t>neff</a:t>
+            </a:r>
+            <a:r>
+              <a:rPr lang="en-US" sz="1200" dirty="0">
+                <a:latin typeface="Arial" panose="020B0604020202020204" pitchFamily="34" charset="0"/>
+                <a:cs typeface="Arial" panose="020B0604020202020204" pitchFamily="34" charset="0"/>
+              </a:rPr>
+              <a:t> </a:t>
+            </a:r>
+            <a:r>
+              <a:rPr lang="en-US" sz="1200" dirty="0" err="1">
+                <a:latin typeface="Arial" panose="020B0604020202020204" pitchFamily="34" charset="0"/>
+                <a:cs typeface="Arial" panose="020B0604020202020204" pitchFamily="34" charset="0"/>
+              </a:rPr>
+              <a:t>en</a:t>
+            </a:r>
+            <a:r>
+              <a:rPr lang="en-US" sz="1200" dirty="0">
+                <a:latin typeface="Arial" panose="020B0604020202020204" pitchFamily="34" charset="0"/>
+                <a:cs typeface="Arial" panose="020B0604020202020204" pitchFamily="34" charset="0"/>
+              </a:rPr>
+              <a:t> </a:t>
+            </a:r>
+            <a:r>
+              <a:rPr lang="en-US" sz="1200" dirty="0" err="1">
+                <a:latin typeface="Arial" panose="020B0604020202020204" pitchFamily="34" charset="0"/>
+                <a:cs typeface="Arial" panose="020B0604020202020204" pitchFamily="34" charset="0"/>
+              </a:rPr>
+              <a:t>SiN</a:t>
+            </a:r>
+            <a:r>
+              <a:rPr lang="en-US" sz="1200" dirty="0">
+                <a:latin typeface="Arial" panose="020B0604020202020204" pitchFamily="34" charset="0"/>
+                <a:cs typeface="Arial" panose="020B0604020202020204" pitchFamily="34" charset="0"/>
+              </a:rPr>
+              <a:t> se </a:t>
+            </a:r>
+            <a:r>
+              <a:rPr lang="en-US" sz="1200" dirty="0" err="1">
+                <a:latin typeface="Arial" panose="020B0604020202020204" pitchFamily="34" charset="0"/>
+                <a:cs typeface="Arial" panose="020B0604020202020204" pitchFamily="34" charset="0"/>
+              </a:rPr>
+              <a:t>mueven</a:t>
+            </a:r>
+            <a:r>
+              <a:rPr lang="en-US" sz="1200" dirty="0">
+                <a:latin typeface="Arial" panose="020B0604020202020204" pitchFamily="34" charset="0"/>
+                <a:cs typeface="Arial" panose="020B0604020202020204" pitchFamily="34" charset="0"/>
+              </a:rPr>
+              <a:t> </a:t>
+            </a:r>
+            <a:r>
+              <a:rPr lang="en-US" sz="1200" dirty="0" err="1">
+                <a:latin typeface="Arial" panose="020B0604020202020204" pitchFamily="34" charset="0"/>
+                <a:cs typeface="Arial" panose="020B0604020202020204" pitchFamily="34" charset="0"/>
+              </a:rPr>
+              <a:t>en</a:t>
+            </a:r>
+            <a:r>
+              <a:rPr lang="en-US" sz="1200" dirty="0">
+                <a:latin typeface="Arial" panose="020B0604020202020204" pitchFamily="34" charset="0"/>
+                <a:cs typeface="Arial" panose="020B0604020202020204" pitchFamily="34" charset="0"/>
+              </a:rPr>
+              <a:t> un </a:t>
+            </a:r>
+            <a:r>
+              <a:rPr lang="en-US" sz="1200" dirty="0" err="1">
+                <a:latin typeface="Arial" panose="020B0604020202020204" pitchFamily="34" charset="0"/>
+                <a:cs typeface="Arial" panose="020B0604020202020204" pitchFamily="34" charset="0"/>
+              </a:rPr>
+              <a:t>rango</a:t>
+            </a:r>
+            <a:r>
+              <a:rPr lang="en-US" sz="1200" dirty="0">
+                <a:latin typeface="Arial" panose="020B0604020202020204" pitchFamily="34" charset="0"/>
+                <a:cs typeface="Arial" panose="020B0604020202020204" pitchFamily="34" charset="0"/>
+              </a:rPr>
+              <a:t> </a:t>
+            </a:r>
+            <a:r>
+              <a:rPr lang="en-US" sz="1200" dirty="0" err="1">
+                <a:latin typeface="Arial" panose="020B0604020202020204" pitchFamily="34" charset="0"/>
+                <a:cs typeface="Arial" panose="020B0604020202020204" pitchFamily="34" charset="0"/>
+              </a:rPr>
+              <a:t>muy</a:t>
+            </a:r>
+            <a:r>
+              <a:rPr lang="en-US" sz="1200" dirty="0">
+                <a:latin typeface="Arial" panose="020B0604020202020204" pitchFamily="34" charset="0"/>
+                <a:cs typeface="Arial" panose="020B0604020202020204" pitchFamily="34" charset="0"/>
+              </a:rPr>
+              <a:t> </a:t>
+            </a:r>
+            <a:r>
+              <a:rPr lang="en-US" sz="1200" dirty="0" err="1">
+                <a:latin typeface="Arial" panose="020B0604020202020204" pitchFamily="34" charset="0"/>
+                <a:cs typeface="Arial" panose="020B0604020202020204" pitchFamily="34" charset="0"/>
+              </a:rPr>
+              <a:t>estrecho</a:t>
+            </a:r>
+            <a:r>
+              <a:rPr lang="en-US" sz="1200" dirty="0">
+                <a:latin typeface="Arial" panose="020B0604020202020204" pitchFamily="34" charset="0"/>
+                <a:cs typeface="Arial" panose="020B0604020202020204" pitchFamily="34" charset="0"/>
+              </a:rPr>
+              <a:t> entre 1.42 y 1.63 </a:t>
+            </a:r>
+            <a:r>
+              <a:rPr lang="en-US" sz="1200" dirty="0" err="1">
+                <a:latin typeface="Arial" panose="020B0604020202020204" pitchFamily="34" charset="0"/>
+                <a:cs typeface="Arial" panose="020B0604020202020204" pitchFamily="34" charset="0"/>
+              </a:rPr>
+              <a:t>mientras</a:t>
+            </a:r>
+            <a:r>
+              <a:rPr lang="en-US" sz="1200" dirty="0">
+                <a:latin typeface="Arial" panose="020B0604020202020204" pitchFamily="34" charset="0"/>
+                <a:cs typeface="Arial" panose="020B0604020202020204" pitchFamily="34" charset="0"/>
+              </a:rPr>
+              <a:t> que </a:t>
+            </a:r>
+            <a:r>
+              <a:rPr lang="en-US" sz="1200" dirty="0" err="1">
+                <a:latin typeface="Arial" panose="020B0604020202020204" pitchFamily="34" charset="0"/>
+                <a:cs typeface="Arial" panose="020B0604020202020204" pitchFamily="34" charset="0"/>
+              </a:rPr>
+              <a:t>en</a:t>
+            </a:r>
+            <a:r>
+              <a:rPr lang="en-US" sz="1200" dirty="0">
+                <a:latin typeface="Arial" panose="020B0604020202020204" pitchFamily="34" charset="0"/>
+                <a:cs typeface="Arial" panose="020B0604020202020204" pitchFamily="34" charset="0"/>
+              </a:rPr>
+              <a:t> Si </a:t>
+            </a:r>
+            <a:r>
+              <a:rPr lang="en-US" sz="1200" dirty="0" err="1">
+                <a:latin typeface="Arial" panose="020B0604020202020204" pitchFamily="34" charset="0"/>
+                <a:cs typeface="Arial" panose="020B0604020202020204" pitchFamily="34" charset="0"/>
+              </a:rPr>
+              <a:t>estos</a:t>
+            </a:r>
+            <a:r>
+              <a:rPr lang="en-US" sz="1200" dirty="0">
+                <a:latin typeface="Arial" panose="020B0604020202020204" pitchFamily="34" charset="0"/>
+                <a:cs typeface="Arial" panose="020B0604020202020204" pitchFamily="34" charset="0"/>
+              </a:rPr>
+              <a:t> </a:t>
+            </a:r>
+            <a:r>
+              <a:rPr lang="en-US" sz="1200" dirty="0" err="1">
+                <a:latin typeface="Arial" panose="020B0604020202020204" pitchFamily="34" charset="0"/>
+                <a:cs typeface="Arial" panose="020B0604020202020204" pitchFamily="34" charset="0"/>
+              </a:rPr>
+              <a:t>valores</a:t>
+            </a:r>
+            <a:r>
+              <a:rPr lang="en-US" sz="1200" dirty="0">
+                <a:latin typeface="Arial" panose="020B0604020202020204" pitchFamily="34" charset="0"/>
+                <a:cs typeface="Arial" panose="020B0604020202020204" pitchFamily="34" charset="0"/>
+              </a:rPr>
+              <a:t> van de 1.4 </a:t>
+            </a:r>
+            <a:r>
+              <a:rPr lang="en-US" sz="1200" dirty="0" err="1">
+                <a:latin typeface="Arial" panose="020B0604020202020204" pitchFamily="34" charset="0"/>
+                <a:cs typeface="Arial" panose="020B0604020202020204" pitchFamily="34" charset="0"/>
+              </a:rPr>
+              <a:t>llegando</a:t>
+            </a:r>
+            <a:r>
+              <a:rPr lang="en-US" sz="1200" dirty="0">
+                <a:latin typeface="Arial" panose="020B0604020202020204" pitchFamily="34" charset="0"/>
+                <a:cs typeface="Arial" panose="020B0604020202020204" pitchFamily="34" charset="0"/>
+              </a:rPr>
+              <a:t> hasta 2.8 para </a:t>
+            </a:r>
+            <a:r>
+              <a:rPr lang="en-US" sz="1200" dirty="0" err="1">
+                <a:latin typeface="Arial" panose="020B0604020202020204" pitchFamily="34" charset="0"/>
+                <a:cs typeface="Arial" panose="020B0604020202020204" pitchFamily="34" charset="0"/>
+              </a:rPr>
+              <a:t>el</a:t>
+            </a:r>
+            <a:r>
+              <a:rPr lang="en-US" sz="1200" dirty="0">
+                <a:latin typeface="Arial" panose="020B0604020202020204" pitchFamily="34" charset="0"/>
+                <a:cs typeface="Arial" panose="020B0604020202020204" pitchFamily="34" charset="0"/>
+              </a:rPr>
+              <a:t> modo fundamental </a:t>
+            </a:r>
+            <a:r>
+              <a:rPr lang="en-US" sz="1200" dirty="0" err="1">
+                <a:latin typeface="Arial" panose="020B0604020202020204" pitchFamily="34" charset="0"/>
+                <a:cs typeface="Arial" panose="020B0604020202020204" pitchFamily="34" charset="0"/>
+              </a:rPr>
+              <a:t>eléctrico</a:t>
+            </a:r>
+            <a:r>
+              <a:rPr lang="en-US" sz="1200" dirty="0">
+                <a:latin typeface="Arial" panose="020B0604020202020204" pitchFamily="34" charset="0"/>
+                <a:cs typeface="Arial" panose="020B0604020202020204" pitchFamily="34" charset="0"/>
+              </a:rPr>
+              <a:t>. </a:t>
+            </a:r>
+            <a:r>
+              <a:rPr lang="en-US" sz="1200" dirty="0" err="1">
+                <a:latin typeface="Arial" panose="020B0604020202020204" pitchFamily="34" charset="0"/>
+                <a:cs typeface="Arial" panose="020B0604020202020204" pitchFamily="34" charset="0"/>
+              </a:rPr>
+              <a:t>Esto</a:t>
+            </a:r>
+            <a:r>
+              <a:rPr lang="en-US" sz="1200" dirty="0">
+                <a:latin typeface="Arial" panose="020B0604020202020204" pitchFamily="34" charset="0"/>
+                <a:cs typeface="Arial" panose="020B0604020202020204" pitchFamily="34" charset="0"/>
+              </a:rPr>
+              <a:t> </a:t>
+            </a:r>
+            <a:r>
+              <a:rPr lang="en-US" sz="1200" dirty="0" err="1">
+                <a:latin typeface="Arial" panose="020B0604020202020204" pitchFamily="34" charset="0"/>
+                <a:cs typeface="Arial" panose="020B0604020202020204" pitchFamily="34" charset="0"/>
+              </a:rPr>
+              <a:t>nos</a:t>
+            </a:r>
+            <a:r>
+              <a:rPr lang="en-US" sz="1200" dirty="0">
+                <a:latin typeface="Arial" panose="020B0604020202020204" pitchFamily="34" charset="0"/>
+                <a:cs typeface="Arial" panose="020B0604020202020204" pitchFamily="34" charset="0"/>
+              </a:rPr>
+              <a:t> indica que </a:t>
+            </a:r>
+            <a:r>
+              <a:rPr lang="en-US" sz="1200" dirty="0" err="1">
+                <a:latin typeface="Arial" panose="020B0604020202020204" pitchFamily="34" charset="0"/>
+                <a:cs typeface="Arial" panose="020B0604020202020204" pitchFamily="34" charset="0"/>
+              </a:rPr>
+              <a:t>el</a:t>
+            </a:r>
+            <a:r>
+              <a:rPr lang="en-US" sz="1200" dirty="0">
+                <a:latin typeface="Arial" panose="020B0604020202020204" pitchFamily="34" charset="0"/>
+                <a:cs typeface="Arial" panose="020B0604020202020204" pitchFamily="34" charset="0"/>
+              </a:rPr>
+              <a:t> </a:t>
+            </a:r>
+            <a:r>
+              <a:rPr lang="en-US" sz="1200" dirty="0" err="1">
+                <a:latin typeface="Arial" panose="020B0604020202020204" pitchFamily="34" charset="0"/>
+                <a:cs typeface="Arial" panose="020B0604020202020204" pitchFamily="34" charset="0"/>
+              </a:rPr>
+              <a:t>silicio</a:t>
+            </a:r>
+            <a:r>
+              <a:rPr lang="en-US" sz="1200" dirty="0">
+                <a:latin typeface="Arial" panose="020B0604020202020204" pitchFamily="34" charset="0"/>
+                <a:cs typeface="Arial" panose="020B0604020202020204" pitchFamily="34" charset="0"/>
+              </a:rPr>
+              <a:t> “</a:t>
+            </a:r>
+            <a:r>
+              <a:rPr lang="en-US" sz="1200" dirty="0" err="1">
+                <a:latin typeface="Arial" panose="020B0604020202020204" pitchFamily="34" charset="0"/>
+                <a:cs typeface="Arial" panose="020B0604020202020204" pitchFamily="34" charset="0"/>
+              </a:rPr>
+              <a:t>frena</a:t>
+            </a:r>
+            <a:r>
+              <a:rPr lang="en-US" sz="1200" dirty="0">
+                <a:latin typeface="Arial" panose="020B0604020202020204" pitchFamily="34" charset="0"/>
+                <a:cs typeface="Arial" panose="020B0604020202020204" pitchFamily="34" charset="0"/>
+              </a:rPr>
+              <a:t>” mas a la luz que </a:t>
+            </a:r>
+            <a:r>
+              <a:rPr lang="en-US" sz="1200" dirty="0" err="1">
+                <a:latin typeface="Arial" panose="020B0604020202020204" pitchFamily="34" charset="0"/>
+                <a:cs typeface="Arial" panose="020B0604020202020204" pitchFamily="34" charset="0"/>
+              </a:rPr>
+              <a:t>el</a:t>
+            </a:r>
+            <a:r>
+              <a:rPr lang="en-US" sz="1200" dirty="0">
+                <a:latin typeface="Arial" panose="020B0604020202020204" pitchFamily="34" charset="0"/>
+                <a:cs typeface="Arial" panose="020B0604020202020204" pitchFamily="34" charset="0"/>
+              </a:rPr>
+              <a:t> </a:t>
+            </a:r>
+            <a:r>
+              <a:rPr lang="en-US" sz="1200" dirty="0" err="1">
+                <a:latin typeface="Arial" panose="020B0604020202020204" pitchFamily="34" charset="0"/>
+                <a:cs typeface="Arial" panose="020B0604020202020204" pitchFamily="34" charset="0"/>
+              </a:rPr>
+              <a:t>nitruro</a:t>
+            </a:r>
+            <a:r>
+              <a:rPr lang="en-US" sz="1200" dirty="0">
+                <a:latin typeface="Arial" panose="020B0604020202020204" pitchFamily="34" charset="0"/>
+                <a:cs typeface="Arial" panose="020B0604020202020204" pitchFamily="34" charset="0"/>
+              </a:rPr>
+              <a:t> </a:t>
+            </a:r>
+            <a:r>
+              <a:rPr lang="en-US" sz="1200" dirty="0" err="1">
+                <a:latin typeface="Arial" panose="020B0604020202020204" pitchFamily="34" charset="0"/>
+                <a:cs typeface="Arial" panose="020B0604020202020204" pitchFamily="34" charset="0"/>
+              </a:rPr>
+              <a:t>debido</a:t>
+            </a:r>
+            <a:r>
+              <a:rPr lang="en-US" sz="1200" dirty="0">
+                <a:latin typeface="Arial" panose="020B0604020202020204" pitchFamily="34" charset="0"/>
+                <a:cs typeface="Arial" panose="020B0604020202020204" pitchFamily="34" charset="0"/>
+              </a:rPr>
+              <a:t> a </a:t>
+            </a:r>
+            <a:r>
+              <a:rPr lang="en-US" sz="1200" dirty="0" err="1">
+                <a:latin typeface="Arial" panose="020B0604020202020204" pitchFamily="34" charset="0"/>
+                <a:cs typeface="Arial" panose="020B0604020202020204" pitchFamily="34" charset="0"/>
+              </a:rPr>
+              <a:t>su</a:t>
+            </a:r>
+            <a:r>
+              <a:rPr lang="en-US" sz="1200" dirty="0">
+                <a:latin typeface="Arial" panose="020B0604020202020204" pitchFamily="34" charset="0"/>
+                <a:cs typeface="Arial" panose="020B0604020202020204" pitchFamily="34" charset="0"/>
+              </a:rPr>
+              <a:t> alto </a:t>
+            </a:r>
+            <a:r>
+              <a:rPr lang="en-US" sz="1200" dirty="0" err="1">
+                <a:latin typeface="Arial" panose="020B0604020202020204" pitchFamily="34" charset="0"/>
+                <a:cs typeface="Arial" panose="020B0604020202020204" pitchFamily="34" charset="0"/>
+              </a:rPr>
+              <a:t>índice</a:t>
+            </a:r>
+            <a:r>
+              <a:rPr lang="en-US" sz="1200" dirty="0">
+                <a:latin typeface="Arial" panose="020B0604020202020204" pitchFamily="34" charset="0"/>
+                <a:cs typeface="Arial" panose="020B0604020202020204" pitchFamily="34" charset="0"/>
+              </a:rPr>
+              <a:t> de </a:t>
+            </a:r>
+            <a:r>
+              <a:rPr lang="en-US" sz="1200" dirty="0" err="1">
+                <a:latin typeface="Arial" panose="020B0604020202020204" pitchFamily="34" charset="0"/>
+                <a:cs typeface="Arial" panose="020B0604020202020204" pitchFamily="34" charset="0"/>
+              </a:rPr>
+              <a:t>refracción</a:t>
+            </a:r>
+            <a:r>
+              <a:rPr lang="en-US" sz="1200" dirty="0">
+                <a:latin typeface="Arial" panose="020B0604020202020204" pitchFamily="34" charset="0"/>
+                <a:cs typeface="Arial" panose="020B0604020202020204" pitchFamily="34" charset="0"/>
+              </a:rPr>
+              <a:t>.</a:t>
+            </a:r>
+          </a:p>
+          <a:p>
+            <a:pPr marL="171450" indent="-171450" algn="just">
+              <a:buFontTx/>
+              <a:buChar char="-"/>
+            </a:pPr>
+            <a:endParaRPr lang="en-US" sz="1200" dirty="0">
+              <a:latin typeface="Arial" panose="020B0604020202020204" pitchFamily="34" charset="0"/>
+              <a:cs typeface="Arial" panose="020B0604020202020204" pitchFamily="34" charset="0"/>
+            </a:endParaRPr>
+          </a:p>
+          <a:p>
+            <a:pPr marL="171450" indent="-171450" algn="just">
+              <a:buFontTx/>
+              <a:buChar char="-"/>
+            </a:pPr>
+            <a:r>
+              <a:rPr lang="en-US" sz="1200" dirty="0">
+                <a:latin typeface="Arial" panose="020B0604020202020204" pitchFamily="34" charset="0"/>
+                <a:cs typeface="Arial" panose="020B0604020202020204" pitchFamily="34" charset="0"/>
+              </a:rPr>
+              <a:t>Si </a:t>
+            </a:r>
+            <a:r>
+              <a:rPr lang="en-US" sz="1200" dirty="0" err="1">
+                <a:latin typeface="Arial" panose="020B0604020202020204" pitchFamily="34" charset="0"/>
+                <a:cs typeface="Arial" panose="020B0604020202020204" pitchFamily="34" charset="0"/>
+              </a:rPr>
+              <a:t>nos</a:t>
+            </a:r>
+            <a:r>
+              <a:rPr lang="en-US" sz="1200" dirty="0">
+                <a:latin typeface="Arial" panose="020B0604020202020204" pitchFamily="34" charset="0"/>
+                <a:cs typeface="Arial" panose="020B0604020202020204" pitchFamily="34" charset="0"/>
+              </a:rPr>
+              <a:t> </a:t>
+            </a:r>
+            <a:r>
+              <a:rPr lang="en-US" sz="1200" dirty="0" err="1">
+                <a:latin typeface="Arial" panose="020B0604020202020204" pitchFamily="34" charset="0"/>
+                <a:cs typeface="Arial" panose="020B0604020202020204" pitchFamily="34" charset="0"/>
+              </a:rPr>
+              <a:t>fijamos</a:t>
+            </a:r>
+            <a:r>
+              <a:rPr lang="en-US" sz="1200" dirty="0">
+                <a:latin typeface="Arial" panose="020B0604020202020204" pitchFamily="34" charset="0"/>
+                <a:cs typeface="Arial" panose="020B0604020202020204" pitchFamily="34" charset="0"/>
+              </a:rPr>
+              <a:t> los </a:t>
+            </a:r>
+            <a:r>
+              <a:rPr lang="en-US" sz="1200" dirty="0" err="1">
+                <a:latin typeface="Arial" panose="020B0604020202020204" pitchFamily="34" charset="0"/>
+                <a:cs typeface="Arial" panose="020B0604020202020204" pitchFamily="34" charset="0"/>
+              </a:rPr>
+              <a:t>modos</a:t>
+            </a:r>
+            <a:r>
+              <a:rPr lang="en-US" sz="1200" dirty="0">
+                <a:latin typeface="Arial" panose="020B0604020202020204" pitchFamily="34" charset="0"/>
+                <a:cs typeface="Arial" panose="020B0604020202020204" pitchFamily="34" charset="0"/>
+              </a:rPr>
+              <a:t> TE0 y TM0 son </a:t>
+            </a:r>
+            <a:r>
+              <a:rPr lang="en-US" sz="1200" dirty="0" err="1">
+                <a:latin typeface="Arial" panose="020B0604020202020204" pitchFamily="34" charset="0"/>
+                <a:cs typeface="Arial" panose="020B0604020202020204" pitchFamily="34" charset="0"/>
+              </a:rPr>
+              <a:t>mucho</a:t>
+            </a:r>
+            <a:r>
+              <a:rPr lang="en-US" sz="1200" dirty="0">
+                <a:latin typeface="Arial" panose="020B0604020202020204" pitchFamily="34" charset="0"/>
+                <a:cs typeface="Arial" panose="020B0604020202020204" pitchFamily="34" charset="0"/>
+              </a:rPr>
+              <a:t> </a:t>
+            </a:r>
+            <a:r>
+              <a:rPr lang="en-US" sz="1200" dirty="0" err="1">
+                <a:latin typeface="Arial" panose="020B0604020202020204" pitchFamily="34" charset="0"/>
+                <a:cs typeface="Arial" panose="020B0604020202020204" pitchFamily="34" charset="0"/>
+              </a:rPr>
+              <a:t>más</a:t>
+            </a:r>
+            <a:r>
+              <a:rPr lang="en-US" sz="1200" dirty="0">
+                <a:latin typeface="Arial" panose="020B0604020202020204" pitchFamily="34" charset="0"/>
+                <a:cs typeface="Arial" panose="020B0604020202020204" pitchFamily="34" charset="0"/>
+              </a:rPr>
+              <a:t> </a:t>
+            </a:r>
+            <a:r>
+              <a:rPr lang="en-US" sz="1200" dirty="0" err="1">
+                <a:latin typeface="Arial" panose="020B0604020202020204" pitchFamily="34" charset="0"/>
+                <a:cs typeface="Arial" panose="020B0604020202020204" pitchFamily="34" charset="0"/>
+              </a:rPr>
+              <a:t>distantes</a:t>
+            </a:r>
+            <a:r>
+              <a:rPr lang="en-US" sz="1200" dirty="0">
+                <a:latin typeface="Arial" panose="020B0604020202020204" pitchFamily="34" charset="0"/>
+                <a:cs typeface="Arial" panose="020B0604020202020204" pitchFamily="34" charset="0"/>
+              </a:rPr>
+              <a:t> </a:t>
+            </a:r>
+            <a:r>
+              <a:rPr lang="en-US" sz="1200" dirty="0" err="1">
+                <a:latin typeface="Arial" panose="020B0604020202020204" pitchFamily="34" charset="0"/>
+                <a:cs typeface="Arial" panose="020B0604020202020204" pitchFamily="34" charset="0"/>
+              </a:rPr>
+              <a:t>en</a:t>
+            </a:r>
+            <a:r>
+              <a:rPr lang="en-US" sz="1200" dirty="0">
+                <a:latin typeface="Arial" panose="020B0604020202020204" pitchFamily="34" charset="0"/>
+                <a:cs typeface="Arial" panose="020B0604020202020204" pitchFamily="34" charset="0"/>
+              </a:rPr>
+              <a:t> </a:t>
+            </a:r>
+            <a:r>
+              <a:rPr lang="en-US" sz="1200" dirty="0" err="1">
+                <a:latin typeface="Arial" panose="020B0604020202020204" pitchFamily="34" charset="0"/>
+                <a:cs typeface="Arial" panose="020B0604020202020204" pitchFamily="34" charset="0"/>
+              </a:rPr>
+              <a:t>índice</a:t>
+            </a:r>
+            <a:r>
+              <a:rPr lang="en-US" sz="1200" dirty="0">
+                <a:latin typeface="Arial" panose="020B0604020202020204" pitchFamily="34" charset="0"/>
+                <a:cs typeface="Arial" panose="020B0604020202020204" pitchFamily="34" charset="0"/>
+              </a:rPr>
+              <a:t> </a:t>
+            </a:r>
+            <a:r>
+              <a:rPr lang="en-US" sz="1200" dirty="0" err="1">
+                <a:latin typeface="Arial" panose="020B0604020202020204" pitchFamily="34" charset="0"/>
+                <a:cs typeface="Arial" panose="020B0604020202020204" pitchFamily="34" charset="0"/>
+              </a:rPr>
+              <a:t>efectivo</a:t>
+            </a:r>
+            <a:r>
+              <a:rPr lang="en-US" sz="1200" dirty="0">
+                <a:latin typeface="Arial" panose="020B0604020202020204" pitchFamily="34" charset="0"/>
+                <a:cs typeface="Arial" panose="020B0604020202020204" pitchFamily="34" charset="0"/>
+              </a:rPr>
+              <a:t> </a:t>
+            </a:r>
+            <a:r>
+              <a:rPr lang="en-US" sz="1200" dirty="0" err="1">
+                <a:latin typeface="Arial" panose="020B0604020202020204" pitchFamily="34" charset="0"/>
+                <a:cs typeface="Arial" panose="020B0604020202020204" pitchFamily="34" charset="0"/>
+              </a:rPr>
+              <a:t>en</a:t>
+            </a:r>
+            <a:r>
+              <a:rPr lang="en-US" sz="1200" dirty="0">
+                <a:latin typeface="Arial" panose="020B0604020202020204" pitchFamily="34" charset="0"/>
+                <a:cs typeface="Arial" panose="020B0604020202020204" pitchFamily="34" charset="0"/>
+              </a:rPr>
+              <a:t> la </a:t>
+            </a:r>
+            <a:r>
+              <a:rPr lang="en-US" sz="1200" dirty="0" err="1">
+                <a:latin typeface="Arial" panose="020B0604020202020204" pitchFamily="34" charset="0"/>
+                <a:cs typeface="Arial" panose="020B0604020202020204" pitchFamily="34" charset="0"/>
+              </a:rPr>
+              <a:t>configuración</a:t>
+            </a:r>
+            <a:r>
+              <a:rPr lang="en-US" sz="1200" dirty="0">
+                <a:latin typeface="Arial" panose="020B0604020202020204" pitchFamily="34" charset="0"/>
+                <a:cs typeface="Arial" panose="020B0604020202020204" pitchFamily="34" charset="0"/>
+              </a:rPr>
+              <a:t> de Si que </a:t>
+            </a:r>
+            <a:r>
+              <a:rPr lang="en-US" sz="1200" dirty="0" err="1">
+                <a:latin typeface="Arial" panose="020B0604020202020204" pitchFamily="34" charset="0"/>
+                <a:cs typeface="Arial" panose="020B0604020202020204" pitchFamily="34" charset="0"/>
+              </a:rPr>
+              <a:t>en</a:t>
+            </a:r>
+            <a:r>
+              <a:rPr lang="en-US" sz="1200" dirty="0">
+                <a:latin typeface="Arial" panose="020B0604020202020204" pitchFamily="34" charset="0"/>
+                <a:cs typeface="Arial" panose="020B0604020202020204" pitchFamily="34" charset="0"/>
+              </a:rPr>
+              <a:t> la de </a:t>
+            </a:r>
+            <a:r>
+              <a:rPr lang="en-US" sz="1200" dirty="0" err="1">
+                <a:latin typeface="Arial" panose="020B0604020202020204" pitchFamily="34" charset="0"/>
+                <a:cs typeface="Arial" panose="020B0604020202020204" pitchFamily="34" charset="0"/>
+              </a:rPr>
+              <a:t>nitruro</a:t>
+            </a:r>
+            <a:r>
+              <a:rPr lang="en-US" sz="1200" dirty="0">
+                <a:latin typeface="Arial" panose="020B0604020202020204" pitchFamily="34" charset="0"/>
+                <a:cs typeface="Arial" panose="020B0604020202020204" pitchFamily="34" charset="0"/>
+              </a:rPr>
+              <a:t>. Nos indica que </a:t>
+            </a:r>
+            <a:r>
+              <a:rPr lang="en-US" sz="1200" dirty="0" err="1">
+                <a:latin typeface="Arial" panose="020B0604020202020204" pitchFamily="34" charset="0"/>
+                <a:cs typeface="Arial" panose="020B0604020202020204" pitchFamily="34" charset="0"/>
+              </a:rPr>
+              <a:t>el</a:t>
+            </a:r>
+            <a:r>
+              <a:rPr lang="en-US" sz="1200" dirty="0">
+                <a:latin typeface="Arial" panose="020B0604020202020204" pitchFamily="34" charset="0"/>
+                <a:cs typeface="Arial" panose="020B0604020202020204" pitchFamily="34" charset="0"/>
+              </a:rPr>
+              <a:t> </a:t>
+            </a:r>
+            <a:r>
+              <a:rPr lang="en-US" sz="1200" dirty="0" err="1">
+                <a:latin typeface="Arial" panose="020B0604020202020204" pitchFamily="34" charset="0"/>
+                <a:cs typeface="Arial" panose="020B0604020202020204" pitchFamily="34" charset="0"/>
+              </a:rPr>
+              <a:t>silicio</a:t>
+            </a:r>
+            <a:r>
+              <a:rPr lang="en-US" sz="1200" dirty="0">
+                <a:latin typeface="Arial" panose="020B0604020202020204" pitchFamily="34" charset="0"/>
+                <a:cs typeface="Arial" panose="020B0604020202020204" pitchFamily="34" charset="0"/>
+              </a:rPr>
+              <a:t> es </a:t>
+            </a:r>
+            <a:r>
+              <a:rPr lang="en-US" sz="1200" dirty="0" err="1">
+                <a:latin typeface="Arial" panose="020B0604020202020204" pitchFamily="34" charset="0"/>
+                <a:cs typeface="Arial" panose="020B0604020202020204" pitchFamily="34" charset="0"/>
+              </a:rPr>
+              <a:t>más</a:t>
+            </a:r>
+            <a:r>
+              <a:rPr lang="en-US" sz="1200" dirty="0">
+                <a:latin typeface="Arial" panose="020B0604020202020204" pitchFamily="34" charset="0"/>
+                <a:cs typeface="Arial" panose="020B0604020202020204" pitchFamily="34" charset="0"/>
+              </a:rPr>
+              <a:t> sensible a la </a:t>
+            </a:r>
+            <a:r>
+              <a:rPr lang="en-US" sz="1200" dirty="0" err="1">
+                <a:latin typeface="Arial" panose="020B0604020202020204" pitchFamily="34" charset="0"/>
+                <a:cs typeface="Arial" panose="020B0604020202020204" pitchFamily="34" charset="0"/>
+              </a:rPr>
+              <a:t>polarización</a:t>
+            </a:r>
+            <a:r>
+              <a:rPr lang="en-US" sz="1200" dirty="0">
+                <a:latin typeface="Arial" panose="020B0604020202020204" pitchFamily="34" charset="0"/>
+                <a:cs typeface="Arial" panose="020B0604020202020204" pitchFamily="34" charset="0"/>
+              </a:rPr>
+              <a:t> que </a:t>
+            </a:r>
+            <a:r>
+              <a:rPr lang="en-US" sz="1200" dirty="0" err="1">
+                <a:latin typeface="Arial" panose="020B0604020202020204" pitchFamily="34" charset="0"/>
+                <a:cs typeface="Arial" panose="020B0604020202020204" pitchFamily="34" charset="0"/>
+              </a:rPr>
+              <a:t>el</a:t>
+            </a:r>
+            <a:r>
+              <a:rPr lang="en-US" sz="1200" dirty="0">
+                <a:latin typeface="Arial" panose="020B0604020202020204" pitchFamily="34" charset="0"/>
+                <a:cs typeface="Arial" panose="020B0604020202020204" pitchFamily="34" charset="0"/>
+              </a:rPr>
+              <a:t> </a:t>
+            </a:r>
+            <a:r>
+              <a:rPr lang="en-US" sz="1200" dirty="0" err="1">
+                <a:latin typeface="Arial" panose="020B0604020202020204" pitchFamily="34" charset="0"/>
+                <a:cs typeface="Arial" panose="020B0604020202020204" pitchFamily="34" charset="0"/>
+              </a:rPr>
+              <a:t>nitruro</a:t>
+            </a:r>
+            <a:r>
+              <a:rPr lang="en-US" sz="1200" dirty="0">
+                <a:latin typeface="Arial" panose="020B0604020202020204" pitchFamily="34" charset="0"/>
+                <a:cs typeface="Arial" panose="020B0604020202020204" pitchFamily="34" charset="0"/>
+              </a:rPr>
+              <a:t> de </a:t>
+            </a:r>
+            <a:r>
+              <a:rPr lang="en-US" sz="1200" dirty="0" err="1">
+                <a:latin typeface="Arial" panose="020B0604020202020204" pitchFamily="34" charset="0"/>
+                <a:cs typeface="Arial" panose="020B0604020202020204" pitchFamily="34" charset="0"/>
+              </a:rPr>
+              <a:t>silicio</a:t>
+            </a:r>
+            <a:r>
+              <a:rPr lang="en-US" sz="1200" dirty="0">
+                <a:latin typeface="Arial" panose="020B0604020202020204" pitchFamily="34" charset="0"/>
+                <a:cs typeface="Arial" panose="020B0604020202020204" pitchFamily="34" charset="0"/>
+              </a:rPr>
+              <a:t>.</a:t>
+            </a:r>
+          </a:p>
+          <a:p>
+            <a:pPr marL="171450" indent="-171450" algn="just">
+              <a:buFontTx/>
+              <a:buChar char="-"/>
+            </a:pPr>
+            <a:endParaRPr lang="en-US" sz="1200" dirty="0">
+              <a:latin typeface="Arial" panose="020B0604020202020204" pitchFamily="34" charset="0"/>
+              <a:cs typeface="Arial" panose="020B0604020202020204" pitchFamily="34" charset="0"/>
+            </a:endParaRPr>
+          </a:p>
+          <a:p>
+            <a:pPr marL="171450" indent="-171450" algn="just">
+              <a:buFontTx/>
+              <a:buChar char="-"/>
+            </a:pPr>
+            <a:r>
+              <a:rPr lang="en-US" sz="1200" dirty="0">
+                <a:latin typeface="Arial" panose="020B0604020202020204" pitchFamily="34" charset="0"/>
+                <a:cs typeface="Arial" panose="020B0604020202020204" pitchFamily="34" charset="0"/>
+              </a:rPr>
+              <a:t>Los </a:t>
+            </a:r>
+            <a:r>
+              <a:rPr lang="en-US" sz="1200" dirty="0" err="1">
+                <a:latin typeface="Arial" panose="020B0604020202020204" pitchFamily="34" charset="0"/>
+                <a:cs typeface="Arial" panose="020B0604020202020204" pitchFamily="34" charset="0"/>
+              </a:rPr>
+              <a:t>modos</a:t>
+            </a:r>
+            <a:r>
+              <a:rPr lang="en-US" sz="1200" dirty="0">
+                <a:latin typeface="Arial" panose="020B0604020202020204" pitchFamily="34" charset="0"/>
+                <a:cs typeface="Arial" panose="020B0604020202020204" pitchFamily="34" charset="0"/>
+              </a:rPr>
+              <a:t> se </a:t>
+            </a:r>
+            <a:r>
+              <a:rPr lang="en-US" sz="1200" dirty="0" err="1">
+                <a:latin typeface="Arial" panose="020B0604020202020204" pitchFamily="34" charset="0"/>
+                <a:cs typeface="Arial" panose="020B0604020202020204" pitchFamily="34" charset="0"/>
+              </a:rPr>
+              <a:t>guían</a:t>
+            </a:r>
+            <a:r>
+              <a:rPr lang="en-US" sz="1200" dirty="0">
+                <a:latin typeface="Arial" panose="020B0604020202020204" pitchFamily="34" charset="0"/>
+                <a:cs typeface="Arial" panose="020B0604020202020204" pitchFamily="34" charset="0"/>
+              </a:rPr>
+              <a:t> antes </a:t>
+            </a:r>
+            <a:r>
+              <a:rPr lang="en-US" sz="1200" dirty="0" err="1">
+                <a:latin typeface="Arial" panose="020B0604020202020204" pitchFamily="34" charset="0"/>
+                <a:cs typeface="Arial" panose="020B0604020202020204" pitchFamily="34" charset="0"/>
+              </a:rPr>
+              <a:t>en</a:t>
+            </a:r>
+            <a:r>
+              <a:rPr lang="en-US" sz="1200" dirty="0">
+                <a:latin typeface="Arial" panose="020B0604020202020204" pitchFamily="34" charset="0"/>
+                <a:cs typeface="Arial" panose="020B0604020202020204" pitchFamily="34" charset="0"/>
+              </a:rPr>
+              <a:t> la </a:t>
+            </a:r>
+            <a:r>
+              <a:rPr lang="en-US" sz="1200" dirty="0" err="1">
+                <a:latin typeface="Arial" panose="020B0604020202020204" pitchFamily="34" charset="0"/>
+                <a:cs typeface="Arial" panose="020B0604020202020204" pitchFamily="34" charset="0"/>
+              </a:rPr>
+              <a:t>configuración</a:t>
+            </a:r>
+            <a:r>
+              <a:rPr lang="en-US" sz="1200" dirty="0">
+                <a:latin typeface="Arial" panose="020B0604020202020204" pitchFamily="34" charset="0"/>
+                <a:cs typeface="Arial" panose="020B0604020202020204" pitchFamily="34" charset="0"/>
+              </a:rPr>
+              <a:t> SOI que </a:t>
+            </a:r>
+            <a:r>
+              <a:rPr lang="en-US" sz="1200" dirty="0" err="1">
+                <a:latin typeface="Arial" panose="020B0604020202020204" pitchFamily="34" charset="0"/>
+                <a:cs typeface="Arial" panose="020B0604020202020204" pitchFamily="34" charset="0"/>
+              </a:rPr>
+              <a:t>en</a:t>
+            </a:r>
+            <a:r>
+              <a:rPr lang="en-US" sz="1200" dirty="0">
+                <a:latin typeface="Arial" panose="020B0604020202020204" pitchFamily="34" charset="0"/>
+                <a:cs typeface="Arial" panose="020B0604020202020204" pitchFamily="34" charset="0"/>
+              </a:rPr>
+              <a:t> </a:t>
+            </a:r>
+            <a:r>
+              <a:rPr lang="en-US" sz="1200" dirty="0" err="1">
+                <a:latin typeface="Arial" panose="020B0604020202020204" pitchFamily="34" charset="0"/>
+                <a:cs typeface="Arial" panose="020B0604020202020204" pitchFamily="34" charset="0"/>
+              </a:rPr>
+              <a:t>SiN</a:t>
+            </a:r>
+            <a:r>
+              <a:rPr lang="en-US" sz="1200" dirty="0">
+                <a:latin typeface="Arial" panose="020B0604020202020204" pitchFamily="34" charset="0"/>
+                <a:cs typeface="Arial" panose="020B0604020202020204" pitchFamily="34" charset="0"/>
+              </a:rPr>
+              <a:t>, </a:t>
+            </a:r>
+            <a:r>
+              <a:rPr lang="en-US" sz="1200" dirty="0" err="1">
+                <a:latin typeface="Arial" panose="020B0604020202020204" pitchFamily="34" charset="0"/>
+                <a:cs typeface="Arial" panose="020B0604020202020204" pitchFamily="34" charset="0"/>
+              </a:rPr>
+              <a:t>pues</a:t>
+            </a:r>
+            <a:r>
+              <a:rPr lang="en-US" sz="1200" dirty="0">
+                <a:latin typeface="Arial" panose="020B0604020202020204" pitchFamily="34" charset="0"/>
+                <a:cs typeface="Arial" panose="020B0604020202020204" pitchFamily="34" charset="0"/>
+              </a:rPr>
+              <a:t> </a:t>
+            </a:r>
+            <a:r>
+              <a:rPr lang="en-US" sz="1200" dirty="0" err="1">
+                <a:latin typeface="Arial" panose="020B0604020202020204" pitchFamily="34" charset="0"/>
+                <a:cs typeface="Arial" panose="020B0604020202020204" pitchFamily="34" charset="0"/>
+              </a:rPr>
+              <a:t>el</a:t>
+            </a:r>
+            <a:r>
+              <a:rPr lang="en-US" sz="1200" dirty="0">
+                <a:latin typeface="Arial" panose="020B0604020202020204" pitchFamily="34" charset="0"/>
+                <a:cs typeface="Arial" panose="020B0604020202020204" pitchFamily="34" charset="0"/>
+              </a:rPr>
+              <a:t> modo 2 por </a:t>
+            </a:r>
+            <a:r>
+              <a:rPr lang="en-US" sz="1200" dirty="0" err="1">
+                <a:latin typeface="Arial" panose="020B0604020202020204" pitchFamily="34" charset="0"/>
+                <a:cs typeface="Arial" panose="020B0604020202020204" pitchFamily="34" charset="0"/>
+              </a:rPr>
+              <a:t>ejemplo</a:t>
+            </a:r>
+            <a:r>
+              <a:rPr lang="en-US" sz="1200" dirty="0">
+                <a:latin typeface="Arial" panose="020B0604020202020204" pitchFamily="34" charset="0"/>
+                <a:cs typeface="Arial" panose="020B0604020202020204" pitchFamily="34" charset="0"/>
+              </a:rPr>
+              <a:t> se </a:t>
+            </a:r>
+            <a:r>
+              <a:rPr lang="en-US" sz="1200" dirty="0" err="1">
+                <a:latin typeface="Arial" panose="020B0604020202020204" pitchFamily="34" charset="0"/>
+                <a:cs typeface="Arial" panose="020B0604020202020204" pitchFamily="34" charset="0"/>
+              </a:rPr>
+              <a:t>empieza</a:t>
+            </a:r>
+            <a:r>
+              <a:rPr lang="en-US" sz="1200" dirty="0">
+                <a:latin typeface="Arial" panose="020B0604020202020204" pitchFamily="34" charset="0"/>
+                <a:cs typeface="Arial" panose="020B0604020202020204" pitchFamily="34" charset="0"/>
+              </a:rPr>
+              <a:t> a </a:t>
+            </a:r>
+            <a:r>
+              <a:rPr lang="en-US" sz="1200" dirty="0" err="1">
+                <a:latin typeface="Arial" panose="020B0604020202020204" pitchFamily="34" charset="0"/>
+                <a:cs typeface="Arial" panose="020B0604020202020204" pitchFamily="34" charset="0"/>
+              </a:rPr>
+              <a:t>propagar</a:t>
+            </a:r>
+            <a:r>
+              <a:rPr lang="en-US" sz="1200" dirty="0">
+                <a:latin typeface="Arial" panose="020B0604020202020204" pitchFamily="34" charset="0"/>
+                <a:cs typeface="Arial" panose="020B0604020202020204" pitchFamily="34" charset="0"/>
+              </a:rPr>
+              <a:t> a </a:t>
+            </a:r>
+            <a:r>
+              <a:rPr lang="en-US" sz="1200" dirty="0" err="1">
+                <a:latin typeface="Arial" panose="020B0604020202020204" pitchFamily="34" charset="0"/>
+                <a:cs typeface="Arial" panose="020B0604020202020204" pitchFamily="34" charset="0"/>
+              </a:rPr>
+              <a:t>partir</a:t>
+            </a:r>
+            <a:r>
+              <a:rPr lang="en-US" sz="1200" dirty="0">
+                <a:latin typeface="Arial" panose="020B0604020202020204" pitchFamily="34" charset="0"/>
+                <a:cs typeface="Arial" panose="020B0604020202020204" pitchFamily="34" charset="0"/>
+              </a:rPr>
+              <a:t> de w= 0.45um y </a:t>
+            </a:r>
+            <a:r>
+              <a:rPr lang="en-US" sz="1200" dirty="0" err="1">
+                <a:latin typeface="Arial" panose="020B0604020202020204" pitchFamily="34" charset="0"/>
+                <a:cs typeface="Arial" panose="020B0604020202020204" pitchFamily="34" charset="0"/>
+              </a:rPr>
+              <a:t>en</a:t>
+            </a:r>
+            <a:r>
+              <a:rPr lang="en-US" sz="1200" dirty="0">
+                <a:latin typeface="Arial" panose="020B0604020202020204" pitchFamily="34" charset="0"/>
+                <a:cs typeface="Arial" panose="020B0604020202020204" pitchFamily="34" charset="0"/>
+              </a:rPr>
+              <a:t> </a:t>
+            </a:r>
+            <a:r>
+              <a:rPr lang="en-US" sz="1200" dirty="0" err="1">
+                <a:latin typeface="Arial" panose="020B0604020202020204" pitchFamily="34" charset="0"/>
+                <a:cs typeface="Arial" panose="020B0604020202020204" pitchFamily="34" charset="0"/>
+              </a:rPr>
+              <a:t>SiN</a:t>
+            </a:r>
+            <a:r>
+              <a:rPr lang="en-US" sz="1200" dirty="0">
+                <a:latin typeface="Arial" panose="020B0604020202020204" pitchFamily="34" charset="0"/>
+                <a:cs typeface="Arial" panose="020B0604020202020204" pitchFamily="34" charset="0"/>
+              </a:rPr>
+              <a:t> hasta que no </a:t>
+            </a:r>
+            <a:r>
+              <a:rPr lang="en-US" sz="1200" dirty="0" err="1">
+                <a:latin typeface="Arial" panose="020B0604020202020204" pitchFamily="34" charset="0"/>
+                <a:cs typeface="Arial" panose="020B0604020202020204" pitchFamily="34" charset="0"/>
+              </a:rPr>
+              <a:t>alcanza</a:t>
+            </a:r>
+            <a:r>
+              <a:rPr lang="en-US" sz="1200" dirty="0">
+                <a:latin typeface="Arial" panose="020B0604020202020204" pitchFamily="34" charset="0"/>
+                <a:cs typeface="Arial" panose="020B0604020202020204" pitchFamily="34" charset="0"/>
+              </a:rPr>
+              <a:t> los 1.3 um no </a:t>
+            </a:r>
+            <a:r>
+              <a:rPr lang="en-US" sz="1200" dirty="0" err="1">
+                <a:latin typeface="Arial" panose="020B0604020202020204" pitchFamily="34" charset="0"/>
+                <a:cs typeface="Arial" panose="020B0604020202020204" pitchFamily="34" charset="0"/>
+              </a:rPr>
+              <a:t>sobre</a:t>
+            </a:r>
+            <a:r>
+              <a:rPr lang="en-US" sz="1200" dirty="0">
+                <a:latin typeface="Arial" panose="020B0604020202020204" pitchFamily="34" charset="0"/>
+                <a:cs typeface="Arial" panose="020B0604020202020204" pitchFamily="34" charset="0"/>
+              </a:rPr>
+              <a:t> </a:t>
+            </a:r>
+            <a:r>
+              <a:rPr lang="en-US" sz="1200" dirty="0" err="1">
+                <a:latin typeface="Arial" panose="020B0604020202020204" pitchFamily="34" charset="0"/>
+                <a:cs typeface="Arial" panose="020B0604020202020204" pitchFamily="34" charset="0"/>
+              </a:rPr>
+              <a:t>pasa</a:t>
+            </a:r>
+            <a:r>
+              <a:rPr lang="en-US" sz="1200" dirty="0">
+                <a:latin typeface="Arial" panose="020B0604020202020204" pitchFamily="34" charset="0"/>
+                <a:cs typeface="Arial" panose="020B0604020202020204" pitchFamily="34" charset="0"/>
+              </a:rPr>
+              <a:t> al </a:t>
+            </a:r>
+            <a:r>
+              <a:rPr lang="en-US" sz="1200" dirty="0" err="1">
+                <a:latin typeface="Arial" panose="020B0604020202020204" pitchFamily="34" charset="0"/>
+                <a:cs typeface="Arial" panose="020B0604020202020204" pitchFamily="34" charset="0"/>
+              </a:rPr>
+              <a:t>índice</a:t>
+            </a:r>
+            <a:r>
+              <a:rPr lang="en-US" sz="1200" dirty="0">
+                <a:latin typeface="Arial" panose="020B0604020202020204" pitchFamily="34" charset="0"/>
+                <a:cs typeface="Arial" panose="020B0604020202020204" pitchFamily="34" charset="0"/>
+              </a:rPr>
+              <a:t> del cladding.</a:t>
+            </a:r>
+          </a:p>
+          <a:p>
+            <a:pPr marL="171450" indent="-171450" algn="just">
+              <a:buFontTx/>
+              <a:buChar char="-"/>
+            </a:pPr>
+            <a:endParaRPr lang="en-US" sz="1200" dirty="0">
+              <a:latin typeface="Arial" panose="020B0604020202020204" pitchFamily="34" charset="0"/>
+              <a:cs typeface="Arial" panose="020B0604020202020204" pitchFamily="34" charset="0"/>
+            </a:endParaRPr>
+          </a:p>
+        </p:txBody>
+      </p:sp>
+      <p:sp>
+        <p:nvSpPr>
+          <p:cNvPr id="21" name="object 16">
+            <a:extLst>
+              <a:ext uri="{FF2B5EF4-FFF2-40B4-BE49-F238E27FC236}">
+                <a16:creationId xmlns:a16="http://schemas.microsoft.com/office/drawing/2014/main" id="{E3C13938-06A8-49BF-9137-895B577DB7FE}"/>
+              </a:ext>
+            </a:extLst>
+          </p:cNvPr>
+          <p:cNvSpPr txBox="1">
+            <a:spLocks/>
+          </p:cNvSpPr>
+          <p:nvPr/>
+        </p:nvSpPr>
+        <p:spPr>
+          <a:xfrm>
+            <a:off x="1447800" y="285279"/>
+            <a:ext cx="10994410" cy="705321"/>
+          </a:xfrm>
+          <a:prstGeom prst="rect">
+            <a:avLst/>
+          </a:prstGeom>
+        </p:spPr>
+        <p:txBody>
+          <a:bodyPr vert="horz" wrap="square" lIns="0" tIns="12700" rIns="0" bIns="0" rtlCol="0">
+            <a:spAutoFit/>
+          </a:bodyPr>
+          <a:lstStyle>
+            <a:lvl1pPr>
+              <a:defRPr sz="2000" b="1" i="0">
+                <a:solidFill>
+                  <a:schemeClr val="tx1"/>
+                </a:solidFill>
+                <a:latin typeface="Calibri"/>
+                <a:ea typeface="+mj-ea"/>
+                <a:cs typeface="Calibri"/>
+              </a:defRPr>
+            </a:lvl1pPr>
+          </a:lstStyle>
+          <a:p>
+            <a:pPr marL="12700">
+              <a:spcBef>
+                <a:spcPts val="100"/>
+              </a:spcBef>
+            </a:pPr>
+            <a:r>
+              <a:rPr lang="en-US" sz="2500" kern="0" dirty="0"/>
+              <a:t>Learning outcome #2 – Width dependence</a:t>
+            </a:r>
+            <a:br>
+              <a:rPr lang="en-US" sz="2500" kern="0" spc="-5" dirty="0">
+                <a:latin typeface="+mj-lt"/>
+                <a:cs typeface="Lucida Sans"/>
+              </a:rPr>
+            </a:br>
+            <a:r>
+              <a:rPr lang="en-US" b="0" kern="0" dirty="0"/>
+              <a:t>Width 0.3 - 1 µm– Wavelength 1.55 µm </a:t>
+            </a:r>
+            <a:endParaRPr lang="en-US" sz="2500" b="0" kern="0" dirty="0">
+              <a:latin typeface="+mj-lt"/>
+              <a:cs typeface="Lucida Sans"/>
+            </a:endParaRPr>
+          </a:p>
+        </p:txBody>
+      </p:sp>
+      <p:pic>
+        <p:nvPicPr>
+          <p:cNvPr id="22" name="Imagen 21">
+            <a:extLst>
+              <a:ext uri="{FF2B5EF4-FFF2-40B4-BE49-F238E27FC236}">
+                <a16:creationId xmlns:a16="http://schemas.microsoft.com/office/drawing/2014/main" id="{8C87031B-567B-46C7-965A-84B7BCE8BBDE}"/>
+              </a:ext>
+            </a:extLst>
+          </p:cNvPr>
+          <p:cNvPicPr>
+            <a:picLocks noChangeAspect="1"/>
+          </p:cNvPicPr>
+          <p:nvPr/>
+        </p:nvPicPr>
+        <p:blipFill>
+          <a:blip r:embed="rId5"/>
+          <a:stretch>
+            <a:fillRect/>
+          </a:stretch>
+        </p:blipFill>
+        <p:spPr>
+          <a:xfrm>
+            <a:off x="932490" y="1554914"/>
+            <a:ext cx="4840620" cy="2817933"/>
+          </a:xfrm>
+          <a:prstGeom prst="rect">
+            <a:avLst/>
+          </a:prstGeom>
+        </p:spPr>
+      </p:pic>
+      <p:sp>
+        <p:nvSpPr>
+          <p:cNvPr id="25" name="CuadroTexto 24">
+            <a:extLst>
+              <a:ext uri="{FF2B5EF4-FFF2-40B4-BE49-F238E27FC236}">
+                <a16:creationId xmlns:a16="http://schemas.microsoft.com/office/drawing/2014/main" id="{A9FF6620-175D-4B5B-AC50-9A8A2FCBE844}"/>
+              </a:ext>
+            </a:extLst>
+          </p:cNvPr>
+          <p:cNvSpPr txBox="1"/>
+          <p:nvPr/>
+        </p:nvSpPr>
+        <p:spPr>
+          <a:xfrm>
+            <a:off x="609600" y="309244"/>
+            <a:ext cx="6129336" cy="369332"/>
+          </a:xfrm>
+          <a:prstGeom prst="rect">
+            <a:avLst/>
+          </a:prstGeom>
+          <a:noFill/>
+        </p:spPr>
+        <p:txBody>
+          <a:bodyPr wrap="square">
+            <a:spAutoFit/>
+          </a:bodyPr>
+          <a:lstStyle/>
+          <a:p>
+            <a:r>
+              <a:rPr lang="es-ES" dirty="0"/>
+              <a:t>EXTRA:</a:t>
+            </a:r>
+          </a:p>
+        </p:txBody>
+      </p:sp>
+    </p:spTree>
+    <p:extLst>
+      <p:ext uri="{BB962C8B-B14F-4D97-AF65-F5344CB8AC3E}">
+        <p14:creationId xmlns:p14="http://schemas.microsoft.com/office/powerpoint/2010/main" val="2291772122"/>
+      </p:ext>
+    </p:extLst>
   </p:cSld>
   <p:clrMapOvr>
     <a:masterClrMapping/>
